--- a/beyond SARCASTIC.pptx
+++ b/beyond SARCASTIC.pptx
@@ -5314,7 +5314,7 @@
                 <a:ea typeface="Calibri" pitchFamily="34" charset="-122"/>
                 <a:cs typeface="Calibri" pitchFamily="34" charset="-120"/>
               </a:rPr>
-              <a:t>Trihedral = orientation-insensitive, maximum-RCS calibration standard.</a:t>
+              <a:t>Trihedral = orientation-insensitive, maximum-cross section calibration standard.</a:t>
             </a:r>
             <a:endParaRPr lang="en-US" sz="1300" dirty="0"/>
           </a:p>
@@ -7657,7 +7657,7 @@
                 <a:ea typeface="Cambria" pitchFamily="34" charset="-122"/>
                 <a:cs typeface="Cambria" pitchFamily="34" charset="-120"/>
               </a:rPr>
-              <a:t>SAR → GMTI: a new architecture axis, not a scatterer type</a:t>
+              <a:t>SAR → Ground Moving Target Interval (GMTI): a new architecture axis, not a scatterer type</a:t>
             </a:r>
             <a:endParaRPr lang="en-US" sz="2300" dirty="0"/>
           </a:p>
@@ -7727,7 +7727,7 @@
                 <a:ea typeface="Calibri" pitchFamily="34" charset="-122"/>
                 <a:cs typeface="Calibri" pitchFamily="34" charset="-120"/>
               </a:rPr>
-              <a:t>Clutter cancellation (DPCA, or STAP for non-ideal clutter) separates movers from stationary background across channels -- a genuinely different processing chain from Step 7’s single-channel image formation, not a variant of it</a:t>
+              <a:t>Clutter cancellation separates movers from stationary background across channels -- a genuinely different processing chain from Step 7’s single-channel image formation, not a variant of it</a:t>
             </a:r>
             <a:endParaRPr lang="en-US" sz="1400" dirty="0"/>
           </a:p>
@@ -7777,6 +7777,29 @@
               </a:rPr>
               <a:t>Output is detections/tracks (range, azimuth, radial velocity) per contact, not an image</a:t>
             </a:r>
+          </a:p>
+          <a:p>
+            <a:pPr marL="203200" indent="-203200">
+              <a:lnSpc>
+                <a:spcPct val="112000"/>
+              </a:lnSpc>
+              <a:spcAft>
+                <a:spcPts val="1200"/>
+              </a:spcAft>
+              <a:buSzPct val="100000"/>
+              <a:buChar char="•"/>
+            </a:pPr>
+            <a:r>
+              <a:rPr lang="en-US" sz="1400" dirty="0">
+                <a:solidFill>
+                  <a:srgbClr val="141A22"/>
+                </a:solidFill>
+                <a:latin typeface="Calibri" pitchFamily="34" charset="0"/>
+                <a:ea typeface="Calibri" pitchFamily="34" charset="-122"/>
+                <a:cs typeface="Calibri" pitchFamily="34" charset="-120"/>
+              </a:rPr>
+              <a:t>Simulated world updates at radar slow-time rate, NOT compute rate</a:t>
+            </a:r>
             <a:endParaRPr lang="en-US" sz="1400" dirty="0"/>
           </a:p>
         </p:txBody>
@@ -7857,7 +7880,7 @@
                 <a:ea typeface="Calibri" pitchFamily="34" charset="-122"/>
                 <a:cs typeface="Calibri" pitchFamily="34" charset="-120"/>
               </a:rPr>
-              <a:t>drive multi-actor scenes with the engine’s own nav-mesh/crowd/traffic AI instead of hand-scripting tracks. Bake each actor’s trajectory once (position + heading vs. time), then replay it decoupled from the engine’s render tick -- a CPI can be well under a second of slow-time, faster than the nav-mesh update rate.</a:t>
+              <a:t>drive multi-actor scenes with the engine’s own nav-mesh/crowd/traffic AI instead of hand-scripting tracks. Bake each actor’s trajectory once (position + heading vs. time), then replay it decoupled from the engine’s render tick -- a coherent processing interval can be well under a second of slow-time, faster than the nav-mesh update rate.</a:t>
             </a:r>
             <a:endParaRPr lang="en-US" sz="1300" dirty="0"/>
           </a:p>
@@ -9352,7 +9375,13 @@
           <p:cNvGraphicFramePr>
             <a:graphicFrameLocks noGrp="1"/>
           </p:cNvGraphicFramePr>
-          <p:nvPr/>
+          <p:nvPr>
+            <p:extLst>
+              <p:ext uri="{D42A27DB-BD31-4B8C-83A1-F6EECF244321}">
+                <p14:modId xmlns:p14="http://schemas.microsoft.com/office/powerpoint/2010/main" val="993355251"/>
+              </p:ext>
+            </p:extLst>
+          </p:nvPr>
         </p:nvGraphicFramePr>
         <p:xfrm>
           <a:off x="457200" y="1828800"/>
@@ -9893,7 +9922,7 @@
                           <a:ea typeface="Calibri" pitchFamily="34" charset="-122"/>
                           <a:cs typeface="Calibri" pitchFamily="34" charset="-120"/>
                         </a:rPr>
-                        <a:t>Peak RCS, null depth, sidelobe level, and mainlobe width all match theory</a:t>
+                        <a:t>Peak radar cross section (RCS), null depth, sidelobe level, and mainlobe width all match theory</a:t>
                       </a:r>
                       <a:endParaRPr lang="en-US" sz="950" dirty="0">
                         <a:latin typeface="Calibri" charset="0"/>
@@ -10172,7 +10201,7 @@
                           <a:ea typeface="Calibri" pitchFamily="34" charset="-122"/>
                           <a:cs typeface="Calibri" pitchFamily="34" charset="-120"/>
                         </a:rPr>
-                        <a:t>SSIM ≥ 0.95 (typical) and RMS error below threshold inside the sector; both degrade sharply together just outside it</a:t>
+                        <a:t>Structural Similarity Matix ≥ 0.95 (typical) and root mean square (RMS) error below threshold inside the sector; both degrade sharply together just outside it</a:t>
                       </a:r>
                       <a:endParaRPr lang="en-US" sz="950" dirty="0">
                         <a:latin typeface="Calibri" charset="0"/>
@@ -10315,7 +10344,7 @@
                           <a:ea typeface="Calibri" pitchFamily="34" charset="-122"/>
                           <a:cs typeface="Calibri" pitchFamily="34" charset="-120"/>
                         </a:rPr>
-                        <a:t>Extract (x_k,y_k[,z_k]) from simulated phase history via CLEAN/matrix-pencil as if unknown; transform aperture-relative → world coords; compare to CAD mesh</a:t>
+                        <a:t>Extract (x_k,y_k[,z_k]) from simulated phase history via CLEAN/matrix-pencil as if unknown; transform aperture-relative → world coords; compare to rendering mesh</a:t>
                       </a:r>
                       <a:endParaRPr lang="en-US" sz="950" dirty="0">
                         <a:latin typeface="Calibri" charset="0"/>
@@ -22530,22 +22559,7 @@
                 <a:ea typeface="Calibri" pitchFamily="34" charset="-122"/>
                 <a:cs typeface="Calibri" pitchFamily="34" charset="-120"/>
               </a:rPr>
-              <a:t>Ansys Perceive EM/SBR+ already does dense multi-bounce ray tracing with per-bounce polarimetric materials, plus PTD/</a:t>
-            </a:r>
-            <a:r>
-              <a:rPr lang="en-US" sz="1400" dirty="0"/>
-              <a:t> Uniform Theory of Diffraction  (</a:t>
-            </a:r>
-            <a:r>
-              <a:rPr lang="en-US" sz="1400" dirty="0">
-                <a:solidFill>
-                  <a:srgbClr val="141A22"/>
-                </a:solidFill>
-                <a:latin typeface="Calibri" pitchFamily="34" charset="0"/>
-                <a:ea typeface="Calibri" pitchFamily="34" charset="-122"/>
-                <a:cs typeface="Calibri" pitchFamily="34" charset="-120"/>
-              </a:rPr>
-              <a:t>UTD) diffraction and creeping waves. That’s a mature, commercial, full-featured solver -- </a:t>
+              <a:t>Ansys Perceive EM/SBR+ already does dense multi-bounce ray tracing with per-bounce polarimetric materials, plus PTD/UTD diffraction and creeping waves. That’s a mature, commercial, full-featured solver -- </a:t>
             </a:r>
             <a:r>
               <a:rPr lang="en-US" sz="1400" b="1" dirty="0">
@@ -22694,7 +22708,7 @@
                 <a:ea typeface="Calibri" pitchFamily="34" charset="-122"/>
                 <a:cs typeface="Calibri" pitchFamily="34" charset="-120"/>
               </a:rPr>
-              <a:t>The win only shows up at scale (a full phase history, an ATR training sweep, a Ground Moving Target Indicator channel set) -- not for a single one-off look</a:t>
+              <a:t>The win only shows up at scale -- not for a single one-off look</a:t>
             </a:r>
             <a:endParaRPr lang="en-US" sz="1250" dirty="0"/>
           </a:p>
@@ -23370,7 +23384,7 @@
                 <a:ea typeface="Calibri" pitchFamily="34" charset="-122"/>
                 <a:cs typeface="Calibri" pitchFamily="34" charset="-120"/>
               </a:rPr>
-              <a:t>Same sensor mode / resolution (2m GSD, real TerraSAR-X Spotlight) at every scale -- what changes is the footprint, so pulse count scales with it. n* = number of collects before ASC-cached total cost undercuts Ansys.</a:t>
+              <a:t>Same sensor mode / resolution (2m Ground Sample Distance (GSD), real TerraSAR-X Spotlight) at every scale -- what changes is the footprint, so pulse count scales with it. n* = number of collects before ASC-cached total cost undercuts Ansys.</a:t>
             </a:r>
             <a:endParaRPr lang="en-US" sz="1200" dirty="0"/>
           </a:p>
@@ -23508,7 +23522,7 @@
                 <a:ea typeface="Calibri" pitchFamily="34" charset="-122"/>
                 <a:cs typeface="Calibri" pitchFamily="34" charset="-120"/>
               </a:rPr>
-              <a:t>4m trihedral (N=1): n*=844 collects -- a one-off cal target essentially never pays back on its own</a:t>
+              <a:t>4m^2 trihedral (N=1): n*=844 collects -- a one-off cal target essentially never pays back on its own</a:t>
             </a:r>
             <a:endParaRPr lang="en-US" sz="1200" dirty="0"/>
           </a:p>
@@ -23630,7 +23644,7 @@
         <p:spPr>
           <a:xfrm>
             <a:off x="905256" y="6151234"/>
-            <a:ext cx="8336280" cy="276999"/>
+            <a:ext cx="5526024" cy="461665"/>
           </a:xfrm>
           <a:prstGeom prst="rect">
             <a:avLst/>
@@ -23645,7 +23659,7 @@
           <a:p>
             <a:r>
               <a:rPr lang="en-US" sz="1200" i="1" dirty="0"/>
-              <a:t>*Both approaches measured on the same single desktop/laptop-class GPU, not a cluster</a:t>
+              <a:t>*Both approaches estimated on the same single desktop/laptop-class Graphics Processing Unit (GPU), not a cluster</a:t>
             </a:r>
           </a:p>
         </p:txBody>
@@ -24001,7 +24015,32 @@
                 <a:ea typeface="Calibri" pitchFamily="34" charset="-122"/>
                 <a:cs typeface="Calibri" pitchFamily="34" charset="-120"/>
               </a:rPr>
-              <a:t>Full city (100km²): 54s ASC-cached vs. 1.88hr Ansys SBR+ -- 125x</a:t>
+              <a:t>Full city (100km²): </a:t>
+            </a:r>
+            <a:r>
+              <a:rPr lang="en-US" sz="1150" dirty="0">
+                <a:solidFill>
+                  <a:srgbClr val="141A22"/>
+                </a:solidFill>
+                <a:highlight>
+                  <a:srgbClr val="FFFF00"/>
+                </a:highlight>
+                <a:latin typeface="Calibri" pitchFamily="34" charset="0"/>
+                <a:ea typeface="Calibri" pitchFamily="34" charset="-122"/>
+                <a:cs typeface="Calibri" pitchFamily="34" charset="-120"/>
+              </a:rPr>
+              <a:t>54s</a:t>
+            </a:r>
+            <a:r>
+              <a:rPr lang="en-US" sz="1150" dirty="0">
+                <a:solidFill>
+                  <a:srgbClr val="141A22"/>
+                </a:solidFill>
+                <a:latin typeface="Calibri" pitchFamily="34" charset="0"/>
+                <a:ea typeface="Calibri" pitchFamily="34" charset="-122"/>
+                <a:cs typeface="Calibri" pitchFamily="34" charset="-120"/>
+              </a:rPr>
+              <a:t> ASC-cached vs. 1.88hr Ansys SBR+ -- 125x</a:t>
             </a:r>
             <a:endParaRPr lang="en-US" sz="1150" dirty="0"/>
           </a:p>

--- a/beyond SARCASTIC.pptx
+++ b/beyond SARCASTIC.pptx
@@ -5,7 +5,7 @@
     <p:sldMasterId id="2147483648" r:id="rId1"/>
   </p:sldMasterIdLst>
   <p:notesMasterIdLst>
-    <p:notesMasterId r:id="rId38"/>
+    <p:notesMasterId r:id="rId40"/>
   </p:notesMasterIdLst>
   <p:sldIdLst>
     <p:sldId id="256" r:id="rId2"/>
@@ -30,20 +30,22 @@
     <p:sldId id="290" r:id="rId21"/>
     <p:sldId id="293" r:id="rId22"/>
     <p:sldId id="294" r:id="rId23"/>
-    <p:sldId id="275" r:id="rId24"/>
-    <p:sldId id="276" r:id="rId25"/>
-    <p:sldId id="277" r:id="rId26"/>
-    <p:sldId id="278" r:id="rId27"/>
-    <p:sldId id="279" r:id="rId28"/>
-    <p:sldId id="288" r:id="rId29"/>
-    <p:sldId id="260" r:id="rId30"/>
-    <p:sldId id="261" r:id="rId31"/>
-    <p:sldId id="262" r:id="rId32"/>
-    <p:sldId id="271" r:id="rId33"/>
-    <p:sldId id="272" r:id="rId34"/>
-    <p:sldId id="273" r:id="rId35"/>
-    <p:sldId id="287" r:id="rId36"/>
-    <p:sldId id="265" r:id="rId37"/>
+    <p:sldId id="296" r:id="rId24"/>
+    <p:sldId id="297" r:id="rId25"/>
+    <p:sldId id="279" r:id="rId26"/>
+    <p:sldId id="288" r:id="rId27"/>
+    <p:sldId id="275" r:id="rId28"/>
+    <p:sldId id="276" r:id="rId29"/>
+    <p:sldId id="277" r:id="rId30"/>
+    <p:sldId id="278" r:id="rId31"/>
+    <p:sldId id="260" r:id="rId32"/>
+    <p:sldId id="261" r:id="rId33"/>
+    <p:sldId id="262" r:id="rId34"/>
+    <p:sldId id="271" r:id="rId35"/>
+    <p:sldId id="272" r:id="rId36"/>
+    <p:sldId id="273" r:id="rId37"/>
+    <p:sldId id="287" r:id="rId38"/>
+    <p:sldId id="265" r:id="rId39"/>
   </p:sldIdLst>
   <p:sldSz cx="12192000" cy="6858000"/>
   <p:notesSz cx="6858000" cy="12192000"/>
@@ -1582,7 +1584,13 @@
   <p:cSld>
     <p:spTree>
       <p:nvGrpSpPr>
-        <p:cNvPr id="1" name=""/>
+        <p:cNvPr id="1" name="">
+          <a:extLst>
+            <a:ext uri="{FF2B5EF4-FFF2-40B4-BE49-F238E27FC236}">
+              <a16:creationId xmlns:a16="http://schemas.microsoft.com/office/drawing/2014/main" id="{78954513-44E0-1974-5A82-1602EA3CE45F}"/>
+            </a:ext>
+          </a:extLst>
+        </p:cNvPr>
         <p:cNvGrpSpPr/>
         <p:nvPr/>
       </p:nvGrpSpPr>
@@ -1596,7 +1604,13 @@
       </p:grpSpPr>
       <p:sp>
         <p:nvSpPr>
-          <p:cNvPr id="2" name="Slide Image Placeholder 1"/>
+          <p:cNvPr id="2" name="Slide Image Placeholder 1">
+            <a:extLst>
+              <a:ext uri="{FF2B5EF4-FFF2-40B4-BE49-F238E27FC236}">
+                <a16:creationId xmlns:a16="http://schemas.microsoft.com/office/drawing/2014/main" id="{E35B058E-5B8B-0C58-E9F5-76AEFF84B7EA}"/>
+              </a:ext>
+            </a:extLst>
+          </p:cNvPr>
           <p:cNvSpPr>
             <a:spLocks noGrp="1" noRot="1" noChangeAspect="1"/>
           </p:cNvSpPr>
@@ -1608,7 +1622,13 @@
       </p:sp>
       <p:sp>
         <p:nvSpPr>
-          <p:cNvPr id="3" name="Notes Placeholder 2"/>
+          <p:cNvPr id="3" name="Notes Placeholder 2">
+            <a:extLst>
+              <a:ext uri="{FF2B5EF4-FFF2-40B4-BE49-F238E27FC236}">
+                <a16:creationId xmlns:a16="http://schemas.microsoft.com/office/drawing/2014/main" id="{4067415F-5D90-E24E-4E9B-627A6A0EECCA}"/>
+              </a:ext>
+            </a:extLst>
+          </p:cNvPr>
           <p:cNvSpPr>
             <a:spLocks noGrp="1"/>
           </p:cNvSpPr>
@@ -1623,14 +1643,20 @@
           <a:p>
             <a:r>
               <a:rPr lang="en-US" dirty="0"/>
-              <a:t>Framing slide for the case-study section. This grounds the last several slides’ concepts (SBR substrate, ASC speedup, Sinclair-matrix polarimetry) against a real, publicly-available codebase rather than leaving them abstract.</a:t>
-            </a:r>
-          </a:p>
-        </p:txBody>
-      </p:sp>
-      <p:sp>
-        <p:nvSpPr>
-          <p:cNvPr id="4" name="Slide Number Placeholder 3"/>
+              <a:t>This is the Tier 2 row from the Validation table, actually executed rather than described: a primitive-level dense-SBR ray tracer (flat rectangular facets, front-face-only single-bounce visibility, no PTD/UTD) built and run against a closed-form ASC-cached forward model on the identical building scene, same aperture, same noiseless realization. Whole-image SSIM is reported for completeness but is not the number to trust -- it is inflated by the concrete ground-clutter background (added identically to both branches, so it contributes "free" agreement to the average) and simultaneously diluted by real per-building differences averaging out across 200 structures. Per-building SSIM, cropping to each building's own footprint plus its height-dependent layover margin, is the metric that actually matches the table's "per structure type, same sector" language, and is what should be quoted: 197/200 (98.5%) pass. The 3 failing buildings (worst: 0.923) are consistently the SHORTEST in the scene (6.5-19m, vs. up to 40m elsewhere) with the smallest crops (35-68px) -- least layover margin and least spatial context for the SSIM window, not a systemic geometry problem; the geometry itself (standoff/altitude/resolution) was iterated specifically to remove an earlier, much worse failure mode where edge-of-scene buildings viewed at large incidence-angle swings (7 deg edge-to-edge at an earlier, too-short standoff) or a too-shallow ~2.9 deg depression angle (an intermediate misstep, altitude not scaled with standoff) drove per-building SSIM as low as 0.92-0.92 for a third of the scene. Real measured cost, not modeled, both from the same 450-pulse run on the RTX 4050: dense SBR 3108ms/pulse, 1398s (23.3 min) total; ASC-cached 3.8ms/pulse, 1.7s total -- 818x faster per pulse, 822x faster end to end. This is bigger than the Generation Speed slide's 125x (slide 7) because that number was never measured -- it came from flat per-structure cost constants (R_ANSYS=75us/structure, R_ASC=0.5us/structure in radar_params.py) standing in for a dense ray tracer that was never actually built or profiled. Once a real ray-facet intersector was built for this validation (O(rays x facets) occlusion, 67,081 rays x 1000 facets per pulse) and measured against the same O(facets) ASC backface-cull evaluation, real geometric occlusion turned out substantially more expensive per structure than the 75us placeholder assumed. GPU memory chunking (added to keep ray-facet intersection within VRAM budget on the RTX 4050) is not the explanation for the gap -- at this scene's facet count chunking adds roughly 8 kernel launches per pulse, negligible against 3.1s/pulse. The right reading: 125x was a napkin estimate for an unbuilt comparison; 818x is what the real cost of ray-traced occlusion vs a closed-form cache actually looks like once both sides exist and get profiled.</a:t>
+            </a:r>
+          </a:p>
+        </p:txBody>
+      </p:sp>
+      <p:sp>
+        <p:nvSpPr>
+          <p:cNvPr id="4" name="Slide Number Placeholder 3">
+            <a:extLst>
+              <a:ext uri="{FF2B5EF4-FFF2-40B4-BE49-F238E27FC236}">
+                <a16:creationId xmlns:a16="http://schemas.microsoft.com/office/drawing/2014/main" id="{17698E2C-DD03-A0C9-66EA-E1631B2FFB04}"/>
+              </a:ext>
+            </a:extLst>
+          </p:cNvPr>
           <p:cNvSpPr>
             <a:spLocks noGrp="1"/>
           </p:cNvSpPr>
@@ -1654,7 +1680,7 @@
     </p:spTree>
     <p:extLst>
       <p:ext uri="{BB962C8B-B14F-4D97-AF65-F5344CB8AC3E}">
-        <p14:creationId xmlns:p14="http://schemas.microsoft.com/office/powerpoint/2010/main" val="3442264141"/>
+        <p14:creationId xmlns:p14="http://schemas.microsoft.com/office/powerpoint/2010/main" val="668810440"/>
       </p:ext>
     </p:extLst>
   </p:cSld>
@@ -1669,7 +1695,13 @@
   <p:cSld>
     <p:spTree>
       <p:nvGrpSpPr>
-        <p:cNvPr id="1" name=""/>
+        <p:cNvPr id="1" name="">
+          <a:extLst>
+            <a:ext uri="{FF2B5EF4-FFF2-40B4-BE49-F238E27FC236}">
+              <a16:creationId xmlns:a16="http://schemas.microsoft.com/office/drawing/2014/main" id="{5A7C3719-DF00-72A8-E431-07A060FD33A1}"/>
+            </a:ext>
+          </a:extLst>
+        </p:cNvPr>
         <p:cNvGrpSpPr/>
         <p:nvPr/>
       </p:nvGrpSpPr>
@@ -1683,7 +1715,13 @@
       </p:grpSpPr>
       <p:sp>
         <p:nvSpPr>
-          <p:cNvPr id="2" name="Slide Image Placeholder 1"/>
+          <p:cNvPr id="2" name="Slide Image Placeholder 1">
+            <a:extLst>
+              <a:ext uri="{FF2B5EF4-FFF2-40B4-BE49-F238E27FC236}">
+                <a16:creationId xmlns:a16="http://schemas.microsoft.com/office/drawing/2014/main" id="{E151F3F1-4100-7F09-793C-F1EEAAB5F7C4}"/>
+              </a:ext>
+            </a:extLst>
+          </p:cNvPr>
           <p:cNvSpPr>
             <a:spLocks noGrp="1" noRot="1" noChangeAspect="1"/>
           </p:cNvSpPr>
@@ -1695,7 +1733,13 @@
       </p:sp>
       <p:sp>
         <p:nvSpPr>
-          <p:cNvPr id="3" name="Notes Placeholder 2"/>
+          <p:cNvPr id="3" name="Notes Placeholder 2">
+            <a:extLst>
+              <a:ext uri="{FF2B5EF4-FFF2-40B4-BE49-F238E27FC236}">
+                <a16:creationId xmlns:a16="http://schemas.microsoft.com/office/drawing/2014/main" id="{F6AFFD04-F4EE-48FD-160E-B35DBED15F41}"/>
+              </a:ext>
+            </a:extLst>
+          </p:cNvPr>
           <p:cNvSpPr>
             <a:spLocks noGrp="1"/>
           </p:cNvSpPr>
@@ -1710,14 +1754,20 @@
           <a:p>
             <a:r>
               <a:rPr lang="en-US" dirty="0"/>
-              <a:t>This is the load-bearing fact for the whole case study: PEC-only, scalar, geometric-cross-pol-only. Everything on the next two slides is a consequence of this baseline.</a:t>
-            </a:r>
-          </a:p>
-        </p:txBody>
-      </p:sp>
-      <p:sp>
-        <p:nvSpPr>
-          <p:cNvPr id="4" name="Slide Number Placeholder 3"/>
+              <a:t>Second scoring pass on the exact same phase history as the previous slide -- no re-simulation, just a different, InSAR-standard metric (complex coherence) applied to the same dense-SBR and ASC-cached complex images. Coherence differs from SSIM in a specific way worth being precise about if asked: SSIM operates on the normalized dB-clipped magnitude image (a structural/perceptual comparison), so it can stay high even when the underlying complex field has areas of joint amplitude+phase misalignment that do not show up as an obvious structural difference in log-magnitude. Coherence is directly sensitive to that joint misalignment because it correlates the actual complex values, not a derived magnitude image. The headline finding: 16/200 buildings (8%) pass the Tier 2 SSIM&gt;=0.95 criterion but fail an equivalent coherence&gt;=0.95 threshold -- the worst case, building 8 (h=25.4m), scores SSIM=0.971 (a clean pass) but coherence=0.678, one of only two buildings below 0.70 in the whole scene (the other, building 33 at h=7.1m, was already flagged in the previous slide's notes as having an anomalously high phase RMS of 40.6 degrees -- coherence explains why: it is the single worst-agreeing building in the scene by this metric too). Notably this coherence-flagged population is NOT the same population as the SSIM-worst-5 from the previous slide: the SSIM failures were the shortest buildings (least layover margin, smallest crops); most of the coherence mismatches are mid-to-tall buildings (17-37m) with large, well-sampled crops, so this is a genuinely different, additional signal, not just the same short-building effect showing up twice. Phase bias sitting at -0.04 degrees (whole-image) and similarly near-zero per-building confirms there is no systematic reference-range or mocomp convention mismatch between the two branches -- whatever is driving the coherence gap is localized disagreement (candidate explanation, not yet confirmed: sub-pixel misalignment of the dominant scatterer position between the ray-traced dense-SBR return and the analytic ASC point-return for these specific facets), not a global bug. Correct interpretation to give in the room: this does not overturn the Tier 2 pass -- SSIM plus per-building scoring is still the primary, deck-stated criterion -- but it is real evidence that SSIM alone has a blind spot for a meaningful minority (8%) of structures, and a coherence threshold is worth adding alongside SSIM in the Tier 2 pass criteria on the Validation table, not swapped in to replace it.</a:t>
+            </a:r>
+          </a:p>
+        </p:txBody>
+      </p:sp>
+      <p:sp>
+        <p:nvSpPr>
+          <p:cNvPr id="4" name="Slide Number Placeholder 3">
+            <a:extLst>
+              <a:ext uri="{FF2B5EF4-FFF2-40B4-BE49-F238E27FC236}">
+                <a16:creationId xmlns:a16="http://schemas.microsoft.com/office/drawing/2014/main" id="{E9F70507-381A-2F37-2A50-37994BBCB3B5}"/>
+              </a:ext>
+            </a:extLst>
+          </p:cNvPr>
           <p:cNvSpPr>
             <a:spLocks noGrp="1"/>
           </p:cNvSpPr>
@@ -1741,7 +1791,7 @@
     </p:spTree>
     <p:extLst>
       <p:ext uri="{BB962C8B-B14F-4D97-AF65-F5344CB8AC3E}">
-        <p14:creationId xmlns:p14="http://schemas.microsoft.com/office/powerpoint/2010/main" val="2419314410"/>
+        <p14:creationId xmlns:p14="http://schemas.microsoft.com/office/powerpoint/2010/main" val="1770273950"/>
       </p:ext>
     </p:extLst>
   </p:cSld>
@@ -1797,7 +1847,7 @@
           <a:p>
             <a:r>
               <a:rPr lang="en-US" dirty="0"/>
-              <a:t>A is a days-scale sanity check that validates the CPHD multi-channel plumbing end to end. B is the one that actually matches this deck’s Sinclair-matrix treatment (Slide 12) and gives correct material-dependent polarimetry, not just geometric dihedral cross-pol.</a:t>
+              <a:t>Landing slide -- restate the core reframe (radar problem, not rendering problem) and give a concrete "what to build first" recommendation.</a:t>
             </a:r>
           </a:p>
         </p:txBody>
@@ -1828,7 +1878,7 @@
     </p:spTree>
     <p:extLst>
       <p:ext uri="{BB962C8B-B14F-4D97-AF65-F5344CB8AC3E}">
-        <p14:creationId xmlns:p14="http://schemas.microsoft.com/office/powerpoint/2010/main" val="2015174317"/>
+        <p14:creationId xmlns:p14="http://schemas.microsoft.com/office/powerpoint/2010/main" val="80603693"/>
       </p:ext>
     </p:extLst>
   </p:cSld>
@@ -1884,7 +1934,7 @@
           <a:p>
             <a:r>
               <a:rPr lang="en-US" dirty="0"/>
-              <a:t>Stage 1 needs zero new code. Stage 2 is a one-time offline job, fine in Python even though the core is C/C++. Stage 3 is the only part that touches the hot per-pulse loop, and it’s deliberately much cheaper than the ray-traced path it’s replacing.</a:t>
+              <a:t>Framing slide for the case-study section. This grounds the last several slides’ concepts (SBR substrate, ASC speedup, Sinclair-matrix polarimetry) against a real, publicly-available codebase rather than leaving them abstract.</a:t>
             </a:r>
           </a:p>
         </p:txBody>
@@ -1906,7 +1956,7 @@
           <a:p>
             <a:fld id="{F7021451-1387-4CA6-816F-3879F97B5CBC}" type="slidenum">
               <a:rPr lang="en-US"/>
-              <a:t>26</a:t>
+              <a:t>27</a:t>
             </a:fld>
             <a:endParaRPr lang="en-US"/>
           </a:p>
@@ -1915,7 +1965,7 @@
     </p:spTree>
     <p:extLst>
       <p:ext uri="{BB962C8B-B14F-4D97-AF65-F5344CB8AC3E}">
-        <p14:creationId xmlns:p14="http://schemas.microsoft.com/office/powerpoint/2010/main" val="1080603944"/>
+        <p14:creationId xmlns:p14="http://schemas.microsoft.com/office/powerpoint/2010/main" val="3442264141"/>
       </p:ext>
     </p:extLst>
   </p:cSld>
@@ -1971,7 +2021,7 @@
           <a:p>
             <a:r>
               <a:rPr lang="en-US" dirty="0"/>
-              <a:t>Landing slide -- restate the core reframe (radar problem, not rendering problem) and give a concrete "what to build first" recommendation.</a:t>
+              <a:t>This is the load-bearing fact for the whole case study: PEC-only, scalar, geometric-cross-pol-only. Everything on the next two slides is a consequence of this baseline.</a:t>
             </a:r>
           </a:p>
         </p:txBody>
@@ -1993,7 +2043,7 @@
           <a:p>
             <a:fld id="{F7021451-1387-4CA6-816F-3879F97B5CBC}" type="slidenum">
               <a:rPr lang="en-US"/>
-              <a:t>27</a:t>
+              <a:t>28</a:t>
             </a:fld>
             <a:endParaRPr lang="en-US"/>
           </a:p>
@@ -2002,7 +2052,7 @@
     </p:spTree>
     <p:extLst>
       <p:ext uri="{BB962C8B-B14F-4D97-AF65-F5344CB8AC3E}">
-        <p14:creationId xmlns:p14="http://schemas.microsoft.com/office/powerpoint/2010/main" val="80603693"/>
+        <p14:creationId xmlns:p14="http://schemas.microsoft.com/office/powerpoint/2010/main" val="2419314410"/>
       </p:ext>
     </p:extLst>
   </p:cSld>
@@ -2058,7 +2108,7 @@
           <a:p>
             <a:r>
               <a:rPr lang="en-US" dirty="0"/>
-              <a:t>Emphasize this is a re-tagging step, not something you get from existing game assets -- you’re throwing away the visual material and keeping only geometry.</a:t>
+              <a:t>A is a days-scale sanity check that validates the CPHD multi-channel plumbing end to end. B is the one that actually matches this deck’s Sinclair-matrix treatment (Slide 12) and gives correct material-dependent polarimetry, not just geometric dihedral cross-pol.</a:t>
             </a:r>
           </a:p>
         </p:txBody>
@@ -2089,7 +2139,7 @@
     </p:spTree>
     <p:extLst>
       <p:ext uri="{BB962C8B-B14F-4D97-AF65-F5344CB8AC3E}">
-        <p14:creationId xmlns:p14="http://schemas.microsoft.com/office/powerpoint/2010/main" val="1024086991"/>
+        <p14:creationId xmlns:p14="http://schemas.microsoft.com/office/powerpoint/2010/main" val="2015174317"/>
       </p:ext>
     </p:extLst>
   </p:cSld>
@@ -2145,7 +2195,7 @@
           <a:p>
             <a:r>
               <a:rPr lang="en-US" dirty="0"/>
-              <a:t>The key engineering decision point. Staying inside Unity/Unreal buys procedural terrain, asset libraries, trajectory scripting, and batch scene automation for dataset generation -- worth it if generating many diverse scenes, less so for one careful scene.</a:t>
+              <a:t>Stage 1 needs zero new code. Stage 2 is a one-time offline job, fine in Python even though the core is C/C++. Stage 3 is the only part that touches the hot per-pulse loop, and it’s deliberately much cheaper than the ray-traced path it’s replacing.</a:t>
             </a:r>
           </a:p>
         </p:txBody>
@@ -2176,7 +2226,7 @@
     </p:spTree>
     <p:extLst>
       <p:ext uri="{BB962C8B-B14F-4D97-AF65-F5344CB8AC3E}">
-        <p14:creationId xmlns:p14="http://schemas.microsoft.com/office/powerpoint/2010/main" val="1024086991"/>
+        <p14:creationId xmlns:p14="http://schemas.microsoft.com/office/powerpoint/2010/main" val="1080603944"/>
       </p:ext>
     </p:extLst>
   </p:cSld>
@@ -2319,7 +2369,7 @@
           <a:p>
             <a:r>
               <a:rPr lang="en-US" dirty="0"/>
-              <a:t>This is the mechanical heart of "how do buildings show up correctly." Flag clearly: single-bounce-only tracing will silently miss the brightest returns in any urban scene.</a:t>
+              <a:t>Emphasize this is a re-tagging step, not something you get from existing game assets -- you’re throwing away the visual material and keeping only geometry.</a:t>
             </a:r>
           </a:p>
         </p:txBody>
@@ -2406,7 +2456,7 @@
           <a:p>
             <a:r>
               <a:rPr lang="en-US" dirty="0"/>
-              <a:t>This is the same point-scatterer forward model developed earlier for target injection -- the whole scene now flows through that one mechanism, regardless of whether a given contribution came from ray tracing or an ASC evaluation.</a:t>
+              <a:t>The key engineering decision point. Staying inside Unity/Unreal buys procedural terrain, asset libraries, trajectory scripting, and batch scene automation for dataset generation -- worth it if generating many diverse scenes, less so for one careful scene.</a:t>
             </a:r>
           </a:p>
         </p:txBody>
@@ -2493,7 +2543,7 @@
           <a:p>
             <a:r>
               <a:rPr lang="en-US" dirty="0"/>
-              <a:t>Good closing-the-loop slide -- ties back to the earlier RDA/ω-k material if this deck follows that content, or stands alone as "and then you image it normally."</a:t>
+              <a:t>This is the mechanical heart of "how do buildings show up correctly." Flag clearly: single-bounce-only tracing will silently miss the brightest returns in any urban scene.</a:t>
             </a:r>
           </a:p>
         </p:txBody>
@@ -2580,7 +2630,7 @@
           <a:p>
             <a:r>
               <a:rPr lang="en-US" dirty="0"/>
-              <a:t>Useful for setting expectations with an audience about scope/timeline. Tier 2.5 is the practical sweet spot once Tier 2 is working and per-pulse re-tracing shows up as the bottleneck. Weather is a separate axis -- call that out explicitly if asked "which tier includes rain."</a:t>
+              <a:t>This is the same point-scatterer forward model developed earlier for target injection -- the whole scene now flows through that one mechanism, regardless of whether a given contribution came from ray tracing or an ASC evaluation.</a:t>
             </a:r>
           </a:p>
         </p:txBody>
@@ -2667,7 +2717,7 @@
           <a:p>
             <a:r>
               <a:rPr lang="en-US" dirty="0"/>
-              <a:t>Makes Slide 11’s "the win only shows up at scale" claim concrete with worked numbers. Sources: RT-core Gigarays/s benchmarks (Turing 10+, Ampere ~2x, Ada 3rd-gen); Willis &amp; Hossain, "Hardware-Accelerated SAR Simulation with NVIDIA-RTX Technology," arXiv:2005.09736 (OptiX-based SAR phase history, orders-of-magnitude speedup, additional order of magnitude specifically from RT cores); Auer/Hinz/Bamler DLR lineage (RaySAR) for the 9,950-building/100ms city-scale benchmark, flagged explicitly as a coarser fidelity treatment, not directly comparable fidelity to the Ansys-class numbers above. H100/A100 explicitly excluded from this estimate -- confirmed via search to lack RT cores entirely; RTX-class hardware is architecturally correct here.</a:t>
+              <a:t>Good closing-the-loop slide -- ties back to the earlier RDA/ω-k material if this deck follows that content, or stands alone as "and then you image it normally."</a:t>
             </a:r>
           </a:p>
         </p:txBody>
@@ -2754,7 +2804,7 @@
           <a:p>
             <a:r>
               <a:rPr lang="en-US" dirty="0"/>
-              <a:t>The bonus point ties this back to the model-based/template-matching detection discussion earlier in the series, if this deck follows that thread -- reuse, not a new concept.</a:t>
+              <a:t>Useful for setting expectations with an audience about scope/timeline. Tier 2.5 is the practical sweet spot once Tier 2 is working and per-pulse re-tracing shows up as the bottleneck. Weather is a separate axis -- call that out explicitly if asked "which tier includes rain."</a:t>
             </a:r>
           </a:p>
         </p:txBody>
@@ -2777,6 +2827,180 @@
             <a:fld id="{F7021451-1387-4CA6-816F-3879F97B5CBC}" type="slidenum">
               <a:rPr lang="en-US"/>
               <a:t>36</a:t>
+            </a:fld>
+            <a:endParaRPr lang="en-US"/>
+          </a:p>
+        </p:txBody>
+      </p:sp>
+    </p:spTree>
+    <p:extLst>
+      <p:ext uri="{BB962C8B-B14F-4D97-AF65-F5344CB8AC3E}">
+        <p14:creationId xmlns:p14="http://schemas.microsoft.com/office/powerpoint/2010/main" val="1024086991"/>
+      </p:ext>
+    </p:extLst>
+  </p:cSld>
+  <p:clrMapOvr>
+    <a:masterClrMapping/>
+  </p:clrMapOvr>
+</p:notes>
+</file>
+
+<file path=ppt/notesSlides/notesSlide36.xml><?xml version="1.0" encoding="utf-8"?>
+<p:notes xmlns:a="http://schemas.openxmlformats.org/drawingml/2006/main" xmlns:r="http://schemas.openxmlformats.org/officeDocument/2006/relationships" xmlns:p="http://schemas.openxmlformats.org/presentationml/2006/main">
+  <p:cSld>
+    <p:spTree>
+      <p:nvGrpSpPr>
+        <p:cNvPr id="1" name=""/>
+        <p:cNvGrpSpPr/>
+        <p:nvPr/>
+      </p:nvGrpSpPr>
+      <p:grpSpPr>
+        <a:xfrm>
+          <a:off x="0" y="0"/>
+          <a:ext cx="0" cy="0"/>
+          <a:chOff x="0" y="0"/>
+          <a:chExt cx="0" cy="0"/>
+        </a:xfrm>
+      </p:grpSpPr>
+      <p:sp>
+        <p:nvSpPr>
+          <p:cNvPr id="2" name="Slide Image Placeholder 1"/>
+          <p:cNvSpPr>
+            <a:spLocks noGrp="1" noRot="1" noChangeAspect="1"/>
+          </p:cNvSpPr>
+          <p:nvPr>
+            <p:ph type="sldImg"/>
+          </p:nvPr>
+        </p:nvSpPr>
+        <p:spPr/>
+      </p:sp>
+      <p:sp>
+        <p:nvSpPr>
+          <p:cNvPr id="3" name="Notes Placeholder 2"/>
+          <p:cNvSpPr>
+            <a:spLocks noGrp="1"/>
+          </p:cNvSpPr>
+          <p:nvPr>
+            <p:ph type="body" idx="1"/>
+          </p:nvPr>
+        </p:nvSpPr>
+        <p:spPr/>
+        <p:txBody>
+          <a:bodyPr/>
+          <a:lstStyle/>
+          <a:p>
+            <a:r>
+              <a:rPr lang="en-US" dirty="0"/>
+              <a:t>Makes Slide 11’s "the win only shows up at scale" claim concrete with worked numbers. Sources: RT-core Gigarays/s benchmarks (Turing 10+, Ampere ~2x, Ada 3rd-gen); Willis &amp; Hossain, "Hardware-Accelerated SAR Simulation with NVIDIA-RTX Technology," arXiv:2005.09736 (OptiX-based SAR phase history, orders-of-magnitude speedup, additional order of magnitude specifically from RT cores); Auer/Hinz/Bamler DLR lineage (RaySAR) for the 9,950-building/100ms city-scale benchmark, flagged explicitly as a coarser fidelity treatment, not directly comparable fidelity to the Ansys-class numbers above. H100/A100 explicitly excluded from this estimate -- confirmed via search to lack RT cores entirely; RTX-class hardware is architecturally correct here.</a:t>
+            </a:r>
+          </a:p>
+        </p:txBody>
+      </p:sp>
+      <p:sp>
+        <p:nvSpPr>
+          <p:cNvPr id="4" name="Slide Number Placeholder 3"/>
+          <p:cNvSpPr>
+            <a:spLocks noGrp="1"/>
+          </p:cNvSpPr>
+          <p:nvPr>
+            <p:ph type="sldNum" sz="quarter" idx="10"/>
+          </p:nvPr>
+        </p:nvSpPr>
+        <p:spPr/>
+        <p:txBody>
+          <a:bodyPr/>
+          <a:lstStyle/>
+          <a:p>
+            <a:fld id="{F7021451-1387-4CA6-816F-3879F97B5CBC}" type="slidenum">
+              <a:rPr lang="en-US"/>
+              <a:t>37</a:t>
+            </a:fld>
+            <a:endParaRPr lang="en-US"/>
+          </a:p>
+        </p:txBody>
+      </p:sp>
+    </p:spTree>
+    <p:extLst>
+      <p:ext uri="{BB962C8B-B14F-4D97-AF65-F5344CB8AC3E}">
+        <p14:creationId xmlns:p14="http://schemas.microsoft.com/office/powerpoint/2010/main" val="1024086991"/>
+      </p:ext>
+    </p:extLst>
+  </p:cSld>
+  <p:clrMapOvr>
+    <a:masterClrMapping/>
+  </p:clrMapOvr>
+</p:notes>
+</file>
+
+<file path=ppt/notesSlides/notesSlide37.xml><?xml version="1.0" encoding="utf-8"?>
+<p:notes xmlns:a="http://schemas.openxmlformats.org/drawingml/2006/main" xmlns:r="http://schemas.openxmlformats.org/officeDocument/2006/relationships" xmlns:p="http://schemas.openxmlformats.org/presentationml/2006/main">
+  <p:cSld>
+    <p:spTree>
+      <p:nvGrpSpPr>
+        <p:cNvPr id="1" name=""/>
+        <p:cNvGrpSpPr/>
+        <p:nvPr/>
+      </p:nvGrpSpPr>
+      <p:grpSpPr>
+        <a:xfrm>
+          <a:off x="0" y="0"/>
+          <a:ext cx="0" cy="0"/>
+          <a:chOff x="0" y="0"/>
+          <a:chExt cx="0" cy="0"/>
+        </a:xfrm>
+      </p:grpSpPr>
+      <p:sp>
+        <p:nvSpPr>
+          <p:cNvPr id="2" name="Slide Image Placeholder 1"/>
+          <p:cNvSpPr>
+            <a:spLocks noGrp="1" noRot="1" noChangeAspect="1"/>
+          </p:cNvSpPr>
+          <p:nvPr>
+            <p:ph type="sldImg"/>
+          </p:nvPr>
+        </p:nvSpPr>
+        <p:spPr/>
+      </p:sp>
+      <p:sp>
+        <p:nvSpPr>
+          <p:cNvPr id="3" name="Notes Placeholder 2"/>
+          <p:cNvSpPr>
+            <a:spLocks noGrp="1"/>
+          </p:cNvSpPr>
+          <p:nvPr>
+            <p:ph type="body" idx="1"/>
+          </p:nvPr>
+        </p:nvSpPr>
+        <p:spPr/>
+        <p:txBody>
+          <a:bodyPr/>
+          <a:lstStyle/>
+          <a:p>
+            <a:r>
+              <a:rPr lang="en-US" dirty="0"/>
+              <a:t>The bonus point ties this back to the model-based/template-matching detection discussion earlier in the series, if this deck follows that thread -- reuse, not a new concept.</a:t>
+            </a:r>
+          </a:p>
+        </p:txBody>
+      </p:sp>
+      <p:sp>
+        <p:nvSpPr>
+          <p:cNvPr id="4" name="Slide Number Placeholder 3"/>
+          <p:cNvSpPr>
+            <a:spLocks noGrp="1"/>
+          </p:cNvSpPr>
+          <p:nvPr>
+            <p:ph type="sldNum" sz="quarter" idx="10"/>
+          </p:nvPr>
+        </p:nvSpPr>
+        <p:spPr/>
+        <p:txBody>
+          <a:bodyPr/>
+          <a:lstStyle/>
+          <a:p>
+            <a:fld id="{F7021451-1387-4CA6-816F-3879F97B5CBC}" type="slidenum">
+              <a:rPr lang="en-US"/>
+              <a:t>38</a:t>
             </a:fld>
             <a:endParaRPr lang="en-US"/>
           </a:p>
@@ -7862,7 +8086,23 @@
                 <a:ea typeface="Calibri" pitchFamily="34" charset="-122"/>
                 <a:cs typeface="Calibri" pitchFamily="34" charset="-120"/>
               </a:rPr>
-              <a:t>SCALAR / PEC MODEL  (e.g. SARCASTIC/MATLAB)</a:t>
+              <a:t>SCALAR / PERFECT ELECTRIC CONDUCTOR (PEC) MODEL</a:t>
+            </a:r>
+          </a:p>
+          <a:p>
+            <a:pPr marL="0" indent="0">
+              <a:buNone/>
+            </a:pPr>
+            <a:r>
+              <a:rPr lang="en-US" sz="1150" b="1" kern="0" spc="100" dirty="0">
+                <a:solidFill>
+                  <a:srgbClr val="5B6672"/>
+                </a:solidFill>
+                <a:latin typeface="Calibri" pitchFamily="34" charset="0"/>
+                <a:ea typeface="Calibri" pitchFamily="34" charset="-122"/>
+                <a:cs typeface="Calibri" pitchFamily="34" charset="-120"/>
+              </a:rPr>
+              <a:t>  (e.g. SARCASTIC/MATLAB)</a:t>
             </a:r>
             <a:endParaRPr lang="en-US" sz="1150" dirty="0"/>
           </a:p>
@@ -14589,7 +14829,7 @@
         <p:spPr>
           <a:xfrm>
             <a:off x="548640" y="1234440"/>
-            <a:ext cx="11091672" cy="566928"/>
+            <a:ext cx="9056536" cy="566928"/>
           </a:xfrm>
           <a:prstGeom prst="rect">
             <a:avLst/>
@@ -14616,15 +14856,541 @@
                 <a:ea typeface="Calibri" pitchFamily="34" charset="-122"/>
                 <a:cs typeface="Calibri" pitchFamily="34" charset="-120"/>
               </a:rPr>
-              <a:t>Not a Fermi estimate like the earlier worked examples -- measured. Full city-block scene (200 buildings, 1000 facets, 1km x 1km), real collection geometry (60km standoff / 22.5km altitude, ~20.6° depression, 2m resolution, 450-pulse Nyquist-sampled aperture), scored per building against the Tier 1 table's own SSIM &gt;= 0.95 criterion -- on a single consumer laptop GPU (RTX 4050).</a:t>
+              <a:t>Full city-block scene (200 buildings, 1000 facets, 1km x 1km), real collection geometry (60km standoff / 22.5km altitude, ~20.6° depression, 2m resolution, 450-pulse Nyquist-sampled aperture), scored per building against the Tier 1 table's own SSIM &gt;= 0.95 criterion -- on a single consumer laptop GPU (RTX 4050).</a:t>
             </a:r>
             <a:endParaRPr lang="en-US" sz="1150" dirty="0"/>
+          </a:p>
+        </p:txBody>
+      </p:sp>
+      <p:sp>
+        <p:nvSpPr>
+          <p:cNvPr id="6" name="Shape 3"/>
+          <p:cNvSpPr/>
+          <p:nvPr/>
+        </p:nvSpPr>
+        <p:spPr>
+          <a:xfrm>
+            <a:off x="548640" y="5110533"/>
+            <a:ext cx="11091672" cy="1290267"/>
+          </a:xfrm>
+          <a:prstGeom prst="roundRect">
+            <a:avLst>
+              <a:gd name="adj" fmla="val 5670"/>
+            </a:avLst>
+          </a:prstGeom>
+          <a:solidFill>
+            <a:srgbClr val="F1F4F8"/>
+          </a:solidFill>
+          <a:ln/>
+          <a:effectLst>
+            <a:outerShdw blurRad="101600" dist="38100" dir="5400000" algn="bl" rotWithShape="0">
+              <a:srgbClr val="9AA5B1">
+                <a:alpha val="22000"/>
+              </a:srgbClr>
+            </a:outerShdw>
+          </a:effectLst>
+        </p:spPr>
+      </p:sp>
+      <p:sp>
+        <p:nvSpPr>
+          <p:cNvPr id="7" name="Text 4"/>
+          <p:cNvSpPr/>
+          <p:nvPr/>
+        </p:nvSpPr>
+        <p:spPr>
+          <a:xfrm>
+            <a:off x="777240" y="5247693"/>
+            <a:ext cx="2407158" cy="256032"/>
+          </a:xfrm>
+          <a:prstGeom prst="rect">
+            <a:avLst/>
+          </a:prstGeom>
+          <a:noFill/>
+          <a:ln/>
+        </p:spPr>
+        <p:txBody>
+          <a:bodyPr wrap="square" lIns="0" tIns="0" rIns="0" bIns="0" rtlCol="0" anchor="ctr"/>
+          <a:lstStyle/>
+          <a:p>
+            <a:pPr marL="0" indent="0">
+              <a:buNone/>
+            </a:pPr>
+            <a:r>
+              <a:rPr lang="en-US" sz="1000" b="1" kern="0" spc="100" dirty="0">
+                <a:solidFill>
+                  <a:srgbClr val="B85C00"/>
+                </a:solidFill>
+                <a:latin typeface="Calibri" pitchFamily="34" charset="0"/>
+                <a:ea typeface="Calibri" pitchFamily="34" charset="-122"/>
+                <a:cs typeface="Calibri" pitchFamily="34" charset="-120"/>
+              </a:rPr>
+              <a:t>WHOLE-IMAGE SSIM</a:t>
+            </a:r>
+            <a:endParaRPr lang="en-US" sz="1000" dirty="0"/>
+          </a:p>
+        </p:txBody>
+      </p:sp>
+      <p:sp>
+        <p:nvSpPr>
+          <p:cNvPr id="8" name="Text 5"/>
+          <p:cNvSpPr/>
+          <p:nvPr/>
+        </p:nvSpPr>
+        <p:spPr>
+          <a:xfrm>
+            <a:off x="777240" y="5494581"/>
+            <a:ext cx="2407158" cy="457200"/>
+          </a:xfrm>
+          <a:prstGeom prst="rect">
+            <a:avLst/>
+          </a:prstGeom>
+          <a:noFill/>
+          <a:ln/>
+        </p:spPr>
+        <p:txBody>
+          <a:bodyPr wrap="square" lIns="0" tIns="0" rIns="0" bIns="0" rtlCol="0" anchor="ctr"/>
+          <a:lstStyle/>
+          <a:p>
+            <a:pPr marL="0" indent="0">
+              <a:buNone/>
+            </a:pPr>
+            <a:r>
+              <a:rPr lang="en-US" sz="1700" b="1" dirty="0">
+                <a:solidFill>
+                  <a:srgbClr val="141A22"/>
+                </a:solidFill>
+                <a:latin typeface="Courier New" pitchFamily="34" charset="0"/>
+                <a:ea typeface="Courier New" pitchFamily="34" charset="-122"/>
+                <a:cs typeface="Courier New" pitchFamily="34" charset="-120"/>
+              </a:rPr>
+              <a:t>0.993</a:t>
+            </a:r>
+            <a:endParaRPr lang="en-US" sz="1700" dirty="0"/>
+          </a:p>
+        </p:txBody>
+      </p:sp>
+      <p:sp>
+        <p:nvSpPr>
+          <p:cNvPr id="9" name="Text 6"/>
+          <p:cNvSpPr/>
+          <p:nvPr/>
+        </p:nvSpPr>
+        <p:spPr>
+          <a:xfrm>
+            <a:off x="777240" y="5951781"/>
+            <a:ext cx="2407158" cy="502920"/>
+          </a:xfrm>
+          <a:prstGeom prst="rect">
+            <a:avLst/>
+          </a:prstGeom>
+          <a:noFill/>
+          <a:ln/>
+        </p:spPr>
+        <p:txBody>
+          <a:bodyPr wrap="square" lIns="0" tIns="0" rIns="0" bIns="0" rtlCol="0" anchor="ctr"/>
+          <a:lstStyle/>
+          <a:p>
+            <a:pPr marL="0" indent="0">
+              <a:lnSpc>
+                <a:spcPct val="110000"/>
+              </a:lnSpc>
+              <a:buNone/>
+            </a:pPr>
+            <a:r>
+              <a:rPr lang="en-US" sz="900" i="1" dirty="0">
+                <a:solidFill>
+                  <a:srgbClr val="5B6672"/>
+                </a:solidFill>
+                <a:latin typeface="Calibri" pitchFamily="34" charset="0"/>
+                <a:ea typeface="Calibri" pitchFamily="34" charset="-122"/>
+                <a:cs typeface="Calibri" pitchFamily="34" charset="-120"/>
+              </a:rPr>
+              <a:t>PASS vs. &gt;= 0.95 -- but inflated/diluted, see per-building</a:t>
+            </a:r>
+            <a:endParaRPr lang="en-US" sz="900" dirty="0"/>
+          </a:p>
+        </p:txBody>
+      </p:sp>
+      <p:sp>
+        <p:nvSpPr>
+          <p:cNvPr id="10" name="Text 7"/>
+          <p:cNvSpPr/>
+          <p:nvPr/>
+        </p:nvSpPr>
+        <p:spPr>
+          <a:xfrm>
+            <a:off x="3412998" y="5247693"/>
+            <a:ext cx="2407158" cy="256032"/>
+          </a:xfrm>
+          <a:prstGeom prst="rect">
+            <a:avLst/>
+          </a:prstGeom>
+          <a:noFill/>
+          <a:ln/>
+        </p:spPr>
+        <p:txBody>
+          <a:bodyPr wrap="square" lIns="0" tIns="0" rIns="0" bIns="0" rtlCol="0" anchor="ctr"/>
+          <a:lstStyle/>
+          <a:p>
+            <a:pPr marL="0" indent="0">
+              <a:buNone/>
+            </a:pPr>
+            <a:r>
+              <a:rPr lang="en-US" sz="1000" b="1" kern="0" spc="100" dirty="0">
+                <a:solidFill>
+                  <a:srgbClr val="B85C00"/>
+                </a:solidFill>
+                <a:latin typeface="Calibri" pitchFamily="34" charset="0"/>
+                <a:ea typeface="Calibri" pitchFamily="34" charset="-122"/>
+                <a:cs typeface="Calibri" pitchFamily="34" charset="-120"/>
+              </a:rPr>
+              <a:t>PER-BUILDING (the real check)</a:t>
+            </a:r>
+            <a:endParaRPr lang="en-US" sz="1000" dirty="0"/>
+          </a:p>
+        </p:txBody>
+      </p:sp>
+      <p:sp>
+        <p:nvSpPr>
+          <p:cNvPr id="11" name="Text 8"/>
+          <p:cNvSpPr/>
+          <p:nvPr/>
+        </p:nvSpPr>
+        <p:spPr>
+          <a:xfrm>
+            <a:off x="3412998" y="5494581"/>
+            <a:ext cx="2407158" cy="457200"/>
+          </a:xfrm>
+          <a:prstGeom prst="rect">
+            <a:avLst/>
+          </a:prstGeom>
+          <a:noFill/>
+          <a:ln/>
+        </p:spPr>
+        <p:txBody>
+          <a:bodyPr wrap="square" lIns="0" tIns="0" rIns="0" bIns="0" rtlCol="0" anchor="ctr"/>
+          <a:lstStyle/>
+          <a:p>
+            <a:pPr marL="0" indent="0">
+              <a:buNone/>
+            </a:pPr>
+            <a:r>
+              <a:rPr lang="en-US" sz="1700" b="1" dirty="0">
+                <a:solidFill>
+                  <a:srgbClr val="141A22"/>
+                </a:solidFill>
+                <a:latin typeface="Courier New" pitchFamily="34" charset="0"/>
+                <a:ea typeface="Courier New" pitchFamily="34" charset="-122"/>
+                <a:cs typeface="Courier New" pitchFamily="34" charset="-120"/>
+              </a:rPr>
+              <a:t>197 / 200 pass</a:t>
+            </a:r>
+            <a:endParaRPr lang="en-US" sz="1700" dirty="0"/>
+          </a:p>
+        </p:txBody>
+      </p:sp>
+      <p:sp>
+        <p:nvSpPr>
+          <p:cNvPr id="12" name="Text 9"/>
+          <p:cNvSpPr/>
+          <p:nvPr/>
+        </p:nvSpPr>
+        <p:spPr>
+          <a:xfrm>
+            <a:off x="3412998" y="5951781"/>
+            <a:ext cx="2407158" cy="502920"/>
+          </a:xfrm>
+          <a:prstGeom prst="rect">
+            <a:avLst/>
+          </a:prstGeom>
+          <a:noFill/>
+          <a:ln/>
+        </p:spPr>
+        <p:txBody>
+          <a:bodyPr wrap="square" lIns="0" tIns="0" rIns="0" bIns="0" rtlCol="0" anchor="ctr"/>
+          <a:lstStyle/>
+          <a:p>
+            <a:pPr marL="0" indent="0">
+              <a:lnSpc>
+                <a:spcPct val="110000"/>
+              </a:lnSpc>
+              <a:buNone/>
+            </a:pPr>
+            <a:r>
+              <a:rPr lang="en-US" sz="900" i="1" dirty="0">
+                <a:solidFill>
+                  <a:srgbClr val="5B6672"/>
+                </a:solidFill>
+                <a:latin typeface="Calibri" pitchFamily="34" charset="0"/>
+                <a:ea typeface="Calibri" pitchFamily="34" charset="-122"/>
+                <a:cs typeface="Calibri" pitchFamily="34" charset="-120"/>
+              </a:rPr>
+              <a:t>mean 0.991, median 0.996, min 0.923 -- matches the table's "same sector" criterion</a:t>
+            </a:r>
+            <a:endParaRPr lang="en-US" sz="900" dirty="0"/>
+          </a:p>
+        </p:txBody>
+      </p:sp>
+      <p:sp>
+        <p:nvSpPr>
+          <p:cNvPr id="13" name="Text 10"/>
+          <p:cNvSpPr/>
+          <p:nvPr/>
+        </p:nvSpPr>
+        <p:spPr>
+          <a:xfrm>
+            <a:off x="6048756" y="5247693"/>
+            <a:ext cx="2407158" cy="256032"/>
+          </a:xfrm>
+          <a:prstGeom prst="rect">
+            <a:avLst/>
+          </a:prstGeom>
+          <a:noFill/>
+          <a:ln/>
+        </p:spPr>
+        <p:txBody>
+          <a:bodyPr wrap="square" lIns="0" tIns="0" rIns="0" bIns="0" rtlCol="0" anchor="ctr"/>
+          <a:lstStyle/>
+          <a:p>
+            <a:pPr marL="0" indent="0">
+              <a:buNone/>
+            </a:pPr>
+            <a:r>
+              <a:rPr lang="en-US" sz="1000" b="1" kern="0" spc="100" dirty="0">
+                <a:solidFill>
+                  <a:srgbClr val="B85C00"/>
+                </a:solidFill>
+                <a:latin typeface="Calibri" pitchFamily="34" charset="0"/>
+                <a:ea typeface="Calibri" pitchFamily="34" charset="-122"/>
+                <a:cs typeface="Calibri" pitchFamily="34" charset="-120"/>
+              </a:rPr>
+              <a:t>AMP / PHASE RMS</a:t>
+            </a:r>
+            <a:endParaRPr lang="en-US" sz="1000" dirty="0"/>
+          </a:p>
+        </p:txBody>
+      </p:sp>
+      <p:sp>
+        <p:nvSpPr>
+          <p:cNvPr id="14" name="Text 11"/>
+          <p:cNvSpPr/>
+          <p:nvPr/>
+        </p:nvSpPr>
+        <p:spPr>
+          <a:xfrm>
+            <a:off x="6048756" y="5494581"/>
+            <a:ext cx="2407158" cy="457200"/>
+          </a:xfrm>
+          <a:prstGeom prst="rect">
+            <a:avLst/>
+          </a:prstGeom>
+          <a:noFill/>
+          <a:ln/>
+        </p:spPr>
+        <p:txBody>
+          <a:bodyPr wrap="square" lIns="0" tIns="0" rIns="0" bIns="0" rtlCol="0" anchor="ctr"/>
+          <a:lstStyle/>
+          <a:p>
+            <a:pPr marL="0" indent="0">
+              <a:buNone/>
+            </a:pPr>
+            <a:r>
+              <a:rPr lang="en-US" sz="1700" b="1" dirty="0">
+                <a:solidFill>
+                  <a:srgbClr val="141A22"/>
+                </a:solidFill>
+                <a:latin typeface="Courier New" pitchFamily="34" charset="0"/>
+                <a:ea typeface="Courier New" pitchFamily="34" charset="-122"/>
+                <a:cs typeface="Courier New" pitchFamily="34" charset="-120"/>
+              </a:rPr>
+              <a:t>0.003 / 5.8°</a:t>
+            </a:r>
+            <a:endParaRPr lang="en-US" sz="1700" dirty="0"/>
+          </a:p>
+        </p:txBody>
+      </p:sp>
+      <p:sp>
+        <p:nvSpPr>
+          <p:cNvPr id="15" name="Text 12"/>
+          <p:cNvSpPr/>
+          <p:nvPr/>
+        </p:nvSpPr>
+        <p:spPr>
+          <a:xfrm>
+            <a:off x="6048756" y="5951781"/>
+            <a:ext cx="2407158" cy="502920"/>
+          </a:xfrm>
+          <a:prstGeom prst="rect">
+            <a:avLst/>
+          </a:prstGeom>
+          <a:noFill/>
+          <a:ln/>
+        </p:spPr>
+        <p:txBody>
+          <a:bodyPr wrap="square" lIns="0" tIns="0" rIns="0" bIns="0" rtlCol="0" anchor="ctr"/>
+          <a:lstStyle/>
+          <a:p>
+            <a:pPr marL="0" indent="0">
+              <a:lnSpc>
+                <a:spcPct val="110000"/>
+              </a:lnSpc>
+              <a:buNone/>
+            </a:pPr>
+            <a:r>
+              <a:rPr lang="en-US" sz="900" i="1" dirty="0">
+                <a:solidFill>
+                  <a:srgbClr val="5B6672"/>
+                </a:solidFill>
+                <a:latin typeface="Calibri" pitchFamily="34" charset="0"/>
+                <a:ea typeface="Calibri" pitchFamily="34" charset="-122"/>
+                <a:cs typeface="Calibri" pitchFamily="34" charset="-120"/>
+              </a:rPr>
+              <a:t>whole-image, magnitude-weighted</a:t>
+            </a:r>
+            <a:endParaRPr lang="en-US" sz="900" dirty="0"/>
+          </a:p>
+        </p:txBody>
+      </p:sp>
+      <p:sp>
+        <p:nvSpPr>
+          <p:cNvPr id="16" name="Text 13"/>
+          <p:cNvSpPr/>
+          <p:nvPr/>
+        </p:nvSpPr>
+        <p:spPr>
+          <a:xfrm>
+            <a:off x="8684514" y="5247693"/>
+            <a:ext cx="2407158" cy="256032"/>
+          </a:xfrm>
+          <a:prstGeom prst="rect">
+            <a:avLst/>
+          </a:prstGeom>
+          <a:noFill/>
+          <a:ln/>
+        </p:spPr>
+        <p:txBody>
+          <a:bodyPr wrap="square" lIns="0" tIns="0" rIns="0" bIns="0" rtlCol="0" anchor="ctr"/>
+          <a:lstStyle/>
+          <a:p>
+            <a:pPr marL="0" indent="0">
+              <a:buNone/>
+            </a:pPr>
+            <a:r>
+              <a:rPr lang="en-US" sz="1000" b="1" kern="0" spc="100" dirty="0">
+                <a:solidFill>
+                  <a:srgbClr val="B85C00"/>
+                </a:solidFill>
+                <a:latin typeface="Calibri" pitchFamily="34" charset="0"/>
+                <a:ea typeface="Calibri" pitchFamily="34" charset="-122"/>
+                <a:cs typeface="Calibri" pitchFamily="34" charset="-120"/>
+              </a:rPr>
+              <a:t>MEASURED SPEEDUP (RTX 4050)</a:t>
+            </a:r>
+            <a:endParaRPr lang="en-US" sz="1000" dirty="0"/>
+          </a:p>
+        </p:txBody>
+      </p:sp>
+      <p:sp>
+        <p:nvSpPr>
+          <p:cNvPr id="17" name="Text 14"/>
+          <p:cNvSpPr/>
+          <p:nvPr/>
+        </p:nvSpPr>
+        <p:spPr>
+          <a:xfrm>
+            <a:off x="8684514" y="5494581"/>
+            <a:ext cx="2407158" cy="457200"/>
+          </a:xfrm>
+          <a:prstGeom prst="rect">
+            <a:avLst/>
+          </a:prstGeom>
+          <a:noFill/>
+          <a:ln/>
+        </p:spPr>
+        <p:txBody>
+          <a:bodyPr wrap="square" lIns="0" tIns="0" rIns="0" bIns="0" rtlCol="0" anchor="ctr"/>
+          <a:lstStyle/>
+          <a:p>
+            <a:pPr marL="0" indent="0">
+              <a:buNone/>
+            </a:pPr>
+            <a:r>
+              <a:rPr lang="en-US" sz="1700" b="1" dirty="0">
+                <a:solidFill>
+                  <a:srgbClr val="141A22"/>
+                </a:solidFill>
+                <a:latin typeface="Courier New" pitchFamily="34" charset="0"/>
+                <a:ea typeface="Courier New" pitchFamily="34" charset="-122"/>
+                <a:cs typeface="Courier New" pitchFamily="34" charset="-120"/>
+              </a:rPr>
+              <a:t>818x / pulse</a:t>
+            </a:r>
+          </a:p>
+          <a:p>
+            <a:r>
+              <a:rPr lang="en-US" sz="1600" b="1" dirty="0">
+                <a:latin typeface="Courier New" panose="02070309020205020404" pitchFamily="49" charset="0"/>
+                <a:cs typeface="Courier New" panose="02070309020205020404" pitchFamily="49" charset="0"/>
+              </a:rPr>
+              <a:t>1.7s / 1398s total</a:t>
+            </a:r>
+            <a:endParaRPr lang="en-US" sz="1700" b="1" dirty="0">
+              <a:latin typeface="Courier New" panose="02070309020205020404" pitchFamily="49" charset="0"/>
+              <a:cs typeface="Courier New" panose="02070309020205020404" pitchFamily="49" charset="0"/>
+            </a:endParaRPr>
+          </a:p>
+        </p:txBody>
+      </p:sp>
+      <p:sp>
+        <p:nvSpPr>
+          <p:cNvPr id="18" name="Text 15"/>
+          <p:cNvSpPr/>
+          <p:nvPr/>
+        </p:nvSpPr>
+        <p:spPr>
+          <a:xfrm>
+            <a:off x="8684514" y="5951781"/>
+            <a:ext cx="2407158" cy="502920"/>
+          </a:xfrm>
+          <a:prstGeom prst="rect">
+            <a:avLst/>
+          </a:prstGeom>
+          <a:noFill/>
+          <a:ln/>
+        </p:spPr>
+        <p:txBody>
+          <a:bodyPr wrap="square" lIns="0" tIns="0" rIns="0" bIns="0" rtlCol="0" anchor="ctr"/>
+          <a:lstStyle/>
+          <a:p>
+            <a:pPr>
+              <a:lnSpc>
+                <a:spcPct val="110000"/>
+              </a:lnSpc>
+            </a:pPr>
+            <a:r>
+              <a:rPr lang="en-US" sz="900" i="1" dirty="0">
+                <a:solidFill>
+                  <a:srgbClr val="5B6672"/>
+                </a:solidFill>
+                <a:latin typeface="Calibri" pitchFamily="34" charset="0"/>
+                <a:ea typeface="Calibri" pitchFamily="34" charset="-122"/>
+                <a:cs typeface="Calibri" pitchFamily="34" charset="-120"/>
+              </a:rPr>
+              <a:t>ray/facet intersection is more expensive than estimated</a:t>
+            </a:r>
+            <a:endParaRPr lang="en-US" sz="900" dirty="0"/>
           </a:p>
         </p:txBody>
       </p:sp>
       <p:pic>
         <p:nvPicPr>
-          <p:cNvPr id="5" name="Image 0" descr="/sessions/sweet-friendly-mayer/mnt/outputs/presentation/tier2_sbr_vs_asc_comparison.png"/>
+          <p:cNvPr id="20" name="Picture 19">
+            <a:extLst>
+              <a:ext uri="{FF2B5EF4-FFF2-40B4-BE49-F238E27FC236}">
+                <a16:creationId xmlns:a16="http://schemas.microsoft.com/office/drawing/2014/main" id="{3469333A-0E49-7CD2-5A18-AA839F6797F2}"/>
+              </a:ext>
+            </a:extLst>
+          </p:cNvPr>
           <p:cNvPicPr>
             <a:picLocks noChangeAspect="1"/>
           </p:cNvPicPr>
@@ -14638,6 +15404,30 @@
         </p:blipFill>
         <p:spPr>
           <a:xfrm>
+            <a:off x="9419237" y="7950"/>
+            <a:ext cx="2844324" cy="2187941"/>
+          </a:xfrm>
+          <a:prstGeom prst="rect">
+            <a:avLst/>
+          </a:prstGeom>
+        </p:spPr>
+      </p:pic>
+      <p:pic>
+        <p:nvPicPr>
+          <p:cNvPr id="5" name="Image 0" descr="/sessions/sweet-friendly-mayer/mnt/outputs/presentation/tier2_sbr_vs_asc_comparison.png"/>
+          <p:cNvPicPr>
+            <a:picLocks noChangeAspect="1"/>
+          </p:cNvPicPr>
+          <p:nvPr/>
+        </p:nvPicPr>
+        <p:blipFill>
+          <a:blip r:embed="rId4"/>
+          <a:stretch>
+            <a:fillRect/>
+          </a:stretch>
+        </p:blipFill>
+        <p:spPr>
+          <a:xfrm>
             <a:off x="516636" y="1874520"/>
             <a:ext cx="11155680" cy="3053133"/>
           </a:xfrm>
@@ -14648,521 +15438,50 @@
       </p:pic>
       <p:sp>
         <p:nvSpPr>
-          <p:cNvPr id="6" name="Shape 3"/>
-          <p:cNvSpPr/>
-          <p:nvPr/>
-        </p:nvSpPr>
-        <p:spPr>
-          <a:xfrm>
-            <a:off x="548640" y="5110533"/>
-            <a:ext cx="11091672" cy="1290267"/>
-          </a:xfrm>
-          <a:prstGeom prst="roundRect">
-            <a:avLst>
-              <a:gd name="adj" fmla="val 5670"/>
-            </a:avLst>
-          </a:prstGeom>
-          <a:solidFill>
-            <a:srgbClr val="F1F4F8"/>
-          </a:solidFill>
-          <a:ln/>
-          <a:effectLst>
-            <a:outerShdw blurRad="101600" dist="38100" dir="5400000" algn="bl" rotWithShape="0">
-              <a:srgbClr val="9AA5B1">
-                <a:alpha val="22000"/>
-              </a:srgbClr>
-            </a:outerShdw>
-          </a:effectLst>
-        </p:spPr>
-      </p:sp>
-      <p:sp>
-        <p:nvSpPr>
-          <p:cNvPr id="7" name="Text 4"/>
-          <p:cNvSpPr/>
-          <p:nvPr/>
-        </p:nvSpPr>
-        <p:spPr>
-          <a:xfrm>
-            <a:off x="777240" y="5247693"/>
-            <a:ext cx="2407158" cy="256032"/>
-          </a:xfrm>
-          <a:prstGeom prst="rect">
-            <a:avLst/>
-          </a:prstGeom>
-          <a:noFill/>
-          <a:ln/>
-        </p:spPr>
-        <p:txBody>
-          <a:bodyPr wrap="square" lIns="0" tIns="0" rIns="0" bIns="0" rtlCol="0" anchor="ctr"/>
-          <a:lstStyle/>
-          <a:p>
-            <a:pPr marL="0" indent="0">
-              <a:buNone/>
-            </a:pPr>
-            <a:r>
-              <a:rPr lang="en-US" sz="1000" b="1" kern="0" spc="100" dirty="0">
-                <a:solidFill>
-                  <a:srgbClr val="B85C00"/>
-                </a:solidFill>
-                <a:latin typeface="Calibri" pitchFamily="34" charset="0"/>
-                <a:ea typeface="Calibri" pitchFamily="34" charset="-122"/>
-                <a:cs typeface="Calibri" pitchFamily="34" charset="-120"/>
-              </a:rPr>
-              <a:t>WHOLE-IMAGE SSIM</a:t>
-            </a:r>
-            <a:endParaRPr lang="en-US" sz="1000" dirty="0"/>
-          </a:p>
-        </p:txBody>
-      </p:sp>
-      <p:sp>
-        <p:nvSpPr>
-          <p:cNvPr id="8" name="Text 5"/>
-          <p:cNvSpPr/>
-          <p:nvPr/>
-        </p:nvSpPr>
-        <p:spPr>
-          <a:xfrm>
-            <a:off x="777240" y="5494581"/>
-            <a:ext cx="2407158" cy="457200"/>
-          </a:xfrm>
-          <a:prstGeom prst="rect">
-            <a:avLst/>
-          </a:prstGeom>
-          <a:noFill/>
-          <a:ln/>
-        </p:spPr>
-        <p:txBody>
-          <a:bodyPr wrap="square" lIns="0" tIns="0" rIns="0" bIns="0" rtlCol="0" anchor="ctr"/>
-          <a:lstStyle/>
-          <a:p>
-            <a:pPr marL="0" indent="0">
-              <a:buNone/>
-            </a:pPr>
-            <a:r>
-              <a:rPr lang="en-US" sz="1700" b="1" dirty="0">
-                <a:solidFill>
-                  <a:srgbClr val="141A22"/>
-                </a:solidFill>
-                <a:latin typeface="Courier New" pitchFamily="34" charset="0"/>
-                <a:ea typeface="Courier New" pitchFamily="34" charset="-122"/>
-                <a:cs typeface="Courier New" pitchFamily="34" charset="-120"/>
-              </a:rPr>
-              <a:t>0.993</a:t>
-            </a:r>
-            <a:endParaRPr lang="en-US" sz="1700" dirty="0"/>
-          </a:p>
-        </p:txBody>
-      </p:sp>
-      <p:sp>
-        <p:nvSpPr>
-          <p:cNvPr id="9" name="Text 6"/>
-          <p:cNvSpPr/>
-          <p:nvPr/>
-        </p:nvSpPr>
-        <p:spPr>
-          <a:xfrm>
-            <a:off x="777240" y="5951781"/>
-            <a:ext cx="2407158" cy="502920"/>
-          </a:xfrm>
-          <a:prstGeom prst="rect">
-            <a:avLst/>
-          </a:prstGeom>
-          <a:noFill/>
-          <a:ln/>
-        </p:spPr>
-        <p:txBody>
-          <a:bodyPr wrap="square" lIns="0" tIns="0" rIns="0" bIns="0" rtlCol="0" anchor="ctr"/>
-          <a:lstStyle/>
-          <a:p>
-            <a:pPr marL="0" indent="0">
-              <a:lnSpc>
-                <a:spcPct val="110000"/>
-              </a:lnSpc>
-              <a:buNone/>
-            </a:pPr>
-            <a:r>
-              <a:rPr lang="en-US" sz="900" i="1" dirty="0">
-                <a:solidFill>
-                  <a:srgbClr val="5B6672"/>
-                </a:solidFill>
-                <a:latin typeface="Calibri" pitchFamily="34" charset="0"/>
-                <a:ea typeface="Calibri" pitchFamily="34" charset="-122"/>
-                <a:cs typeface="Calibri" pitchFamily="34" charset="-120"/>
-              </a:rPr>
-              <a:t>PASS vs. &gt;= 0.95 -- but inflated/diluted, see per-building</a:t>
-            </a:r>
-            <a:endParaRPr lang="en-US" sz="900" dirty="0"/>
-          </a:p>
-        </p:txBody>
-      </p:sp>
-      <p:sp>
-        <p:nvSpPr>
-          <p:cNvPr id="10" name="Text 7"/>
-          <p:cNvSpPr/>
-          <p:nvPr/>
-        </p:nvSpPr>
-        <p:spPr>
-          <a:xfrm>
-            <a:off x="3412998" y="5247693"/>
-            <a:ext cx="2407158" cy="256032"/>
-          </a:xfrm>
-          <a:prstGeom prst="rect">
-            <a:avLst/>
-          </a:prstGeom>
-          <a:noFill/>
-          <a:ln/>
-        </p:spPr>
-        <p:txBody>
-          <a:bodyPr wrap="square" lIns="0" tIns="0" rIns="0" bIns="0" rtlCol="0" anchor="ctr"/>
-          <a:lstStyle/>
-          <a:p>
-            <a:pPr marL="0" indent="0">
-              <a:buNone/>
-            </a:pPr>
-            <a:r>
-              <a:rPr lang="en-US" sz="1000" b="1" kern="0" spc="100" dirty="0">
-                <a:solidFill>
-                  <a:srgbClr val="B85C00"/>
-                </a:solidFill>
-                <a:latin typeface="Calibri" pitchFamily="34" charset="0"/>
-                <a:ea typeface="Calibri" pitchFamily="34" charset="-122"/>
-                <a:cs typeface="Calibri" pitchFamily="34" charset="-120"/>
-              </a:rPr>
-              <a:t>PER-BUILDING (the real check)</a:t>
-            </a:r>
-            <a:endParaRPr lang="en-US" sz="1000" dirty="0"/>
-          </a:p>
-        </p:txBody>
-      </p:sp>
-      <p:sp>
-        <p:nvSpPr>
-          <p:cNvPr id="11" name="Text 8"/>
-          <p:cNvSpPr/>
-          <p:nvPr/>
-        </p:nvSpPr>
-        <p:spPr>
-          <a:xfrm>
-            <a:off x="3412998" y="5494581"/>
-            <a:ext cx="2407158" cy="457200"/>
-          </a:xfrm>
-          <a:prstGeom prst="rect">
-            <a:avLst/>
-          </a:prstGeom>
-          <a:noFill/>
-          <a:ln/>
-        </p:spPr>
-        <p:txBody>
-          <a:bodyPr wrap="square" lIns="0" tIns="0" rIns="0" bIns="0" rtlCol="0" anchor="ctr"/>
-          <a:lstStyle/>
-          <a:p>
-            <a:pPr marL="0" indent="0">
-              <a:buNone/>
-            </a:pPr>
-            <a:r>
-              <a:rPr lang="en-US" sz="1700" b="1" dirty="0">
-                <a:solidFill>
-                  <a:srgbClr val="141A22"/>
-                </a:solidFill>
-                <a:latin typeface="Courier New" pitchFamily="34" charset="0"/>
-                <a:ea typeface="Courier New" pitchFamily="34" charset="-122"/>
-                <a:cs typeface="Courier New" pitchFamily="34" charset="-120"/>
-              </a:rPr>
-              <a:t>197 / 200 pass</a:t>
-            </a:r>
-            <a:endParaRPr lang="en-US" sz="1700" dirty="0"/>
-          </a:p>
-        </p:txBody>
-      </p:sp>
-      <p:sp>
-        <p:nvSpPr>
-          <p:cNvPr id="12" name="Text 9"/>
-          <p:cNvSpPr/>
-          <p:nvPr/>
-        </p:nvSpPr>
-        <p:spPr>
-          <a:xfrm>
-            <a:off x="3412998" y="5951781"/>
-            <a:ext cx="2407158" cy="502920"/>
-          </a:xfrm>
-          <a:prstGeom prst="rect">
-            <a:avLst/>
-          </a:prstGeom>
-          <a:noFill/>
-          <a:ln/>
-        </p:spPr>
-        <p:txBody>
-          <a:bodyPr wrap="square" lIns="0" tIns="0" rIns="0" bIns="0" rtlCol="0" anchor="ctr"/>
-          <a:lstStyle/>
-          <a:p>
-            <a:pPr marL="0" indent="0">
-              <a:lnSpc>
-                <a:spcPct val="110000"/>
-              </a:lnSpc>
-              <a:buNone/>
-            </a:pPr>
-            <a:r>
-              <a:rPr lang="en-US" sz="900" i="1" dirty="0">
-                <a:solidFill>
-                  <a:srgbClr val="5B6672"/>
-                </a:solidFill>
-                <a:latin typeface="Calibri" pitchFamily="34" charset="0"/>
-                <a:ea typeface="Calibri" pitchFamily="34" charset="-122"/>
-                <a:cs typeface="Calibri" pitchFamily="34" charset="-120"/>
-              </a:rPr>
-              <a:t>mean 0.991, median 0.996, min 0.923 -- matches the table's "same sector" criterion</a:t>
-            </a:r>
-            <a:endParaRPr lang="en-US" sz="900" dirty="0"/>
-          </a:p>
-        </p:txBody>
-      </p:sp>
-      <p:sp>
-        <p:nvSpPr>
-          <p:cNvPr id="13" name="Text 10"/>
-          <p:cNvSpPr/>
-          <p:nvPr/>
-        </p:nvSpPr>
-        <p:spPr>
-          <a:xfrm>
-            <a:off x="6048756" y="5247693"/>
-            <a:ext cx="2407158" cy="256032"/>
-          </a:xfrm>
-          <a:prstGeom prst="rect">
-            <a:avLst/>
-          </a:prstGeom>
-          <a:noFill/>
-          <a:ln/>
-        </p:spPr>
-        <p:txBody>
-          <a:bodyPr wrap="square" lIns="0" tIns="0" rIns="0" bIns="0" rtlCol="0" anchor="ctr"/>
-          <a:lstStyle/>
-          <a:p>
-            <a:pPr marL="0" indent="0">
-              <a:buNone/>
-            </a:pPr>
-            <a:r>
-              <a:rPr lang="en-US" sz="1000" b="1" kern="0" spc="100" dirty="0">
-                <a:solidFill>
-                  <a:srgbClr val="B85C00"/>
-                </a:solidFill>
-                <a:latin typeface="Calibri" pitchFamily="34" charset="0"/>
-                <a:ea typeface="Calibri" pitchFamily="34" charset="-122"/>
-                <a:cs typeface="Calibri" pitchFamily="34" charset="-120"/>
-              </a:rPr>
-              <a:t>AMP / PHASE RMS</a:t>
-            </a:r>
-            <a:endParaRPr lang="en-US" sz="1000" dirty="0"/>
-          </a:p>
-        </p:txBody>
-      </p:sp>
-      <p:sp>
-        <p:nvSpPr>
-          <p:cNvPr id="14" name="Text 11"/>
-          <p:cNvSpPr/>
-          <p:nvPr/>
-        </p:nvSpPr>
-        <p:spPr>
-          <a:xfrm>
-            <a:off x="6048756" y="5494581"/>
-            <a:ext cx="2407158" cy="457200"/>
-          </a:xfrm>
-          <a:prstGeom prst="rect">
-            <a:avLst/>
-          </a:prstGeom>
-          <a:noFill/>
-          <a:ln/>
-        </p:spPr>
-        <p:txBody>
-          <a:bodyPr wrap="square" lIns="0" tIns="0" rIns="0" bIns="0" rtlCol="0" anchor="ctr"/>
-          <a:lstStyle/>
-          <a:p>
-            <a:pPr marL="0" indent="0">
-              <a:buNone/>
-            </a:pPr>
-            <a:r>
-              <a:rPr lang="en-US" sz="1700" b="1" dirty="0">
-                <a:solidFill>
-                  <a:srgbClr val="141A22"/>
-                </a:solidFill>
-                <a:latin typeface="Courier New" pitchFamily="34" charset="0"/>
-                <a:ea typeface="Courier New" pitchFamily="34" charset="-122"/>
-                <a:cs typeface="Courier New" pitchFamily="34" charset="-120"/>
-              </a:rPr>
-              <a:t>0.003 / 5.8°</a:t>
-            </a:r>
-            <a:endParaRPr lang="en-US" sz="1700" dirty="0"/>
-          </a:p>
-        </p:txBody>
-      </p:sp>
-      <p:sp>
-        <p:nvSpPr>
-          <p:cNvPr id="15" name="Text 12"/>
-          <p:cNvSpPr/>
-          <p:nvPr/>
-        </p:nvSpPr>
-        <p:spPr>
-          <a:xfrm>
-            <a:off x="6048756" y="5951781"/>
-            <a:ext cx="2407158" cy="502920"/>
-          </a:xfrm>
-          <a:prstGeom prst="rect">
-            <a:avLst/>
-          </a:prstGeom>
-          <a:noFill/>
-          <a:ln/>
-        </p:spPr>
-        <p:txBody>
-          <a:bodyPr wrap="square" lIns="0" tIns="0" rIns="0" bIns="0" rtlCol="0" anchor="ctr"/>
-          <a:lstStyle/>
-          <a:p>
-            <a:pPr marL="0" indent="0">
-              <a:lnSpc>
-                <a:spcPct val="110000"/>
-              </a:lnSpc>
-              <a:buNone/>
-            </a:pPr>
-            <a:r>
-              <a:rPr lang="en-US" sz="900" i="1" dirty="0">
-                <a:solidFill>
-                  <a:srgbClr val="5B6672"/>
-                </a:solidFill>
-                <a:latin typeface="Calibri" pitchFamily="34" charset="0"/>
-                <a:ea typeface="Calibri" pitchFamily="34" charset="-122"/>
-                <a:cs typeface="Calibri" pitchFamily="34" charset="-120"/>
-              </a:rPr>
-              <a:t>whole-image, magnitude-weighted</a:t>
-            </a:r>
-            <a:endParaRPr lang="en-US" sz="900" dirty="0"/>
-          </a:p>
-        </p:txBody>
-      </p:sp>
-      <p:sp>
-        <p:nvSpPr>
-          <p:cNvPr id="16" name="Text 13"/>
-          <p:cNvSpPr/>
-          <p:nvPr/>
-        </p:nvSpPr>
-        <p:spPr>
-          <a:xfrm>
-            <a:off x="8684514" y="5247693"/>
-            <a:ext cx="2407158" cy="256032"/>
-          </a:xfrm>
-          <a:prstGeom prst="rect">
-            <a:avLst/>
-          </a:prstGeom>
-          <a:noFill/>
-          <a:ln/>
-        </p:spPr>
-        <p:txBody>
-          <a:bodyPr wrap="square" lIns="0" tIns="0" rIns="0" bIns="0" rtlCol="0" anchor="ctr"/>
-          <a:lstStyle/>
-          <a:p>
-            <a:pPr marL="0" indent="0">
-              <a:buNone/>
-            </a:pPr>
-            <a:r>
-              <a:rPr lang="en-US" sz="1000" b="1" kern="0" spc="100" dirty="0">
-                <a:solidFill>
-                  <a:srgbClr val="B85C00"/>
-                </a:solidFill>
-                <a:latin typeface="Calibri" pitchFamily="34" charset="0"/>
-                <a:ea typeface="Calibri" pitchFamily="34" charset="-122"/>
-                <a:cs typeface="Calibri" pitchFamily="34" charset="-120"/>
-              </a:rPr>
-              <a:t>MEASURED SPEEDUP (RTX 4050)</a:t>
-            </a:r>
-            <a:endParaRPr lang="en-US" sz="1000" dirty="0"/>
-          </a:p>
-        </p:txBody>
-      </p:sp>
-      <p:sp>
-        <p:nvSpPr>
-          <p:cNvPr id="17" name="Text 14"/>
-          <p:cNvSpPr/>
-          <p:nvPr/>
-        </p:nvSpPr>
-        <p:spPr>
-          <a:xfrm>
-            <a:off x="8684514" y="5494581"/>
-            <a:ext cx="2407158" cy="457200"/>
-          </a:xfrm>
-          <a:prstGeom prst="rect">
-            <a:avLst/>
-          </a:prstGeom>
-          <a:noFill/>
-          <a:ln/>
-        </p:spPr>
-        <p:txBody>
-          <a:bodyPr wrap="square" lIns="0" tIns="0" rIns="0" bIns="0" rtlCol="0" anchor="ctr"/>
-          <a:lstStyle/>
-          <a:p>
-            <a:pPr marL="0" indent="0">
-              <a:buNone/>
-            </a:pPr>
-            <a:r>
-              <a:rPr lang="en-US" sz="1700" b="1" dirty="0">
-                <a:solidFill>
-                  <a:srgbClr val="141A22"/>
-                </a:solidFill>
-                <a:latin typeface="Courier New" pitchFamily="34" charset="0"/>
-                <a:ea typeface="Courier New" pitchFamily="34" charset="-122"/>
-                <a:cs typeface="Courier New" pitchFamily="34" charset="-120"/>
-              </a:rPr>
-              <a:t>818x / pulse</a:t>
-            </a:r>
-          </a:p>
-          <a:p>
-            <a:r>
-              <a:rPr lang="en-US" sz="1600" b="1" dirty="0">
-                <a:latin typeface="Courier New" panose="02070309020205020404" pitchFamily="49" charset="0"/>
-                <a:cs typeface="Courier New" panose="02070309020205020404" pitchFamily="49" charset="0"/>
-              </a:rPr>
-              <a:t>1.7s / 1398s total</a:t>
-            </a:r>
-            <a:endParaRPr lang="en-US" sz="1700" b="1" dirty="0">
-              <a:latin typeface="Courier New" panose="02070309020205020404" pitchFamily="49" charset="0"/>
-              <a:cs typeface="Courier New" panose="02070309020205020404" pitchFamily="49" charset="0"/>
-            </a:endParaRPr>
-          </a:p>
-        </p:txBody>
-      </p:sp>
-      <p:sp>
-        <p:nvSpPr>
-          <p:cNvPr id="18" name="Text 15"/>
-          <p:cNvSpPr/>
-          <p:nvPr/>
-        </p:nvSpPr>
-        <p:spPr>
-          <a:xfrm>
-            <a:off x="8684514" y="5951781"/>
-            <a:ext cx="2407158" cy="502920"/>
-          </a:xfrm>
-          <a:prstGeom prst="rect">
-            <a:avLst/>
-          </a:prstGeom>
-          <a:noFill/>
-          <a:ln/>
-        </p:spPr>
-        <p:txBody>
-          <a:bodyPr wrap="square" lIns="0" tIns="0" rIns="0" bIns="0" rtlCol="0" anchor="ctr"/>
-          <a:lstStyle/>
-          <a:p>
-            <a:pPr>
-              <a:lnSpc>
-                <a:spcPct val="110000"/>
-              </a:lnSpc>
-            </a:pPr>
-            <a:r>
-              <a:rPr lang="en-US" sz="900" i="1" dirty="0">
-                <a:solidFill>
-                  <a:srgbClr val="5B6672"/>
-                </a:solidFill>
-                <a:latin typeface="Calibri" pitchFamily="34" charset="0"/>
-                <a:ea typeface="Calibri" pitchFamily="34" charset="-122"/>
-                <a:cs typeface="Calibri" pitchFamily="34" charset="-120"/>
-              </a:rPr>
-              <a:t>ray/facet intersection is more expensive than estimated</a:t>
-            </a:r>
-            <a:endParaRPr lang="en-US" sz="900" dirty="0"/>
+          <p:cNvPr id="21" name="Thought Bubble: Cloud 20">
+            <a:extLst>
+              <a:ext uri="{FF2B5EF4-FFF2-40B4-BE49-F238E27FC236}">
+                <a16:creationId xmlns:a16="http://schemas.microsoft.com/office/drawing/2014/main" id="{097E1056-BCE9-13BA-D602-CBDBBB28874C}"/>
+              </a:ext>
+            </a:extLst>
+          </p:cNvPr>
+          <p:cNvSpPr/>
+          <p:nvPr/>
+        </p:nvSpPr>
+        <p:spPr>
+          <a:xfrm>
+            <a:off x="2370914" y="2802904"/>
+            <a:ext cx="2550944" cy="1252192"/>
+          </a:xfrm>
+          <a:prstGeom prst="cloudCallout">
+            <a:avLst/>
+          </a:prstGeom>
+        </p:spPr>
+        <p:style>
+          <a:lnRef idx="2">
+            <a:schemeClr val="accent1">
+              <a:shade val="15000"/>
+            </a:schemeClr>
+          </a:lnRef>
+          <a:fillRef idx="1">
+            <a:schemeClr val="accent1"/>
+          </a:fillRef>
+          <a:effectRef idx="0">
+            <a:schemeClr val="accent1"/>
+          </a:effectRef>
+          <a:fontRef idx="minor">
+            <a:schemeClr val="lt1"/>
+          </a:fontRef>
+        </p:style>
+        <p:txBody>
+          <a:bodyPr rtlCol="0" anchor="ctr"/>
+          <a:lstStyle/>
+          <a:p>
+            <a:pPr algn="ctr"/>
+            <a:r>
+              <a:rPr lang="en-US" dirty="0"/>
+              <a:t>After some thought, I realized these lacked layover!</a:t>
+            </a:r>
           </a:p>
         </p:txBody>
       </p:sp>
@@ -15883,45 +16202,6 @@
           </a:p>
         </p:txBody>
       </p:sp>
-      <p:sp>
-        <p:nvSpPr>
-          <p:cNvPr id="20" name="Text 17"/>
-          <p:cNvSpPr/>
-          <p:nvPr/>
-        </p:nvSpPr>
-        <p:spPr>
-          <a:xfrm>
-            <a:off x="11430000" y="6473952"/>
-            <a:ext cx="548640" cy="274320"/>
-          </a:xfrm>
-          <a:prstGeom prst="rect">
-            <a:avLst/>
-          </a:prstGeom>
-          <a:noFill/>
-          <a:ln/>
-        </p:spPr>
-        <p:txBody>
-          <a:bodyPr wrap="square" lIns="0" tIns="0" rIns="0" bIns="0" rtlCol="0" anchor="ctr"/>
-          <a:lstStyle/>
-          <a:p>
-            <a:pPr marL="0" indent="0" algn="r">
-              <a:buNone/>
-            </a:pPr>
-            <a:r>
-              <a:rPr lang="en-US" sz="1000" dirty="0">
-                <a:solidFill>
-                  <a:srgbClr val="5B6672"/>
-                </a:solidFill>
-                <a:latin typeface="Calibri" pitchFamily="34" charset="0"/>
-                <a:ea typeface="Calibri" pitchFamily="34" charset="-122"/>
-                <a:cs typeface="Calibri" pitchFamily="34" charset="-120"/>
-              </a:rPr>
-              <a:t>22</a:t>
-            </a:r>
-            <a:endParaRPr lang="en-US" sz="1000" dirty="0"/>
-          </a:p>
-        </p:txBody>
-      </p:sp>
     </p:spTree>
   </p:cSld>
   <p:clrMapOvr>
@@ -15935,7 +16215,13 @@
   <p:cSld>
     <p:spTree>
       <p:nvGrpSpPr>
-        <p:cNvPr id="1" name=""/>
+        <p:cNvPr id="1" name="">
+          <a:extLst>
+            <a:ext uri="{FF2B5EF4-FFF2-40B4-BE49-F238E27FC236}">
+              <a16:creationId xmlns:a16="http://schemas.microsoft.com/office/drawing/2014/main" id="{A9C3B7EB-2DCC-A462-42BC-ADD41CFBA20B}"/>
+            </a:ext>
+          </a:extLst>
+        </p:cNvPr>
         <p:cNvGrpSpPr/>
         <p:nvPr/>
       </p:nvGrpSpPr>
@@ -15949,7 +16235,13 @@
       </p:grpSpPr>
       <p:sp>
         <p:nvSpPr>
-          <p:cNvPr id="2" name="Text 0"/>
+          <p:cNvPr id="2" name="Text 0">
+            <a:extLst>
+              <a:ext uri="{FF2B5EF4-FFF2-40B4-BE49-F238E27FC236}">
+                <a16:creationId xmlns:a16="http://schemas.microsoft.com/office/drawing/2014/main" id="{B132C1F1-80A7-1ADF-20A5-3B7CDED3B992}"/>
+              </a:ext>
+            </a:extLst>
+          </p:cNvPr>
           <p:cNvSpPr/>
           <p:nvPr/>
         </p:nvSpPr>
@@ -15980,7 +16272,7 @@
                 <a:ea typeface="Calibri" pitchFamily="34" charset="-122"/>
                 <a:cs typeface="Calibri" pitchFamily="34" charset="-120"/>
               </a:rPr>
-              <a:t>CASE STUDY</a:t>
+              <a:t>VALIDATION, CONTINUED</a:t>
             </a:r>
             <a:endParaRPr lang="en-US" sz="1200" dirty="0"/>
           </a:p>
@@ -15988,7 +16280,13 @@
       </p:sp>
       <p:sp>
         <p:nvSpPr>
-          <p:cNvPr id="3" name="Text 1"/>
+          <p:cNvPr id="3" name="Text 1">
+            <a:extLst>
+              <a:ext uri="{FF2B5EF4-FFF2-40B4-BE49-F238E27FC236}">
+                <a16:creationId xmlns:a16="http://schemas.microsoft.com/office/drawing/2014/main" id="{73B7BB90-DDC5-FAB8-4E9D-8521F58B5BDC}"/>
+              </a:ext>
+            </a:extLst>
+          </p:cNvPr>
           <p:cNvSpPr/>
           <p:nvPr/>
         </p:nvSpPr>
@@ -16011,7 +16309,7 @@
               <a:buNone/>
             </a:pPr>
             <a:r>
-              <a:rPr lang="en-US" sz="2800" b="1" dirty="0">
+              <a:rPr lang="en-US" sz="2100" b="1" dirty="0">
                 <a:solidFill>
                   <a:srgbClr val="141A22"/>
                 </a:solidFill>
@@ -16019,22 +16317,28 @@
                 <a:ea typeface="Cambria" pitchFamily="34" charset="-122"/>
                 <a:cs typeface="Cambria" pitchFamily="34" charset="-120"/>
               </a:rPr>
-              <a:t>Extending SARCASTIC</a:t>
-            </a:r>
-            <a:endParaRPr lang="en-US" sz="2800" dirty="0"/>
-          </a:p>
-        </p:txBody>
-      </p:sp>
-      <p:sp>
-        <p:nvSpPr>
-          <p:cNvPr id="4" name="Text 2"/>
-          <p:cNvSpPr/>
-          <p:nvPr/>
-        </p:nvSpPr>
-        <p:spPr>
-          <a:xfrm>
-            <a:off x="548640" y="1691640"/>
-            <a:ext cx="10515600" cy="2194560"/>
+              <a:t>Tier 2 – with proper layover!</a:t>
+            </a:r>
+            <a:endParaRPr lang="en-US" sz="2100" dirty="0"/>
+          </a:p>
+        </p:txBody>
+      </p:sp>
+      <p:sp>
+        <p:nvSpPr>
+          <p:cNvPr id="4" name="Text 2">
+            <a:extLst>
+              <a:ext uri="{FF2B5EF4-FFF2-40B4-BE49-F238E27FC236}">
+                <a16:creationId xmlns:a16="http://schemas.microsoft.com/office/drawing/2014/main" id="{F715558F-FB19-5BE6-CD7A-998776B69C7F}"/>
+              </a:ext>
+            </a:extLst>
+          </p:cNvPr>
+          <p:cNvSpPr/>
+          <p:nvPr/>
+        </p:nvSpPr>
+        <p:spPr>
+          <a:xfrm>
+            <a:off x="548640" y="1234440"/>
+            <a:ext cx="9056536" cy="566928"/>
           </a:xfrm>
           <a:prstGeom prst="rect">
             <a:avLst/>
@@ -16043,76 +16347,54 @@
           <a:ln/>
         </p:spPr>
         <p:txBody>
-          <a:bodyPr wrap="square" lIns="0" tIns="0" rIns="0" bIns="0" rtlCol="0" anchor="t"/>
-          <a:lstStyle/>
-          <a:p>
-            <a:pPr marL="203200" indent="-203200">
+          <a:bodyPr wrap="square" lIns="0" tIns="0" rIns="0" bIns="0" rtlCol="0" anchor="ctr"/>
+          <a:lstStyle/>
+          <a:p>
+            <a:pPr marL="0" indent="0">
               <a:lnSpc>
                 <a:spcPct val="112000"/>
               </a:lnSpc>
-              <a:spcAft>
-                <a:spcPts val="1600"/>
-              </a:spcAft>
-              <a:buSzPct val="100000"/>
-              <a:buChar char="•"/>
-            </a:pPr>
-            <a:r>
-              <a:rPr lang="en-US" sz="1550" dirty="0">
-                <a:solidFill>
-                  <a:srgbClr val="141A22"/>
+              <a:buNone/>
+            </a:pPr>
+            <a:r>
+              <a:rPr lang="en-US" sz="1150" i="1" dirty="0">
+                <a:solidFill>
+                  <a:srgbClr val="5B6672"/>
                 </a:solidFill>
                 <a:latin typeface="Calibri" pitchFamily="34" charset="0"/>
                 <a:ea typeface="Calibri" pitchFamily="34" charset="-122"/>
                 <a:cs typeface="Calibri" pitchFamily="34" charset="-120"/>
               </a:rPr>
-              <a:t>Dstl’s SARCASTIC is the real-world reference implementation of the SBR approach from Step 2 — a working GPU/CPU shooting-and-bouncing-rays SAR simulator, validated against real CAD-model targets</a:t>
-            </a:r>
-            <a:endParaRPr lang="en-US" sz="1550" dirty="0"/>
-          </a:p>
-          <a:p>
-            <a:pPr marL="203200" indent="-203200">
-              <a:lnSpc>
-                <a:spcPct val="112000"/>
-              </a:lnSpc>
-              <a:spcAft>
-                <a:spcPts val="1600"/>
-              </a:spcAft>
-              <a:buSzPct val="100000"/>
-              <a:buChar char="•"/>
-            </a:pPr>
-            <a:r>
-              <a:rPr lang="en-US" sz="1550" dirty="0">
-                <a:solidFill>
-                  <a:srgbClr val="141A22"/>
-                </a:solidFill>
-                <a:latin typeface="Calibri" pitchFamily="34" charset="0"/>
-                <a:ea typeface="Calibri" pitchFamily="34" charset="-122"/>
-                <a:cs typeface="Calibri" pitchFamily="34" charset="-120"/>
-              </a:rPr>
-              <a:t>What follows: concretely what it computes today, and what it’d take to add this deck’s polarimetry and ASC speedup to it</a:t>
-            </a:r>
-            <a:endParaRPr lang="en-US" sz="1550" dirty="0"/>
-          </a:p>
-        </p:txBody>
-      </p:sp>
-      <p:sp>
-        <p:nvSpPr>
-          <p:cNvPr id="5" name="Shape 3"/>
-          <p:cNvSpPr/>
-          <p:nvPr/>
-        </p:nvSpPr>
-        <p:spPr>
-          <a:xfrm>
-            <a:off x="548640" y="4069080"/>
-            <a:ext cx="10698480" cy="1554480"/>
+              <a:t>Dug into SBR – Rays were intersecting at center of facet. </a:t>
+            </a:r>
+            <a:endParaRPr lang="en-US" sz="1150" dirty="0"/>
+          </a:p>
+        </p:txBody>
+      </p:sp>
+      <p:sp>
+        <p:nvSpPr>
+          <p:cNvPr id="6" name="Shape 3">
+            <a:extLst>
+              <a:ext uri="{FF2B5EF4-FFF2-40B4-BE49-F238E27FC236}">
+                <a16:creationId xmlns:a16="http://schemas.microsoft.com/office/drawing/2014/main" id="{D407540E-EC2E-430E-D40C-6B41A8EE1F6C}"/>
+              </a:ext>
+            </a:extLst>
+          </p:cNvPr>
+          <p:cNvSpPr/>
+          <p:nvPr/>
+        </p:nvSpPr>
+        <p:spPr>
+          <a:xfrm>
+            <a:off x="548640" y="5110533"/>
+            <a:ext cx="11091672" cy="1290267"/>
           </a:xfrm>
           <a:prstGeom prst="roundRect">
             <a:avLst>
-              <a:gd name="adj" fmla="val 4706"/>
+              <a:gd name="adj" fmla="val 5670"/>
             </a:avLst>
           </a:prstGeom>
           <a:solidFill>
-            <a:srgbClr val="E6EAF0"/>
+            <a:srgbClr val="F1F4F8"/>
           </a:solidFill>
           <a:ln/>
           <a:effectLst>
@@ -16126,14 +16408,20 @@
       </p:sp>
       <p:sp>
         <p:nvSpPr>
-          <p:cNvPr id="6" name="Text 4"/>
-          <p:cNvSpPr/>
-          <p:nvPr/>
-        </p:nvSpPr>
-        <p:spPr>
-          <a:xfrm>
-            <a:off x="822960" y="4251960"/>
-            <a:ext cx="10149840" cy="1188720"/>
+          <p:cNvPr id="7" name="Text 4">
+            <a:extLst>
+              <a:ext uri="{FF2B5EF4-FFF2-40B4-BE49-F238E27FC236}">
+                <a16:creationId xmlns:a16="http://schemas.microsoft.com/office/drawing/2014/main" id="{CA5414BD-3DE3-0B1D-CA93-1C3FC11FB062}"/>
+              </a:ext>
+            </a:extLst>
+          </p:cNvPr>
+          <p:cNvSpPr/>
+          <p:nvPr/>
+        </p:nvSpPr>
+        <p:spPr>
+          <a:xfrm>
+            <a:off x="777240" y="5247693"/>
+            <a:ext cx="2407158" cy="256032"/>
           </a:xfrm>
           <a:prstGeom prst="rect">
             <a:avLst/>
@@ -16142,17 +16430,14 @@
           <a:ln/>
         </p:spPr>
         <p:txBody>
-          <a:bodyPr wrap="square" lIns="0" tIns="0" rIns="0" bIns="0" rtlCol="0" anchor="t"/>
+          <a:bodyPr wrap="square" lIns="0" tIns="0" rIns="0" bIns="0" rtlCol="0" anchor="ctr"/>
           <a:lstStyle/>
           <a:p>
             <a:pPr marL="0" indent="0">
-              <a:lnSpc>
-                <a:spcPct val="120000"/>
-              </a:lnSpc>
               <a:buNone/>
             </a:pPr>
             <a:r>
-              <a:rPr lang="en-US" sz="1300" b="1" dirty="0">
+              <a:rPr lang="en-US" sz="1000" b="1" kern="0" spc="100" dirty="0">
                 <a:solidFill>
                   <a:srgbClr val="B85C00"/>
                 </a:solidFill>
@@ -16160,30 +16445,137 @@
                 <a:ea typeface="Calibri" pitchFamily="34" charset="-122"/>
                 <a:cs typeface="Calibri" pitchFamily="34" charset="-120"/>
               </a:rPr>
-              <a:t>Reference:  </a:t>
-            </a:r>
-            <a:r>
-              <a:rPr lang="en-US" sz="1300" dirty="0">
+              <a:t>WHOLE-IMAGE SSIM</a:t>
+            </a:r>
+            <a:endParaRPr lang="en-US" sz="1000" dirty="0"/>
+          </a:p>
+        </p:txBody>
+      </p:sp>
+      <p:sp>
+        <p:nvSpPr>
+          <p:cNvPr id="8" name="Text 5">
+            <a:extLst>
+              <a:ext uri="{FF2B5EF4-FFF2-40B4-BE49-F238E27FC236}">
+                <a16:creationId xmlns:a16="http://schemas.microsoft.com/office/drawing/2014/main" id="{BEBC04F8-0B77-045F-2355-4D5B5D8550D8}"/>
+              </a:ext>
+            </a:extLst>
+          </p:cNvPr>
+          <p:cNvSpPr/>
+          <p:nvPr/>
+        </p:nvSpPr>
+        <p:spPr>
+          <a:xfrm>
+            <a:off x="777240" y="5494581"/>
+            <a:ext cx="2407158" cy="457200"/>
+          </a:xfrm>
+          <a:prstGeom prst="rect">
+            <a:avLst/>
+          </a:prstGeom>
+          <a:noFill/>
+          <a:ln/>
+        </p:spPr>
+        <p:txBody>
+          <a:bodyPr wrap="square" lIns="0" tIns="0" rIns="0" bIns="0" rtlCol="0" anchor="ctr"/>
+          <a:lstStyle/>
+          <a:p>
+            <a:pPr marL="0" indent="0">
+              <a:buNone/>
+            </a:pPr>
+            <a:r>
+              <a:rPr lang="en-US" sz="1700" b="1" dirty="0">
                 <a:solidFill>
                   <a:srgbClr val="141A22"/>
+                </a:solidFill>
+                <a:latin typeface="Courier New" pitchFamily="34" charset="0"/>
+                <a:ea typeface="Courier New" pitchFamily="34" charset="-122"/>
+                <a:cs typeface="Courier New" pitchFamily="34" charset="-120"/>
+              </a:rPr>
+              <a:t>0.982</a:t>
+            </a:r>
+            <a:endParaRPr lang="en-US" sz="1700" dirty="0"/>
+          </a:p>
+        </p:txBody>
+      </p:sp>
+      <p:sp>
+        <p:nvSpPr>
+          <p:cNvPr id="9" name="Text 6">
+            <a:extLst>
+              <a:ext uri="{FF2B5EF4-FFF2-40B4-BE49-F238E27FC236}">
+                <a16:creationId xmlns:a16="http://schemas.microsoft.com/office/drawing/2014/main" id="{0CA97D9F-8FD4-6210-1CA2-362C22CDFACD}"/>
+              </a:ext>
+            </a:extLst>
+          </p:cNvPr>
+          <p:cNvSpPr/>
+          <p:nvPr/>
+        </p:nvSpPr>
+        <p:spPr>
+          <a:xfrm>
+            <a:off x="777240" y="5951781"/>
+            <a:ext cx="2407158" cy="502920"/>
+          </a:xfrm>
+          <a:prstGeom prst="rect">
+            <a:avLst/>
+          </a:prstGeom>
+          <a:noFill/>
+          <a:ln/>
+        </p:spPr>
+        <p:txBody>
+          <a:bodyPr wrap="square" lIns="0" tIns="0" rIns="0" bIns="0" rtlCol="0" anchor="ctr"/>
+          <a:lstStyle/>
+          <a:p>
+            <a:pPr marL="0" indent="0">
+              <a:lnSpc>
+                <a:spcPct val="110000"/>
+              </a:lnSpc>
+              <a:buNone/>
+            </a:pPr>
+            <a:r>
+              <a:rPr lang="en-US" sz="900" i="1" dirty="0">
+                <a:solidFill>
+                  <a:srgbClr val="5B6672"/>
                 </a:solidFill>
                 <a:latin typeface="Calibri" pitchFamily="34" charset="0"/>
                 <a:ea typeface="Calibri" pitchFamily="34" charset="-122"/>
                 <a:cs typeface="Calibri" pitchFamily="34" charset="-120"/>
               </a:rPr>
-              <a:t>Blacknell et al., "SARCASTIC v2.0 — High-Performance SAR Simulation for Next-Generation ATR Systems," Remote Sensing, 2022.</a:t>
-            </a:r>
-            <a:endParaRPr lang="en-US" sz="1300" dirty="0"/>
-          </a:p>
+              <a:t>PASS vs. &gt;= 0.95 -- but inflated/diluted, see per-building</a:t>
+            </a:r>
+            <a:endParaRPr lang="en-US" sz="900" dirty="0"/>
+          </a:p>
+        </p:txBody>
+      </p:sp>
+      <p:sp>
+        <p:nvSpPr>
+          <p:cNvPr id="10" name="Text 7">
+            <a:extLst>
+              <a:ext uri="{FF2B5EF4-FFF2-40B4-BE49-F238E27FC236}">
+                <a16:creationId xmlns:a16="http://schemas.microsoft.com/office/drawing/2014/main" id="{2A597CDA-8F08-2A31-3B8B-A7CDF46C04AC}"/>
+              </a:ext>
+            </a:extLst>
+          </p:cNvPr>
+          <p:cNvSpPr/>
+          <p:nvPr/>
+        </p:nvSpPr>
+        <p:spPr>
+          <a:xfrm>
+            <a:off x="3412998" y="5247693"/>
+            <a:ext cx="2407158" cy="256032"/>
+          </a:xfrm>
+          <a:prstGeom prst="rect">
+            <a:avLst/>
+          </a:prstGeom>
+          <a:noFill/>
+          <a:ln/>
+        </p:spPr>
+        <p:txBody>
+          <a:bodyPr wrap="square" lIns="0" tIns="0" rIns="0" bIns="0" rtlCol="0" anchor="ctr"/>
+          <a:lstStyle/>
           <a:p>
             <a:pPr marL="0" indent="0">
-              <a:lnSpc>
-                <a:spcPct val="120000"/>
-              </a:lnSpc>
               <a:buNone/>
             </a:pPr>
             <a:r>
-              <a:rPr lang="en-US" sz="1300" b="1" dirty="0">
+              <a:rPr lang="en-US" sz="1000" b="1" kern="0" spc="100" dirty="0">
                 <a:solidFill>
                   <a:srgbClr val="B85C00"/>
                 </a:solidFill>
@@ -16191,36 +16583,456 @@
                 <a:ea typeface="Calibri" pitchFamily="34" charset="-122"/>
                 <a:cs typeface="Calibri" pitchFamily="34" charset="-120"/>
               </a:rPr>
-              <a:t>Code:  </a:t>
-            </a:r>
-            <a:endParaRPr lang="en-US" sz="1300" dirty="0"/>
-          </a:p>
+              <a:t>PER-BUILDING (the real check)</a:t>
+            </a:r>
+            <a:endParaRPr lang="en-US" sz="1000" dirty="0"/>
+          </a:p>
+        </p:txBody>
+      </p:sp>
+      <p:sp>
+        <p:nvSpPr>
+          <p:cNvPr id="11" name="Text 8">
+            <a:extLst>
+              <a:ext uri="{FF2B5EF4-FFF2-40B4-BE49-F238E27FC236}">
+                <a16:creationId xmlns:a16="http://schemas.microsoft.com/office/drawing/2014/main" id="{AA597662-4C83-2693-4BC8-6BD979E99781}"/>
+              </a:ext>
+            </a:extLst>
+          </p:cNvPr>
+          <p:cNvSpPr/>
+          <p:nvPr/>
+        </p:nvSpPr>
+        <p:spPr>
+          <a:xfrm>
+            <a:off x="3412998" y="5494581"/>
+            <a:ext cx="2407158" cy="457200"/>
+          </a:xfrm>
+          <a:prstGeom prst="rect">
+            <a:avLst/>
+          </a:prstGeom>
+          <a:noFill/>
+          <a:ln/>
+        </p:spPr>
+        <p:txBody>
+          <a:bodyPr wrap="square" lIns="0" tIns="0" rIns="0" bIns="0" rtlCol="0" anchor="ctr"/>
+          <a:lstStyle/>
+          <a:p>
+            <a:pPr marL="0" indent="0">
+              <a:buNone/>
+            </a:pPr>
+            <a:r>
+              <a:rPr lang="en-US" sz="1700" b="1" dirty="0">
+                <a:solidFill>
+                  <a:srgbClr val="141A22"/>
+                </a:solidFill>
+                <a:latin typeface="Courier New" pitchFamily="34" charset="0"/>
+                <a:ea typeface="Courier New" pitchFamily="34" charset="-122"/>
+                <a:cs typeface="Courier New" pitchFamily="34" charset="-120"/>
+              </a:rPr>
+              <a:t>182 / 200 pass</a:t>
+            </a:r>
+            <a:endParaRPr lang="en-US" sz="1700" dirty="0"/>
+          </a:p>
+        </p:txBody>
+      </p:sp>
+      <p:sp>
+        <p:nvSpPr>
+          <p:cNvPr id="12" name="Text 9">
+            <a:extLst>
+              <a:ext uri="{FF2B5EF4-FFF2-40B4-BE49-F238E27FC236}">
+                <a16:creationId xmlns:a16="http://schemas.microsoft.com/office/drawing/2014/main" id="{1936D2E2-38FC-1093-412A-E332D9042344}"/>
+              </a:ext>
+            </a:extLst>
+          </p:cNvPr>
+          <p:cNvSpPr/>
+          <p:nvPr/>
+        </p:nvSpPr>
+        <p:spPr>
+          <a:xfrm>
+            <a:off x="3412998" y="5951781"/>
+            <a:ext cx="2407158" cy="502920"/>
+          </a:xfrm>
+          <a:prstGeom prst="rect">
+            <a:avLst/>
+          </a:prstGeom>
+          <a:noFill/>
+          <a:ln/>
+        </p:spPr>
+        <p:txBody>
+          <a:bodyPr wrap="square" lIns="0" tIns="0" rIns="0" bIns="0" rtlCol="0" anchor="ctr"/>
+          <a:lstStyle/>
           <a:p>
             <a:pPr marL="0" indent="0">
               <a:lnSpc>
-                <a:spcPct val="120000"/>
+                <a:spcPct val="110000"/>
               </a:lnSpc>
               <a:buNone/>
             </a:pPr>
             <a:r>
-              <a:rPr lang="en-US" sz="1300" dirty="0">
-                <a:solidFill>
-                  <a:srgbClr val="141A22"/>
+              <a:rPr lang="en-US" sz="900" i="1" dirty="0">
+                <a:solidFill>
+                  <a:srgbClr val="5B6672"/>
                 </a:solidFill>
                 <a:latin typeface="Calibri" pitchFamily="34" charset="0"/>
                 <a:ea typeface="Calibri" pitchFamily="34" charset="-122"/>
                 <a:cs typeface="Calibri" pitchFamily="34" charset="-120"/>
               </a:rPr>
-              <a:t>github.com/dstl/sarcastic — archived/read-only as of Jan 2025, so any extension is a fork, not an upstream contribution.</a:t>
-            </a:r>
-            <a:endParaRPr lang="en-US" sz="1300" dirty="0"/>
-          </a:p>
-        </p:txBody>
-      </p:sp>
+              <a:t>mean 0.991, median 0.996, min 0.923 -- matches the table's "same sector" criterion</a:t>
+            </a:r>
+            <a:endParaRPr lang="en-US" sz="900" dirty="0"/>
+          </a:p>
+        </p:txBody>
+      </p:sp>
+      <p:sp>
+        <p:nvSpPr>
+          <p:cNvPr id="13" name="Text 10">
+            <a:extLst>
+              <a:ext uri="{FF2B5EF4-FFF2-40B4-BE49-F238E27FC236}">
+                <a16:creationId xmlns:a16="http://schemas.microsoft.com/office/drawing/2014/main" id="{A82C96B2-523E-9536-35B2-1D4A273D2BC2}"/>
+              </a:ext>
+            </a:extLst>
+          </p:cNvPr>
+          <p:cNvSpPr/>
+          <p:nvPr/>
+        </p:nvSpPr>
+        <p:spPr>
+          <a:xfrm>
+            <a:off x="6048756" y="5247693"/>
+            <a:ext cx="2407158" cy="256032"/>
+          </a:xfrm>
+          <a:prstGeom prst="rect">
+            <a:avLst/>
+          </a:prstGeom>
+          <a:noFill/>
+          <a:ln/>
+        </p:spPr>
+        <p:txBody>
+          <a:bodyPr wrap="square" lIns="0" tIns="0" rIns="0" bIns="0" rtlCol="0" anchor="ctr"/>
+          <a:lstStyle/>
+          <a:p>
+            <a:pPr marL="0" indent="0">
+              <a:buNone/>
+            </a:pPr>
+            <a:r>
+              <a:rPr lang="en-US" sz="1000" b="1" kern="0" spc="100" dirty="0">
+                <a:solidFill>
+                  <a:srgbClr val="B85C00"/>
+                </a:solidFill>
+                <a:latin typeface="Calibri" pitchFamily="34" charset="0"/>
+                <a:ea typeface="Calibri" pitchFamily="34" charset="-122"/>
+                <a:cs typeface="Calibri" pitchFamily="34" charset="-120"/>
+              </a:rPr>
+              <a:t>AMP / PHASE RMS</a:t>
+            </a:r>
+            <a:endParaRPr lang="en-US" sz="1000" dirty="0"/>
+          </a:p>
+        </p:txBody>
+      </p:sp>
+      <p:sp>
+        <p:nvSpPr>
+          <p:cNvPr id="14" name="Text 11">
+            <a:extLst>
+              <a:ext uri="{FF2B5EF4-FFF2-40B4-BE49-F238E27FC236}">
+                <a16:creationId xmlns:a16="http://schemas.microsoft.com/office/drawing/2014/main" id="{6703E233-C0D0-768B-EF5B-9099923AC58C}"/>
+              </a:ext>
+            </a:extLst>
+          </p:cNvPr>
+          <p:cNvSpPr/>
+          <p:nvPr/>
+        </p:nvSpPr>
+        <p:spPr>
+          <a:xfrm>
+            <a:off x="6048756" y="5494581"/>
+            <a:ext cx="2407158" cy="457200"/>
+          </a:xfrm>
+          <a:prstGeom prst="rect">
+            <a:avLst/>
+          </a:prstGeom>
+          <a:noFill/>
+          <a:ln/>
+        </p:spPr>
+        <p:txBody>
+          <a:bodyPr wrap="square" lIns="0" tIns="0" rIns="0" bIns="0" rtlCol="0" anchor="ctr"/>
+          <a:lstStyle/>
+          <a:p>
+            <a:pPr marL="0" indent="0">
+              <a:buNone/>
+            </a:pPr>
+            <a:r>
+              <a:rPr lang="en-US" sz="1700" b="1" dirty="0">
+                <a:solidFill>
+                  <a:srgbClr val="141A22"/>
+                </a:solidFill>
+                <a:latin typeface="Courier New" pitchFamily="34" charset="0"/>
+                <a:ea typeface="Courier New" pitchFamily="34" charset="-122"/>
+                <a:cs typeface="Courier New" pitchFamily="34" charset="-120"/>
+              </a:rPr>
+              <a:t>0.008 / 8.5°</a:t>
+            </a:r>
+            <a:endParaRPr lang="en-US" sz="1700" dirty="0"/>
+          </a:p>
+        </p:txBody>
+      </p:sp>
+      <p:sp>
+        <p:nvSpPr>
+          <p:cNvPr id="15" name="Text 12">
+            <a:extLst>
+              <a:ext uri="{FF2B5EF4-FFF2-40B4-BE49-F238E27FC236}">
+                <a16:creationId xmlns:a16="http://schemas.microsoft.com/office/drawing/2014/main" id="{BA85B3A5-BAEC-A402-84FF-B95972175A98}"/>
+              </a:ext>
+            </a:extLst>
+          </p:cNvPr>
+          <p:cNvSpPr/>
+          <p:nvPr/>
+        </p:nvSpPr>
+        <p:spPr>
+          <a:xfrm>
+            <a:off x="6048756" y="5951781"/>
+            <a:ext cx="2407158" cy="502920"/>
+          </a:xfrm>
+          <a:prstGeom prst="rect">
+            <a:avLst/>
+          </a:prstGeom>
+          <a:noFill/>
+          <a:ln/>
+        </p:spPr>
+        <p:txBody>
+          <a:bodyPr wrap="square" lIns="0" tIns="0" rIns="0" bIns="0" rtlCol="0" anchor="ctr"/>
+          <a:lstStyle/>
+          <a:p>
+            <a:pPr marL="0" indent="0">
+              <a:lnSpc>
+                <a:spcPct val="110000"/>
+              </a:lnSpc>
+              <a:buNone/>
+            </a:pPr>
+            <a:r>
+              <a:rPr lang="en-US" sz="900" i="1" dirty="0">
+                <a:solidFill>
+                  <a:srgbClr val="5B6672"/>
+                </a:solidFill>
+                <a:latin typeface="Calibri" pitchFamily="34" charset="0"/>
+                <a:ea typeface="Calibri" pitchFamily="34" charset="-122"/>
+                <a:cs typeface="Calibri" pitchFamily="34" charset="-120"/>
+              </a:rPr>
+              <a:t>whole-image, magnitude-weighted</a:t>
+            </a:r>
+            <a:endParaRPr lang="en-US" sz="900" dirty="0"/>
+          </a:p>
+        </p:txBody>
+      </p:sp>
+      <p:sp>
+        <p:nvSpPr>
+          <p:cNvPr id="16" name="Text 13">
+            <a:extLst>
+              <a:ext uri="{FF2B5EF4-FFF2-40B4-BE49-F238E27FC236}">
+                <a16:creationId xmlns:a16="http://schemas.microsoft.com/office/drawing/2014/main" id="{9B66A1B2-F3DB-88BF-F00B-11CD6C7618C7}"/>
+              </a:ext>
+            </a:extLst>
+          </p:cNvPr>
+          <p:cNvSpPr/>
+          <p:nvPr/>
+        </p:nvSpPr>
+        <p:spPr>
+          <a:xfrm>
+            <a:off x="8684514" y="5247693"/>
+            <a:ext cx="2407158" cy="256032"/>
+          </a:xfrm>
+          <a:prstGeom prst="rect">
+            <a:avLst/>
+          </a:prstGeom>
+          <a:noFill/>
+          <a:ln/>
+        </p:spPr>
+        <p:txBody>
+          <a:bodyPr wrap="square" lIns="0" tIns="0" rIns="0" bIns="0" rtlCol="0" anchor="ctr"/>
+          <a:lstStyle/>
+          <a:p>
+            <a:pPr marL="0" indent="0">
+              <a:buNone/>
+            </a:pPr>
+            <a:r>
+              <a:rPr lang="en-US" sz="1000" b="1" kern="0" spc="100" dirty="0">
+                <a:solidFill>
+                  <a:srgbClr val="B85C00"/>
+                </a:solidFill>
+                <a:latin typeface="Calibri" pitchFamily="34" charset="0"/>
+                <a:ea typeface="Calibri" pitchFamily="34" charset="-122"/>
+                <a:cs typeface="Calibri" pitchFamily="34" charset="-120"/>
+              </a:rPr>
+              <a:t>MEASURED SPEEDUP (RTX 4050)</a:t>
+            </a:r>
+            <a:endParaRPr lang="en-US" sz="1000" dirty="0"/>
+          </a:p>
+        </p:txBody>
+      </p:sp>
+      <p:sp>
+        <p:nvSpPr>
+          <p:cNvPr id="17" name="Text 14">
+            <a:extLst>
+              <a:ext uri="{FF2B5EF4-FFF2-40B4-BE49-F238E27FC236}">
+                <a16:creationId xmlns:a16="http://schemas.microsoft.com/office/drawing/2014/main" id="{9439CC84-D168-6237-0053-57894A3066BF}"/>
+              </a:ext>
+            </a:extLst>
+          </p:cNvPr>
+          <p:cNvSpPr/>
+          <p:nvPr/>
+        </p:nvSpPr>
+        <p:spPr>
+          <a:xfrm>
+            <a:off x="8684514" y="5494581"/>
+            <a:ext cx="2407158" cy="457200"/>
+          </a:xfrm>
+          <a:prstGeom prst="rect">
+            <a:avLst/>
+          </a:prstGeom>
+          <a:noFill/>
+          <a:ln/>
+        </p:spPr>
+        <p:txBody>
+          <a:bodyPr wrap="square" lIns="0" tIns="0" rIns="0" bIns="0" rtlCol="0" anchor="ctr"/>
+          <a:lstStyle/>
+          <a:p>
+            <a:pPr marL="0" indent="0">
+              <a:buNone/>
+            </a:pPr>
+            <a:r>
+              <a:rPr lang="en-US" sz="1700" b="1" dirty="0">
+                <a:solidFill>
+                  <a:srgbClr val="141A22"/>
+                </a:solidFill>
+                <a:latin typeface="Courier New" pitchFamily="34" charset="0"/>
+                <a:ea typeface="Courier New" pitchFamily="34" charset="-122"/>
+                <a:cs typeface="Courier New" pitchFamily="34" charset="-120"/>
+              </a:rPr>
+              <a:t>464x / pulse</a:t>
+            </a:r>
+          </a:p>
+          <a:p>
+            <a:r>
+              <a:rPr lang="en-US" sz="1600" b="1" dirty="0">
+                <a:latin typeface="Courier New" panose="02070309020205020404" pitchFamily="49" charset="0"/>
+                <a:cs typeface="Courier New" panose="02070309020205020404" pitchFamily="49" charset="0"/>
+              </a:rPr>
+              <a:t>60s / 23126s total</a:t>
+            </a:r>
+            <a:endParaRPr lang="en-US" sz="1700" b="1" dirty="0">
+              <a:latin typeface="Courier New" panose="02070309020205020404" pitchFamily="49" charset="0"/>
+              <a:cs typeface="Courier New" panose="02070309020205020404" pitchFamily="49" charset="0"/>
+            </a:endParaRPr>
+          </a:p>
+        </p:txBody>
+      </p:sp>
+      <p:sp>
+        <p:nvSpPr>
+          <p:cNvPr id="18" name="Text 15">
+            <a:extLst>
+              <a:ext uri="{FF2B5EF4-FFF2-40B4-BE49-F238E27FC236}">
+                <a16:creationId xmlns:a16="http://schemas.microsoft.com/office/drawing/2014/main" id="{1F16027F-F88B-0A34-7EDB-E4A002DAB6AB}"/>
+              </a:ext>
+            </a:extLst>
+          </p:cNvPr>
+          <p:cNvSpPr/>
+          <p:nvPr/>
+        </p:nvSpPr>
+        <p:spPr>
+          <a:xfrm>
+            <a:off x="8684514" y="5951781"/>
+            <a:ext cx="2407158" cy="502920"/>
+          </a:xfrm>
+          <a:prstGeom prst="rect">
+            <a:avLst/>
+          </a:prstGeom>
+          <a:noFill/>
+          <a:ln/>
+        </p:spPr>
+        <p:txBody>
+          <a:bodyPr wrap="square" lIns="0" tIns="0" rIns="0" bIns="0" rtlCol="0" anchor="ctr"/>
+          <a:lstStyle/>
+          <a:p>
+            <a:pPr>
+              <a:lnSpc>
+                <a:spcPct val="110000"/>
+              </a:lnSpc>
+            </a:pPr>
+            <a:r>
+              <a:rPr lang="en-US" sz="900" i="1" dirty="0">
+                <a:solidFill>
+                  <a:srgbClr val="5B6672"/>
+                </a:solidFill>
+                <a:latin typeface="Calibri" pitchFamily="34" charset="0"/>
+                <a:ea typeface="Calibri" pitchFamily="34" charset="-122"/>
+                <a:cs typeface="Calibri" pitchFamily="34" charset="-120"/>
+              </a:rPr>
+              <a:t>ray/facet intersection is more expensive than estimated</a:t>
+            </a:r>
+            <a:endParaRPr lang="en-US" sz="900" dirty="0"/>
+          </a:p>
+        </p:txBody>
+      </p:sp>
+      <p:pic>
+        <p:nvPicPr>
+          <p:cNvPr id="20" name="Picture 19">
+            <a:extLst>
+              <a:ext uri="{FF2B5EF4-FFF2-40B4-BE49-F238E27FC236}">
+                <a16:creationId xmlns:a16="http://schemas.microsoft.com/office/drawing/2014/main" id="{8C7EFB97-BBB4-B858-E319-B8FAC9324062}"/>
+              </a:ext>
+            </a:extLst>
+          </p:cNvPr>
+          <p:cNvPicPr>
+            <a:picLocks noChangeAspect="1"/>
+          </p:cNvPicPr>
+          <p:nvPr/>
+        </p:nvPicPr>
+        <p:blipFill>
+          <a:blip r:embed="rId3"/>
+          <a:stretch>
+            <a:fillRect/>
+          </a:stretch>
+        </p:blipFill>
+        <p:spPr>
+          <a:xfrm>
+            <a:off x="9419237" y="7950"/>
+            <a:ext cx="2844324" cy="2187941"/>
+          </a:xfrm>
+          <a:prstGeom prst="rect">
+            <a:avLst/>
+          </a:prstGeom>
+        </p:spPr>
+      </p:pic>
+      <p:pic>
+        <p:nvPicPr>
+          <p:cNvPr id="24" name="Picture 23">
+            <a:extLst>
+              <a:ext uri="{FF2B5EF4-FFF2-40B4-BE49-F238E27FC236}">
+                <a16:creationId xmlns:a16="http://schemas.microsoft.com/office/drawing/2014/main" id="{3E2400F5-CA83-C89B-1AA3-C3B8580F09C6}"/>
+              </a:ext>
+            </a:extLst>
+          </p:cNvPr>
+          <p:cNvPicPr>
+            <a:picLocks noChangeAspect="1"/>
+          </p:cNvPicPr>
+          <p:nvPr/>
+        </p:nvPicPr>
+        <p:blipFill>
+          <a:blip r:embed="rId4"/>
+          <a:stretch>
+            <a:fillRect/>
+          </a:stretch>
+        </p:blipFill>
+        <p:spPr>
+          <a:xfrm>
+            <a:off x="362309" y="1760621"/>
+            <a:ext cx="11576650" cy="3336758"/>
+          </a:xfrm>
+          <a:prstGeom prst="rect">
+            <a:avLst/>
+          </a:prstGeom>
+        </p:spPr>
+      </p:pic>
     </p:spTree>
     <p:extLst>
       <p:ext uri="{BB962C8B-B14F-4D97-AF65-F5344CB8AC3E}">
-        <p14:creationId xmlns:p14="http://schemas.microsoft.com/office/powerpoint/2010/main" val="914562532"/>
+        <p14:creationId xmlns:p14="http://schemas.microsoft.com/office/powerpoint/2010/main" val="3650786353"/>
       </p:ext>
     </p:extLst>
   </p:cSld>
@@ -16235,7 +17047,13 @@
   <p:cSld>
     <p:spTree>
       <p:nvGrpSpPr>
-        <p:cNvPr id="1" name=""/>
+        <p:cNvPr id="1" name="">
+          <a:extLst>
+            <a:ext uri="{FF2B5EF4-FFF2-40B4-BE49-F238E27FC236}">
+              <a16:creationId xmlns:a16="http://schemas.microsoft.com/office/drawing/2014/main" id="{FF3FA6D9-DDFF-E73F-719E-087169E5A076}"/>
+            </a:ext>
+          </a:extLst>
+        </p:cNvPr>
         <p:cNvGrpSpPr/>
         <p:nvPr/>
       </p:nvGrpSpPr>
@@ -16249,7 +17067,13 @@
       </p:grpSpPr>
       <p:sp>
         <p:nvSpPr>
-          <p:cNvPr id="2" name="Text 0"/>
+          <p:cNvPr id="2" name="Text 0">
+            <a:extLst>
+              <a:ext uri="{FF2B5EF4-FFF2-40B4-BE49-F238E27FC236}">
+                <a16:creationId xmlns:a16="http://schemas.microsoft.com/office/drawing/2014/main" id="{2CB9B116-4C8F-29F0-AA82-69964672D7E0}"/>
+              </a:ext>
+            </a:extLst>
+          </p:cNvPr>
           <p:cNvSpPr/>
           <p:nvPr/>
         </p:nvSpPr>
@@ -16280,7 +17104,7 @@
                 <a:ea typeface="Calibri" pitchFamily="34" charset="-122"/>
                 <a:cs typeface="Calibri" pitchFamily="34" charset="-120"/>
               </a:rPr>
-              <a:t>CASE STUDY, CONTINUED</a:t>
+              <a:t>VALIDATION, CONTINUED</a:t>
             </a:r>
             <a:endParaRPr lang="en-US" sz="1200" dirty="0"/>
           </a:p>
@@ -16288,14 +17112,20 @@
       </p:sp>
       <p:sp>
         <p:nvSpPr>
-          <p:cNvPr id="3" name="Text 1"/>
+          <p:cNvPr id="3" name="Text 1">
+            <a:extLst>
+              <a:ext uri="{FF2B5EF4-FFF2-40B4-BE49-F238E27FC236}">
+                <a16:creationId xmlns:a16="http://schemas.microsoft.com/office/drawing/2014/main" id="{31233364-B185-C010-2C63-01AF0FFE9D36}"/>
+              </a:ext>
+            </a:extLst>
+          </p:cNvPr>
           <p:cNvSpPr/>
           <p:nvPr/>
         </p:nvSpPr>
         <p:spPr>
           <a:xfrm>
             <a:off x="548640" y="658368"/>
-            <a:ext cx="10881360" cy="868680"/>
+            <a:ext cx="10881360" cy="448056"/>
           </a:xfrm>
           <a:prstGeom prst="rect">
             <a:avLst/>
@@ -16311,7 +17141,7 @@
               <a:buNone/>
             </a:pPr>
             <a:r>
-              <a:rPr lang="en-US" sz="2700" b="1" dirty="0">
+              <a:rPr lang="en-US" sz="2000" b="1" dirty="0">
                 <a:solidFill>
                   <a:srgbClr val="141A22"/>
                 </a:solidFill>
@@ -16319,124 +17149,36 @@
                 <a:ea typeface="Cambria" pitchFamily="34" charset="-122"/>
                 <a:cs typeface="Cambria" pitchFamily="34" charset="-120"/>
               </a:rPr>
-              <a:t>What SARCASTIC computes today</a:t>
-            </a:r>
-            <a:endParaRPr lang="en-US" sz="2700" dirty="0"/>
-          </a:p>
-        </p:txBody>
-      </p:sp>
-      <p:sp>
-        <p:nvSpPr>
-          <p:cNvPr id="4" name="Text 2"/>
-          <p:cNvSpPr/>
-          <p:nvPr/>
-        </p:nvSpPr>
-        <p:spPr>
-          <a:xfrm>
-            <a:off x="548640" y="1691640"/>
-            <a:ext cx="10607040" cy="2468880"/>
-          </a:xfrm>
-          <a:prstGeom prst="rect">
-            <a:avLst/>
-          </a:prstGeom>
-          <a:noFill/>
-          <a:ln/>
-        </p:spPr>
-        <p:txBody>
-          <a:bodyPr wrap="square" lIns="0" tIns="0" rIns="0" bIns="0" rtlCol="0" anchor="t"/>
-          <a:lstStyle/>
-          <a:p>
-            <a:pPr marL="203200" indent="-203200">
-              <a:lnSpc>
-                <a:spcPct val="112000"/>
-              </a:lnSpc>
-              <a:spcAft>
-                <a:spcPts val="1400"/>
-              </a:spcAft>
-              <a:buSzPct val="100000"/>
-              <a:buChar char="•"/>
-            </a:pPr>
-            <a:r>
-              <a:rPr lang="en-US" sz="1450" dirty="0">
-                <a:solidFill>
-                  <a:srgbClr val="141A22"/>
-                </a:solidFill>
-                <a:latin typeface="Calibri" pitchFamily="34" charset="0"/>
-                <a:ea typeface="Calibri" pitchFamily="34" charset="-122"/>
-                <a:cs typeface="Calibri" pitchFamily="34" charset="-120"/>
-              </a:rPr>
-              <a:t>Scattering model is Knott’s physical optics for a flat PEC (perfectly conducting) plate only — no permittivity, no Fresnel R_s/R_p anywhere in the derivation</a:t>
-            </a:r>
-            <a:endParaRPr lang="en-US" sz="1450" dirty="0"/>
-          </a:p>
-          <a:p>
-            <a:pPr marL="203200" indent="-203200">
-              <a:lnSpc>
-                <a:spcPct val="112000"/>
-              </a:lnSpc>
-              <a:spcAft>
-                <a:spcPts val="1400"/>
-              </a:spcAft>
-              <a:buSzPct val="100000"/>
-              <a:buChar char="•"/>
-            </a:pPr>
-            <a:r>
-              <a:rPr lang="en-US" sz="1450" dirty="0">
-                <a:solidFill>
-                  <a:srgbClr val="141A22"/>
-                </a:solidFill>
-                <a:latin typeface="Calibri" pitchFamily="34" charset="0"/>
-                <a:ea typeface="Calibri" pitchFamily="34" charset="-122"/>
-                <a:cs typeface="Calibri" pitchFamily="34" charset="-120"/>
-              </a:rPr>
-              <a:t>Polarization = one real 3-vector ĥ per ray, updated by geometric mirror reflection at each bounce — cross-pol only comes from bounce geometry (their own validation case is a dihedral), never from material response</a:t>
-            </a:r>
-            <a:endParaRPr lang="en-US" sz="1450" dirty="0"/>
-          </a:p>
-          <a:p>
-            <a:pPr marL="203200" indent="-203200">
-              <a:lnSpc>
-                <a:spcPct val="112000"/>
-              </a:lnSpc>
-              <a:spcAft>
-                <a:spcPts val="1400"/>
-              </a:spcAft>
-              <a:buSzPct val="100000"/>
-              <a:buChar char="•"/>
-            </a:pPr>
-            <a:r>
-              <a:rPr lang="en-US" sz="1450" dirty="0">
-                <a:solidFill>
-                  <a:srgbClr val="141A22"/>
-                </a:solidFill>
-                <a:latin typeface="Calibri" pitchFamily="34" charset="0"/>
-                <a:ea typeface="Calibri" pitchFamily="34" charset="-122"/>
-                <a:cs typeface="Calibri" pitchFamily="34" charset="-120"/>
-              </a:rPr>
-              <a:t>Maps to real source: RCS.c (scalar contribution) · reflect.cpp (per-bounce ĥ update) · cpuPOField.cpp (accumulation) · CPHD I/O via cphdShell/cphdInfo</a:t>
-            </a:r>
-            <a:endParaRPr lang="en-US" sz="1450" dirty="0"/>
-          </a:p>
-        </p:txBody>
-      </p:sp>
-      <p:sp>
-        <p:nvSpPr>
-          <p:cNvPr id="5" name="Shape 3"/>
-          <p:cNvSpPr/>
-          <p:nvPr/>
-        </p:nvSpPr>
-        <p:spPr>
-          <a:xfrm>
-            <a:off x="548640" y="4434840"/>
-            <a:ext cx="10698480" cy="1188720"/>
+              <a:t>Same run, a stricter question: does phase agree, not just amplitude?</a:t>
+            </a:r>
+            <a:endParaRPr lang="en-US" sz="2000" dirty="0"/>
+          </a:p>
+        </p:txBody>
+      </p:sp>
+      <p:sp>
+        <p:nvSpPr>
+          <p:cNvPr id="6" name="Shape 3">
+            <a:extLst>
+              <a:ext uri="{FF2B5EF4-FFF2-40B4-BE49-F238E27FC236}">
+                <a16:creationId xmlns:a16="http://schemas.microsoft.com/office/drawing/2014/main" id="{28F1E18F-3C51-D84E-0742-26956EFB8615}"/>
+              </a:ext>
+            </a:extLst>
+          </p:cNvPr>
+          <p:cNvSpPr/>
+          <p:nvPr/>
+        </p:nvSpPr>
+        <p:spPr>
+          <a:xfrm>
+            <a:off x="548640" y="5156253"/>
+            <a:ext cx="11091672" cy="1244547"/>
           </a:xfrm>
           <a:prstGeom prst="roundRect">
             <a:avLst>
-              <a:gd name="adj" fmla="val 6154"/>
+              <a:gd name="adj" fmla="val 5878"/>
             </a:avLst>
           </a:prstGeom>
           <a:solidFill>
-            <a:srgbClr val="E6EAF0"/>
+            <a:srgbClr val="F1F4F8"/>
           </a:solidFill>
           <a:ln/>
           <a:effectLst>
@@ -16450,14 +17192,20 @@
       </p:sp>
       <p:sp>
         <p:nvSpPr>
-          <p:cNvPr id="6" name="Text 4"/>
-          <p:cNvSpPr/>
-          <p:nvPr/>
-        </p:nvSpPr>
-        <p:spPr>
-          <a:xfrm>
-            <a:off x="822960" y="4434840"/>
-            <a:ext cx="10149840" cy="1188720"/>
+          <p:cNvPr id="7" name="Text 4">
+            <a:extLst>
+              <a:ext uri="{FF2B5EF4-FFF2-40B4-BE49-F238E27FC236}">
+                <a16:creationId xmlns:a16="http://schemas.microsoft.com/office/drawing/2014/main" id="{1E29B9DB-F336-100B-479F-35317823511B}"/>
+              </a:ext>
+            </a:extLst>
+          </p:cNvPr>
+          <p:cNvSpPr/>
+          <p:nvPr/>
+        </p:nvSpPr>
+        <p:spPr>
+          <a:xfrm>
+            <a:off x="777240" y="5293413"/>
+            <a:ext cx="2407158" cy="256032"/>
           </a:xfrm>
           <a:prstGeom prst="rect">
             <a:avLst/>
@@ -16470,13 +17218,10 @@
           <a:lstStyle/>
           <a:p>
             <a:pPr marL="0" indent="0">
-              <a:lnSpc>
-                <a:spcPct val="115000"/>
-              </a:lnSpc>
               <a:buNone/>
             </a:pPr>
             <a:r>
-              <a:rPr lang="en-US" sz="1400" b="1" dirty="0">
+              <a:rPr lang="en-US" sz="1000" b="1" kern="0" spc="100" dirty="0">
                 <a:solidFill>
                   <a:srgbClr val="B85C00"/>
                 </a:solidFill>
@@ -16484,27 +17229,587 @@
                 <a:ea typeface="Calibri" pitchFamily="34" charset="-122"/>
                 <a:cs typeface="Calibri" pitchFamily="34" charset="-120"/>
               </a:rPr>
-              <a:t>Better starting point:  </a:t>
-            </a:r>
-            <a:r>
-              <a:rPr lang="en-US" sz="1400" dirty="0">
+              <a:t>WHOLE-IMAGE COHERENCE</a:t>
+            </a:r>
+            <a:endParaRPr lang="en-US" sz="1000" dirty="0"/>
+          </a:p>
+        </p:txBody>
+      </p:sp>
+      <p:sp>
+        <p:nvSpPr>
+          <p:cNvPr id="8" name="Text 5">
+            <a:extLst>
+              <a:ext uri="{FF2B5EF4-FFF2-40B4-BE49-F238E27FC236}">
+                <a16:creationId xmlns:a16="http://schemas.microsoft.com/office/drawing/2014/main" id="{2DE06A9B-6AD7-BD8F-2E31-25410FA68BA3}"/>
+              </a:ext>
+            </a:extLst>
+          </p:cNvPr>
+          <p:cNvSpPr/>
+          <p:nvPr/>
+        </p:nvSpPr>
+        <p:spPr>
+          <a:xfrm>
+            <a:off x="777240" y="5540301"/>
+            <a:ext cx="2407158" cy="457200"/>
+          </a:xfrm>
+          <a:prstGeom prst="rect">
+            <a:avLst/>
+          </a:prstGeom>
+          <a:noFill/>
+          <a:ln/>
+        </p:spPr>
+        <p:txBody>
+          <a:bodyPr wrap="square" lIns="0" tIns="0" rIns="0" bIns="0" rtlCol="0" anchor="ctr"/>
+          <a:lstStyle/>
+          <a:p>
+            <a:pPr marL="0" indent="0">
+              <a:buNone/>
+            </a:pPr>
+            <a:r>
+              <a:rPr lang="en-US" sz="1700" b="1" dirty="0">
                 <a:solidFill>
                   <a:srgbClr val="141A22"/>
+                </a:solidFill>
+                <a:latin typeface="Courier New" pitchFamily="34" charset="0"/>
+                <a:ea typeface="Courier New" pitchFamily="34" charset="-122"/>
+                <a:cs typeface="Courier New" pitchFamily="34" charset="-120"/>
+              </a:rPr>
+              <a:t>0.956</a:t>
+            </a:r>
+            <a:endParaRPr lang="en-US" sz="1700" dirty="0"/>
+          </a:p>
+        </p:txBody>
+      </p:sp>
+      <p:sp>
+        <p:nvSpPr>
+          <p:cNvPr id="9" name="Text 6">
+            <a:extLst>
+              <a:ext uri="{FF2B5EF4-FFF2-40B4-BE49-F238E27FC236}">
+                <a16:creationId xmlns:a16="http://schemas.microsoft.com/office/drawing/2014/main" id="{35E3FD4F-0B37-AB54-97EF-74F106C174E7}"/>
+              </a:ext>
+            </a:extLst>
+          </p:cNvPr>
+          <p:cNvSpPr/>
+          <p:nvPr/>
+        </p:nvSpPr>
+        <p:spPr>
+          <a:xfrm>
+            <a:off x="777240" y="5997501"/>
+            <a:ext cx="2407158" cy="502920"/>
+          </a:xfrm>
+          <a:prstGeom prst="rect">
+            <a:avLst/>
+          </a:prstGeom>
+          <a:noFill/>
+          <a:ln/>
+        </p:spPr>
+        <p:txBody>
+          <a:bodyPr wrap="square" lIns="0" tIns="0" rIns="0" bIns="0" rtlCol="0" anchor="ctr"/>
+          <a:lstStyle/>
+          <a:p>
+            <a:pPr marL="0" indent="0">
+              <a:lnSpc>
+                <a:spcPct val="110000"/>
+              </a:lnSpc>
+              <a:buNone/>
+            </a:pPr>
+            <a:r>
+              <a:rPr lang="en-US" sz="900" i="1" dirty="0">
+                <a:solidFill>
+                  <a:srgbClr val="5B6672"/>
                 </a:solidFill>
                 <a:latin typeface="Calibri" pitchFamily="34" charset="0"/>
                 <a:ea typeface="Calibri" pitchFamily="34" charset="-122"/>
                 <a:cs typeface="Calibri" pitchFamily="34" charset="-120"/>
               </a:rPr>
-              <a:t>the "SARTrace" module already exposes per-bounce ray history — extend from there rather than patching the scalar path.</a:t>
-            </a:r>
-            <a:endParaRPr lang="en-US" sz="1400" dirty="0"/>
-          </a:p>
-        </p:txBody>
-      </p:sp>
+              <a:t>same dilution issue as whole-image SSIM -- see per-building</a:t>
+            </a:r>
+            <a:endParaRPr lang="en-US" sz="900" dirty="0"/>
+          </a:p>
+        </p:txBody>
+      </p:sp>
+      <p:sp>
+        <p:nvSpPr>
+          <p:cNvPr id="10" name="Text 7">
+            <a:extLst>
+              <a:ext uri="{FF2B5EF4-FFF2-40B4-BE49-F238E27FC236}">
+                <a16:creationId xmlns:a16="http://schemas.microsoft.com/office/drawing/2014/main" id="{2D7852D4-A06F-A4DB-C0D9-CB34D8D7B38E}"/>
+              </a:ext>
+            </a:extLst>
+          </p:cNvPr>
+          <p:cNvSpPr/>
+          <p:nvPr/>
+        </p:nvSpPr>
+        <p:spPr>
+          <a:xfrm>
+            <a:off x="3412998" y="5293413"/>
+            <a:ext cx="2407158" cy="256032"/>
+          </a:xfrm>
+          <a:prstGeom prst="rect">
+            <a:avLst/>
+          </a:prstGeom>
+          <a:noFill/>
+          <a:ln/>
+        </p:spPr>
+        <p:txBody>
+          <a:bodyPr wrap="square" lIns="0" tIns="0" rIns="0" bIns="0" rtlCol="0" anchor="ctr"/>
+          <a:lstStyle/>
+          <a:p>
+            <a:pPr marL="0" indent="0">
+              <a:buNone/>
+            </a:pPr>
+            <a:r>
+              <a:rPr lang="en-US" sz="1000" b="1" kern="0" spc="100" dirty="0">
+                <a:solidFill>
+                  <a:srgbClr val="B85C00"/>
+                </a:solidFill>
+                <a:latin typeface="Calibri" pitchFamily="34" charset="0"/>
+                <a:ea typeface="Calibri" pitchFamily="34" charset="-122"/>
+                <a:cs typeface="Calibri" pitchFamily="34" charset="-120"/>
+              </a:rPr>
+              <a:t>PER-BUILDING COHERENCE</a:t>
+            </a:r>
+            <a:endParaRPr lang="en-US" sz="1000" dirty="0"/>
+          </a:p>
+        </p:txBody>
+      </p:sp>
+      <p:sp>
+        <p:nvSpPr>
+          <p:cNvPr id="11" name="Text 8">
+            <a:extLst>
+              <a:ext uri="{FF2B5EF4-FFF2-40B4-BE49-F238E27FC236}">
+                <a16:creationId xmlns:a16="http://schemas.microsoft.com/office/drawing/2014/main" id="{56331090-1901-40AE-5891-DFDF2869F8C1}"/>
+              </a:ext>
+            </a:extLst>
+          </p:cNvPr>
+          <p:cNvSpPr/>
+          <p:nvPr/>
+        </p:nvSpPr>
+        <p:spPr>
+          <a:xfrm>
+            <a:off x="3412998" y="5540301"/>
+            <a:ext cx="2407158" cy="457200"/>
+          </a:xfrm>
+          <a:prstGeom prst="rect">
+            <a:avLst/>
+          </a:prstGeom>
+          <a:noFill/>
+          <a:ln/>
+        </p:spPr>
+        <p:txBody>
+          <a:bodyPr wrap="square" lIns="0" tIns="0" rIns="0" bIns="0" rtlCol="0" anchor="ctr"/>
+          <a:lstStyle/>
+          <a:p>
+            <a:pPr marL="0" indent="0">
+              <a:buNone/>
+            </a:pPr>
+            <a:r>
+              <a:rPr lang="en-US" sz="1700" b="1" dirty="0">
+                <a:solidFill>
+                  <a:srgbClr val="141A22"/>
+                </a:solidFill>
+                <a:latin typeface="Courier New" pitchFamily="34" charset="0"/>
+                <a:ea typeface="Courier New" pitchFamily="34" charset="-122"/>
+                <a:cs typeface="Courier New" pitchFamily="34" charset="-120"/>
+              </a:rPr>
+              <a:t>mean 0.96, median .99, min 0.75</a:t>
+            </a:r>
+            <a:endParaRPr lang="en-US" sz="1700" dirty="0"/>
+          </a:p>
+        </p:txBody>
+      </p:sp>
+      <p:sp>
+        <p:nvSpPr>
+          <p:cNvPr id="12" name="Text 9">
+            <a:extLst>
+              <a:ext uri="{FF2B5EF4-FFF2-40B4-BE49-F238E27FC236}">
+                <a16:creationId xmlns:a16="http://schemas.microsoft.com/office/drawing/2014/main" id="{8D6C534D-8088-1F7A-1FB9-AF6D5021B721}"/>
+              </a:ext>
+            </a:extLst>
+          </p:cNvPr>
+          <p:cNvSpPr/>
+          <p:nvPr/>
+        </p:nvSpPr>
+        <p:spPr>
+          <a:xfrm>
+            <a:off x="3412998" y="5997501"/>
+            <a:ext cx="2407158" cy="502920"/>
+          </a:xfrm>
+          <a:prstGeom prst="rect">
+            <a:avLst/>
+          </a:prstGeom>
+          <a:noFill/>
+          <a:ln/>
+        </p:spPr>
+        <p:txBody>
+          <a:bodyPr wrap="square" lIns="0" tIns="0" rIns="0" bIns="0" rtlCol="0" anchor="ctr"/>
+          <a:lstStyle/>
+          <a:p>
+            <a:pPr marL="0" indent="0">
+              <a:lnSpc>
+                <a:spcPct val="110000"/>
+              </a:lnSpc>
+              <a:buNone/>
+            </a:pPr>
+            <a:r>
+              <a:rPr lang="en-US" sz="900" i="1" dirty="0">
+                <a:solidFill>
+                  <a:srgbClr val="5B6672"/>
+                </a:solidFill>
+                <a:latin typeface="Calibri" pitchFamily="34" charset="0"/>
+                <a:ea typeface="Calibri" pitchFamily="34" charset="-122"/>
+                <a:cs typeface="Calibri" pitchFamily="34" charset="-120"/>
+              </a:rPr>
+              <a:t>median 1.000 -- a few outliers pull the mean, not a broad drift</a:t>
+            </a:r>
+            <a:endParaRPr lang="en-US" sz="900" dirty="0"/>
+          </a:p>
+        </p:txBody>
+      </p:sp>
+      <p:sp>
+        <p:nvSpPr>
+          <p:cNvPr id="13" name="Text 10">
+            <a:extLst>
+              <a:ext uri="{FF2B5EF4-FFF2-40B4-BE49-F238E27FC236}">
+                <a16:creationId xmlns:a16="http://schemas.microsoft.com/office/drawing/2014/main" id="{BB8147CF-6780-F8DB-2806-1060BFE54D43}"/>
+              </a:ext>
+            </a:extLst>
+          </p:cNvPr>
+          <p:cNvSpPr/>
+          <p:nvPr/>
+        </p:nvSpPr>
+        <p:spPr>
+          <a:xfrm>
+            <a:off x="6048756" y="5293413"/>
+            <a:ext cx="2407158" cy="256032"/>
+          </a:xfrm>
+          <a:prstGeom prst="rect">
+            <a:avLst/>
+          </a:prstGeom>
+          <a:noFill/>
+          <a:ln/>
+        </p:spPr>
+        <p:txBody>
+          <a:bodyPr wrap="square" lIns="0" tIns="0" rIns="0" bIns="0" rtlCol="0" anchor="ctr"/>
+          <a:lstStyle/>
+          <a:p>
+            <a:pPr marL="0" indent="0">
+              <a:buNone/>
+            </a:pPr>
+            <a:r>
+              <a:rPr lang="en-US" sz="1000" b="1" kern="0" spc="100" dirty="0">
+                <a:solidFill>
+                  <a:srgbClr val="B85C00"/>
+                </a:solidFill>
+                <a:latin typeface="Calibri" pitchFamily="34" charset="0"/>
+                <a:ea typeface="Calibri" pitchFamily="34" charset="-122"/>
+                <a:cs typeface="Calibri" pitchFamily="34" charset="-120"/>
+              </a:rPr>
+              <a:t>PHASE BIAS / RMS</a:t>
+            </a:r>
+            <a:endParaRPr lang="en-US" sz="1000" dirty="0"/>
+          </a:p>
+        </p:txBody>
+      </p:sp>
+      <p:sp>
+        <p:nvSpPr>
+          <p:cNvPr id="14" name="Text 11">
+            <a:extLst>
+              <a:ext uri="{FF2B5EF4-FFF2-40B4-BE49-F238E27FC236}">
+                <a16:creationId xmlns:a16="http://schemas.microsoft.com/office/drawing/2014/main" id="{DDD577A3-9438-E4F6-2C0A-F02578339CD4}"/>
+              </a:ext>
+            </a:extLst>
+          </p:cNvPr>
+          <p:cNvSpPr/>
+          <p:nvPr/>
+        </p:nvSpPr>
+        <p:spPr>
+          <a:xfrm>
+            <a:off x="6048756" y="5540301"/>
+            <a:ext cx="2407158" cy="457200"/>
+          </a:xfrm>
+          <a:prstGeom prst="rect">
+            <a:avLst/>
+          </a:prstGeom>
+          <a:noFill/>
+          <a:ln/>
+        </p:spPr>
+        <p:txBody>
+          <a:bodyPr wrap="square" lIns="0" tIns="0" rIns="0" bIns="0" rtlCol="0" anchor="ctr"/>
+          <a:lstStyle/>
+          <a:p>
+            <a:pPr marL="0" indent="0">
+              <a:buNone/>
+            </a:pPr>
+            <a:r>
+              <a:rPr lang="en-US" sz="1700" b="1" dirty="0">
+                <a:solidFill>
+                  <a:srgbClr val="141A22"/>
+                </a:solidFill>
+                <a:latin typeface="Courier New" pitchFamily="34" charset="0"/>
+                <a:ea typeface="Courier New" pitchFamily="34" charset="-122"/>
+                <a:cs typeface="Courier New" pitchFamily="34" charset="-120"/>
+              </a:rPr>
+              <a:t>-0.11° / 8.5°</a:t>
+            </a:r>
+            <a:endParaRPr lang="en-US" sz="1700" dirty="0"/>
+          </a:p>
+        </p:txBody>
+      </p:sp>
+      <p:sp>
+        <p:nvSpPr>
+          <p:cNvPr id="15" name="Text 12">
+            <a:extLst>
+              <a:ext uri="{FF2B5EF4-FFF2-40B4-BE49-F238E27FC236}">
+                <a16:creationId xmlns:a16="http://schemas.microsoft.com/office/drawing/2014/main" id="{756384F1-B270-6501-5DC0-CAA185C65724}"/>
+              </a:ext>
+            </a:extLst>
+          </p:cNvPr>
+          <p:cNvSpPr/>
+          <p:nvPr/>
+        </p:nvSpPr>
+        <p:spPr>
+          <a:xfrm>
+            <a:off x="6048756" y="5997501"/>
+            <a:ext cx="2407158" cy="502920"/>
+          </a:xfrm>
+          <a:prstGeom prst="rect">
+            <a:avLst/>
+          </a:prstGeom>
+          <a:noFill/>
+          <a:ln/>
+        </p:spPr>
+        <p:txBody>
+          <a:bodyPr wrap="square" lIns="0" tIns="0" rIns="0" bIns="0" rtlCol="0" anchor="ctr"/>
+          <a:lstStyle/>
+          <a:p>
+            <a:pPr marL="0" indent="0">
+              <a:lnSpc>
+                <a:spcPct val="110000"/>
+              </a:lnSpc>
+              <a:buNone/>
+            </a:pPr>
+            <a:r>
+              <a:rPr lang="en-US" sz="900" i="1" dirty="0">
+                <a:solidFill>
+                  <a:srgbClr val="5B6672"/>
+                </a:solidFill>
+                <a:latin typeface="Calibri" pitchFamily="34" charset="0"/>
+                <a:ea typeface="Calibri" pitchFamily="34" charset="-122"/>
+                <a:cs typeface="Calibri" pitchFamily="34" charset="-120"/>
+              </a:rPr>
+              <a:t>bias ~0 -- symmetric scatter, not a systematic offset bug</a:t>
+            </a:r>
+            <a:endParaRPr lang="en-US" sz="900" dirty="0"/>
+          </a:p>
+        </p:txBody>
+      </p:sp>
+      <p:sp>
+        <p:nvSpPr>
+          <p:cNvPr id="16" name="Text 13">
+            <a:extLst>
+              <a:ext uri="{FF2B5EF4-FFF2-40B4-BE49-F238E27FC236}">
+                <a16:creationId xmlns:a16="http://schemas.microsoft.com/office/drawing/2014/main" id="{47E1D29A-7668-20E1-B6F1-213334CC482A}"/>
+              </a:ext>
+            </a:extLst>
+          </p:cNvPr>
+          <p:cNvSpPr/>
+          <p:nvPr/>
+        </p:nvSpPr>
+        <p:spPr>
+          <a:xfrm>
+            <a:off x="8684514" y="5293413"/>
+            <a:ext cx="2407158" cy="256032"/>
+          </a:xfrm>
+          <a:prstGeom prst="rect">
+            <a:avLst/>
+          </a:prstGeom>
+          <a:noFill/>
+          <a:ln/>
+        </p:spPr>
+        <p:txBody>
+          <a:bodyPr wrap="square" lIns="0" tIns="0" rIns="0" bIns="0" rtlCol="0" anchor="ctr"/>
+          <a:lstStyle/>
+          <a:p>
+            <a:pPr marL="0" indent="0">
+              <a:buNone/>
+            </a:pPr>
+            <a:r>
+              <a:rPr lang="en-US" sz="1000" b="1" kern="0" spc="100" dirty="0">
+                <a:solidFill>
+                  <a:srgbClr val="B85C00"/>
+                </a:solidFill>
+                <a:latin typeface="Calibri" pitchFamily="34" charset="0"/>
+                <a:ea typeface="Calibri" pitchFamily="34" charset="-122"/>
+                <a:cs typeface="Calibri" pitchFamily="34" charset="-120"/>
+              </a:rPr>
+              <a:t>CAUGHT BY COHERENCE, MISSED BY SSIM</a:t>
+            </a:r>
+            <a:endParaRPr lang="en-US" sz="1000" dirty="0"/>
+          </a:p>
+        </p:txBody>
+      </p:sp>
+      <p:sp>
+        <p:nvSpPr>
+          <p:cNvPr id="17" name="Text 14">
+            <a:extLst>
+              <a:ext uri="{FF2B5EF4-FFF2-40B4-BE49-F238E27FC236}">
+                <a16:creationId xmlns:a16="http://schemas.microsoft.com/office/drawing/2014/main" id="{0EE042FF-BCAC-7F4E-A80E-139B4276448A}"/>
+              </a:ext>
+            </a:extLst>
+          </p:cNvPr>
+          <p:cNvSpPr/>
+          <p:nvPr/>
+        </p:nvSpPr>
+        <p:spPr>
+          <a:xfrm>
+            <a:off x="8684514" y="5540301"/>
+            <a:ext cx="2407158" cy="457200"/>
+          </a:xfrm>
+          <a:prstGeom prst="rect">
+            <a:avLst/>
+          </a:prstGeom>
+          <a:noFill/>
+          <a:ln/>
+        </p:spPr>
+        <p:txBody>
+          <a:bodyPr wrap="square" lIns="0" tIns="0" rIns="0" bIns="0" rtlCol="0" anchor="ctr"/>
+          <a:lstStyle/>
+          <a:p>
+            <a:pPr marL="0" indent="0">
+              <a:buNone/>
+            </a:pPr>
+            <a:r>
+              <a:rPr lang="en-US" sz="1700" b="1" dirty="0">
+                <a:solidFill>
+                  <a:srgbClr val="141A22"/>
+                </a:solidFill>
+                <a:latin typeface="Courier New" pitchFamily="34" charset="0"/>
+                <a:ea typeface="Courier New" pitchFamily="34" charset="-122"/>
+                <a:cs typeface="Courier New" pitchFamily="34" charset="-120"/>
+              </a:rPr>
+              <a:t>27 / 200 buildings</a:t>
+            </a:r>
+            <a:endParaRPr lang="en-US" sz="1700" dirty="0"/>
+          </a:p>
+        </p:txBody>
+      </p:sp>
+      <p:sp>
+        <p:nvSpPr>
+          <p:cNvPr id="18" name="Text 15">
+            <a:extLst>
+              <a:ext uri="{FF2B5EF4-FFF2-40B4-BE49-F238E27FC236}">
+                <a16:creationId xmlns:a16="http://schemas.microsoft.com/office/drawing/2014/main" id="{3EA3550C-6EAF-4BA2-5F8D-2D2C567649D3}"/>
+              </a:ext>
+            </a:extLst>
+          </p:cNvPr>
+          <p:cNvSpPr/>
+          <p:nvPr/>
+        </p:nvSpPr>
+        <p:spPr>
+          <a:xfrm>
+            <a:off x="8684514" y="5997501"/>
+            <a:ext cx="2407158" cy="502920"/>
+          </a:xfrm>
+          <a:prstGeom prst="rect">
+            <a:avLst/>
+          </a:prstGeom>
+          <a:noFill/>
+          <a:ln/>
+        </p:spPr>
+        <p:txBody>
+          <a:bodyPr wrap="square" lIns="0" tIns="0" rIns="0" bIns="0" rtlCol="0" anchor="ctr"/>
+          <a:lstStyle/>
+          <a:p>
+            <a:pPr marL="0" indent="0">
+              <a:lnSpc>
+                <a:spcPct val="110000"/>
+              </a:lnSpc>
+              <a:buNone/>
+            </a:pPr>
+            <a:r>
+              <a:rPr lang="en-US" sz="900" i="1" dirty="0">
+                <a:solidFill>
+                  <a:srgbClr val="5B6672"/>
+                </a:solidFill>
+                <a:latin typeface="Calibri" pitchFamily="34" charset="0"/>
+                <a:ea typeface="Calibri" pitchFamily="34" charset="-122"/>
+                <a:cs typeface="Calibri" pitchFamily="34" charset="-120"/>
+              </a:rPr>
+              <a:t>pass SSIM≥0.95 but fail coherence≥0.95 -- worst: SSIM=0.963, coherence=0.75</a:t>
+            </a:r>
+            <a:endParaRPr lang="en-US" sz="900" dirty="0"/>
+          </a:p>
+        </p:txBody>
+      </p:sp>
+      <p:sp>
+        <p:nvSpPr>
+          <p:cNvPr id="19" name="Text 16">
+            <a:extLst>
+              <a:ext uri="{FF2B5EF4-FFF2-40B4-BE49-F238E27FC236}">
+                <a16:creationId xmlns:a16="http://schemas.microsoft.com/office/drawing/2014/main" id="{DF6358D2-4321-3CE3-5A2D-4C1D34536F6C}"/>
+              </a:ext>
+            </a:extLst>
+          </p:cNvPr>
+          <p:cNvSpPr/>
+          <p:nvPr/>
+        </p:nvSpPr>
+        <p:spPr>
+          <a:xfrm>
+            <a:off x="548640" y="6428232"/>
+            <a:ext cx="10607040" cy="274320"/>
+          </a:xfrm>
+          <a:prstGeom prst="rect">
+            <a:avLst/>
+          </a:prstGeom>
+          <a:noFill/>
+          <a:ln/>
+        </p:spPr>
+        <p:txBody>
+          <a:bodyPr wrap="square" lIns="0" tIns="0" rIns="0" bIns="0" rtlCol="0" anchor="ctr"/>
+          <a:lstStyle/>
+          <a:p>
+            <a:pPr marL="0" indent="0">
+              <a:buNone/>
+            </a:pPr>
+            <a:endParaRPr lang="en-US" sz="850" dirty="0"/>
+          </a:p>
+        </p:txBody>
+      </p:sp>
+      <p:pic>
+        <p:nvPicPr>
+          <p:cNvPr id="29" name="Picture 28">
+            <a:extLst>
+              <a:ext uri="{FF2B5EF4-FFF2-40B4-BE49-F238E27FC236}">
+                <a16:creationId xmlns:a16="http://schemas.microsoft.com/office/drawing/2014/main" id="{BAE34C60-C2B7-C5E7-2221-7C2ED20A38D8}"/>
+              </a:ext>
+            </a:extLst>
+          </p:cNvPr>
+          <p:cNvPicPr>
+            <a:picLocks noChangeAspect="1"/>
+          </p:cNvPicPr>
+          <p:nvPr/>
+        </p:nvPicPr>
+        <p:blipFill>
+          <a:blip r:embed="rId3"/>
+          <a:stretch>
+            <a:fillRect/>
+          </a:stretch>
+        </p:blipFill>
+        <p:spPr>
+          <a:xfrm>
+            <a:off x="120770" y="1308555"/>
+            <a:ext cx="11869947" cy="3788824"/>
+          </a:xfrm>
+          <a:prstGeom prst="rect">
+            <a:avLst/>
+          </a:prstGeom>
+        </p:spPr>
+      </p:pic>
     </p:spTree>
     <p:extLst>
       <p:ext uri="{BB962C8B-B14F-4D97-AF65-F5344CB8AC3E}">
-        <p14:creationId xmlns:p14="http://schemas.microsoft.com/office/powerpoint/2010/main" val="3371548086"/>
+        <p14:creationId xmlns:p14="http://schemas.microsoft.com/office/powerpoint/2010/main" val="1866589917"/>
       </p:ext>
     </p:extLst>
   </p:cSld>
@@ -16539,8 +17844,8 @@
         </p:nvSpPr>
         <p:spPr>
           <a:xfrm>
-            <a:off x="548640" y="365760"/>
-            <a:ext cx="9144000" cy="292608"/>
+            <a:off x="548640" y="658368"/>
+            <a:ext cx="10881360" cy="868680"/>
           </a:xfrm>
           <a:prstGeom prst="rect">
             <a:avLst/>
@@ -16549,63 +17854,66 @@
           <a:ln/>
         </p:spPr>
         <p:txBody>
-          <a:bodyPr wrap="square" lIns="0" tIns="0" rIns="0" bIns="0" rtlCol="0" anchor="ctr"/>
+          <a:bodyPr wrap="square" lIns="0" tIns="0" rIns="0" bIns="0" rtlCol="0" anchor="t"/>
           <a:lstStyle/>
           <a:p>
             <a:pPr marL="0" indent="0">
               <a:buNone/>
             </a:pPr>
             <a:r>
-              <a:rPr lang="en-US" sz="1200" b="1" kern="0" spc="200" dirty="0">
-                <a:solidFill>
-                  <a:srgbClr val="B85C00"/>
+              <a:rPr lang="en-US" sz="3400" b="1" dirty="0">
+                <a:solidFill>
+                  <a:srgbClr val="141A22"/>
+                </a:solidFill>
+                <a:latin typeface="Cambria" pitchFamily="34" charset="0"/>
+                <a:ea typeface="Cambria" pitchFamily="34" charset="-122"/>
+                <a:cs typeface="Cambria" pitchFamily="34" charset="-120"/>
+              </a:rPr>
+              <a:t>Summary</a:t>
+            </a:r>
+            <a:endParaRPr lang="en-US" sz="3400" dirty="0"/>
+          </a:p>
+        </p:txBody>
+      </p:sp>
+      <p:sp>
+        <p:nvSpPr>
+          <p:cNvPr id="3" name="Text 1"/>
+          <p:cNvSpPr/>
+          <p:nvPr/>
+        </p:nvSpPr>
+        <p:spPr>
+          <a:xfrm>
+            <a:off x="548640" y="1554480"/>
+            <a:ext cx="10698480" cy="822960"/>
+          </a:xfrm>
+          <a:prstGeom prst="rect">
+            <a:avLst/>
+          </a:prstGeom>
+          <a:noFill/>
+          <a:ln/>
+        </p:spPr>
+        <p:txBody>
+          <a:bodyPr wrap="square" lIns="0" tIns="0" rIns="0" bIns="0" rtlCol="0" anchor="ctr"/>
+          <a:lstStyle/>
+          <a:p>
+            <a:pPr marL="0" indent="0">
+              <a:lnSpc>
+                <a:spcPct val="115000"/>
+              </a:lnSpc>
+              <a:buNone/>
+            </a:pPr>
+            <a:r>
+              <a:rPr lang="en-US" sz="1500" i="1" dirty="0">
+                <a:solidFill>
+                  <a:srgbClr val="5B6672"/>
                 </a:solidFill>
                 <a:latin typeface="Calibri" pitchFamily="34" charset="0"/>
                 <a:ea typeface="Calibri" pitchFamily="34" charset="-122"/>
                 <a:cs typeface="Calibri" pitchFamily="34" charset="-120"/>
               </a:rPr>
-              <a:t>INTEGRATION</a:t>
-            </a:r>
-            <a:endParaRPr lang="en-US" sz="1200" dirty="0"/>
-          </a:p>
-        </p:txBody>
-      </p:sp>
-      <p:sp>
-        <p:nvSpPr>
-          <p:cNvPr id="3" name="Text 1"/>
-          <p:cNvSpPr/>
-          <p:nvPr/>
-        </p:nvSpPr>
-        <p:spPr>
-          <a:xfrm>
-            <a:off x="548640" y="658368"/>
-            <a:ext cx="10881360" cy="868680"/>
-          </a:xfrm>
-          <a:prstGeom prst="rect">
-            <a:avLst/>
-          </a:prstGeom>
-          <a:noFill/>
-          <a:ln/>
-        </p:spPr>
-        <p:txBody>
-          <a:bodyPr wrap="square" lIns="0" tIns="0" rIns="0" bIns="0" rtlCol="0" anchor="t"/>
-          <a:lstStyle/>
-          <a:p>
-            <a:pPr marL="0" indent="0">
-              <a:buNone/>
-            </a:pPr>
-            <a:r>
-              <a:rPr lang="en-US" sz="2300" b="1" dirty="0">
-                <a:solidFill>
-                  <a:srgbClr val="141A22"/>
-                </a:solidFill>
-                <a:latin typeface="Cambria" pitchFamily="34" charset="0"/>
-                <a:ea typeface="Cambria" pitchFamily="34" charset="-122"/>
-                <a:cs typeface="Cambria" pitchFamily="34" charset="-120"/>
-              </a:rPr>
-              <a:t>Adding Sinclair-matrix polarimetry to SARCASTIC</a:t>
-            </a:r>
-            <a:endParaRPr lang="en-US" sz="2300" dirty="0"/>
+              <a:t>SAR simulation from a 3D scene is a physics forward-model problem wearing a graphics costume -- geometry and ray tracing infrastructure transfer</a:t>
+            </a:r>
+            <a:endParaRPr lang="en-US" sz="1500" dirty="0"/>
           </a:p>
         </p:txBody>
       </p:sp>
@@ -16617,12 +17925,12 @@
         </p:nvSpPr>
         <p:spPr>
           <a:xfrm>
-            <a:off x="548640" y="1783080"/>
-            <a:ext cx="5120640" cy="4251960"/>
+            <a:off x="548640" y="2606040"/>
+            <a:ext cx="2560320" cy="2377440"/>
           </a:xfrm>
           <a:prstGeom prst="roundRect">
             <a:avLst>
-              <a:gd name="adj" fmla="val 1720"/>
+              <a:gd name="adj" fmla="val 3077"/>
             </a:avLst>
           </a:prstGeom>
           <a:solidFill>
@@ -16640,18 +17948,62 @@
       </p:sp>
       <p:sp>
         <p:nvSpPr>
-          <p:cNvPr id="5" name="Text 3"/>
-          <p:cNvSpPr/>
-          <p:nvPr/>
-        </p:nvSpPr>
-        <p:spPr>
-          <a:xfrm>
-            <a:off x="822960" y="1965960"/>
-            <a:ext cx="4572000" cy="365760"/>
+          <p:cNvPr id="5" name="Shape 3"/>
+          <p:cNvSpPr/>
+          <p:nvPr/>
+        </p:nvSpPr>
+        <p:spPr>
+          <a:xfrm>
+            <a:off x="1463040" y="2880360"/>
+            <a:ext cx="731520" cy="731520"/>
+          </a:xfrm>
+          <a:prstGeom prst="ellipse">
+            <a:avLst/>
+          </a:prstGeom>
+          <a:solidFill>
+            <a:srgbClr val="FF9E2C"/>
+          </a:solidFill>
+          <a:ln/>
+        </p:spPr>
+      </p:sp>
+      <p:pic>
+        <p:nvPicPr>
+          <p:cNvPr id="6" name="Image 0" descr="/sessions/sweet-friendly-mayer/mnt/outputs/presentation/icons/FaLayerGroup_dark.png"/>
+          <p:cNvPicPr>
+            <a:picLocks noChangeAspect="1"/>
+          </p:cNvPicPr>
+          <p:nvPr/>
+        </p:nvPicPr>
+        <p:blipFill>
+          <a:blip r:embed="rId3"/>
+          <a:stretch>
+            <a:fillRect/>
+          </a:stretch>
+        </p:blipFill>
+        <p:spPr>
+          <a:xfrm>
+            <a:off x="1660550" y="3077870"/>
+            <a:ext cx="336499" cy="336499"/>
           </a:xfrm>
           <a:prstGeom prst="rect">
             <a:avLst/>
           </a:prstGeom>
+        </p:spPr>
+      </p:pic>
+      <p:sp>
+        <p:nvSpPr>
+          <p:cNvPr id="7" name="Text 4"/>
+          <p:cNvSpPr/>
+          <p:nvPr/>
+        </p:nvSpPr>
+        <p:spPr>
+          <a:xfrm>
+            <a:off x="548640" y="3749040"/>
+            <a:ext cx="2560320" cy="365760"/>
+          </a:xfrm>
+          <a:prstGeom prst="rect">
+            <a:avLst/>
+          </a:prstGeom>
           <a:noFill/>
           <a:ln/>
         </p:spPr>
@@ -16659,34 +18011,34 @@
           <a:bodyPr wrap="square" lIns="0" tIns="0" rIns="0" bIns="0" rtlCol="0" anchor="ctr"/>
           <a:lstStyle/>
           <a:p>
-            <a:pPr marL="0" indent="0">
+            <a:pPr marL="0" indent="0" algn="ctr">
               <a:buNone/>
             </a:pPr>
             <a:r>
-              <a:rPr lang="en-US" sz="1300" b="1" kern="0" spc="100" dirty="0">
-                <a:solidFill>
-                  <a:srgbClr val="0B7285"/>
+              <a:rPr lang="en-US" sz="1400" b="1" dirty="0">
+                <a:solidFill>
+                  <a:srgbClr val="141A22"/>
                 </a:solidFill>
                 <a:latin typeface="Calibri" pitchFamily="34" charset="0"/>
                 <a:ea typeface="Calibri" pitchFamily="34" charset="-122"/>
                 <a:cs typeface="Calibri" pitchFamily="34" charset="-120"/>
               </a:rPr>
-              <a:t>OPTION A — TWO-PASS</a:t>
-            </a:r>
-            <a:endParaRPr lang="en-US" sz="1300" dirty="0"/>
-          </a:p>
-        </p:txBody>
-      </p:sp>
-      <p:sp>
-        <p:nvSpPr>
-          <p:cNvPr id="6" name="Text 4"/>
-          <p:cNvSpPr/>
-          <p:nvPr/>
-        </p:nvSpPr>
-        <p:spPr>
-          <a:xfrm>
-            <a:off x="822960" y="2423160"/>
-            <a:ext cx="4572000" cy="3429000"/>
+              <a:t>Multi-bounce</a:t>
+            </a:r>
+            <a:endParaRPr lang="en-US" sz="1400" dirty="0"/>
+          </a:p>
+        </p:txBody>
+      </p:sp>
+      <p:sp>
+        <p:nvSpPr>
+          <p:cNvPr id="8" name="Text 5"/>
+          <p:cNvSpPr/>
+          <p:nvPr/>
+        </p:nvSpPr>
+        <p:spPr>
+          <a:xfrm>
+            <a:off x="685800" y="4114800"/>
+            <a:ext cx="2286000" cy="777240"/>
           </a:xfrm>
           <a:prstGeom prst="rect">
             <a:avLst/>
@@ -16695,96 +18047,44 @@
           <a:ln/>
         </p:spPr>
         <p:txBody>
-          <a:bodyPr wrap="square" lIns="0" tIns="0" rIns="0" bIns="0" rtlCol="0" anchor="t"/>
-          <a:lstStyle/>
-          <a:p>
-            <a:pPr marL="203200" indent="-203200">
+          <a:bodyPr wrap="square" lIns="0" tIns="0" rIns="0" bIns="0" rtlCol="0" anchor="ctr"/>
+          <a:lstStyle/>
+          <a:p>
+            <a:pPr marL="0" indent="0" algn="ctr">
               <a:lnSpc>
-                <a:spcPct val="112000"/>
+                <a:spcPct val="110000"/>
               </a:lnSpc>
-              <a:spcAft>
-                <a:spcPts val="1200"/>
-              </a:spcAft>
-              <a:buSzPct val="100000"/>
-              <a:buChar char="•"/>
-            </a:pPr>
-            <a:r>
-              <a:rPr lang="en-US" sz="1300" dirty="0">
-                <a:solidFill>
-                  <a:srgbClr val="141A22"/>
+              <a:buNone/>
+            </a:pPr>
+            <a:r>
+              <a:rPr lang="en-US" sz="1100" i="1" dirty="0">
+                <a:solidFill>
+                  <a:srgbClr val="5B6672"/>
                 </a:solidFill>
                 <a:latin typeface="Calibri" pitchFamily="34" charset="0"/>
                 <a:ea typeface="Calibri" pitchFamily="34" charset="-122"/>
                 <a:cs typeface="Calibri" pitchFamily="34" charset="-120"/>
               </a:rPr>
-              <a:t>Launch h-pol and v-pol runs separately; project the final ĥ onto both receive axes → 4 channels</a:t>
-            </a:r>
-            <a:endParaRPr lang="en-US" sz="1300" dirty="0"/>
-          </a:p>
-          <a:p>
-            <a:pPr marL="203200" indent="-203200">
-              <a:lnSpc>
-                <a:spcPct val="112000"/>
-              </a:lnSpc>
-              <a:spcAft>
-                <a:spcPts val="1200"/>
-              </a:spcAft>
-              <a:buSzPct val="100000"/>
-              <a:buChar char="•"/>
-            </a:pPr>
-            <a:r>
-              <a:rPr lang="en-US" sz="1300" dirty="0">
-                <a:solidFill>
-                  <a:srgbClr val="141A22"/>
-                </a:solidFill>
-                <a:latin typeface="Calibri" pitchFamily="34" charset="0"/>
-                <a:ea typeface="Calibri" pitchFamily="34" charset="-122"/>
-                <a:cs typeface="Calibri" pitchFamily="34" charset="-120"/>
-              </a:rPr>
-              <a:t>Reuses CPHD’s existing multi-channel schema — no file-format change needed</a:t>
-            </a:r>
-            <a:endParaRPr lang="en-US" sz="1300" dirty="0"/>
-          </a:p>
-          <a:p>
-            <a:pPr marL="203200" indent="-203200">
-              <a:lnSpc>
-                <a:spcPct val="112000"/>
-              </a:lnSpc>
-              <a:spcAft>
-                <a:spcPts val="1200"/>
-              </a:spcAft>
-              <a:buSzPct val="100000"/>
-              <a:buChar char="•"/>
-            </a:pPr>
-            <a:r>
-              <a:rPr lang="en-US" sz="1300" dirty="0">
-                <a:solidFill>
-                  <a:srgbClr val="141A22"/>
-                </a:solidFill>
-                <a:latin typeface="Calibri" pitchFamily="34" charset="0"/>
-                <a:ea typeface="Calibri" pitchFamily="34" charset="-122"/>
-                <a:cs typeface="Calibri" pitchFamily="34" charset="-120"/>
-              </a:rPr>
-              <a:t>Still PEC underneath: geometric cross-pol only (dihedrals) — no material-dependent differential reflectivity</a:t>
-            </a:r>
-            <a:endParaRPr lang="en-US" sz="1300" dirty="0"/>
-          </a:p>
-        </p:txBody>
-      </p:sp>
-      <p:sp>
-        <p:nvSpPr>
-          <p:cNvPr id="7" name="Shape 5"/>
-          <p:cNvSpPr/>
-          <p:nvPr/>
-        </p:nvSpPr>
-        <p:spPr>
-          <a:xfrm>
-            <a:off x="6126480" y="1783080"/>
-            <a:ext cx="5120640" cy="4251960"/>
+              <a:t>Resolvable RCS contributors, not aesthetic reflections</a:t>
+            </a:r>
+            <a:endParaRPr lang="en-US" sz="1100" dirty="0"/>
+          </a:p>
+        </p:txBody>
+      </p:sp>
+      <p:sp>
+        <p:nvSpPr>
+          <p:cNvPr id="9" name="Shape 6"/>
+          <p:cNvSpPr/>
+          <p:nvPr/>
+        </p:nvSpPr>
+        <p:spPr>
+          <a:xfrm>
+            <a:off x="3310128" y="2606040"/>
+            <a:ext cx="2560320" cy="2377440"/>
           </a:xfrm>
           <a:prstGeom prst="roundRect">
             <a:avLst>
-              <a:gd name="adj" fmla="val 1720"/>
+              <a:gd name="adj" fmla="val 3077"/>
             </a:avLst>
           </a:prstGeom>
           <a:solidFill>
@@ -16802,18 +18102,62 @@
       </p:sp>
       <p:sp>
         <p:nvSpPr>
-          <p:cNvPr id="8" name="Text 6"/>
-          <p:cNvSpPr/>
-          <p:nvPr/>
-        </p:nvSpPr>
-        <p:spPr>
-          <a:xfrm>
-            <a:off x="6400800" y="1965960"/>
-            <a:ext cx="4572000" cy="365760"/>
+          <p:cNvPr id="10" name="Shape 7"/>
+          <p:cNvSpPr/>
+          <p:nvPr/>
+        </p:nvSpPr>
+        <p:spPr>
+          <a:xfrm>
+            <a:off x="4224528" y="2880360"/>
+            <a:ext cx="731520" cy="731520"/>
+          </a:xfrm>
+          <a:prstGeom prst="ellipse">
+            <a:avLst/>
+          </a:prstGeom>
+          <a:solidFill>
+            <a:srgbClr val="FF9E2C"/>
+          </a:solidFill>
+          <a:ln/>
+        </p:spPr>
+      </p:sp>
+      <p:pic>
+        <p:nvPicPr>
+          <p:cNvPr id="11" name="Image 1" descr="/sessions/sweet-friendly-mayer/mnt/outputs/presentation/icons/FaCube_dark.png"/>
+          <p:cNvPicPr>
+            <a:picLocks noChangeAspect="1"/>
+          </p:cNvPicPr>
+          <p:nvPr/>
+        </p:nvPicPr>
+        <p:blipFill>
+          <a:blip r:embed="rId4"/>
+          <a:stretch>
+            <a:fillRect/>
+          </a:stretch>
+        </p:blipFill>
+        <p:spPr>
+          <a:xfrm>
+            <a:off x="4422038" y="3077870"/>
+            <a:ext cx="336499" cy="336499"/>
           </a:xfrm>
           <a:prstGeom prst="rect">
             <a:avLst/>
           </a:prstGeom>
+        </p:spPr>
+      </p:pic>
+      <p:sp>
+        <p:nvSpPr>
+          <p:cNvPr id="12" name="Text 8"/>
+          <p:cNvSpPr/>
+          <p:nvPr/>
+        </p:nvSpPr>
+        <p:spPr>
+          <a:xfrm>
+            <a:off x="3310128" y="3749040"/>
+            <a:ext cx="2560320" cy="365760"/>
+          </a:xfrm>
+          <a:prstGeom prst="rect">
+            <a:avLst/>
+          </a:prstGeom>
           <a:noFill/>
           <a:ln/>
         </p:spPr>
@@ -16821,34 +18165,34 @@
           <a:bodyPr wrap="square" lIns="0" tIns="0" rIns="0" bIns="0" rtlCol="0" anchor="ctr"/>
           <a:lstStyle/>
           <a:p>
-            <a:pPr marL="0" indent="0">
+            <a:pPr marL="0" indent="0" algn="ctr">
               <a:buNone/>
             </a:pPr>
             <a:r>
-              <a:rPr lang="en-US" sz="1300" b="1" kern="0" spc="100" dirty="0">
-                <a:solidFill>
-                  <a:srgbClr val="B85C00"/>
+              <a:rPr lang="en-US" sz="1400" b="1" dirty="0">
+                <a:solidFill>
+                  <a:srgbClr val="141A22"/>
                 </a:solidFill>
                 <a:latin typeface="Calibri" pitchFamily="34" charset="0"/>
                 <a:ea typeface="Calibri" pitchFamily="34" charset="-122"/>
                 <a:cs typeface="Calibri" pitchFamily="34" charset="-120"/>
               </a:rPr>
-              <a:t>OPTION B — MATRIX PROPAGATION</a:t>
-            </a:r>
-            <a:endParaRPr lang="en-US" sz="1300" dirty="0"/>
-          </a:p>
-        </p:txBody>
-      </p:sp>
-      <p:sp>
-        <p:nvSpPr>
-          <p:cNvPr id="9" name="Text 7"/>
-          <p:cNvSpPr/>
-          <p:nvPr/>
-        </p:nvSpPr>
-        <p:spPr>
-          <a:xfrm>
-            <a:off x="6400800" y="2423160"/>
-            <a:ext cx="4572000" cy="3429000"/>
+              <a:t>Material</a:t>
+            </a:r>
+            <a:endParaRPr lang="en-US" sz="1400" dirty="0"/>
+          </a:p>
+        </p:txBody>
+      </p:sp>
+      <p:sp>
+        <p:nvSpPr>
+          <p:cNvPr id="13" name="Text 9"/>
+          <p:cNvSpPr/>
+          <p:nvPr/>
+        </p:nvSpPr>
+        <p:spPr>
+          <a:xfrm>
+            <a:off x="3447288" y="4114800"/>
+            <a:ext cx="2286000" cy="777240"/>
           </a:xfrm>
           <a:prstGeom prst="rect">
             <a:avLst/>
@@ -16857,45 +18201,129 @@
           <a:ln/>
         </p:spPr>
         <p:txBody>
-          <a:bodyPr wrap="square" lIns="0" tIns="0" rIns="0" bIns="0" rtlCol="0" anchor="t"/>
-          <a:lstStyle/>
-          <a:p>
-            <a:pPr marL="203200" indent="-203200">
+          <a:bodyPr wrap="square" lIns="0" tIns="0" rIns="0" bIns="0" rtlCol="0" anchor="ctr"/>
+          <a:lstStyle/>
+          <a:p>
+            <a:pPr marL="0" indent="0" algn="ctr">
               <a:lnSpc>
-                <a:spcPct val="112000"/>
+                <a:spcPct val="110000"/>
               </a:lnSpc>
-              <a:spcAft>
-                <a:spcPts val="1200"/>
-              </a:spcAft>
-              <a:buSzPct val="100000"/>
-              <a:buChar char="•"/>
-            </a:pPr>
-            <a:r>
-              <a:rPr lang="en-US" sz="1300" dirty="0">
-                <a:solidFill>
-                  <a:srgbClr val="141A22"/>
+              <a:buNone/>
+            </a:pPr>
+            <a:r>
+              <a:rPr lang="en-US" sz="1100" i="1" dirty="0">
+                <a:solidFill>
+                  <a:srgbClr val="5B6672"/>
                 </a:solidFill>
                 <a:latin typeface="Calibri" pitchFamily="34" charset="0"/>
                 <a:ea typeface="Calibri" pitchFamily="34" charset="-122"/>
                 <a:cs typeface="Calibri" pitchFamily="34" charset="-120"/>
               </a:rPr>
-              <a:t>Tag facets with permittivity; decompose into local Fresnel s/p basis inside RCS.c</a:t>
-            </a:r>
-            <a:endParaRPr lang="en-US" sz="1300" dirty="0"/>
-          </a:p>
-          <a:p>
-            <a:pPr marL="203200" indent="-203200">
-              <a:lnSpc>
-                <a:spcPct val="112000"/>
-              </a:lnSpc>
-              <a:spcAft>
-                <a:spcPts val="1200"/>
-              </a:spcAft>
-              <a:buSzPct val="100000"/>
-              <a:buChar char="•"/>
-            </a:pPr>
-            <a:r>
-              <a:rPr lang="en-US" sz="1300" dirty="0">
+              <a:t>EM permittivity, not albedo</a:t>
+            </a:r>
+            <a:endParaRPr lang="en-US" sz="1100" dirty="0"/>
+          </a:p>
+        </p:txBody>
+      </p:sp>
+      <p:sp>
+        <p:nvSpPr>
+          <p:cNvPr id="14" name="Shape 10"/>
+          <p:cNvSpPr/>
+          <p:nvPr/>
+        </p:nvSpPr>
+        <p:spPr>
+          <a:xfrm>
+            <a:off x="6071616" y="2606040"/>
+            <a:ext cx="2560320" cy="2377440"/>
+          </a:xfrm>
+          <a:prstGeom prst="roundRect">
+            <a:avLst>
+              <a:gd name="adj" fmla="val 3077"/>
+            </a:avLst>
+          </a:prstGeom>
+          <a:solidFill>
+            <a:srgbClr val="F1F4F8"/>
+          </a:solidFill>
+          <a:ln/>
+          <a:effectLst>
+            <a:outerShdw blurRad="101600" dist="38100" dir="5400000" algn="bl" rotWithShape="0">
+              <a:srgbClr val="9AA5B1">
+                <a:alpha val="22000"/>
+              </a:srgbClr>
+            </a:outerShdw>
+          </a:effectLst>
+        </p:spPr>
+      </p:sp>
+      <p:sp>
+        <p:nvSpPr>
+          <p:cNvPr id="15" name="Shape 11"/>
+          <p:cNvSpPr/>
+          <p:nvPr/>
+        </p:nvSpPr>
+        <p:spPr>
+          <a:xfrm>
+            <a:off x="6986016" y="2880360"/>
+            <a:ext cx="731520" cy="731520"/>
+          </a:xfrm>
+          <a:prstGeom prst="ellipse">
+            <a:avLst/>
+          </a:prstGeom>
+          <a:solidFill>
+            <a:srgbClr val="FF9E2C"/>
+          </a:solidFill>
+          <a:ln/>
+        </p:spPr>
+      </p:sp>
+      <p:pic>
+        <p:nvPicPr>
+          <p:cNvPr id="16" name="Image 2" descr="/sessions/sweet-friendly-mayer/mnt/outputs/presentation/icons/FaWaveSquare_dark.png"/>
+          <p:cNvPicPr>
+            <a:picLocks noChangeAspect="1"/>
+          </p:cNvPicPr>
+          <p:nvPr/>
+        </p:nvPicPr>
+        <p:blipFill>
+          <a:blip r:embed="rId5"/>
+          <a:stretch>
+            <a:fillRect/>
+          </a:stretch>
+        </p:blipFill>
+        <p:spPr>
+          <a:xfrm>
+            <a:off x="7183526" y="3077870"/>
+            <a:ext cx="336499" cy="336499"/>
+          </a:xfrm>
+          <a:prstGeom prst="rect">
+            <a:avLst/>
+          </a:prstGeom>
+        </p:spPr>
+      </p:pic>
+      <p:sp>
+        <p:nvSpPr>
+          <p:cNvPr id="17" name="Text 12"/>
+          <p:cNvSpPr/>
+          <p:nvPr/>
+        </p:nvSpPr>
+        <p:spPr>
+          <a:xfrm>
+            <a:off x="6071616" y="3749040"/>
+            <a:ext cx="2560320" cy="365760"/>
+          </a:xfrm>
+          <a:prstGeom prst="rect">
+            <a:avLst/>
+          </a:prstGeom>
+          <a:noFill/>
+          <a:ln/>
+        </p:spPr>
+        <p:txBody>
+          <a:bodyPr wrap="square" lIns="0" tIns="0" rIns="0" bIns="0" rtlCol="0" anchor="ctr"/>
+          <a:lstStyle/>
+          <a:p>
+            <a:pPr marL="0" indent="0" algn="ctr">
+              <a:buNone/>
+            </a:pPr>
+            <a:r>
+              <a:rPr lang="en-US" sz="1400" b="1" dirty="0">
                 <a:solidFill>
                   <a:srgbClr val="141A22"/>
                 </a:solidFill>
@@ -16903,40 +18331,212 @@
                 <a:ea typeface="Calibri" pitchFamily="34" charset="-122"/>
                 <a:cs typeface="Calibri" pitchFamily="34" charset="-120"/>
               </a:rPr>
-              <a:t>Chain 2×2 matrices through reflect.cpp instead of a 3-vector; widen cpuPOField.cpp to 4 complex accumulators</a:t>
-            </a:r>
-            <a:endParaRPr lang="en-US" sz="1300" dirty="0"/>
-          </a:p>
-          <a:p>
-            <a:pPr marL="203200" indent="-203200">
+              <a:t>Polarization</a:t>
+            </a:r>
+            <a:endParaRPr lang="en-US" sz="1400" dirty="0"/>
+          </a:p>
+        </p:txBody>
+      </p:sp>
+      <p:sp>
+        <p:nvSpPr>
+          <p:cNvPr id="18" name="Text 13"/>
+          <p:cNvSpPr/>
+          <p:nvPr/>
+        </p:nvSpPr>
+        <p:spPr>
+          <a:xfrm>
+            <a:off x="6208776" y="4114800"/>
+            <a:ext cx="2286000" cy="777240"/>
+          </a:xfrm>
+          <a:prstGeom prst="rect">
+            <a:avLst/>
+          </a:prstGeom>
+          <a:noFill/>
+          <a:ln/>
+        </p:spPr>
+        <p:txBody>
+          <a:bodyPr wrap="square" lIns="0" tIns="0" rIns="0" bIns="0" rtlCol="0" anchor="ctr"/>
+          <a:lstStyle/>
+          <a:p>
+            <a:pPr marL="0" indent="0" algn="ctr">
               <a:lnSpc>
-                <a:spcPct val="112000"/>
+                <a:spcPct val="110000"/>
               </a:lnSpc>
-              <a:spcAft>
-                <a:spcPts val="1200"/>
-              </a:spcAft>
-              <a:buSzPct val="100000"/>
-              <a:buChar char="•"/>
-            </a:pPr>
-            <a:r>
-              <a:rPr lang="en-US" sz="1300" dirty="0">
-                <a:solidFill>
-                  <a:srgbClr val="141A22"/>
+              <a:buNone/>
+            </a:pPr>
+            <a:r>
+              <a:rPr lang="en-US" sz="1100" i="1" dirty="0">
+                <a:solidFill>
+                  <a:srgbClr val="5B6672"/>
                 </a:solidFill>
                 <a:latin typeface="Calibri" pitchFamily="34" charset="0"/>
                 <a:ea typeface="Calibri" pitchFamily="34" charset="-122"/>
                 <a:cs typeface="Calibri" pitchFamily="34" charset="-120"/>
               </a:rPr>
-              <a:t>Start from SARTrace, not the scalar path — per-bounce history is already exposed there</a:t>
-            </a:r>
-            <a:endParaRPr lang="en-US" sz="1300" dirty="0"/>
+              <a:t>Sinclair matrices, not colors</a:t>
+            </a:r>
+            <a:endParaRPr lang="en-US" sz="1100" dirty="0"/>
+          </a:p>
+        </p:txBody>
+      </p:sp>
+      <p:sp>
+        <p:nvSpPr>
+          <p:cNvPr id="19" name="Shape 14"/>
+          <p:cNvSpPr/>
+          <p:nvPr/>
+        </p:nvSpPr>
+        <p:spPr>
+          <a:xfrm>
+            <a:off x="8833104" y="2606040"/>
+            <a:ext cx="2560320" cy="2377440"/>
+          </a:xfrm>
+          <a:prstGeom prst="roundRect">
+            <a:avLst>
+              <a:gd name="adj" fmla="val 3077"/>
+            </a:avLst>
+          </a:prstGeom>
+          <a:solidFill>
+            <a:srgbClr val="F1F4F8"/>
+          </a:solidFill>
+          <a:ln/>
+          <a:effectLst>
+            <a:outerShdw blurRad="101600" dist="38100" dir="5400000" algn="bl" rotWithShape="0">
+              <a:srgbClr val="9AA5B1">
+                <a:alpha val="22000"/>
+              </a:srgbClr>
+            </a:outerShdw>
+          </a:effectLst>
+        </p:spPr>
+      </p:sp>
+      <p:sp>
+        <p:nvSpPr>
+          <p:cNvPr id="20" name="Shape 15"/>
+          <p:cNvSpPr/>
+          <p:nvPr/>
+        </p:nvSpPr>
+        <p:spPr>
+          <a:xfrm>
+            <a:off x="9747504" y="2880360"/>
+            <a:ext cx="731520" cy="731520"/>
+          </a:xfrm>
+          <a:prstGeom prst="ellipse">
+            <a:avLst/>
+          </a:prstGeom>
+          <a:solidFill>
+            <a:srgbClr val="FF9E2C"/>
+          </a:solidFill>
+          <a:ln/>
+        </p:spPr>
+      </p:sp>
+      <p:pic>
+        <p:nvPicPr>
+          <p:cNvPr id="21" name="Image 3" descr="/sessions/sweet-friendly-mayer/mnt/outputs/presentation/icons/FaCloudRain_dark.png"/>
+          <p:cNvPicPr>
+            <a:picLocks noChangeAspect="1"/>
+          </p:cNvPicPr>
+          <p:nvPr/>
+        </p:nvPicPr>
+        <p:blipFill>
+          <a:blip r:embed="rId6"/>
+          <a:stretch>
+            <a:fillRect/>
+          </a:stretch>
+        </p:blipFill>
+        <p:spPr>
+          <a:xfrm>
+            <a:off x="9945014" y="3077870"/>
+            <a:ext cx="336499" cy="336499"/>
+          </a:xfrm>
+          <a:prstGeom prst="rect">
+            <a:avLst/>
+          </a:prstGeom>
+        </p:spPr>
+      </p:pic>
+      <p:sp>
+        <p:nvSpPr>
+          <p:cNvPr id="22" name="Text 16"/>
+          <p:cNvSpPr/>
+          <p:nvPr/>
+        </p:nvSpPr>
+        <p:spPr>
+          <a:xfrm>
+            <a:off x="8833104" y="3749040"/>
+            <a:ext cx="2560320" cy="365760"/>
+          </a:xfrm>
+          <a:prstGeom prst="rect">
+            <a:avLst/>
+          </a:prstGeom>
+          <a:noFill/>
+          <a:ln/>
+        </p:spPr>
+        <p:txBody>
+          <a:bodyPr wrap="square" lIns="0" tIns="0" rIns="0" bIns="0" rtlCol="0" anchor="ctr"/>
+          <a:lstStyle/>
+          <a:p>
+            <a:pPr marL="0" indent="0" algn="ctr">
+              <a:buNone/>
+            </a:pPr>
+            <a:r>
+              <a:rPr lang="en-US" sz="1400" b="1" dirty="0">
+                <a:solidFill>
+                  <a:srgbClr val="141A22"/>
+                </a:solidFill>
+                <a:latin typeface="Calibri" pitchFamily="34" charset="0"/>
+                <a:ea typeface="Calibri" pitchFamily="34" charset="-122"/>
+                <a:cs typeface="Calibri" pitchFamily="34" charset="-120"/>
+              </a:rPr>
+              <a:t>Atmosphere</a:t>
+            </a:r>
+            <a:endParaRPr lang="en-US" sz="1400" dirty="0"/>
+          </a:p>
+        </p:txBody>
+      </p:sp>
+      <p:sp>
+        <p:nvSpPr>
+          <p:cNvPr id="23" name="Text 17"/>
+          <p:cNvSpPr/>
+          <p:nvPr/>
+        </p:nvSpPr>
+        <p:spPr>
+          <a:xfrm>
+            <a:off x="8970264" y="4114800"/>
+            <a:ext cx="2286000" cy="777240"/>
+          </a:xfrm>
+          <a:prstGeom prst="rect">
+            <a:avLst/>
+          </a:prstGeom>
+          <a:noFill/>
+          <a:ln/>
+        </p:spPr>
+        <p:txBody>
+          <a:bodyPr wrap="square" lIns="0" tIns="0" rIns="0" bIns="0" rtlCol="0" anchor="ctr"/>
+          <a:lstStyle/>
+          <a:p>
+            <a:pPr marL="0" indent="0" algn="ctr">
+              <a:lnSpc>
+                <a:spcPct val="110000"/>
+              </a:lnSpc>
+              <a:buNone/>
+            </a:pPr>
+            <a:r>
+              <a:rPr lang="en-US" sz="1100" i="1" dirty="0">
+                <a:solidFill>
+                  <a:srgbClr val="5B6672"/>
+                </a:solidFill>
+                <a:latin typeface="Calibri" pitchFamily="34" charset="0"/>
+                <a:ea typeface="Calibri" pitchFamily="34" charset="-122"/>
+                <a:cs typeface="Calibri" pitchFamily="34" charset="-120"/>
+              </a:rPr>
+              <a:t>Moving volumetric clutter, not a post-processing filter</a:t>
+            </a:r>
+            <a:endParaRPr lang="en-US" sz="1100" dirty="0"/>
           </a:p>
         </p:txBody>
       </p:sp>
     </p:spTree>
     <p:extLst>
       <p:ext uri="{BB962C8B-B14F-4D97-AF65-F5344CB8AC3E}">
-        <p14:creationId xmlns:p14="http://schemas.microsoft.com/office/powerpoint/2010/main" val="474102231"/>
+        <p14:creationId xmlns:p14="http://schemas.microsoft.com/office/powerpoint/2010/main" val="423134737"/>
       </p:ext>
     </p:extLst>
   </p:cSld>
@@ -16965,467 +18565,43 @@
       </p:grpSpPr>
       <p:sp>
         <p:nvSpPr>
-          <p:cNvPr id="2" name="Text 0"/>
-          <p:cNvSpPr/>
-          <p:nvPr/>
-        </p:nvSpPr>
-        <p:spPr>
-          <a:xfrm>
-            <a:off x="548640" y="365760"/>
-            <a:ext cx="9144000" cy="292608"/>
+          <p:cNvPr id="2" name="TextBox 1">
+            <a:extLst>
+              <a:ext uri="{FF2B5EF4-FFF2-40B4-BE49-F238E27FC236}">
+                <a16:creationId xmlns:a16="http://schemas.microsoft.com/office/drawing/2014/main" id="{C9681E14-5C07-F98B-314E-94E4012AD1FB}"/>
+              </a:ext>
+            </a:extLst>
+          </p:cNvPr>
+          <p:cNvSpPr txBox="1"/>
+          <p:nvPr/>
+        </p:nvSpPr>
+        <p:spPr>
+          <a:xfrm>
+            <a:off x="4306277" y="3235569"/>
+            <a:ext cx="1454501" cy="369332"/>
           </a:xfrm>
           <a:prstGeom prst="rect">
             <a:avLst/>
           </a:prstGeom>
           <a:noFill/>
-          <a:ln/>
-        </p:spPr>
-        <p:txBody>
-          <a:bodyPr wrap="square" lIns="0" tIns="0" rIns="0" bIns="0" rtlCol="0" anchor="ctr"/>
-          <a:lstStyle/>
-          <a:p>
-            <a:pPr marL="0" indent="0">
-              <a:buNone/>
-            </a:pPr>
-            <a:r>
-              <a:rPr lang="en-US" sz="1200" b="1" kern="0" spc="200" dirty="0">
-                <a:solidFill>
-                  <a:srgbClr val="B85C00"/>
-                </a:solidFill>
-                <a:latin typeface="Calibri" pitchFamily="34" charset="0"/>
-                <a:ea typeface="Calibri" pitchFamily="34" charset="-122"/>
-                <a:cs typeface="Calibri" pitchFamily="34" charset="-120"/>
-              </a:rPr>
-              <a:t>INTEGRATION, CONTINUED</a:t>
-            </a:r>
-            <a:endParaRPr lang="en-US" sz="1200" dirty="0"/>
-          </a:p>
-        </p:txBody>
-      </p:sp>
-      <p:sp>
-        <p:nvSpPr>
-          <p:cNvPr id="3" name="Text 1"/>
-          <p:cNvSpPr/>
-          <p:nvPr/>
-        </p:nvSpPr>
-        <p:spPr>
-          <a:xfrm>
-            <a:off x="548640" y="658368"/>
-            <a:ext cx="10881360" cy="868680"/>
-          </a:xfrm>
-          <a:prstGeom prst="rect">
-            <a:avLst/>
-          </a:prstGeom>
-          <a:noFill/>
-          <a:ln/>
-        </p:spPr>
-        <p:txBody>
-          <a:bodyPr wrap="square" lIns="0" tIns="0" rIns="0" bIns="0" rtlCol="0" anchor="t"/>
-          <a:lstStyle/>
-          <a:p>
-            <a:pPr marL="0" indent="0">
-              <a:buNone/>
-            </a:pPr>
-            <a:r>
-              <a:rPr lang="en-US" sz="2500" b="1" dirty="0">
-                <a:solidFill>
-                  <a:srgbClr val="141A22"/>
-                </a:solidFill>
-                <a:latin typeface="Cambria" pitchFamily="34" charset="0"/>
-                <a:ea typeface="Cambria" pitchFamily="34" charset="-122"/>
-                <a:cs typeface="Cambria" pitchFamily="34" charset="-120"/>
-              </a:rPr>
-              <a:t>Adding ASC compression to SARCASTIC</a:t>
-            </a:r>
-            <a:endParaRPr lang="en-US" sz="2500" dirty="0"/>
-          </a:p>
-        </p:txBody>
-      </p:sp>
-      <p:sp>
-        <p:nvSpPr>
-          <p:cNvPr id="4" name="Shape 2"/>
-          <p:cNvSpPr/>
-          <p:nvPr/>
-        </p:nvSpPr>
-        <p:spPr>
-          <a:xfrm>
-            <a:off x="548640" y="1901952"/>
-            <a:ext cx="502920" cy="502920"/>
-          </a:xfrm>
-          <a:prstGeom prst="ellipse">
-            <a:avLst/>
-          </a:prstGeom>
-          <a:solidFill>
-            <a:srgbClr val="FF9E2C"/>
-          </a:solidFill>
-          <a:ln/>
-        </p:spPr>
-      </p:sp>
-      <p:sp>
-        <p:nvSpPr>
-          <p:cNvPr id="5" name="Text 3"/>
-          <p:cNvSpPr/>
-          <p:nvPr/>
-        </p:nvSpPr>
-        <p:spPr>
-          <a:xfrm>
-            <a:off x="548640" y="1901952"/>
-            <a:ext cx="502920" cy="502920"/>
-          </a:xfrm>
-          <a:prstGeom prst="rect">
-            <a:avLst/>
-          </a:prstGeom>
-          <a:noFill/>
-          <a:ln/>
-        </p:spPr>
-        <p:txBody>
-          <a:bodyPr wrap="square" lIns="0" tIns="0" rIns="0" bIns="0" rtlCol="0" anchor="ctr"/>
-          <a:lstStyle/>
-          <a:p>
-            <a:pPr marL="0" indent="0" algn="ctr">
-              <a:buNone/>
-            </a:pPr>
-            <a:r>
-              <a:rPr lang="en-US" sz="1700" b="1" dirty="0">
-                <a:solidFill>
-                  <a:srgbClr val="12161C"/>
-                </a:solidFill>
-                <a:latin typeface="Cambria" pitchFamily="34" charset="0"/>
-                <a:ea typeface="Cambria" pitchFamily="34" charset="-122"/>
-                <a:cs typeface="Cambria" pitchFamily="34" charset="-120"/>
-              </a:rPr>
-              <a:t>1</a:t>
-            </a:r>
-            <a:endParaRPr lang="en-US" sz="1700" dirty="0"/>
-          </a:p>
-        </p:txBody>
-      </p:sp>
-      <p:sp>
-        <p:nvSpPr>
-          <p:cNvPr id="6" name="Text 4"/>
-          <p:cNvSpPr/>
-          <p:nvPr/>
-        </p:nvSpPr>
-        <p:spPr>
-          <a:xfrm>
-            <a:off x="1280160" y="1828800"/>
-            <a:ext cx="10332720" cy="1234440"/>
-          </a:xfrm>
-          <a:prstGeom prst="rect">
-            <a:avLst/>
-          </a:prstGeom>
-          <a:noFill/>
-          <a:ln/>
-        </p:spPr>
-        <p:txBody>
-          <a:bodyPr wrap="square" lIns="0" tIns="0" rIns="0" bIns="0" rtlCol="0" anchor="t"/>
-          <a:lstStyle/>
-          <a:p>
-            <a:pPr marL="0" indent="0">
-              <a:lnSpc>
-                <a:spcPct val="112000"/>
-              </a:lnSpc>
-              <a:buNone/>
-            </a:pPr>
-            <a:r>
-              <a:rPr lang="en-US" sz="1450" b="1" dirty="0">
-                <a:solidFill>
-                  <a:srgbClr val="141A22"/>
-                </a:solidFill>
-                <a:latin typeface="Calibri" pitchFamily="34" charset="0"/>
-                <a:ea typeface="Calibri" pitchFamily="34" charset="-122"/>
-                <a:cs typeface="Calibri" pitchFamily="34" charset="-120"/>
-              </a:rPr>
-              <a:t>1. Extract (reuse as-is)
-</a:t>
-            </a:r>
-            <a:r>
-              <a:rPr lang="en-US" sz="1250" dirty="0">
-                <a:solidFill>
-                  <a:srgbClr val="5B6672"/>
-                </a:solidFill>
-                <a:latin typeface="Calibri" pitchFamily="34" charset="0"/>
-                <a:ea typeface="Calibri" pitchFamily="34" charset="-122"/>
-                <a:cs typeface="Calibri" pitchFamily="34" charset="-120"/>
-              </a:rPr>
-              <a:t>Isolate the structure’s CAD sub-mesh, sweep aspect angle with the unmodified SARCASTIC/SARTrace binary — produces the wideband, multi-aspect training data.</a:t>
-            </a:r>
-            <a:endParaRPr lang="en-US" sz="1450" dirty="0"/>
-          </a:p>
-        </p:txBody>
-      </p:sp>
-      <p:sp>
-        <p:nvSpPr>
-          <p:cNvPr id="7" name="Shape 5"/>
-          <p:cNvSpPr/>
-          <p:nvPr/>
-        </p:nvSpPr>
-        <p:spPr>
-          <a:xfrm>
-            <a:off x="548640" y="3136392"/>
-            <a:ext cx="502920" cy="502920"/>
-          </a:xfrm>
-          <a:prstGeom prst="ellipse">
-            <a:avLst/>
-          </a:prstGeom>
-          <a:solidFill>
-            <a:srgbClr val="4FD8EB"/>
-          </a:solidFill>
-          <a:ln/>
-        </p:spPr>
-      </p:sp>
-      <p:sp>
-        <p:nvSpPr>
-          <p:cNvPr id="8" name="Text 6"/>
-          <p:cNvSpPr/>
-          <p:nvPr/>
-        </p:nvSpPr>
-        <p:spPr>
-          <a:xfrm>
-            <a:off x="548640" y="3136392"/>
-            <a:ext cx="502920" cy="502920"/>
-          </a:xfrm>
-          <a:prstGeom prst="rect">
-            <a:avLst/>
-          </a:prstGeom>
-          <a:noFill/>
-          <a:ln/>
-        </p:spPr>
-        <p:txBody>
-          <a:bodyPr wrap="square" lIns="0" tIns="0" rIns="0" bIns="0" rtlCol="0" anchor="ctr"/>
-          <a:lstStyle/>
-          <a:p>
-            <a:pPr marL="0" indent="0" algn="ctr">
-              <a:buNone/>
-            </a:pPr>
-            <a:r>
-              <a:rPr lang="en-US" sz="1700" b="1" dirty="0">
-                <a:solidFill>
-                  <a:srgbClr val="12161C"/>
-                </a:solidFill>
-                <a:latin typeface="Cambria" pitchFamily="34" charset="0"/>
-                <a:ea typeface="Cambria" pitchFamily="34" charset="-122"/>
-                <a:cs typeface="Cambria" pitchFamily="34" charset="-120"/>
-              </a:rPr>
-              <a:t>2</a:t>
-            </a:r>
-            <a:endParaRPr lang="en-US" sz="1700" dirty="0"/>
-          </a:p>
-        </p:txBody>
-      </p:sp>
-      <p:sp>
-        <p:nvSpPr>
-          <p:cNvPr id="9" name="Text 7"/>
-          <p:cNvSpPr/>
-          <p:nvPr/>
-        </p:nvSpPr>
-        <p:spPr>
-          <a:xfrm>
-            <a:off x="1280160" y="3063240"/>
-            <a:ext cx="10332720" cy="1234440"/>
-          </a:xfrm>
-          <a:prstGeom prst="rect">
-            <a:avLst/>
-          </a:prstGeom>
-          <a:noFill/>
-          <a:ln/>
-        </p:spPr>
-        <p:txBody>
-          <a:bodyPr wrap="square" lIns="0" tIns="0" rIns="0" bIns="0" rtlCol="0" anchor="t"/>
-          <a:lstStyle/>
-          <a:p>
-            <a:pPr marL="0" indent="0">
-              <a:lnSpc>
-                <a:spcPct val="112000"/>
-              </a:lnSpc>
-              <a:buNone/>
-            </a:pPr>
-            <a:r>
-              <a:rPr lang="en-US" sz="1450" b="1" dirty="0">
-                <a:solidFill>
-                  <a:srgbClr val="141A22"/>
-                </a:solidFill>
-                <a:latin typeface="Calibri" pitchFamily="34" charset="0"/>
-                <a:ea typeface="Calibri" pitchFamily="34" charset="-122"/>
-                <a:cs typeface="Calibri" pitchFamily="34" charset="-120"/>
-              </a:rPr>
-              <a:t>2. Fit (new, external)
-</a:t>
-            </a:r>
-            <a:r>
-              <a:rPr lang="en-US" sz="1250" dirty="0">
-                <a:solidFill>
-                  <a:srgbClr val="5B6672"/>
-                </a:solidFill>
-                <a:latin typeface="Calibri" pitchFamily="34" charset="0"/>
-                <a:ea typeface="Calibri" pitchFamily="34" charset="-122"/>
-                <a:cs typeface="Calibri" pitchFamily="34" charset="-120"/>
-              </a:rPr>
-              <a:t>A Python CLEAN / matrix-pencil tool reads the resulting CPHD via cphdInfo and outputs a compact ASC parameter table — no C++ changes needed for this stage.</a:t>
-            </a:r>
-            <a:endParaRPr lang="en-US" sz="1450" dirty="0"/>
-          </a:p>
-        </p:txBody>
-      </p:sp>
-      <p:sp>
-        <p:nvSpPr>
-          <p:cNvPr id="10" name="Shape 8"/>
-          <p:cNvSpPr/>
-          <p:nvPr/>
-        </p:nvSpPr>
-        <p:spPr>
-          <a:xfrm>
-            <a:off x="548640" y="4370832"/>
-            <a:ext cx="502920" cy="502920"/>
-          </a:xfrm>
-          <a:prstGeom prst="ellipse">
-            <a:avLst/>
-          </a:prstGeom>
-          <a:solidFill>
-            <a:srgbClr val="FF9E2C"/>
-          </a:solidFill>
-          <a:ln/>
-        </p:spPr>
-      </p:sp>
-      <p:sp>
-        <p:nvSpPr>
-          <p:cNvPr id="11" name="Text 9"/>
-          <p:cNvSpPr/>
-          <p:nvPr/>
-        </p:nvSpPr>
-        <p:spPr>
-          <a:xfrm>
-            <a:off x="548640" y="4370832"/>
-            <a:ext cx="502920" cy="502920"/>
-          </a:xfrm>
-          <a:prstGeom prst="rect">
-            <a:avLst/>
-          </a:prstGeom>
-          <a:noFill/>
-          <a:ln/>
-        </p:spPr>
-        <p:txBody>
-          <a:bodyPr wrap="square" lIns="0" tIns="0" rIns="0" bIns="0" rtlCol="0" anchor="ctr"/>
-          <a:lstStyle/>
-          <a:p>
-            <a:pPr marL="0" indent="0" algn="ctr">
-              <a:buNone/>
-            </a:pPr>
-            <a:r>
-              <a:rPr lang="en-US" sz="1700" b="1" dirty="0">
-                <a:solidFill>
-                  <a:srgbClr val="12161C"/>
-                </a:solidFill>
-                <a:latin typeface="Cambria" pitchFamily="34" charset="0"/>
-                <a:ea typeface="Cambria" pitchFamily="34" charset="-122"/>
-                <a:cs typeface="Cambria" pitchFamily="34" charset="-120"/>
-              </a:rPr>
-              <a:t>3</a:t>
-            </a:r>
-            <a:endParaRPr lang="en-US" sz="1700" dirty="0"/>
-          </a:p>
-        </p:txBody>
-      </p:sp>
-      <p:sp>
-        <p:nvSpPr>
-          <p:cNvPr id="12" name="Text 10"/>
-          <p:cNvSpPr/>
-          <p:nvPr/>
-        </p:nvSpPr>
-        <p:spPr>
-          <a:xfrm>
-            <a:off x="1280160" y="4297680"/>
-            <a:ext cx="10332720" cy="1234440"/>
-          </a:xfrm>
-          <a:prstGeom prst="rect">
-            <a:avLst/>
-          </a:prstGeom>
-          <a:noFill/>
-          <a:ln/>
-        </p:spPr>
-        <p:txBody>
-          <a:bodyPr wrap="square" lIns="0" tIns="0" rIns="0" bIns="0" rtlCol="0" anchor="t"/>
-          <a:lstStyle/>
-          <a:p>
-            <a:pPr marL="0" indent="0">
-              <a:lnSpc>
-                <a:spcPct val="112000"/>
-              </a:lnSpc>
-              <a:buNone/>
-            </a:pPr>
-            <a:r>
-              <a:rPr lang="en-US" sz="1450" b="1" dirty="0">
-                <a:solidFill>
-                  <a:srgbClr val="141A22"/>
-                </a:solidFill>
-                <a:latin typeface="Calibri" pitchFamily="34" charset="0"/>
-                <a:ea typeface="Calibri" pitchFamily="34" charset="-122"/>
-                <a:cs typeface="Calibri" pitchFamily="34" charset="-120"/>
-              </a:rPr>
-              <a:t>3. Evaluate (new, in-core)
-</a:t>
-            </a:r>
-            <a:r>
-              <a:rPr lang="en-US" sz="1250" dirty="0">
-                <a:solidFill>
-                  <a:srgbClr val="5B6672"/>
-                </a:solidFill>
-                <a:latin typeface="Calibri" pitchFamily="34" charset="0"/>
-                <a:ea typeface="Calibri" pitchFamily="34" charset="-122"/>
-                <a:cs typeface="Calibri" pitchFamily="34" charset="-120"/>
-              </a:rPr>
-              <a:t>ascField.cpp, parallel to cpuPOField.cpp: facet stays in the BVH for occlusion but opts out of RCS.c; one shadow ray per pulse gates the contribution; threadCore.cpp combines it additively with a per-pulse validity-sector fallback to full ray tracing.</a:t>
-            </a:r>
-            <a:endParaRPr lang="en-US" sz="1450" dirty="0"/>
-          </a:p>
-        </p:txBody>
-      </p:sp>
-      <p:sp>
-        <p:nvSpPr>
-          <p:cNvPr id="13" name="Text 11"/>
-          <p:cNvSpPr/>
-          <p:nvPr/>
-        </p:nvSpPr>
-        <p:spPr>
-          <a:xfrm>
-            <a:off x="548640" y="5577840"/>
-            <a:ext cx="10698480" cy="548640"/>
-          </a:xfrm>
-          <a:prstGeom prst="rect">
-            <a:avLst/>
-          </a:prstGeom>
-          <a:noFill/>
-          <a:ln/>
-        </p:spPr>
-        <p:txBody>
-          <a:bodyPr wrap="square" lIns="0" tIns="0" rIns="0" bIns="0" rtlCol="0" anchor="ctr"/>
-          <a:lstStyle/>
-          <a:p>
-            <a:pPr marL="0" indent="0">
-              <a:lnSpc>
-                <a:spcPct val="110000"/>
-              </a:lnSpc>
-              <a:buNone/>
-            </a:pPr>
-            <a:r>
-              <a:rPr lang="en-US" sz="1250" i="1" dirty="0">
-                <a:solidFill>
-                  <a:srgbClr val="B85C00"/>
-                </a:solidFill>
-                <a:latin typeface="Calibri" pitchFamily="34" charset="0"/>
-                <a:ea typeface="Calibri" pitchFamily="34" charset="-122"/>
-                <a:cs typeface="Calibri" pitchFamily="34" charset="-120"/>
-              </a:rPr>
-              <a:t>Same mechanism, dual purpose: the parallel-evaluator-plus-additive-injection pattern here is exactly what target injection needs too — one piece of infrastructure serves both.</a:t>
-            </a:r>
-            <a:endParaRPr lang="en-US" sz="1250" dirty="0"/>
+        </p:spPr>
+        <p:txBody>
+          <a:bodyPr wrap="none" rtlCol="0">
+            <a:spAutoFit/>
+          </a:bodyPr>
+          <a:lstStyle/>
+          <a:p>
+            <a:r>
+              <a:rPr lang="en-US" dirty="0"/>
+              <a:t>Backup Slides</a:t>
+            </a:r>
           </a:p>
         </p:txBody>
       </p:sp>
     </p:spTree>
     <p:extLst>
       <p:ext uri="{BB962C8B-B14F-4D97-AF65-F5344CB8AC3E}">
-        <p14:creationId xmlns:p14="http://schemas.microsoft.com/office/powerpoint/2010/main" val="737475423"/>
+        <p14:creationId xmlns:p14="http://schemas.microsoft.com/office/powerpoint/2010/main" val="3953220828"/>
       </p:ext>
     </p:extLst>
   </p:cSld>
@@ -17460,6 +18636,45 @@
         </p:nvSpPr>
         <p:spPr>
           <a:xfrm>
+            <a:off x="548640" y="365760"/>
+            <a:ext cx="9144000" cy="292608"/>
+          </a:xfrm>
+          <a:prstGeom prst="rect">
+            <a:avLst/>
+          </a:prstGeom>
+          <a:noFill/>
+          <a:ln/>
+        </p:spPr>
+        <p:txBody>
+          <a:bodyPr wrap="square" lIns="0" tIns="0" rIns="0" bIns="0" rtlCol="0" anchor="ctr"/>
+          <a:lstStyle/>
+          <a:p>
+            <a:pPr marL="0" indent="0">
+              <a:buNone/>
+            </a:pPr>
+            <a:r>
+              <a:rPr lang="en-US" sz="1200" b="1" kern="0" spc="200" dirty="0">
+                <a:solidFill>
+                  <a:srgbClr val="B85C00"/>
+                </a:solidFill>
+                <a:latin typeface="Calibri" pitchFamily="34" charset="0"/>
+                <a:ea typeface="Calibri" pitchFamily="34" charset="-122"/>
+                <a:cs typeface="Calibri" pitchFamily="34" charset="-120"/>
+              </a:rPr>
+              <a:t>CASE STUDY</a:t>
+            </a:r>
+            <a:endParaRPr lang="en-US" sz="1200" dirty="0"/>
+          </a:p>
+        </p:txBody>
+      </p:sp>
+      <p:sp>
+        <p:nvSpPr>
+          <p:cNvPr id="3" name="Text 1"/>
+          <p:cNvSpPr/>
+          <p:nvPr/>
+        </p:nvSpPr>
+        <p:spPr>
+          <a:xfrm>
             <a:off x="548640" y="658368"/>
             <a:ext cx="10881360" cy="868680"/>
           </a:xfrm>
@@ -17477,7 +18692,7 @@
               <a:buNone/>
             </a:pPr>
             <a:r>
-              <a:rPr lang="en-US" sz="3400" b="1" dirty="0">
+              <a:rPr lang="en-US" sz="2800" b="1" dirty="0">
                 <a:solidFill>
                   <a:srgbClr val="141A22"/>
                 </a:solidFill>
@@ -17485,22 +18700,22 @@
                 <a:ea typeface="Cambria" pitchFamily="34" charset="-122"/>
                 <a:cs typeface="Cambria" pitchFamily="34" charset="-120"/>
               </a:rPr>
-              <a:t>Summary</a:t>
-            </a:r>
-            <a:endParaRPr lang="en-US" sz="3400" dirty="0"/>
-          </a:p>
-        </p:txBody>
-      </p:sp>
-      <p:sp>
-        <p:nvSpPr>
-          <p:cNvPr id="3" name="Text 1"/>
-          <p:cNvSpPr/>
-          <p:nvPr/>
-        </p:nvSpPr>
-        <p:spPr>
-          <a:xfrm>
-            <a:off x="548640" y="1554480"/>
-            <a:ext cx="10698480" cy="822960"/>
+              <a:t>Extending SARCASTIC</a:t>
+            </a:r>
+            <a:endParaRPr lang="en-US" sz="2800" dirty="0"/>
+          </a:p>
+        </p:txBody>
+      </p:sp>
+      <p:sp>
+        <p:nvSpPr>
+          <p:cNvPr id="4" name="Text 2"/>
+          <p:cNvSpPr/>
+          <p:nvPr/>
+        </p:nvSpPr>
+        <p:spPr>
+          <a:xfrm>
+            <a:off x="548640" y="1691640"/>
+            <a:ext cx="10515600" cy="2194560"/>
           </a:xfrm>
           <a:prstGeom prst="rect">
             <a:avLst/>
@@ -17509,48 +18724,76 @@
           <a:ln/>
         </p:spPr>
         <p:txBody>
-          <a:bodyPr wrap="square" lIns="0" tIns="0" rIns="0" bIns="0" rtlCol="0" anchor="ctr"/>
-          <a:lstStyle/>
-          <a:p>
-            <a:pPr marL="0" indent="0">
+          <a:bodyPr wrap="square" lIns="0" tIns="0" rIns="0" bIns="0" rtlCol="0" anchor="t"/>
+          <a:lstStyle/>
+          <a:p>
+            <a:pPr marL="203200" indent="-203200">
               <a:lnSpc>
-                <a:spcPct val="115000"/>
+                <a:spcPct val="112000"/>
               </a:lnSpc>
-              <a:buNone/>
-            </a:pPr>
-            <a:r>
-              <a:rPr lang="en-US" sz="1500" i="1" dirty="0">
-                <a:solidFill>
-                  <a:srgbClr val="5B6672"/>
+              <a:spcAft>
+                <a:spcPts val="1600"/>
+              </a:spcAft>
+              <a:buSzPct val="100000"/>
+              <a:buChar char="•"/>
+            </a:pPr>
+            <a:r>
+              <a:rPr lang="en-US" sz="1550" dirty="0">
+                <a:solidFill>
+                  <a:srgbClr val="141A22"/>
                 </a:solidFill>
                 <a:latin typeface="Calibri" pitchFamily="34" charset="0"/>
                 <a:ea typeface="Calibri" pitchFamily="34" charset="-122"/>
                 <a:cs typeface="Calibri" pitchFamily="34" charset="-120"/>
               </a:rPr>
-              <a:t>SAR simulation from a 3D scene is a physics forward-model problem wearing a graphics costume -- geometry and ray tracing infrastructure transfer</a:t>
-            </a:r>
-            <a:endParaRPr lang="en-US" sz="1500" dirty="0"/>
-          </a:p>
-        </p:txBody>
-      </p:sp>
-      <p:sp>
-        <p:nvSpPr>
-          <p:cNvPr id="4" name="Shape 2"/>
-          <p:cNvSpPr/>
-          <p:nvPr/>
-        </p:nvSpPr>
-        <p:spPr>
-          <a:xfrm>
-            <a:off x="548640" y="2606040"/>
-            <a:ext cx="2560320" cy="2377440"/>
+              <a:t>Dstl’s SARCASTIC is the real-world reference implementation of the SBR approach from Step 2 — a working GPU/CPU shooting-and-bouncing-rays SAR simulator, validated against real CAD-model targets</a:t>
+            </a:r>
+            <a:endParaRPr lang="en-US" sz="1550" dirty="0"/>
+          </a:p>
+          <a:p>
+            <a:pPr marL="203200" indent="-203200">
+              <a:lnSpc>
+                <a:spcPct val="112000"/>
+              </a:lnSpc>
+              <a:spcAft>
+                <a:spcPts val="1600"/>
+              </a:spcAft>
+              <a:buSzPct val="100000"/>
+              <a:buChar char="•"/>
+            </a:pPr>
+            <a:r>
+              <a:rPr lang="en-US" sz="1550" dirty="0">
+                <a:solidFill>
+                  <a:srgbClr val="141A22"/>
+                </a:solidFill>
+                <a:latin typeface="Calibri" pitchFamily="34" charset="0"/>
+                <a:ea typeface="Calibri" pitchFamily="34" charset="-122"/>
+                <a:cs typeface="Calibri" pitchFamily="34" charset="-120"/>
+              </a:rPr>
+              <a:t>What follows: concretely what it computes today, and what it’d take to add this deck’s polarimetry and ASC speedup to it</a:t>
+            </a:r>
+            <a:endParaRPr lang="en-US" sz="1550" dirty="0"/>
+          </a:p>
+        </p:txBody>
+      </p:sp>
+      <p:sp>
+        <p:nvSpPr>
+          <p:cNvPr id="5" name="Shape 3"/>
+          <p:cNvSpPr/>
+          <p:nvPr/>
+        </p:nvSpPr>
+        <p:spPr>
+          <a:xfrm>
+            <a:off x="548640" y="4069080"/>
+            <a:ext cx="10698480" cy="1554480"/>
           </a:xfrm>
           <a:prstGeom prst="roundRect">
             <a:avLst>
-              <a:gd name="adj" fmla="val 3077"/>
+              <a:gd name="adj" fmla="val 4706"/>
             </a:avLst>
           </a:prstGeom>
           <a:solidFill>
-            <a:srgbClr val="F1F4F8"/>
+            <a:srgbClr val="E6EAF0"/>
           </a:solidFill>
           <a:ln/>
           <a:effectLst>
@@ -17564,628 +18807,92 @@
       </p:sp>
       <p:sp>
         <p:nvSpPr>
-          <p:cNvPr id="5" name="Shape 3"/>
-          <p:cNvSpPr/>
-          <p:nvPr/>
-        </p:nvSpPr>
-        <p:spPr>
-          <a:xfrm>
-            <a:off x="1463040" y="2880360"/>
-            <a:ext cx="731520" cy="731520"/>
-          </a:xfrm>
-          <a:prstGeom prst="ellipse">
-            <a:avLst/>
-          </a:prstGeom>
-          <a:solidFill>
-            <a:srgbClr val="FF9E2C"/>
-          </a:solidFill>
-          <a:ln/>
-        </p:spPr>
-      </p:sp>
-      <p:pic>
-        <p:nvPicPr>
-          <p:cNvPr id="6" name="Image 0" descr="/sessions/sweet-friendly-mayer/mnt/outputs/presentation/icons/FaLayerGroup_dark.png"/>
-          <p:cNvPicPr>
-            <a:picLocks noChangeAspect="1"/>
-          </p:cNvPicPr>
-          <p:nvPr/>
-        </p:nvPicPr>
-        <p:blipFill>
-          <a:blip r:embed="rId3"/>
-          <a:stretch>
-            <a:fillRect/>
-          </a:stretch>
-        </p:blipFill>
-        <p:spPr>
-          <a:xfrm>
-            <a:off x="1660550" y="3077870"/>
-            <a:ext cx="336499" cy="336499"/>
+          <p:cNvPr id="6" name="Text 4"/>
+          <p:cNvSpPr/>
+          <p:nvPr/>
+        </p:nvSpPr>
+        <p:spPr>
+          <a:xfrm>
+            <a:off x="822960" y="4251960"/>
+            <a:ext cx="10149840" cy="1188720"/>
           </a:xfrm>
           <a:prstGeom prst="rect">
             <a:avLst/>
           </a:prstGeom>
-        </p:spPr>
-      </p:pic>
-      <p:sp>
-        <p:nvSpPr>
-          <p:cNvPr id="7" name="Text 4"/>
-          <p:cNvSpPr/>
-          <p:nvPr/>
-        </p:nvSpPr>
-        <p:spPr>
-          <a:xfrm>
-            <a:off x="548640" y="3749040"/>
-            <a:ext cx="2560320" cy="365760"/>
-          </a:xfrm>
-          <a:prstGeom prst="rect">
-            <a:avLst/>
-          </a:prstGeom>
           <a:noFill/>
           <a:ln/>
         </p:spPr>
         <p:txBody>
-          <a:bodyPr wrap="square" lIns="0" tIns="0" rIns="0" bIns="0" rtlCol="0" anchor="ctr"/>
-          <a:lstStyle/>
-          <a:p>
-            <a:pPr marL="0" indent="0" algn="ctr">
+          <a:bodyPr wrap="square" lIns="0" tIns="0" rIns="0" bIns="0" rtlCol="0" anchor="t"/>
+          <a:lstStyle/>
+          <a:p>
+            <a:pPr marL="0" indent="0">
+              <a:lnSpc>
+                <a:spcPct val="120000"/>
+              </a:lnSpc>
               <a:buNone/>
             </a:pPr>
             <a:r>
-              <a:rPr lang="en-US" sz="1400" b="1" dirty="0">
-                <a:solidFill>
-                  <a:srgbClr val="141A22"/>
+              <a:rPr lang="en-US" sz="1300" b="1" dirty="0">
+                <a:solidFill>
+                  <a:srgbClr val="B85C00"/>
                 </a:solidFill>
                 <a:latin typeface="Calibri" pitchFamily="34" charset="0"/>
                 <a:ea typeface="Calibri" pitchFamily="34" charset="-122"/>
                 <a:cs typeface="Calibri" pitchFamily="34" charset="-120"/>
               </a:rPr>
-              <a:t>Multi-bounce</a:t>
-            </a:r>
-            <a:endParaRPr lang="en-US" sz="1400" dirty="0"/>
-          </a:p>
-        </p:txBody>
-      </p:sp>
-      <p:sp>
-        <p:nvSpPr>
-          <p:cNvPr id="8" name="Text 5"/>
-          <p:cNvSpPr/>
-          <p:nvPr/>
-        </p:nvSpPr>
-        <p:spPr>
-          <a:xfrm>
-            <a:off x="685800" y="4114800"/>
-            <a:ext cx="2286000" cy="777240"/>
-          </a:xfrm>
-          <a:prstGeom prst="rect">
-            <a:avLst/>
-          </a:prstGeom>
-          <a:noFill/>
-          <a:ln/>
-        </p:spPr>
-        <p:txBody>
-          <a:bodyPr wrap="square" lIns="0" tIns="0" rIns="0" bIns="0" rtlCol="0" anchor="ctr"/>
-          <a:lstStyle/>
-          <a:p>
-            <a:pPr marL="0" indent="0" algn="ctr">
-              <a:lnSpc>
-                <a:spcPct val="110000"/>
-              </a:lnSpc>
-              <a:buNone/>
-            </a:pPr>
-            <a:r>
-              <a:rPr lang="en-US" sz="1100" i="1" dirty="0">
-                <a:solidFill>
-                  <a:srgbClr val="5B6672"/>
+              <a:t>Reference:  </a:t>
+            </a:r>
+            <a:r>
+              <a:rPr lang="en-US" sz="1300" dirty="0">
+                <a:solidFill>
+                  <a:srgbClr val="141A22"/>
                 </a:solidFill>
                 <a:latin typeface="Calibri" pitchFamily="34" charset="0"/>
                 <a:ea typeface="Calibri" pitchFamily="34" charset="-122"/>
                 <a:cs typeface="Calibri" pitchFamily="34" charset="-120"/>
               </a:rPr>
-              <a:t>Resolvable RCS contributors, not aesthetic reflections</a:t>
-            </a:r>
-            <a:endParaRPr lang="en-US" sz="1100" dirty="0"/>
-          </a:p>
-        </p:txBody>
-      </p:sp>
-      <p:sp>
-        <p:nvSpPr>
-          <p:cNvPr id="9" name="Shape 6"/>
-          <p:cNvSpPr/>
-          <p:nvPr/>
-        </p:nvSpPr>
-        <p:spPr>
-          <a:xfrm>
-            <a:off x="3310128" y="2606040"/>
-            <a:ext cx="2560320" cy="2377440"/>
-          </a:xfrm>
-          <a:prstGeom prst="roundRect">
-            <a:avLst>
-              <a:gd name="adj" fmla="val 3077"/>
-            </a:avLst>
-          </a:prstGeom>
-          <a:solidFill>
-            <a:srgbClr val="F1F4F8"/>
-          </a:solidFill>
-          <a:ln/>
-          <a:effectLst>
-            <a:outerShdw blurRad="101600" dist="38100" dir="5400000" algn="bl" rotWithShape="0">
-              <a:srgbClr val="9AA5B1">
-                <a:alpha val="22000"/>
-              </a:srgbClr>
-            </a:outerShdw>
-          </a:effectLst>
-        </p:spPr>
-      </p:sp>
-      <p:sp>
-        <p:nvSpPr>
-          <p:cNvPr id="10" name="Shape 7"/>
-          <p:cNvSpPr/>
-          <p:nvPr/>
-        </p:nvSpPr>
-        <p:spPr>
-          <a:xfrm>
-            <a:off x="4224528" y="2880360"/>
-            <a:ext cx="731520" cy="731520"/>
-          </a:xfrm>
-          <a:prstGeom prst="ellipse">
-            <a:avLst/>
-          </a:prstGeom>
-          <a:solidFill>
-            <a:srgbClr val="FF9E2C"/>
-          </a:solidFill>
-          <a:ln/>
-        </p:spPr>
-      </p:sp>
-      <p:pic>
-        <p:nvPicPr>
-          <p:cNvPr id="11" name="Image 1" descr="/sessions/sweet-friendly-mayer/mnt/outputs/presentation/icons/FaCube_dark.png"/>
-          <p:cNvPicPr>
-            <a:picLocks noChangeAspect="1"/>
-          </p:cNvPicPr>
-          <p:nvPr/>
-        </p:nvPicPr>
-        <p:blipFill>
-          <a:blip r:embed="rId4"/>
-          <a:stretch>
-            <a:fillRect/>
-          </a:stretch>
-        </p:blipFill>
-        <p:spPr>
-          <a:xfrm>
-            <a:off x="4422038" y="3077870"/>
-            <a:ext cx="336499" cy="336499"/>
-          </a:xfrm>
-          <a:prstGeom prst="rect">
-            <a:avLst/>
-          </a:prstGeom>
-        </p:spPr>
-      </p:pic>
-      <p:sp>
-        <p:nvSpPr>
-          <p:cNvPr id="12" name="Text 8"/>
-          <p:cNvSpPr/>
-          <p:nvPr/>
-        </p:nvSpPr>
-        <p:spPr>
-          <a:xfrm>
-            <a:off x="3310128" y="3749040"/>
-            <a:ext cx="2560320" cy="365760"/>
-          </a:xfrm>
-          <a:prstGeom prst="rect">
-            <a:avLst/>
-          </a:prstGeom>
-          <a:noFill/>
-          <a:ln/>
-        </p:spPr>
-        <p:txBody>
-          <a:bodyPr wrap="square" lIns="0" tIns="0" rIns="0" bIns="0" rtlCol="0" anchor="ctr"/>
-          <a:lstStyle/>
-          <a:p>
-            <a:pPr marL="0" indent="0" algn="ctr">
+              <a:t>Blacknell et al., "SARCASTIC v2.0 — High-Performance SAR Simulation for Next-Generation ATR Systems," Remote Sensing, 2022.</a:t>
+            </a:r>
+            <a:endParaRPr lang="en-US" sz="1300" dirty="0"/>
+          </a:p>
+          <a:p>
+            <a:pPr marL="0" indent="0">
+              <a:lnSpc>
+                <a:spcPct val="120000"/>
+              </a:lnSpc>
               <a:buNone/>
             </a:pPr>
             <a:r>
-              <a:rPr lang="en-US" sz="1400" b="1" dirty="0">
-                <a:solidFill>
-                  <a:srgbClr val="141A22"/>
+              <a:rPr lang="en-US" sz="1300" b="1" dirty="0">
+                <a:solidFill>
+                  <a:srgbClr val="B85C00"/>
                 </a:solidFill>
                 <a:latin typeface="Calibri" pitchFamily="34" charset="0"/>
                 <a:ea typeface="Calibri" pitchFamily="34" charset="-122"/>
                 <a:cs typeface="Calibri" pitchFamily="34" charset="-120"/>
               </a:rPr>
-              <a:t>Material</a:t>
-            </a:r>
-            <a:endParaRPr lang="en-US" sz="1400" dirty="0"/>
-          </a:p>
-        </p:txBody>
-      </p:sp>
-      <p:sp>
-        <p:nvSpPr>
-          <p:cNvPr id="13" name="Text 9"/>
-          <p:cNvSpPr/>
-          <p:nvPr/>
-        </p:nvSpPr>
-        <p:spPr>
-          <a:xfrm>
-            <a:off x="3447288" y="4114800"/>
-            <a:ext cx="2286000" cy="777240"/>
-          </a:xfrm>
-          <a:prstGeom prst="rect">
-            <a:avLst/>
-          </a:prstGeom>
-          <a:noFill/>
-          <a:ln/>
-        </p:spPr>
-        <p:txBody>
-          <a:bodyPr wrap="square" lIns="0" tIns="0" rIns="0" bIns="0" rtlCol="0" anchor="ctr"/>
-          <a:lstStyle/>
-          <a:p>
-            <a:pPr marL="0" indent="0" algn="ctr">
+              <a:t>Code:  </a:t>
+            </a:r>
+            <a:endParaRPr lang="en-US" sz="1300" dirty="0"/>
+          </a:p>
+          <a:p>
+            <a:pPr marL="0" indent="0">
               <a:lnSpc>
-                <a:spcPct val="110000"/>
+                <a:spcPct val="120000"/>
               </a:lnSpc>
               <a:buNone/>
             </a:pPr>
             <a:r>
-              <a:rPr lang="en-US" sz="1100" i="1" dirty="0">
-                <a:solidFill>
-                  <a:srgbClr val="5B6672"/>
+              <a:rPr lang="en-US" sz="1300" dirty="0">
+                <a:solidFill>
+                  <a:srgbClr val="141A22"/>
                 </a:solidFill>
                 <a:latin typeface="Calibri" pitchFamily="34" charset="0"/>
                 <a:ea typeface="Calibri" pitchFamily="34" charset="-122"/>
                 <a:cs typeface="Calibri" pitchFamily="34" charset="-120"/>
               </a:rPr>
-              <a:t>EM permittivity, not albedo</a:t>
-            </a:r>
-            <a:endParaRPr lang="en-US" sz="1100" dirty="0"/>
-          </a:p>
-        </p:txBody>
-      </p:sp>
-      <p:sp>
-        <p:nvSpPr>
-          <p:cNvPr id="14" name="Shape 10"/>
-          <p:cNvSpPr/>
-          <p:nvPr/>
-        </p:nvSpPr>
-        <p:spPr>
-          <a:xfrm>
-            <a:off x="6071616" y="2606040"/>
-            <a:ext cx="2560320" cy="2377440"/>
-          </a:xfrm>
-          <a:prstGeom prst="roundRect">
-            <a:avLst>
-              <a:gd name="adj" fmla="val 3077"/>
-            </a:avLst>
-          </a:prstGeom>
-          <a:solidFill>
-            <a:srgbClr val="F1F4F8"/>
-          </a:solidFill>
-          <a:ln/>
-          <a:effectLst>
-            <a:outerShdw blurRad="101600" dist="38100" dir="5400000" algn="bl" rotWithShape="0">
-              <a:srgbClr val="9AA5B1">
-                <a:alpha val="22000"/>
-              </a:srgbClr>
-            </a:outerShdw>
-          </a:effectLst>
-        </p:spPr>
-      </p:sp>
-      <p:sp>
-        <p:nvSpPr>
-          <p:cNvPr id="15" name="Shape 11"/>
-          <p:cNvSpPr/>
-          <p:nvPr/>
-        </p:nvSpPr>
-        <p:spPr>
-          <a:xfrm>
-            <a:off x="6986016" y="2880360"/>
-            <a:ext cx="731520" cy="731520"/>
-          </a:xfrm>
-          <a:prstGeom prst="ellipse">
-            <a:avLst/>
-          </a:prstGeom>
-          <a:solidFill>
-            <a:srgbClr val="FF9E2C"/>
-          </a:solidFill>
-          <a:ln/>
-        </p:spPr>
-      </p:sp>
-      <p:pic>
-        <p:nvPicPr>
-          <p:cNvPr id="16" name="Image 2" descr="/sessions/sweet-friendly-mayer/mnt/outputs/presentation/icons/FaWaveSquare_dark.png"/>
-          <p:cNvPicPr>
-            <a:picLocks noChangeAspect="1"/>
-          </p:cNvPicPr>
-          <p:nvPr/>
-        </p:nvPicPr>
-        <p:blipFill>
-          <a:blip r:embed="rId5"/>
-          <a:stretch>
-            <a:fillRect/>
-          </a:stretch>
-        </p:blipFill>
-        <p:spPr>
-          <a:xfrm>
-            <a:off x="7183526" y="3077870"/>
-            <a:ext cx="336499" cy="336499"/>
-          </a:xfrm>
-          <a:prstGeom prst="rect">
-            <a:avLst/>
-          </a:prstGeom>
-        </p:spPr>
-      </p:pic>
-      <p:sp>
-        <p:nvSpPr>
-          <p:cNvPr id="17" name="Text 12"/>
-          <p:cNvSpPr/>
-          <p:nvPr/>
-        </p:nvSpPr>
-        <p:spPr>
-          <a:xfrm>
-            <a:off x="6071616" y="3749040"/>
-            <a:ext cx="2560320" cy="365760"/>
-          </a:xfrm>
-          <a:prstGeom prst="rect">
-            <a:avLst/>
-          </a:prstGeom>
-          <a:noFill/>
-          <a:ln/>
-        </p:spPr>
-        <p:txBody>
-          <a:bodyPr wrap="square" lIns="0" tIns="0" rIns="0" bIns="0" rtlCol="0" anchor="ctr"/>
-          <a:lstStyle/>
-          <a:p>
-            <a:pPr marL="0" indent="0" algn="ctr">
-              <a:buNone/>
-            </a:pPr>
-            <a:r>
-              <a:rPr lang="en-US" sz="1400" b="1" dirty="0">
-                <a:solidFill>
-                  <a:srgbClr val="141A22"/>
-                </a:solidFill>
-                <a:latin typeface="Calibri" pitchFamily="34" charset="0"/>
-                <a:ea typeface="Calibri" pitchFamily="34" charset="-122"/>
-                <a:cs typeface="Calibri" pitchFamily="34" charset="-120"/>
-              </a:rPr>
-              <a:t>Polarization</a:t>
-            </a:r>
-            <a:endParaRPr lang="en-US" sz="1400" dirty="0"/>
-          </a:p>
-        </p:txBody>
-      </p:sp>
-      <p:sp>
-        <p:nvSpPr>
-          <p:cNvPr id="18" name="Text 13"/>
-          <p:cNvSpPr/>
-          <p:nvPr/>
-        </p:nvSpPr>
-        <p:spPr>
-          <a:xfrm>
-            <a:off x="6208776" y="4114800"/>
-            <a:ext cx="2286000" cy="777240"/>
-          </a:xfrm>
-          <a:prstGeom prst="rect">
-            <a:avLst/>
-          </a:prstGeom>
-          <a:noFill/>
-          <a:ln/>
-        </p:spPr>
-        <p:txBody>
-          <a:bodyPr wrap="square" lIns="0" tIns="0" rIns="0" bIns="0" rtlCol="0" anchor="ctr"/>
-          <a:lstStyle/>
-          <a:p>
-            <a:pPr marL="0" indent="0" algn="ctr">
-              <a:lnSpc>
-                <a:spcPct val="110000"/>
-              </a:lnSpc>
-              <a:buNone/>
-            </a:pPr>
-            <a:r>
-              <a:rPr lang="en-US" sz="1100" i="1" dirty="0">
-                <a:solidFill>
-                  <a:srgbClr val="5B6672"/>
-                </a:solidFill>
-                <a:latin typeface="Calibri" pitchFamily="34" charset="0"/>
-                <a:ea typeface="Calibri" pitchFamily="34" charset="-122"/>
-                <a:cs typeface="Calibri" pitchFamily="34" charset="-120"/>
-              </a:rPr>
-              <a:t>Sinclair matrices, not colors</a:t>
-            </a:r>
-            <a:endParaRPr lang="en-US" sz="1100" dirty="0"/>
-          </a:p>
-        </p:txBody>
-      </p:sp>
-      <p:sp>
-        <p:nvSpPr>
-          <p:cNvPr id="19" name="Shape 14"/>
-          <p:cNvSpPr/>
-          <p:nvPr/>
-        </p:nvSpPr>
-        <p:spPr>
-          <a:xfrm>
-            <a:off x="8833104" y="2606040"/>
-            <a:ext cx="2560320" cy="2377440"/>
-          </a:xfrm>
-          <a:prstGeom prst="roundRect">
-            <a:avLst>
-              <a:gd name="adj" fmla="val 3077"/>
-            </a:avLst>
-          </a:prstGeom>
-          <a:solidFill>
-            <a:srgbClr val="F1F4F8"/>
-          </a:solidFill>
-          <a:ln/>
-          <a:effectLst>
-            <a:outerShdw blurRad="101600" dist="38100" dir="5400000" algn="bl" rotWithShape="0">
-              <a:srgbClr val="9AA5B1">
-                <a:alpha val="22000"/>
-              </a:srgbClr>
-            </a:outerShdw>
-          </a:effectLst>
-        </p:spPr>
-      </p:sp>
-      <p:sp>
-        <p:nvSpPr>
-          <p:cNvPr id="20" name="Shape 15"/>
-          <p:cNvSpPr/>
-          <p:nvPr/>
-        </p:nvSpPr>
-        <p:spPr>
-          <a:xfrm>
-            <a:off x="9747504" y="2880360"/>
-            <a:ext cx="731520" cy="731520"/>
-          </a:xfrm>
-          <a:prstGeom prst="ellipse">
-            <a:avLst/>
-          </a:prstGeom>
-          <a:solidFill>
-            <a:srgbClr val="FF9E2C"/>
-          </a:solidFill>
-          <a:ln/>
-        </p:spPr>
-      </p:sp>
-      <p:pic>
-        <p:nvPicPr>
-          <p:cNvPr id="21" name="Image 3" descr="/sessions/sweet-friendly-mayer/mnt/outputs/presentation/icons/FaCloudRain_dark.png"/>
-          <p:cNvPicPr>
-            <a:picLocks noChangeAspect="1"/>
-          </p:cNvPicPr>
-          <p:nvPr/>
-        </p:nvPicPr>
-        <p:blipFill>
-          <a:blip r:embed="rId6"/>
-          <a:stretch>
-            <a:fillRect/>
-          </a:stretch>
-        </p:blipFill>
-        <p:spPr>
-          <a:xfrm>
-            <a:off x="9945014" y="3077870"/>
-            <a:ext cx="336499" cy="336499"/>
-          </a:xfrm>
-          <a:prstGeom prst="rect">
-            <a:avLst/>
-          </a:prstGeom>
-        </p:spPr>
-      </p:pic>
-      <p:sp>
-        <p:nvSpPr>
-          <p:cNvPr id="22" name="Text 16"/>
-          <p:cNvSpPr/>
-          <p:nvPr/>
-        </p:nvSpPr>
-        <p:spPr>
-          <a:xfrm>
-            <a:off x="8833104" y="3749040"/>
-            <a:ext cx="2560320" cy="365760"/>
-          </a:xfrm>
-          <a:prstGeom prst="rect">
-            <a:avLst/>
-          </a:prstGeom>
-          <a:noFill/>
-          <a:ln/>
-        </p:spPr>
-        <p:txBody>
-          <a:bodyPr wrap="square" lIns="0" tIns="0" rIns="0" bIns="0" rtlCol="0" anchor="ctr"/>
-          <a:lstStyle/>
-          <a:p>
-            <a:pPr marL="0" indent="0" algn="ctr">
-              <a:buNone/>
-            </a:pPr>
-            <a:r>
-              <a:rPr lang="en-US" sz="1400" b="1" dirty="0">
-                <a:solidFill>
-                  <a:srgbClr val="141A22"/>
-                </a:solidFill>
-                <a:latin typeface="Calibri" pitchFamily="34" charset="0"/>
-                <a:ea typeface="Calibri" pitchFamily="34" charset="-122"/>
-                <a:cs typeface="Calibri" pitchFamily="34" charset="-120"/>
-              </a:rPr>
-              <a:t>Atmosphere</a:t>
-            </a:r>
-            <a:endParaRPr lang="en-US" sz="1400" dirty="0"/>
-          </a:p>
-        </p:txBody>
-      </p:sp>
-      <p:sp>
-        <p:nvSpPr>
-          <p:cNvPr id="23" name="Text 17"/>
-          <p:cNvSpPr/>
-          <p:nvPr/>
-        </p:nvSpPr>
-        <p:spPr>
-          <a:xfrm>
-            <a:off x="8970264" y="4114800"/>
-            <a:ext cx="2286000" cy="777240"/>
-          </a:xfrm>
-          <a:prstGeom prst="rect">
-            <a:avLst/>
-          </a:prstGeom>
-          <a:noFill/>
-          <a:ln/>
-        </p:spPr>
-        <p:txBody>
-          <a:bodyPr wrap="square" lIns="0" tIns="0" rIns="0" bIns="0" rtlCol="0" anchor="ctr"/>
-          <a:lstStyle/>
-          <a:p>
-            <a:pPr marL="0" indent="0" algn="ctr">
-              <a:lnSpc>
-                <a:spcPct val="110000"/>
-              </a:lnSpc>
-              <a:buNone/>
-            </a:pPr>
-            <a:r>
-              <a:rPr lang="en-US" sz="1100" i="1" dirty="0">
-                <a:solidFill>
-                  <a:srgbClr val="5B6672"/>
-                </a:solidFill>
-                <a:latin typeface="Calibri" pitchFamily="34" charset="0"/>
-                <a:ea typeface="Calibri" pitchFamily="34" charset="-122"/>
-                <a:cs typeface="Calibri" pitchFamily="34" charset="-120"/>
-              </a:rPr>
-              <a:t>Moving volumetric clutter, not a post-processing filter</a:t>
-            </a:r>
-            <a:endParaRPr lang="en-US" sz="1100" dirty="0"/>
-          </a:p>
-        </p:txBody>
-      </p:sp>
-      <p:sp>
-        <p:nvSpPr>
-          <p:cNvPr id="24" name="Text 18"/>
-          <p:cNvSpPr/>
-          <p:nvPr/>
-        </p:nvSpPr>
-        <p:spPr>
-          <a:xfrm>
-            <a:off x="548640" y="5257800"/>
-            <a:ext cx="10698480" cy="822960"/>
-          </a:xfrm>
-          <a:prstGeom prst="rect">
-            <a:avLst/>
-          </a:prstGeom>
-          <a:noFill/>
-          <a:ln/>
-        </p:spPr>
-        <p:txBody>
-          <a:bodyPr wrap="square" lIns="0" tIns="0" rIns="0" bIns="0" rtlCol="0" anchor="ctr"/>
-          <a:lstStyle/>
-          <a:p>
-            <a:pPr marL="0" indent="0">
-              <a:lnSpc>
-                <a:spcPct val="115000"/>
-              </a:lnSpc>
-              <a:buNone/>
-            </a:pPr>
-            <a:r>
-              <a:rPr lang="en-US" sz="1300" dirty="0">
-                <a:solidFill>
-                  <a:srgbClr val="0B7285"/>
-                </a:solidFill>
-                <a:latin typeface="Calibri" pitchFamily="34" charset="0"/>
-                <a:ea typeface="Calibri" pitchFamily="34" charset="-122"/>
-                <a:cs typeface="Calibri" pitchFamily="34" charset="-120"/>
-              </a:rPr>
-              <a:t>Next: prototype the point-scatterer forward sim first, layer in SBR multi-bounce + polarimetry, add ASC compression once re-tracing is the bottleneck, and weather whenever atmospheric fidelity matters.</a:t>
+              <a:t>github.com/dstl/sarcastic — archived/read-only as of Jan 2025, so any extension is a fork, not an upstream contribution.</a:t>
             </a:r>
             <a:endParaRPr lang="en-US" sz="1300" dirty="0"/>
           </a:p>
@@ -18194,7 +18901,7 @@
     </p:spTree>
     <p:extLst>
       <p:ext uri="{BB962C8B-B14F-4D97-AF65-F5344CB8AC3E}">
-        <p14:creationId xmlns:p14="http://schemas.microsoft.com/office/powerpoint/2010/main" val="423134737"/>
+        <p14:creationId xmlns:p14="http://schemas.microsoft.com/office/powerpoint/2010/main" val="914562532"/>
       </p:ext>
     </p:extLst>
   </p:cSld>
@@ -18223,43 +18930,262 @@
       </p:grpSpPr>
       <p:sp>
         <p:nvSpPr>
-          <p:cNvPr id="2" name="TextBox 1">
-            <a:extLst>
-              <a:ext uri="{FF2B5EF4-FFF2-40B4-BE49-F238E27FC236}">
-                <a16:creationId xmlns:a16="http://schemas.microsoft.com/office/drawing/2014/main" id="{C9681E14-5C07-F98B-314E-94E4012AD1FB}"/>
-              </a:ext>
-            </a:extLst>
-          </p:cNvPr>
-          <p:cNvSpPr txBox="1"/>
-          <p:nvPr/>
-        </p:nvSpPr>
-        <p:spPr>
-          <a:xfrm>
-            <a:off x="4306277" y="3235569"/>
-            <a:ext cx="1454501" cy="369332"/>
+          <p:cNvPr id="2" name="Text 0"/>
+          <p:cNvSpPr/>
+          <p:nvPr/>
+        </p:nvSpPr>
+        <p:spPr>
+          <a:xfrm>
+            <a:off x="548640" y="365760"/>
+            <a:ext cx="9144000" cy="292608"/>
           </a:xfrm>
           <a:prstGeom prst="rect">
             <a:avLst/>
           </a:prstGeom>
           <a:noFill/>
-        </p:spPr>
-        <p:txBody>
-          <a:bodyPr wrap="none" rtlCol="0">
-            <a:spAutoFit/>
-          </a:bodyPr>
-          <a:lstStyle/>
-          <a:p>
-            <a:r>
-              <a:rPr lang="en-US" dirty="0"/>
-              <a:t>Backup Slides</a:t>
-            </a:r>
+          <a:ln/>
+        </p:spPr>
+        <p:txBody>
+          <a:bodyPr wrap="square" lIns="0" tIns="0" rIns="0" bIns="0" rtlCol="0" anchor="ctr"/>
+          <a:lstStyle/>
+          <a:p>
+            <a:pPr marL="0" indent="0">
+              <a:buNone/>
+            </a:pPr>
+            <a:r>
+              <a:rPr lang="en-US" sz="1200" b="1" kern="0" spc="200" dirty="0">
+                <a:solidFill>
+                  <a:srgbClr val="B85C00"/>
+                </a:solidFill>
+                <a:latin typeface="Calibri" pitchFamily="34" charset="0"/>
+                <a:ea typeface="Calibri" pitchFamily="34" charset="-122"/>
+                <a:cs typeface="Calibri" pitchFamily="34" charset="-120"/>
+              </a:rPr>
+              <a:t>CASE STUDY, CONTINUED</a:t>
+            </a:r>
+            <a:endParaRPr lang="en-US" sz="1200" dirty="0"/>
+          </a:p>
+        </p:txBody>
+      </p:sp>
+      <p:sp>
+        <p:nvSpPr>
+          <p:cNvPr id="3" name="Text 1"/>
+          <p:cNvSpPr/>
+          <p:nvPr/>
+        </p:nvSpPr>
+        <p:spPr>
+          <a:xfrm>
+            <a:off x="548640" y="658368"/>
+            <a:ext cx="10881360" cy="868680"/>
+          </a:xfrm>
+          <a:prstGeom prst="rect">
+            <a:avLst/>
+          </a:prstGeom>
+          <a:noFill/>
+          <a:ln/>
+        </p:spPr>
+        <p:txBody>
+          <a:bodyPr wrap="square" lIns="0" tIns="0" rIns="0" bIns="0" rtlCol="0" anchor="t"/>
+          <a:lstStyle/>
+          <a:p>
+            <a:pPr marL="0" indent="0">
+              <a:buNone/>
+            </a:pPr>
+            <a:r>
+              <a:rPr lang="en-US" sz="2700" b="1" dirty="0">
+                <a:solidFill>
+                  <a:srgbClr val="141A22"/>
+                </a:solidFill>
+                <a:latin typeface="Cambria" pitchFamily="34" charset="0"/>
+                <a:ea typeface="Cambria" pitchFamily="34" charset="-122"/>
+                <a:cs typeface="Cambria" pitchFamily="34" charset="-120"/>
+              </a:rPr>
+              <a:t>What SARCASTIC computes today</a:t>
+            </a:r>
+            <a:endParaRPr lang="en-US" sz="2700" dirty="0"/>
+          </a:p>
+        </p:txBody>
+      </p:sp>
+      <p:sp>
+        <p:nvSpPr>
+          <p:cNvPr id="4" name="Text 2"/>
+          <p:cNvSpPr/>
+          <p:nvPr/>
+        </p:nvSpPr>
+        <p:spPr>
+          <a:xfrm>
+            <a:off x="548640" y="1691640"/>
+            <a:ext cx="10607040" cy="2468880"/>
+          </a:xfrm>
+          <a:prstGeom prst="rect">
+            <a:avLst/>
+          </a:prstGeom>
+          <a:noFill/>
+          <a:ln/>
+        </p:spPr>
+        <p:txBody>
+          <a:bodyPr wrap="square" lIns="0" tIns="0" rIns="0" bIns="0" rtlCol="0" anchor="t"/>
+          <a:lstStyle/>
+          <a:p>
+            <a:pPr marL="203200" indent="-203200">
+              <a:lnSpc>
+                <a:spcPct val="112000"/>
+              </a:lnSpc>
+              <a:spcAft>
+                <a:spcPts val="1400"/>
+              </a:spcAft>
+              <a:buSzPct val="100000"/>
+              <a:buChar char="•"/>
+            </a:pPr>
+            <a:r>
+              <a:rPr lang="en-US" sz="1450" dirty="0">
+                <a:solidFill>
+                  <a:srgbClr val="141A22"/>
+                </a:solidFill>
+                <a:latin typeface="Calibri" pitchFamily="34" charset="0"/>
+                <a:ea typeface="Calibri" pitchFamily="34" charset="-122"/>
+                <a:cs typeface="Calibri" pitchFamily="34" charset="-120"/>
+              </a:rPr>
+              <a:t>Scattering model is Knott’s physical optics for a flat PEC plate only — no permittivity, no Fresnel R_s/R_p anywhere in the derivation</a:t>
+            </a:r>
+            <a:endParaRPr lang="en-US" sz="1450" dirty="0"/>
+          </a:p>
+          <a:p>
+            <a:pPr marL="203200" indent="-203200">
+              <a:lnSpc>
+                <a:spcPct val="112000"/>
+              </a:lnSpc>
+              <a:spcAft>
+                <a:spcPts val="1400"/>
+              </a:spcAft>
+              <a:buSzPct val="100000"/>
+              <a:buChar char="•"/>
+            </a:pPr>
+            <a:r>
+              <a:rPr lang="en-US" sz="1450" dirty="0">
+                <a:solidFill>
+                  <a:srgbClr val="141A22"/>
+                </a:solidFill>
+                <a:latin typeface="Calibri" pitchFamily="34" charset="0"/>
+                <a:ea typeface="Calibri" pitchFamily="34" charset="-122"/>
+                <a:cs typeface="Calibri" pitchFamily="34" charset="-120"/>
+              </a:rPr>
+              <a:t>Polarization = one real 3-vector ĥ per ray, updated by geometric mirror reflection at each bounce — cross-pol only comes from bounce geometry (their own validation case is a dihedral), never from material response</a:t>
+            </a:r>
+            <a:endParaRPr lang="en-US" sz="1450" dirty="0"/>
+          </a:p>
+          <a:p>
+            <a:pPr marL="203200" indent="-203200">
+              <a:lnSpc>
+                <a:spcPct val="112000"/>
+              </a:lnSpc>
+              <a:spcAft>
+                <a:spcPts val="1400"/>
+              </a:spcAft>
+              <a:buSzPct val="100000"/>
+              <a:buChar char="•"/>
+            </a:pPr>
+            <a:r>
+              <a:rPr lang="en-US" sz="1450" dirty="0">
+                <a:solidFill>
+                  <a:srgbClr val="141A22"/>
+                </a:solidFill>
+                <a:latin typeface="Calibri" pitchFamily="34" charset="0"/>
+                <a:ea typeface="Calibri" pitchFamily="34" charset="-122"/>
+                <a:cs typeface="Calibri" pitchFamily="34" charset="-120"/>
+              </a:rPr>
+              <a:t>Maps to real source: RCS.c (scalar contribution) · reflect.cpp (per-bounce ĥ update) · cpuPOField.cpp (accumulation) · CPHD I/O via cphdShell/cphdInfo</a:t>
+            </a:r>
+            <a:endParaRPr lang="en-US" sz="1450" dirty="0"/>
+          </a:p>
+        </p:txBody>
+      </p:sp>
+      <p:sp>
+        <p:nvSpPr>
+          <p:cNvPr id="5" name="Shape 3"/>
+          <p:cNvSpPr/>
+          <p:nvPr/>
+        </p:nvSpPr>
+        <p:spPr>
+          <a:xfrm>
+            <a:off x="548640" y="4434840"/>
+            <a:ext cx="10698480" cy="1188720"/>
+          </a:xfrm>
+          <a:prstGeom prst="roundRect">
+            <a:avLst>
+              <a:gd name="adj" fmla="val 6154"/>
+            </a:avLst>
+          </a:prstGeom>
+          <a:solidFill>
+            <a:srgbClr val="E6EAF0"/>
+          </a:solidFill>
+          <a:ln/>
+          <a:effectLst>
+            <a:outerShdw blurRad="101600" dist="38100" dir="5400000" algn="bl" rotWithShape="0">
+              <a:srgbClr val="9AA5B1">
+                <a:alpha val="22000"/>
+              </a:srgbClr>
+            </a:outerShdw>
+          </a:effectLst>
+        </p:spPr>
+      </p:sp>
+      <p:sp>
+        <p:nvSpPr>
+          <p:cNvPr id="6" name="Text 4"/>
+          <p:cNvSpPr/>
+          <p:nvPr/>
+        </p:nvSpPr>
+        <p:spPr>
+          <a:xfrm>
+            <a:off x="822960" y="4434840"/>
+            <a:ext cx="10149840" cy="1188720"/>
+          </a:xfrm>
+          <a:prstGeom prst="rect">
+            <a:avLst/>
+          </a:prstGeom>
+          <a:noFill/>
+          <a:ln/>
+        </p:spPr>
+        <p:txBody>
+          <a:bodyPr wrap="square" lIns="0" tIns="0" rIns="0" bIns="0" rtlCol="0" anchor="ctr"/>
+          <a:lstStyle/>
+          <a:p>
+            <a:pPr marL="0" indent="0">
+              <a:lnSpc>
+                <a:spcPct val="115000"/>
+              </a:lnSpc>
+              <a:buNone/>
+            </a:pPr>
+            <a:r>
+              <a:rPr lang="en-US" sz="1400" b="1" dirty="0">
+                <a:solidFill>
+                  <a:srgbClr val="B85C00"/>
+                </a:solidFill>
+                <a:latin typeface="Calibri" pitchFamily="34" charset="0"/>
+                <a:ea typeface="Calibri" pitchFamily="34" charset="-122"/>
+                <a:cs typeface="Calibri" pitchFamily="34" charset="-120"/>
+              </a:rPr>
+              <a:t>Better starting point:  </a:t>
+            </a:r>
+            <a:r>
+              <a:rPr lang="en-US" sz="1400" dirty="0">
+                <a:solidFill>
+                  <a:srgbClr val="141A22"/>
+                </a:solidFill>
+                <a:latin typeface="Calibri" pitchFamily="34" charset="0"/>
+                <a:ea typeface="Calibri" pitchFamily="34" charset="-122"/>
+                <a:cs typeface="Calibri" pitchFamily="34" charset="-120"/>
+              </a:rPr>
+              <a:t>the "SARTrace" module already exposes per-bounce ray history — extend from there rather than patching the scalar path.</a:t>
+            </a:r>
+            <a:endParaRPr lang="en-US" sz="1400" dirty="0"/>
           </a:p>
         </p:txBody>
       </p:sp>
     </p:spTree>
     <p:extLst>
       <p:ext uri="{BB962C8B-B14F-4D97-AF65-F5344CB8AC3E}">
-        <p14:creationId xmlns:p14="http://schemas.microsoft.com/office/powerpoint/2010/main" val="3953220828"/>
+        <p14:creationId xmlns:p14="http://schemas.microsoft.com/office/powerpoint/2010/main" val="3371548086"/>
       </p:ext>
     </p:extLst>
   </p:cSld>
@@ -18270,6 +19196,1699 @@
 </file>
 
 <file path=ppt/slides/slide29.xml><?xml version="1.0" encoding="utf-8"?>
+<p:sld xmlns:a="http://schemas.openxmlformats.org/drawingml/2006/main" xmlns:r="http://schemas.openxmlformats.org/officeDocument/2006/relationships" xmlns:p="http://schemas.openxmlformats.org/presentationml/2006/main">
+  <p:cSld>
+    <p:spTree>
+      <p:nvGrpSpPr>
+        <p:cNvPr id="1" name=""/>
+        <p:cNvGrpSpPr/>
+        <p:nvPr/>
+      </p:nvGrpSpPr>
+      <p:grpSpPr>
+        <a:xfrm>
+          <a:off x="0" y="0"/>
+          <a:ext cx="0" cy="0"/>
+          <a:chOff x="0" y="0"/>
+          <a:chExt cx="0" cy="0"/>
+        </a:xfrm>
+      </p:grpSpPr>
+      <p:sp>
+        <p:nvSpPr>
+          <p:cNvPr id="2" name="Text 0"/>
+          <p:cNvSpPr/>
+          <p:nvPr/>
+        </p:nvSpPr>
+        <p:spPr>
+          <a:xfrm>
+            <a:off x="548640" y="365760"/>
+            <a:ext cx="9144000" cy="292608"/>
+          </a:xfrm>
+          <a:prstGeom prst="rect">
+            <a:avLst/>
+          </a:prstGeom>
+          <a:noFill/>
+          <a:ln/>
+        </p:spPr>
+        <p:txBody>
+          <a:bodyPr wrap="square" lIns="0" tIns="0" rIns="0" bIns="0" rtlCol="0" anchor="ctr"/>
+          <a:lstStyle/>
+          <a:p>
+            <a:pPr marL="0" indent="0">
+              <a:buNone/>
+            </a:pPr>
+            <a:r>
+              <a:rPr lang="en-US" sz="1200" b="1" kern="0" spc="200" dirty="0">
+                <a:solidFill>
+                  <a:srgbClr val="B85C00"/>
+                </a:solidFill>
+                <a:latin typeface="Calibri" pitchFamily="34" charset="0"/>
+                <a:ea typeface="Calibri" pitchFamily="34" charset="-122"/>
+                <a:cs typeface="Calibri" pitchFamily="34" charset="-120"/>
+              </a:rPr>
+              <a:t>INTEGRATION</a:t>
+            </a:r>
+            <a:endParaRPr lang="en-US" sz="1200" dirty="0"/>
+          </a:p>
+        </p:txBody>
+      </p:sp>
+      <p:sp>
+        <p:nvSpPr>
+          <p:cNvPr id="3" name="Text 1"/>
+          <p:cNvSpPr/>
+          <p:nvPr/>
+        </p:nvSpPr>
+        <p:spPr>
+          <a:xfrm>
+            <a:off x="548640" y="658368"/>
+            <a:ext cx="10881360" cy="868680"/>
+          </a:xfrm>
+          <a:prstGeom prst="rect">
+            <a:avLst/>
+          </a:prstGeom>
+          <a:noFill/>
+          <a:ln/>
+        </p:spPr>
+        <p:txBody>
+          <a:bodyPr wrap="square" lIns="0" tIns="0" rIns="0" bIns="0" rtlCol="0" anchor="t"/>
+          <a:lstStyle/>
+          <a:p>
+            <a:pPr marL="0" indent="0">
+              <a:buNone/>
+            </a:pPr>
+            <a:r>
+              <a:rPr lang="en-US" sz="2300" b="1" dirty="0">
+                <a:solidFill>
+                  <a:srgbClr val="141A22"/>
+                </a:solidFill>
+                <a:latin typeface="Cambria" pitchFamily="34" charset="0"/>
+                <a:ea typeface="Cambria" pitchFamily="34" charset="-122"/>
+                <a:cs typeface="Cambria" pitchFamily="34" charset="-120"/>
+              </a:rPr>
+              <a:t>Adding Sinclair-matrix polarimetry to SARCASTIC</a:t>
+            </a:r>
+            <a:endParaRPr lang="en-US" sz="2300" dirty="0"/>
+          </a:p>
+        </p:txBody>
+      </p:sp>
+      <p:sp>
+        <p:nvSpPr>
+          <p:cNvPr id="4" name="Shape 2"/>
+          <p:cNvSpPr/>
+          <p:nvPr/>
+        </p:nvSpPr>
+        <p:spPr>
+          <a:xfrm>
+            <a:off x="548640" y="1783080"/>
+            <a:ext cx="5120640" cy="4251960"/>
+          </a:xfrm>
+          <a:prstGeom prst="roundRect">
+            <a:avLst>
+              <a:gd name="adj" fmla="val 1720"/>
+            </a:avLst>
+          </a:prstGeom>
+          <a:solidFill>
+            <a:srgbClr val="F1F4F8"/>
+          </a:solidFill>
+          <a:ln/>
+          <a:effectLst>
+            <a:outerShdw blurRad="101600" dist="38100" dir="5400000" algn="bl" rotWithShape="0">
+              <a:srgbClr val="9AA5B1">
+                <a:alpha val="22000"/>
+              </a:srgbClr>
+            </a:outerShdw>
+          </a:effectLst>
+        </p:spPr>
+      </p:sp>
+      <p:sp>
+        <p:nvSpPr>
+          <p:cNvPr id="5" name="Text 3"/>
+          <p:cNvSpPr/>
+          <p:nvPr/>
+        </p:nvSpPr>
+        <p:spPr>
+          <a:xfrm>
+            <a:off x="822960" y="1965960"/>
+            <a:ext cx="4572000" cy="365760"/>
+          </a:xfrm>
+          <a:prstGeom prst="rect">
+            <a:avLst/>
+          </a:prstGeom>
+          <a:noFill/>
+          <a:ln/>
+        </p:spPr>
+        <p:txBody>
+          <a:bodyPr wrap="square" lIns="0" tIns="0" rIns="0" bIns="0" rtlCol="0" anchor="ctr"/>
+          <a:lstStyle/>
+          <a:p>
+            <a:pPr marL="0" indent="0">
+              <a:buNone/>
+            </a:pPr>
+            <a:r>
+              <a:rPr lang="en-US" sz="1300" b="1" kern="0" spc="100" dirty="0">
+                <a:solidFill>
+                  <a:srgbClr val="0B7285"/>
+                </a:solidFill>
+                <a:latin typeface="Calibri" pitchFamily="34" charset="0"/>
+                <a:ea typeface="Calibri" pitchFamily="34" charset="-122"/>
+                <a:cs typeface="Calibri" pitchFamily="34" charset="-120"/>
+              </a:rPr>
+              <a:t>OPTION A — TWO-PASS</a:t>
+            </a:r>
+            <a:endParaRPr lang="en-US" sz="1300" dirty="0"/>
+          </a:p>
+        </p:txBody>
+      </p:sp>
+      <p:sp>
+        <p:nvSpPr>
+          <p:cNvPr id="6" name="Text 4"/>
+          <p:cNvSpPr/>
+          <p:nvPr/>
+        </p:nvSpPr>
+        <p:spPr>
+          <a:xfrm>
+            <a:off x="822960" y="2423160"/>
+            <a:ext cx="4572000" cy="3429000"/>
+          </a:xfrm>
+          <a:prstGeom prst="rect">
+            <a:avLst/>
+          </a:prstGeom>
+          <a:noFill/>
+          <a:ln/>
+        </p:spPr>
+        <p:txBody>
+          <a:bodyPr wrap="square" lIns="0" tIns="0" rIns="0" bIns="0" rtlCol="0" anchor="t"/>
+          <a:lstStyle/>
+          <a:p>
+            <a:pPr marL="203200" indent="-203200">
+              <a:lnSpc>
+                <a:spcPct val="112000"/>
+              </a:lnSpc>
+              <a:spcAft>
+                <a:spcPts val="1200"/>
+              </a:spcAft>
+              <a:buSzPct val="100000"/>
+              <a:buChar char="•"/>
+            </a:pPr>
+            <a:r>
+              <a:rPr lang="en-US" sz="1300" dirty="0">
+                <a:solidFill>
+                  <a:srgbClr val="141A22"/>
+                </a:solidFill>
+                <a:latin typeface="Calibri" pitchFamily="34" charset="0"/>
+                <a:ea typeface="Calibri" pitchFamily="34" charset="-122"/>
+                <a:cs typeface="Calibri" pitchFamily="34" charset="-120"/>
+              </a:rPr>
+              <a:t>Launch h-pol and v-pol runs separately; project the final ĥ onto both receive axes → 4 channels</a:t>
+            </a:r>
+            <a:endParaRPr lang="en-US" sz="1300" dirty="0"/>
+          </a:p>
+          <a:p>
+            <a:pPr marL="203200" indent="-203200">
+              <a:lnSpc>
+                <a:spcPct val="112000"/>
+              </a:lnSpc>
+              <a:spcAft>
+                <a:spcPts val="1200"/>
+              </a:spcAft>
+              <a:buSzPct val="100000"/>
+              <a:buChar char="•"/>
+            </a:pPr>
+            <a:r>
+              <a:rPr lang="en-US" sz="1300" dirty="0">
+                <a:solidFill>
+                  <a:srgbClr val="141A22"/>
+                </a:solidFill>
+                <a:latin typeface="Calibri" pitchFamily="34" charset="0"/>
+                <a:ea typeface="Calibri" pitchFamily="34" charset="-122"/>
+                <a:cs typeface="Calibri" pitchFamily="34" charset="-120"/>
+              </a:rPr>
+              <a:t>Reuses CPHD’s existing multi-channel schema — no file-format change needed</a:t>
+            </a:r>
+            <a:endParaRPr lang="en-US" sz="1300" dirty="0"/>
+          </a:p>
+          <a:p>
+            <a:pPr marL="203200" indent="-203200">
+              <a:lnSpc>
+                <a:spcPct val="112000"/>
+              </a:lnSpc>
+              <a:spcAft>
+                <a:spcPts val="1200"/>
+              </a:spcAft>
+              <a:buSzPct val="100000"/>
+              <a:buChar char="•"/>
+            </a:pPr>
+            <a:r>
+              <a:rPr lang="en-US" sz="1300" dirty="0">
+                <a:solidFill>
+                  <a:srgbClr val="141A22"/>
+                </a:solidFill>
+                <a:latin typeface="Calibri" pitchFamily="34" charset="0"/>
+                <a:ea typeface="Calibri" pitchFamily="34" charset="-122"/>
+                <a:cs typeface="Calibri" pitchFamily="34" charset="-120"/>
+              </a:rPr>
+              <a:t>Still PEC underneath: geometric cross-pol only (dihedrals) — no material-dependent differential reflectivity</a:t>
+            </a:r>
+            <a:endParaRPr lang="en-US" sz="1300" dirty="0"/>
+          </a:p>
+        </p:txBody>
+      </p:sp>
+      <p:sp>
+        <p:nvSpPr>
+          <p:cNvPr id="7" name="Shape 5"/>
+          <p:cNvSpPr/>
+          <p:nvPr/>
+        </p:nvSpPr>
+        <p:spPr>
+          <a:xfrm>
+            <a:off x="6126480" y="1783080"/>
+            <a:ext cx="5120640" cy="4251960"/>
+          </a:xfrm>
+          <a:prstGeom prst="roundRect">
+            <a:avLst>
+              <a:gd name="adj" fmla="val 1720"/>
+            </a:avLst>
+          </a:prstGeom>
+          <a:solidFill>
+            <a:srgbClr val="F1F4F8"/>
+          </a:solidFill>
+          <a:ln/>
+          <a:effectLst>
+            <a:outerShdw blurRad="101600" dist="38100" dir="5400000" algn="bl" rotWithShape="0">
+              <a:srgbClr val="9AA5B1">
+                <a:alpha val="22000"/>
+              </a:srgbClr>
+            </a:outerShdw>
+          </a:effectLst>
+        </p:spPr>
+      </p:sp>
+      <p:sp>
+        <p:nvSpPr>
+          <p:cNvPr id="8" name="Text 6"/>
+          <p:cNvSpPr/>
+          <p:nvPr/>
+        </p:nvSpPr>
+        <p:spPr>
+          <a:xfrm>
+            <a:off x="6400800" y="1965960"/>
+            <a:ext cx="4572000" cy="365760"/>
+          </a:xfrm>
+          <a:prstGeom prst="rect">
+            <a:avLst/>
+          </a:prstGeom>
+          <a:noFill/>
+          <a:ln/>
+        </p:spPr>
+        <p:txBody>
+          <a:bodyPr wrap="square" lIns="0" tIns="0" rIns="0" bIns="0" rtlCol="0" anchor="ctr"/>
+          <a:lstStyle/>
+          <a:p>
+            <a:pPr marL="0" indent="0">
+              <a:buNone/>
+            </a:pPr>
+            <a:r>
+              <a:rPr lang="en-US" sz="1300" b="1" kern="0" spc="100" dirty="0">
+                <a:solidFill>
+                  <a:srgbClr val="B85C00"/>
+                </a:solidFill>
+                <a:latin typeface="Calibri" pitchFamily="34" charset="0"/>
+                <a:ea typeface="Calibri" pitchFamily="34" charset="-122"/>
+                <a:cs typeface="Calibri" pitchFamily="34" charset="-120"/>
+              </a:rPr>
+              <a:t>OPTION B — MATRIX PROPAGATION</a:t>
+            </a:r>
+            <a:endParaRPr lang="en-US" sz="1300" dirty="0"/>
+          </a:p>
+        </p:txBody>
+      </p:sp>
+      <p:sp>
+        <p:nvSpPr>
+          <p:cNvPr id="9" name="Text 7"/>
+          <p:cNvSpPr/>
+          <p:nvPr/>
+        </p:nvSpPr>
+        <p:spPr>
+          <a:xfrm>
+            <a:off x="6400800" y="2423160"/>
+            <a:ext cx="4572000" cy="3429000"/>
+          </a:xfrm>
+          <a:prstGeom prst="rect">
+            <a:avLst/>
+          </a:prstGeom>
+          <a:noFill/>
+          <a:ln/>
+        </p:spPr>
+        <p:txBody>
+          <a:bodyPr wrap="square" lIns="0" tIns="0" rIns="0" bIns="0" rtlCol="0" anchor="t"/>
+          <a:lstStyle/>
+          <a:p>
+            <a:pPr marL="203200" indent="-203200">
+              <a:lnSpc>
+                <a:spcPct val="112000"/>
+              </a:lnSpc>
+              <a:spcAft>
+                <a:spcPts val="1200"/>
+              </a:spcAft>
+              <a:buSzPct val="100000"/>
+              <a:buChar char="•"/>
+            </a:pPr>
+            <a:r>
+              <a:rPr lang="en-US" sz="1300" dirty="0">
+                <a:solidFill>
+                  <a:srgbClr val="141A22"/>
+                </a:solidFill>
+                <a:latin typeface="Calibri" pitchFamily="34" charset="0"/>
+                <a:ea typeface="Calibri" pitchFamily="34" charset="-122"/>
+                <a:cs typeface="Calibri" pitchFamily="34" charset="-120"/>
+              </a:rPr>
+              <a:t>Tag facets with permittivity; decompose into local Fresnel s/p basis inside RCS.c</a:t>
+            </a:r>
+            <a:endParaRPr lang="en-US" sz="1300" dirty="0"/>
+          </a:p>
+          <a:p>
+            <a:pPr marL="203200" indent="-203200">
+              <a:lnSpc>
+                <a:spcPct val="112000"/>
+              </a:lnSpc>
+              <a:spcAft>
+                <a:spcPts val="1200"/>
+              </a:spcAft>
+              <a:buSzPct val="100000"/>
+              <a:buChar char="•"/>
+            </a:pPr>
+            <a:r>
+              <a:rPr lang="en-US" sz="1300" dirty="0">
+                <a:solidFill>
+                  <a:srgbClr val="141A22"/>
+                </a:solidFill>
+                <a:latin typeface="Calibri" pitchFamily="34" charset="0"/>
+                <a:ea typeface="Calibri" pitchFamily="34" charset="-122"/>
+                <a:cs typeface="Calibri" pitchFamily="34" charset="-120"/>
+              </a:rPr>
+              <a:t>Chain 2×2 matrices through reflect.cpp instead of a 3-vector; widen cpuPOField.cpp to 4 complex accumulators</a:t>
+            </a:r>
+            <a:endParaRPr lang="en-US" sz="1300" dirty="0"/>
+          </a:p>
+          <a:p>
+            <a:pPr marL="203200" indent="-203200">
+              <a:lnSpc>
+                <a:spcPct val="112000"/>
+              </a:lnSpc>
+              <a:spcAft>
+                <a:spcPts val="1200"/>
+              </a:spcAft>
+              <a:buSzPct val="100000"/>
+              <a:buChar char="•"/>
+            </a:pPr>
+            <a:r>
+              <a:rPr lang="en-US" sz="1300" dirty="0">
+                <a:solidFill>
+                  <a:srgbClr val="141A22"/>
+                </a:solidFill>
+                <a:latin typeface="Calibri" pitchFamily="34" charset="0"/>
+                <a:ea typeface="Calibri" pitchFamily="34" charset="-122"/>
+                <a:cs typeface="Calibri" pitchFamily="34" charset="-120"/>
+              </a:rPr>
+              <a:t>Start from SARTrace, not the scalar path — per-bounce history is already exposed there</a:t>
+            </a:r>
+            <a:endParaRPr lang="en-US" sz="1300" dirty="0"/>
+          </a:p>
+        </p:txBody>
+      </p:sp>
+    </p:spTree>
+    <p:extLst>
+      <p:ext uri="{BB962C8B-B14F-4D97-AF65-F5344CB8AC3E}">
+        <p14:creationId xmlns:p14="http://schemas.microsoft.com/office/powerpoint/2010/main" val="474102231"/>
+      </p:ext>
+    </p:extLst>
+  </p:cSld>
+  <p:clrMapOvr>
+    <a:masterClrMapping/>
+  </p:clrMapOvr>
+</p:sld>
+</file>
+
+<file path=ppt/slides/slide3.xml><?xml version="1.0" encoding="utf-8"?>
+<p:sld xmlns:a="http://schemas.openxmlformats.org/drawingml/2006/main" xmlns:r="http://schemas.openxmlformats.org/officeDocument/2006/relationships" xmlns:p="http://schemas.openxmlformats.org/presentationml/2006/main">
+  <p:cSld>
+    <p:spTree>
+      <p:nvGrpSpPr>
+        <p:cNvPr id="1" name=""/>
+        <p:cNvGrpSpPr/>
+        <p:nvPr/>
+      </p:nvGrpSpPr>
+      <p:grpSpPr>
+        <a:xfrm>
+          <a:off x="0" y="0"/>
+          <a:ext cx="0" cy="0"/>
+          <a:chOff x="0" y="0"/>
+          <a:chExt cx="0" cy="0"/>
+        </a:xfrm>
+      </p:grpSpPr>
+      <p:sp>
+        <p:nvSpPr>
+          <p:cNvPr id="2" name="Text 0"/>
+          <p:cNvSpPr/>
+          <p:nvPr/>
+        </p:nvSpPr>
+        <p:spPr>
+          <a:xfrm>
+            <a:off x="548640" y="365760"/>
+            <a:ext cx="9144000" cy="292608"/>
+          </a:xfrm>
+          <a:prstGeom prst="rect">
+            <a:avLst/>
+          </a:prstGeom>
+          <a:noFill/>
+          <a:ln/>
+        </p:spPr>
+        <p:txBody>
+          <a:bodyPr wrap="square" lIns="0" tIns="0" rIns="0" bIns="0" rtlCol="0" anchor="ctr"/>
+          <a:lstStyle/>
+          <a:p>
+            <a:pPr marL="0" indent="0">
+              <a:buNone/>
+            </a:pPr>
+            <a:r>
+              <a:rPr lang="en-US" sz="1200" b="1" kern="0" spc="200" dirty="0">
+                <a:solidFill>
+                  <a:srgbClr val="B85C00"/>
+                </a:solidFill>
+                <a:latin typeface="Calibri" pitchFamily="34" charset="0"/>
+                <a:ea typeface="Calibri" pitchFamily="34" charset="-122"/>
+                <a:cs typeface="Calibri" pitchFamily="34" charset="-120"/>
+              </a:rPr>
+              <a:t>MOTIVATION, CONTINUED</a:t>
+            </a:r>
+            <a:endParaRPr lang="en-US" sz="1200" dirty="0"/>
+          </a:p>
+        </p:txBody>
+      </p:sp>
+      <p:sp>
+        <p:nvSpPr>
+          <p:cNvPr id="3" name="Text 1"/>
+          <p:cNvSpPr/>
+          <p:nvPr/>
+        </p:nvSpPr>
+        <p:spPr>
+          <a:xfrm>
+            <a:off x="548640" y="658368"/>
+            <a:ext cx="10881360" cy="868680"/>
+          </a:xfrm>
+          <a:prstGeom prst="rect">
+            <a:avLst/>
+          </a:prstGeom>
+          <a:noFill/>
+          <a:ln/>
+        </p:spPr>
+        <p:txBody>
+          <a:bodyPr wrap="square" lIns="0" tIns="0" rIns="0" bIns="0" rtlCol="0" anchor="t"/>
+          <a:lstStyle/>
+          <a:p>
+            <a:pPr marL="0" indent="0">
+              <a:buNone/>
+            </a:pPr>
+            <a:r>
+              <a:rPr lang="en-US" sz="2400" b="1" dirty="0">
+                <a:solidFill>
+                  <a:srgbClr val="141A22"/>
+                </a:solidFill>
+                <a:latin typeface="Cambria" pitchFamily="34" charset="0"/>
+                <a:ea typeface="Cambria" pitchFamily="34" charset="-122"/>
+                <a:cs typeface="Cambria" pitchFamily="34" charset="-120"/>
+              </a:rPr>
+              <a:t>Concrete use cases: who runs this, and for what</a:t>
+            </a:r>
+            <a:endParaRPr lang="en-US" sz="2400" dirty="0"/>
+          </a:p>
+        </p:txBody>
+      </p:sp>
+      <p:sp>
+        <p:nvSpPr>
+          <p:cNvPr id="4" name="Text 2"/>
+          <p:cNvSpPr/>
+          <p:nvPr/>
+        </p:nvSpPr>
+        <p:spPr>
+          <a:xfrm>
+            <a:off x="548640" y="1234440"/>
+            <a:ext cx="11091672" cy="457200"/>
+          </a:xfrm>
+          <a:prstGeom prst="rect">
+            <a:avLst/>
+          </a:prstGeom>
+          <a:noFill/>
+          <a:ln/>
+        </p:spPr>
+        <p:txBody>
+          <a:bodyPr wrap="square" lIns="0" tIns="0" rIns="0" bIns="0" rtlCol="0" anchor="ctr"/>
+          <a:lstStyle/>
+          <a:p>
+            <a:pPr marL="0" indent="0">
+              <a:lnSpc>
+                <a:spcPct val="112000"/>
+              </a:lnSpc>
+              <a:buNone/>
+            </a:pPr>
+            <a:r>
+              <a:rPr lang="en-US" sz="1250" i="1" dirty="0">
+                <a:solidFill>
+                  <a:srgbClr val="5B6672"/>
+                </a:solidFill>
+                <a:latin typeface="Calibri" pitchFamily="34" charset="0"/>
+                <a:ea typeface="Calibri" pitchFamily="34" charset="-122"/>
+                <a:cs typeface="Calibri" pitchFamily="34" charset="-120"/>
+              </a:rPr>
+              <a:t>Beyond the general motivation (previous slide): three places a controllable, ground-truthed SAR forward model earns its keep in practice.</a:t>
+            </a:r>
+            <a:endParaRPr lang="en-US" sz="1250" dirty="0"/>
+          </a:p>
+        </p:txBody>
+      </p:sp>
+      <p:sp>
+        <p:nvSpPr>
+          <p:cNvPr id="5" name="Shape 3"/>
+          <p:cNvSpPr/>
+          <p:nvPr/>
+        </p:nvSpPr>
+        <p:spPr>
+          <a:xfrm>
+            <a:off x="548640" y="1828800"/>
+            <a:ext cx="3511296" cy="4160520"/>
+          </a:xfrm>
+          <a:prstGeom prst="roundRect">
+            <a:avLst>
+              <a:gd name="adj" fmla="val 2083"/>
+            </a:avLst>
+          </a:prstGeom>
+          <a:solidFill>
+            <a:srgbClr val="F1F4F8"/>
+          </a:solidFill>
+          <a:ln/>
+          <a:effectLst>
+            <a:outerShdw blurRad="101600" dist="38100" dir="5400000" algn="bl" rotWithShape="0">
+              <a:srgbClr val="9AA5B1">
+                <a:alpha val="22000"/>
+              </a:srgbClr>
+            </a:outerShdw>
+          </a:effectLst>
+        </p:spPr>
+      </p:sp>
+      <p:sp>
+        <p:nvSpPr>
+          <p:cNvPr id="6" name="Shape 4"/>
+          <p:cNvSpPr/>
+          <p:nvPr/>
+        </p:nvSpPr>
+        <p:spPr>
+          <a:xfrm>
+            <a:off x="822960" y="2103120"/>
+            <a:ext cx="566928" cy="566928"/>
+          </a:xfrm>
+          <a:prstGeom prst="ellipse">
+            <a:avLst/>
+          </a:prstGeom>
+          <a:solidFill>
+            <a:srgbClr val="FF9E2C"/>
+          </a:solidFill>
+          <a:ln/>
+        </p:spPr>
+      </p:sp>
+      <p:pic>
+        <p:nvPicPr>
+          <p:cNvPr id="7" name="Image 0" descr="/sessions/sweet-friendly-mayer/mnt/outputs/presentation/icons/FaCheckCircle_dark.png"/>
+          <p:cNvPicPr>
+            <a:picLocks noChangeAspect="1"/>
+          </p:cNvPicPr>
+          <p:nvPr/>
+        </p:nvPicPr>
+        <p:blipFill>
+          <a:blip r:embed="rId3"/>
+          <a:stretch>
+            <a:fillRect/>
+          </a:stretch>
+        </p:blipFill>
+        <p:spPr>
+          <a:xfrm>
+            <a:off x="976031" y="2256191"/>
+            <a:ext cx="260787" cy="260787"/>
+          </a:xfrm>
+          <a:prstGeom prst="rect">
+            <a:avLst/>
+          </a:prstGeom>
+        </p:spPr>
+      </p:pic>
+      <p:sp>
+        <p:nvSpPr>
+          <p:cNvPr id="8" name="Text 5"/>
+          <p:cNvSpPr/>
+          <p:nvPr/>
+        </p:nvSpPr>
+        <p:spPr>
+          <a:xfrm>
+            <a:off x="822960" y="2788920"/>
+            <a:ext cx="2962656" cy="502920"/>
+          </a:xfrm>
+          <a:prstGeom prst="rect">
+            <a:avLst/>
+          </a:prstGeom>
+          <a:noFill/>
+          <a:ln/>
+        </p:spPr>
+        <p:txBody>
+          <a:bodyPr wrap="square" lIns="0" tIns="0" rIns="0" bIns="0" rtlCol="0" anchor="t"/>
+          <a:lstStyle/>
+          <a:p>
+            <a:pPr marL="0" indent="0">
+              <a:lnSpc>
+                <a:spcPct val="110000"/>
+              </a:lnSpc>
+              <a:buNone/>
+            </a:pPr>
+            <a:r>
+              <a:rPr lang="en-US" sz="1450" b="1" dirty="0">
+                <a:solidFill>
+                  <a:srgbClr val="141A22"/>
+                </a:solidFill>
+                <a:latin typeface="Calibri" pitchFamily="34" charset="0"/>
+                <a:ea typeface="Calibri" pitchFamily="34" charset="-122"/>
+                <a:cs typeface="Calibri" pitchFamily="34" charset="-120"/>
+              </a:rPr>
+              <a:t>ATR &amp; Detection</a:t>
+            </a:r>
+            <a:endParaRPr lang="en-US" sz="1450" dirty="0"/>
+          </a:p>
+        </p:txBody>
+      </p:sp>
+      <p:sp>
+        <p:nvSpPr>
+          <p:cNvPr id="9" name="Text 6"/>
+          <p:cNvSpPr/>
+          <p:nvPr/>
+        </p:nvSpPr>
+        <p:spPr>
+          <a:xfrm>
+            <a:off x="822960" y="3337560"/>
+            <a:ext cx="2962656" cy="2468880"/>
+          </a:xfrm>
+          <a:prstGeom prst="rect">
+            <a:avLst/>
+          </a:prstGeom>
+          <a:noFill/>
+          <a:ln/>
+        </p:spPr>
+        <p:txBody>
+          <a:bodyPr wrap="square" lIns="0" tIns="0" rIns="0" bIns="0" rtlCol="0" anchor="t"/>
+          <a:lstStyle/>
+          <a:p>
+            <a:pPr marL="203200" indent="-203200">
+              <a:lnSpc>
+                <a:spcPct val="112000"/>
+              </a:lnSpc>
+              <a:spcAft>
+                <a:spcPts val="1000"/>
+              </a:spcAft>
+              <a:buSzPct val="100000"/>
+              <a:buChar char="•"/>
+            </a:pPr>
+            <a:r>
+              <a:rPr lang="en-US" sz="1050" dirty="0">
+                <a:solidFill>
+                  <a:srgbClr val="141A22"/>
+                </a:solidFill>
+                <a:latin typeface="Calibri" pitchFamily="34" charset="0"/>
+                <a:ea typeface="Calibri" pitchFamily="34" charset="-122"/>
+                <a:cs typeface="Calibri" pitchFamily="34" charset="-120"/>
+              </a:rPr>
+              <a:t>Training data augmentation via target injection into real clutter -- covers rare target classes/poses real collections can't supply on demand</a:t>
+            </a:r>
+            <a:endParaRPr lang="en-US" sz="1050" dirty="0"/>
+          </a:p>
+          <a:p>
+            <a:pPr marL="203200" indent="-203200">
+              <a:lnSpc>
+                <a:spcPct val="112000"/>
+              </a:lnSpc>
+              <a:spcAft>
+                <a:spcPts val="1000"/>
+              </a:spcAft>
+              <a:buSzPct val="100000"/>
+              <a:buChar char="•"/>
+            </a:pPr>
+            <a:r>
+              <a:rPr lang="en-US" sz="1050" dirty="0">
+                <a:solidFill>
+                  <a:srgbClr val="141A22"/>
+                </a:solidFill>
+                <a:latin typeface="Calibri" pitchFamily="34" charset="0"/>
+                <a:ea typeface="Calibri" pitchFamily="34" charset="-122"/>
+                <a:cs typeface="Calibri" pitchFamily="34" charset="-120"/>
+              </a:rPr>
+              <a:t>Model-based / matched-filter detection templates – simulated model double as the detector's reference signature</a:t>
+            </a:r>
+            <a:endParaRPr lang="en-US" sz="1050" dirty="0"/>
+          </a:p>
+          <a:p>
+            <a:pPr marL="203200" indent="-203200">
+              <a:lnSpc>
+                <a:spcPct val="112000"/>
+              </a:lnSpc>
+              <a:spcAft>
+                <a:spcPts val="1000"/>
+              </a:spcAft>
+              <a:buSzPct val="100000"/>
+              <a:buChar char="•"/>
+            </a:pPr>
+            <a:r>
+              <a:rPr lang="en-US" sz="1050" dirty="0">
+                <a:solidFill>
+                  <a:srgbClr val="141A22"/>
+                </a:solidFill>
+                <a:latin typeface="Calibri" pitchFamily="34" charset="0"/>
+                <a:ea typeface="Calibri" pitchFamily="34" charset="-122"/>
+                <a:cs typeface="Calibri" pitchFamily="34" charset="-120"/>
+              </a:rPr>
+              <a:t>Synthetic scenario generation for analyst training and benchmark construction, with exact ground-truth labels no manual annotation can match</a:t>
+            </a:r>
+            <a:endParaRPr lang="en-US" sz="1050" dirty="0"/>
+          </a:p>
+        </p:txBody>
+      </p:sp>
+      <p:sp>
+        <p:nvSpPr>
+          <p:cNvPr id="10" name="Shape 7"/>
+          <p:cNvSpPr/>
+          <p:nvPr/>
+        </p:nvSpPr>
+        <p:spPr>
+          <a:xfrm>
+            <a:off x="4334256" y="1828800"/>
+            <a:ext cx="3511296" cy="4160520"/>
+          </a:xfrm>
+          <a:prstGeom prst="roundRect">
+            <a:avLst>
+              <a:gd name="adj" fmla="val 2083"/>
+            </a:avLst>
+          </a:prstGeom>
+          <a:solidFill>
+            <a:srgbClr val="F1F4F8"/>
+          </a:solidFill>
+          <a:ln/>
+          <a:effectLst>
+            <a:outerShdw blurRad="101600" dist="38100" dir="5400000" algn="bl" rotWithShape="0">
+              <a:srgbClr val="9AA5B1">
+                <a:alpha val="22000"/>
+              </a:srgbClr>
+            </a:outerShdw>
+          </a:effectLst>
+        </p:spPr>
+      </p:sp>
+      <p:sp>
+        <p:nvSpPr>
+          <p:cNvPr id="11" name="Shape 8"/>
+          <p:cNvSpPr/>
+          <p:nvPr/>
+        </p:nvSpPr>
+        <p:spPr>
+          <a:xfrm>
+            <a:off x="4608576" y="2103120"/>
+            <a:ext cx="566928" cy="566928"/>
+          </a:xfrm>
+          <a:prstGeom prst="ellipse">
+            <a:avLst/>
+          </a:prstGeom>
+          <a:solidFill>
+            <a:srgbClr val="4FD8EB"/>
+          </a:solidFill>
+          <a:ln/>
+        </p:spPr>
+      </p:sp>
+      <p:pic>
+        <p:nvPicPr>
+          <p:cNvPr id="12" name="Image 1" descr="/sessions/sweet-friendly-mayer/mnt/outputs/presentation/icons/FaTools_dark.png"/>
+          <p:cNvPicPr>
+            <a:picLocks noChangeAspect="1"/>
+          </p:cNvPicPr>
+          <p:nvPr/>
+        </p:nvPicPr>
+        <p:blipFill>
+          <a:blip r:embed="rId4"/>
+          <a:stretch>
+            <a:fillRect/>
+          </a:stretch>
+        </p:blipFill>
+        <p:spPr>
+          <a:xfrm>
+            <a:off x="4761647" y="2256191"/>
+            <a:ext cx="260787" cy="260787"/>
+          </a:xfrm>
+          <a:prstGeom prst="rect">
+            <a:avLst/>
+          </a:prstGeom>
+        </p:spPr>
+      </p:pic>
+      <p:sp>
+        <p:nvSpPr>
+          <p:cNvPr id="13" name="Text 9"/>
+          <p:cNvSpPr/>
+          <p:nvPr/>
+        </p:nvSpPr>
+        <p:spPr>
+          <a:xfrm>
+            <a:off x="4608576" y="2788920"/>
+            <a:ext cx="2962656" cy="502920"/>
+          </a:xfrm>
+          <a:prstGeom prst="rect">
+            <a:avLst/>
+          </a:prstGeom>
+          <a:noFill/>
+          <a:ln/>
+        </p:spPr>
+        <p:txBody>
+          <a:bodyPr wrap="square" lIns="0" tIns="0" rIns="0" bIns="0" rtlCol="0" anchor="t"/>
+          <a:lstStyle/>
+          <a:p>
+            <a:pPr marL="0" indent="0">
+              <a:lnSpc>
+                <a:spcPct val="110000"/>
+              </a:lnSpc>
+              <a:buNone/>
+            </a:pPr>
+            <a:r>
+              <a:rPr lang="en-US" sz="1450" b="1" dirty="0">
+                <a:solidFill>
+                  <a:srgbClr val="141A22"/>
+                </a:solidFill>
+                <a:latin typeface="Calibri" pitchFamily="34" charset="0"/>
+                <a:ea typeface="Calibri" pitchFamily="34" charset="-122"/>
+                <a:cs typeface="Calibri" pitchFamily="34" charset="-120"/>
+              </a:rPr>
+              <a:t>Algorithm Development &amp; Test</a:t>
+            </a:r>
+            <a:endParaRPr lang="en-US" sz="1450" dirty="0"/>
+          </a:p>
+        </p:txBody>
+      </p:sp>
+      <p:sp>
+        <p:nvSpPr>
+          <p:cNvPr id="14" name="Text 10"/>
+          <p:cNvSpPr/>
+          <p:nvPr/>
+        </p:nvSpPr>
+        <p:spPr>
+          <a:xfrm>
+            <a:off x="4608576" y="3337560"/>
+            <a:ext cx="2962656" cy="2468880"/>
+          </a:xfrm>
+          <a:prstGeom prst="rect">
+            <a:avLst/>
+          </a:prstGeom>
+          <a:noFill/>
+          <a:ln/>
+        </p:spPr>
+        <p:txBody>
+          <a:bodyPr wrap="square" lIns="0" tIns="0" rIns="0" bIns="0" rtlCol="0" anchor="t"/>
+          <a:lstStyle/>
+          <a:p>
+            <a:pPr marL="203200" indent="-203200">
+              <a:lnSpc>
+                <a:spcPct val="112000"/>
+              </a:lnSpc>
+              <a:spcAft>
+                <a:spcPts val="1000"/>
+              </a:spcAft>
+              <a:buSzPct val="100000"/>
+              <a:buChar char="•"/>
+            </a:pPr>
+            <a:r>
+              <a:rPr lang="en-US" sz="1050" dirty="0">
+                <a:solidFill>
+                  <a:srgbClr val="141A22"/>
+                </a:solidFill>
+                <a:latin typeface="Calibri" pitchFamily="34" charset="0"/>
+                <a:ea typeface="Calibri" pitchFamily="34" charset="-122"/>
+                <a:cs typeface="Calibri" pitchFamily="34" charset="-120"/>
+              </a:rPr>
+              <a:t>Ground Moving Target Indicator (GMTI) -- exercise a mover detector against known-truth radial velocity and clutter notch before recording live multi-channel data</a:t>
+            </a:r>
+            <a:endParaRPr lang="en-US" sz="1050" dirty="0"/>
+          </a:p>
+          <a:p>
+            <a:pPr marL="203200" indent="-203200">
+              <a:lnSpc>
+                <a:spcPct val="112000"/>
+              </a:lnSpc>
+              <a:spcAft>
+                <a:spcPts val="1000"/>
+              </a:spcAft>
+              <a:buSzPct val="100000"/>
+              <a:buChar char="•"/>
+            </a:pPr>
+            <a:r>
+              <a:rPr lang="en-US" sz="1050" dirty="0">
+                <a:solidFill>
+                  <a:srgbClr val="141A22"/>
+                </a:solidFill>
+                <a:latin typeface="Calibri" pitchFamily="34" charset="0"/>
+                <a:ea typeface="Calibri" pitchFamily="34" charset="-122"/>
+                <a:cs typeface="Calibri" pitchFamily="34" charset="-120"/>
+              </a:rPr>
+              <a:t>Change-detection algorithm testing -- paired before/after scenes with exactly known ground-truth changes, on demand</a:t>
+            </a:r>
+            <a:endParaRPr lang="en-US" sz="1050" dirty="0"/>
+          </a:p>
+          <a:p>
+            <a:pPr marL="203200" indent="-203200">
+              <a:lnSpc>
+                <a:spcPct val="112000"/>
+              </a:lnSpc>
+              <a:spcAft>
+                <a:spcPts val="1000"/>
+              </a:spcAft>
+              <a:buSzPct val="100000"/>
+              <a:buChar char="•"/>
+            </a:pPr>
+            <a:r>
+              <a:rPr lang="en-US" sz="1050" dirty="0">
+                <a:solidFill>
+                  <a:srgbClr val="141A22"/>
+                </a:solidFill>
+                <a:latin typeface="Calibri" pitchFamily="34" charset="0"/>
+                <a:ea typeface="Calibri" pitchFamily="34" charset="-122"/>
+                <a:cs typeface="Calibri" pitchFamily="34" charset="-120"/>
+              </a:rPr>
+              <a:t>Image-formation / autofocus validation</a:t>
+            </a:r>
+            <a:endParaRPr lang="en-US" sz="1050" dirty="0"/>
+          </a:p>
+        </p:txBody>
+      </p:sp>
+      <p:sp>
+        <p:nvSpPr>
+          <p:cNvPr id="15" name="Shape 11"/>
+          <p:cNvSpPr/>
+          <p:nvPr/>
+        </p:nvSpPr>
+        <p:spPr>
+          <a:xfrm>
+            <a:off x="8119872" y="1828800"/>
+            <a:ext cx="3511296" cy="4160520"/>
+          </a:xfrm>
+          <a:prstGeom prst="roundRect">
+            <a:avLst>
+              <a:gd name="adj" fmla="val 2083"/>
+            </a:avLst>
+          </a:prstGeom>
+          <a:solidFill>
+            <a:srgbClr val="F1F4F8"/>
+          </a:solidFill>
+          <a:ln/>
+          <a:effectLst>
+            <a:outerShdw blurRad="101600" dist="38100" dir="5400000" algn="bl" rotWithShape="0">
+              <a:srgbClr val="9AA5B1">
+                <a:alpha val="22000"/>
+              </a:srgbClr>
+            </a:outerShdw>
+          </a:effectLst>
+        </p:spPr>
+      </p:sp>
+      <p:sp>
+        <p:nvSpPr>
+          <p:cNvPr id="16" name="Shape 12"/>
+          <p:cNvSpPr/>
+          <p:nvPr/>
+        </p:nvSpPr>
+        <p:spPr>
+          <a:xfrm>
+            <a:off x="8394192" y="2103120"/>
+            <a:ext cx="566928" cy="566928"/>
+          </a:xfrm>
+          <a:prstGeom prst="ellipse">
+            <a:avLst/>
+          </a:prstGeom>
+          <a:solidFill>
+            <a:srgbClr val="FF9E2C"/>
+          </a:solidFill>
+          <a:ln/>
+        </p:spPr>
+      </p:sp>
+      <p:pic>
+        <p:nvPicPr>
+          <p:cNvPr id="17" name="Image 2" descr="/sessions/sweet-friendly-mayer/mnt/outputs/presentation/icons/FaSatelliteDish_dark.png"/>
+          <p:cNvPicPr>
+            <a:picLocks noChangeAspect="1"/>
+          </p:cNvPicPr>
+          <p:nvPr/>
+        </p:nvPicPr>
+        <p:blipFill>
+          <a:blip r:embed="rId5"/>
+          <a:stretch>
+            <a:fillRect/>
+          </a:stretch>
+        </p:blipFill>
+        <p:spPr>
+          <a:xfrm>
+            <a:off x="8547263" y="2256191"/>
+            <a:ext cx="260787" cy="260787"/>
+          </a:xfrm>
+          <a:prstGeom prst="rect">
+            <a:avLst/>
+          </a:prstGeom>
+        </p:spPr>
+      </p:pic>
+      <p:sp>
+        <p:nvSpPr>
+          <p:cNvPr id="18" name="Text 13"/>
+          <p:cNvSpPr/>
+          <p:nvPr/>
+        </p:nvSpPr>
+        <p:spPr>
+          <a:xfrm>
+            <a:off x="8394192" y="2788920"/>
+            <a:ext cx="2962656" cy="502920"/>
+          </a:xfrm>
+          <a:prstGeom prst="rect">
+            <a:avLst/>
+          </a:prstGeom>
+          <a:noFill/>
+          <a:ln/>
+        </p:spPr>
+        <p:txBody>
+          <a:bodyPr wrap="square" lIns="0" tIns="0" rIns="0" bIns="0" rtlCol="0" anchor="t"/>
+          <a:lstStyle/>
+          <a:p>
+            <a:pPr marL="0" indent="0">
+              <a:lnSpc>
+                <a:spcPct val="110000"/>
+              </a:lnSpc>
+              <a:buNone/>
+            </a:pPr>
+            <a:r>
+              <a:rPr lang="en-US" sz="1450" b="1" dirty="0">
+                <a:solidFill>
+                  <a:srgbClr val="141A22"/>
+                </a:solidFill>
+                <a:latin typeface="Calibri" pitchFamily="34" charset="0"/>
+                <a:ea typeface="Calibri" pitchFamily="34" charset="-122"/>
+                <a:cs typeface="Calibri" pitchFamily="34" charset="-120"/>
+              </a:rPr>
+              <a:t>Mission Planning &amp; Sensor Trade Studies</a:t>
+            </a:r>
+            <a:endParaRPr lang="en-US" sz="1450" dirty="0"/>
+          </a:p>
+        </p:txBody>
+      </p:sp>
+      <p:sp>
+        <p:nvSpPr>
+          <p:cNvPr id="19" name="Text 14"/>
+          <p:cNvSpPr/>
+          <p:nvPr/>
+        </p:nvSpPr>
+        <p:spPr>
+          <a:xfrm>
+            <a:off x="8394192" y="3337560"/>
+            <a:ext cx="2962656" cy="2468880"/>
+          </a:xfrm>
+          <a:prstGeom prst="rect">
+            <a:avLst/>
+          </a:prstGeom>
+          <a:noFill/>
+          <a:ln/>
+        </p:spPr>
+        <p:txBody>
+          <a:bodyPr wrap="square" lIns="0" tIns="0" rIns="0" bIns="0" rtlCol="0" anchor="t"/>
+          <a:lstStyle/>
+          <a:p>
+            <a:pPr marL="203200" indent="-203200">
+              <a:lnSpc>
+                <a:spcPct val="112000"/>
+              </a:lnSpc>
+              <a:spcAft>
+                <a:spcPts val="1000"/>
+              </a:spcAft>
+              <a:buSzPct val="100000"/>
+              <a:buChar char="•"/>
+            </a:pPr>
+            <a:r>
+              <a:rPr lang="en-US" sz="1050" dirty="0">
+                <a:solidFill>
+                  <a:srgbClr val="141A22"/>
+                </a:solidFill>
+                <a:latin typeface="Calibri" pitchFamily="34" charset="0"/>
+                <a:ea typeface="Calibri" pitchFamily="34" charset="-122"/>
+                <a:cs typeface="Calibri" pitchFamily="34" charset="-120"/>
+              </a:rPr>
+              <a:t>Pre-fly the collection plan to find what actually resolves the target before spending real tasking budget</a:t>
+            </a:r>
+            <a:endParaRPr lang="en-US" sz="1050" dirty="0"/>
+          </a:p>
+          <a:p>
+            <a:pPr marL="203200" indent="-203200">
+              <a:lnSpc>
+                <a:spcPct val="112000"/>
+              </a:lnSpc>
+              <a:spcAft>
+                <a:spcPts val="1000"/>
+              </a:spcAft>
+              <a:buSzPct val="100000"/>
+              <a:buChar char="•"/>
+            </a:pPr>
+            <a:r>
+              <a:rPr lang="en-US" sz="1050" dirty="0">
+                <a:solidFill>
+                  <a:srgbClr val="141A22"/>
+                </a:solidFill>
+                <a:latin typeface="Calibri" pitchFamily="34" charset="0"/>
+                <a:ea typeface="Calibri" pitchFamily="34" charset="-122"/>
+                <a:cs typeface="Calibri" pitchFamily="34" charset="-120"/>
+              </a:rPr>
+              <a:t>Real commercial tasking runs roughly $1300-$7000 per scene (Airbus/Astrium GEO TerraSAR-X price list) vs. seconds per simulated pass on a Graphical Processing Unit (GPU)-- cheap enough to optimize collection value first</a:t>
+            </a:r>
+            <a:endParaRPr lang="en-US" sz="1050" dirty="0"/>
+          </a:p>
+          <a:p>
+            <a:pPr marL="203200" indent="-203200">
+              <a:lnSpc>
+                <a:spcPct val="112000"/>
+              </a:lnSpc>
+              <a:spcAft>
+                <a:spcPts val="1000"/>
+              </a:spcAft>
+              <a:buSzPct val="100000"/>
+              <a:buChar char="•"/>
+            </a:pPr>
+            <a:r>
+              <a:rPr lang="en-US" sz="1050" dirty="0">
+                <a:solidFill>
+                  <a:srgbClr val="141A22"/>
+                </a:solidFill>
+                <a:latin typeface="Calibri" pitchFamily="34" charset="0"/>
+                <a:ea typeface="Calibri" pitchFamily="34" charset="-122"/>
+                <a:cs typeface="Calibri" pitchFamily="34" charset="-120"/>
+              </a:rPr>
+              <a:t>Sensor design trade studies -- bandwidth/resolution choice before committing to hardware</a:t>
+            </a:r>
+            <a:endParaRPr lang="en-US" sz="1050" dirty="0"/>
+          </a:p>
+        </p:txBody>
+      </p:sp>
+    </p:spTree>
+  </p:cSld>
+  <p:clrMapOvr>
+    <a:masterClrMapping/>
+  </p:clrMapOvr>
+</p:sld>
+</file>
+
+<file path=ppt/slides/slide30.xml><?xml version="1.0" encoding="utf-8"?>
+<p:sld xmlns:a="http://schemas.openxmlformats.org/drawingml/2006/main" xmlns:r="http://schemas.openxmlformats.org/officeDocument/2006/relationships" xmlns:p="http://schemas.openxmlformats.org/presentationml/2006/main">
+  <p:cSld>
+    <p:spTree>
+      <p:nvGrpSpPr>
+        <p:cNvPr id="1" name=""/>
+        <p:cNvGrpSpPr/>
+        <p:nvPr/>
+      </p:nvGrpSpPr>
+      <p:grpSpPr>
+        <a:xfrm>
+          <a:off x="0" y="0"/>
+          <a:ext cx="0" cy="0"/>
+          <a:chOff x="0" y="0"/>
+          <a:chExt cx="0" cy="0"/>
+        </a:xfrm>
+      </p:grpSpPr>
+      <p:sp>
+        <p:nvSpPr>
+          <p:cNvPr id="2" name="Text 0"/>
+          <p:cNvSpPr/>
+          <p:nvPr/>
+        </p:nvSpPr>
+        <p:spPr>
+          <a:xfrm>
+            <a:off x="548640" y="365760"/>
+            <a:ext cx="9144000" cy="292608"/>
+          </a:xfrm>
+          <a:prstGeom prst="rect">
+            <a:avLst/>
+          </a:prstGeom>
+          <a:noFill/>
+          <a:ln/>
+        </p:spPr>
+        <p:txBody>
+          <a:bodyPr wrap="square" lIns="0" tIns="0" rIns="0" bIns="0" rtlCol="0" anchor="ctr"/>
+          <a:lstStyle/>
+          <a:p>
+            <a:pPr marL="0" indent="0">
+              <a:buNone/>
+            </a:pPr>
+            <a:r>
+              <a:rPr lang="en-US" sz="1200" b="1" kern="0" spc="200" dirty="0">
+                <a:solidFill>
+                  <a:srgbClr val="B85C00"/>
+                </a:solidFill>
+                <a:latin typeface="Calibri" pitchFamily="34" charset="0"/>
+                <a:ea typeface="Calibri" pitchFamily="34" charset="-122"/>
+                <a:cs typeface="Calibri" pitchFamily="34" charset="-120"/>
+              </a:rPr>
+              <a:t>INTEGRATION, CONTINUED</a:t>
+            </a:r>
+            <a:endParaRPr lang="en-US" sz="1200" dirty="0"/>
+          </a:p>
+        </p:txBody>
+      </p:sp>
+      <p:sp>
+        <p:nvSpPr>
+          <p:cNvPr id="3" name="Text 1"/>
+          <p:cNvSpPr/>
+          <p:nvPr/>
+        </p:nvSpPr>
+        <p:spPr>
+          <a:xfrm>
+            <a:off x="548640" y="658368"/>
+            <a:ext cx="10881360" cy="868680"/>
+          </a:xfrm>
+          <a:prstGeom prst="rect">
+            <a:avLst/>
+          </a:prstGeom>
+          <a:noFill/>
+          <a:ln/>
+        </p:spPr>
+        <p:txBody>
+          <a:bodyPr wrap="square" lIns="0" tIns="0" rIns="0" bIns="0" rtlCol="0" anchor="t"/>
+          <a:lstStyle/>
+          <a:p>
+            <a:pPr marL="0" indent="0">
+              <a:buNone/>
+            </a:pPr>
+            <a:r>
+              <a:rPr lang="en-US" sz="2500" b="1" dirty="0">
+                <a:solidFill>
+                  <a:srgbClr val="141A22"/>
+                </a:solidFill>
+                <a:latin typeface="Cambria" pitchFamily="34" charset="0"/>
+                <a:ea typeface="Cambria" pitchFamily="34" charset="-122"/>
+                <a:cs typeface="Cambria" pitchFamily="34" charset="-120"/>
+              </a:rPr>
+              <a:t>Adding ASC compression to SARCASTIC</a:t>
+            </a:r>
+            <a:endParaRPr lang="en-US" sz="2500" dirty="0"/>
+          </a:p>
+        </p:txBody>
+      </p:sp>
+      <p:sp>
+        <p:nvSpPr>
+          <p:cNvPr id="4" name="Shape 2"/>
+          <p:cNvSpPr/>
+          <p:nvPr/>
+        </p:nvSpPr>
+        <p:spPr>
+          <a:xfrm>
+            <a:off x="548640" y="1901952"/>
+            <a:ext cx="502920" cy="502920"/>
+          </a:xfrm>
+          <a:prstGeom prst="ellipse">
+            <a:avLst/>
+          </a:prstGeom>
+          <a:solidFill>
+            <a:srgbClr val="FF9E2C"/>
+          </a:solidFill>
+          <a:ln/>
+        </p:spPr>
+      </p:sp>
+      <p:sp>
+        <p:nvSpPr>
+          <p:cNvPr id="5" name="Text 3"/>
+          <p:cNvSpPr/>
+          <p:nvPr/>
+        </p:nvSpPr>
+        <p:spPr>
+          <a:xfrm>
+            <a:off x="548640" y="1901952"/>
+            <a:ext cx="502920" cy="502920"/>
+          </a:xfrm>
+          <a:prstGeom prst="rect">
+            <a:avLst/>
+          </a:prstGeom>
+          <a:noFill/>
+          <a:ln/>
+        </p:spPr>
+        <p:txBody>
+          <a:bodyPr wrap="square" lIns="0" tIns="0" rIns="0" bIns="0" rtlCol="0" anchor="ctr"/>
+          <a:lstStyle/>
+          <a:p>
+            <a:pPr marL="0" indent="0" algn="ctr">
+              <a:buNone/>
+            </a:pPr>
+            <a:r>
+              <a:rPr lang="en-US" sz="1700" b="1" dirty="0">
+                <a:solidFill>
+                  <a:srgbClr val="12161C"/>
+                </a:solidFill>
+                <a:latin typeface="Cambria" pitchFamily="34" charset="0"/>
+                <a:ea typeface="Cambria" pitchFamily="34" charset="-122"/>
+                <a:cs typeface="Cambria" pitchFamily="34" charset="-120"/>
+              </a:rPr>
+              <a:t>1</a:t>
+            </a:r>
+            <a:endParaRPr lang="en-US" sz="1700" dirty="0"/>
+          </a:p>
+        </p:txBody>
+      </p:sp>
+      <p:sp>
+        <p:nvSpPr>
+          <p:cNvPr id="6" name="Text 4"/>
+          <p:cNvSpPr/>
+          <p:nvPr/>
+        </p:nvSpPr>
+        <p:spPr>
+          <a:xfrm>
+            <a:off x="1280160" y="1828800"/>
+            <a:ext cx="10332720" cy="1234440"/>
+          </a:xfrm>
+          <a:prstGeom prst="rect">
+            <a:avLst/>
+          </a:prstGeom>
+          <a:noFill/>
+          <a:ln/>
+        </p:spPr>
+        <p:txBody>
+          <a:bodyPr wrap="square" lIns="0" tIns="0" rIns="0" bIns="0" rtlCol="0" anchor="t"/>
+          <a:lstStyle/>
+          <a:p>
+            <a:pPr marL="0" indent="0">
+              <a:lnSpc>
+                <a:spcPct val="112000"/>
+              </a:lnSpc>
+              <a:buNone/>
+            </a:pPr>
+            <a:r>
+              <a:rPr lang="en-US" sz="1450" b="1" dirty="0">
+                <a:solidFill>
+                  <a:srgbClr val="141A22"/>
+                </a:solidFill>
+                <a:latin typeface="Calibri" pitchFamily="34" charset="0"/>
+                <a:ea typeface="Calibri" pitchFamily="34" charset="-122"/>
+                <a:cs typeface="Calibri" pitchFamily="34" charset="-120"/>
+              </a:rPr>
+              <a:t>1. Extract (reuse as-is)
+</a:t>
+            </a:r>
+            <a:r>
+              <a:rPr lang="en-US" sz="1250" dirty="0">
+                <a:solidFill>
+                  <a:srgbClr val="5B6672"/>
+                </a:solidFill>
+                <a:latin typeface="Calibri" pitchFamily="34" charset="0"/>
+                <a:ea typeface="Calibri" pitchFamily="34" charset="-122"/>
+                <a:cs typeface="Calibri" pitchFamily="34" charset="-120"/>
+              </a:rPr>
+              <a:t>Isolate the structure’s CAD sub-mesh, sweep aspect angle with the unmodified SARCASTIC/SARTrace binary — produces the wideband, multi-aspect training data.</a:t>
+            </a:r>
+            <a:endParaRPr lang="en-US" sz="1450" dirty="0"/>
+          </a:p>
+        </p:txBody>
+      </p:sp>
+      <p:sp>
+        <p:nvSpPr>
+          <p:cNvPr id="7" name="Shape 5"/>
+          <p:cNvSpPr/>
+          <p:nvPr/>
+        </p:nvSpPr>
+        <p:spPr>
+          <a:xfrm>
+            <a:off x="548640" y="3136392"/>
+            <a:ext cx="502920" cy="502920"/>
+          </a:xfrm>
+          <a:prstGeom prst="ellipse">
+            <a:avLst/>
+          </a:prstGeom>
+          <a:solidFill>
+            <a:srgbClr val="4FD8EB"/>
+          </a:solidFill>
+          <a:ln/>
+        </p:spPr>
+      </p:sp>
+      <p:sp>
+        <p:nvSpPr>
+          <p:cNvPr id="8" name="Text 6"/>
+          <p:cNvSpPr/>
+          <p:nvPr/>
+        </p:nvSpPr>
+        <p:spPr>
+          <a:xfrm>
+            <a:off x="548640" y="3136392"/>
+            <a:ext cx="502920" cy="502920"/>
+          </a:xfrm>
+          <a:prstGeom prst="rect">
+            <a:avLst/>
+          </a:prstGeom>
+          <a:noFill/>
+          <a:ln/>
+        </p:spPr>
+        <p:txBody>
+          <a:bodyPr wrap="square" lIns="0" tIns="0" rIns="0" bIns="0" rtlCol="0" anchor="ctr"/>
+          <a:lstStyle/>
+          <a:p>
+            <a:pPr marL="0" indent="0" algn="ctr">
+              <a:buNone/>
+            </a:pPr>
+            <a:r>
+              <a:rPr lang="en-US" sz="1700" b="1" dirty="0">
+                <a:solidFill>
+                  <a:srgbClr val="12161C"/>
+                </a:solidFill>
+                <a:latin typeface="Cambria" pitchFamily="34" charset="0"/>
+                <a:ea typeface="Cambria" pitchFamily="34" charset="-122"/>
+                <a:cs typeface="Cambria" pitchFamily="34" charset="-120"/>
+              </a:rPr>
+              <a:t>2</a:t>
+            </a:r>
+            <a:endParaRPr lang="en-US" sz="1700" dirty="0"/>
+          </a:p>
+        </p:txBody>
+      </p:sp>
+      <p:sp>
+        <p:nvSpPr>
+          <p:cNvPr id="9" name="Text 7"/>
+          <p:cNvSpPr/>
+          <p:nvPr/>
+        </p:nvSpPr>
+        <p:spPr>
+          <a:xfrm>
+            <a:off x="1280160" y="3063240"/>
+            <a:ext cx="10332720" cy="1234440"/>
+          </a:xfrm>
+          <a:prstGeom prst="rect">
+            <a:avLst/>
+          </a:prstGeom>
+          <a:noFill/>
+          <a:ln/>
+        </p:spPr>
+        <p:txBody>
+          <a:bodyPr wrap="square" lIns="0" tIns="0" rIns="0" bIns="0" rtlCol="0" anchor="t"/>
+          <a:lstStyle/>
+          <a:p>
+            <a:pPr marL="0" indent="0">
+              <a:lnSpc>
+                <a:spcPct val="112000"/>
+              </a:lnSpc>
+              <a:buNone/>
+            </a:pPr>
+            <a:r>
+              <a:rPr lang="en-US" sz="1450" b="1" dirty="0">
+                <a:solidFill>
+                  <a:srgbClr val="141A22"/>
+                </a:solidFill>
+                <a:latin typeface="Calibri" pitchFamily="34" charset="0"/>
+                <a:ea typeface="Calibri" pitchFamily="34" charset="-122"/>
+                <a:cs typeface="Calibri" pitchFamily="34" charset="-120"/>
+              </a:rPr>
+              <a:t>2. Fit (new, external)
+</a:t>
+            </a:r>
+            <a:r>
+              <a:rPr lang="en-US" sz="1250" dirty="0">
+                <a:solidFill>
+                  <a:srgbClr val="5B6672"/>
+                </a:solidFill>
+                <a:latin typeface="Calibri" pitchFamily="34" charset="0"/>
+                <a:ea typeface="Calibri" pitchFamily="34" charset="-122"/>
+                <a:cs typeface="Calibri" pitchFamily="34" charset="-120"/>
+              </a:rPr>
+              <a:t>A Python CLEAN / matrix-pencil tool reads the resulting CPHD via cphdInfo and outputs a compact ASC parameter table — no C++ changes needed for this stage.</a:t>
+            </a:r>
+            <a:endParaRPr lang="en-US" sz="1450" dirty="0"/>
+          </a:p>
+        </p:txBody>
+      </p:sp>
+      <p:sp>
+        <p:nvSpPr>
+          <p:cNvPr id="10" name="Shape 8"/>
+          <p:cNvSpPr/>
+          <p:nvPr/>
+        </p:nvSpPr>
+        <p:spPr>
+          <a:xfrm>
+            <a:off x="548640" y="4370832"/>
+            <a:ext cx="502920" cy="502920"/>
+          </a:xfrm>
+          <a:prstGeom prst="ellipse">
+            <a:avLst/>
+          </a:prstGeom>
+          <a:solidFill>
+            <a:srgbClr val="FF9E2C"/>
+          </a:solidFill>
+          <a:ln/>
+        </p:spPr>
+      </p:sp>
+      <p:sp>
+        <p:nvSpPr>
+          <p:cNvPr id="11" name="Text 9"/>
+          <p:cNvSpPr/>
+          <p:nvPr/>
+        </p:nvSpPr>
+        <p:spPr>
+          <a:xfrm>
+            <a:off x="548640" y="4370832"/>
+            <a:ext cx="502920" cy="502920"/>
+          </a:xfrm>
+          <a:prstGeom prst="rect">
+            <a:avLst/>
+          </a:prstGeom>
+          <a:noFill/>
+          <a:ln/>
+        </p:spPr>
+        <p:txBody>
+          <a:bodyPr wrap="square" lIns="0" tIns="0" rIns="0" bIns="0" rtlCol="0" anchor="ctr"/>
+          <a:lstStyle/>
+          <a:p>
+            <a:pPr marL="0" indent="0" algn="ctr">
+              <a:buNone/>
+            </a:pPr>
+            <a:r>
+              <a:rPr lang="en-US" sz="1700" b="1" dirty="0">
+                <a:solidFill>
+                  <a:srgbClr val="12161C"/>
+                </a:solidFill>
+                <a:latin typeface="Cambria" pitchFamily="34" charset="0"/>
+                <a:ea typeface="Cambria" pitchFamily="34" charset="-122"/>
+                <a:cs typeface="Cambria" pitchFamily="34" charset="-120"/>
+              </a:rPr>
+              <a:t>3</a:t>
+            </a:r>
+            <a:endParaRPr lang="en-US" sz="1700" dirty="0"/>
+          </a:p>
+        </p:txBody>
+      </p:sp>
+      <p:sp>
+        <p:nvSpPr>
+          <p:cNvPr id="12" name="Text 10"/>
+          <p:cNvSpPr/>
+          <p:nvPr/>
+        </p:nvSpPr>
+        <p:spPr>
+          <a:xfrm>
+            <a:off x="1280160" y="4297680"/>
+            <a:ext cx="10332720" cy="1234440"/>
+          </a:xfrm>
+          <a:prstGeom prst="rect">
+            <a:avLst/>
+          </a:prstGeom>
+          <a:noFill/>
+          <a:ln/>
+        </p:spPr>
+        <p:txBody>
+          <a:bodyPr wrap="square" lIns="0" tIns="0" rIns="0" bIns="0" rtlCol="0" anchor="t"/>
+          <a:lstStyle/>
+          <a:p>
+            <a:pPr marL="0" indent="0">
+              <a:lnSpc>
+                <a:spcPct val="112000"/>
+              </a:lnSpc>
+              <a:buNone/>
+            </a:pPr>
+            <a:r>
+              <a:rPr lang="en-US" sz="1450" b="1" dirty="0">
+                <a:solidFill>
+                  <a:srgbClr val="141A22"/>
+                </a:solidFill>
+                <a:latin typeface="Calibri" pitchFamily="34" charset="0"/>
+                <a:ea typeface="Calibri" pitchFamily="34" charset="-122"/>
+                <a:cs typeface="Calibri" pitchFamily="34" charset="-120"/>
+              </a:rPr>
+              <a:t>3. Evaluate (new, in-core)
+</a:t>
+            </a:r>
+            <a:r>
+              <a:rPr lang="en-US" sz="1250" dirty="0">
+                <a:solidFill>
+                  <a:srgbClr val="5B6672"/>
+                </a:solidFill>
+                <a:latin typeface="Calibri" pitchFamily="34" charset="0"/>
+                <a:ea typeface="Calibri" pitchFamily="34" charset="-122"/>
+                <a:cs typeface="Calibri" pitchFamily="34" charset="-120"/>
+              </a:rPr>
+              <a:t>ascField.cpp, parallel to cpuPOField.cpp: facet stays in the BVH for occlusion but opts out of RCS.c; one shadow ray per pulse gates the contribution; threadCore.cpp combines it additively with a per-pulse validity-sector fallback to full ray tracing.</a:t>
+            </a:r>
+            <a:endParaRPr lang="en-US" sz="1450" dirty="0"/>
+          </a:p>
+        </p:txBody>
+      </p:sp>
+      <p:sp>
+        <p:nvSpPr>
+          <p:cNvPr id="13" name="Text 11"/>
+          <p:cNvSpPr/>
+          <p:nvPr/>
+        </p:nvSpPr>
+        <p:spPr>
+          <a:xfrm>
+            <a:off x="548640" y="5577840"/>
+            <a:ext cx="10698480" cy="548640"/>
+          </a:xfrm>
+          <a:prstGeom prst="rect">
+            <a:avLst/>
+          </a:prstGeom>
+          <a:noFill/>
+          <a:ln/>
+        </p:spPr>
+        <p:txBody>
+          <a:bodyPr wrap="square" lIns="0" tIns="0" rIns="0" bIns="0" rtlCol="0" anchor="ctr"/>
+          <a:lstStyle/>
+          <a:p>
+            <a:pPr marL="0" indent="0">
+              <a:lnSpc>
+                <a:spcPct val="110000"/>
+              </a:lnSpc>
+              <a:buNone/>
+            </a:pPr>
+            <a:r>
+              <a:rPr lang="en-US" sz="1250" i="1" dirty="0">
+                <a:solidFill>
+                  <a:srgbClr val="B85C00"/>
+                </a:solidFill>
+                <a:latin typeface="Calibri" pitchFamily="34" charset="0"/>
+                <a:ea typeface="Calibri" pitchFamily="34" charset="-122"/>
+                <a:cs typeface="Calibri" pitchFamily="34" charset="-120"/>
+              </a:rPr>
+              <a:t>Same mechanism, dual purpose: the parallel-evaluator-plus-additive-injection pattern here is exactly what target injection needs too — one piece of infrastructure serves both.</a:t>
+            </a:r>
+            <a:endParaRPr lang="en-US" sz="1250" dirty="0"/>
+          </a:p>
+        </p:txBody>
+      </p:sp>
+    </p:spTree>
+    <p:extLst>
+      <p:ext uri="{BB962C8B-B14F-4D97-AF65-F5344CB8AC3E}">
+        <p14:creationId xmlns:p14="http://schemas.microsoft.com/office/powerpoint/2010/main" val="737475423"/>
+      </p:ext>
+    </p:extLst>
+  </p:cSld>
+  <p:clrMapOvr>
+    <a:masterClrMapping/>
+  </p:clrMapOvr>
+</p:sld>
+</file>
+
+<file path=ppt/slides/slide31.xml><?xml version="1.0" encoding="utf-8"?>
 <p:sld xmlns:a="http://schemas.openxmlformats.org/drawingml/2006/main" xmlns:r="http://schemas.openxmlformats.org/officeDocument/2006/relationships" xmlns:p="http://schemas.openxmlformats.org/presentationml/2006/main">
   <p:cSld name="Slide 5">
     <p:bg>
@@ -18981,818 +21600,7 @@
 </p:sld>
 </file>
 
-<file path=ppt/slides/slide3.xml><?xml version="1.0" encoding="utf-8"?>
-<p:sld xmlns:a="http://schemas.openxmlformats.org/drawingml/2006/main" xmlns:r="http://schemas.openxmlformats.org/officeDocument/2006/relationships" xmlns:p="http://schemas.openxmlformats.org/presentationml/2006/main">
-  <p:cSld>
-    <p:spTree>
-      <p:nvGrpSpPr>
-        <p:cNvPr id="1" name=""/>
-        <p:cNvGrpSpPr/>
-        <p:nvPr/>
-      </p:nvGrpSpPr>
-      <p:grpSpPr>
-        <a:xfrm>
-          <a:off x="0" y="0"/>
-          <a:ext cx="0" cy="0"/>
-          <a:chOff x="0" y="0"/>
-          <a:chExt cx="0" cy="0"/>
-        </a:xfrm>
-      </p:grpSpPr>
-      <p:sp>
-        <p:nvSpPr>
-          <p:cNvPr id="2" name="Text 0"/>
-          <p:cNvSpPr/>
-          <p:nvPr/>
-        </p:nvSpPr>
-        <p:spPr>
-          <a:xfrm>
-            <a:off x="548640" y="365760"/>
-            <a:ext cx="9144000" cy="292608"/>
-          </a:xfrm>
-          <a:prstGeom prst="rect">
-            <a:avLst/>
-          </a:prstGeom>
-          <a:noFill/>
-          <a:ln/>
-        </p:spPr>
-        <p:txBody>
-          <a:bodyPr wrap="square" lIns="0" tIns="0" rIns="0" bIns="0" rtlCol="0" anchor="ctr"/>
-          <a:lstStyle/>
-          <a:p>
-            <a:pPr marL="0" indent="0">
-              <a:buNone/>
-            </a:pPr>
-            <a:r>
-              <a:rPr lang="en-US" sz="1200" b="1" kern="0" spc="200" dirty="0">
-                <a:solidFill>
-                  <a:srgbClr val="B85C00"/>
-                </a:solidFill>
-                <a:latin typeface="Calibri" pitchFamily="34" charset="0"/>
-                <a:ea typeface="Calibri" pitchFamily="34" charset="-122"/>
-                <a:cs typeface="Calibri" pitchFamily="34" charset="-120"/>
-              </a:rPr>
-              <a:t>MOTIVATION, CONTINUED</a:t>
-            </a:r>
-            <a:endParaRPr lang="en-US" sz="1200" dirty="0"/>
-          </a:p>
-        </p:txBody>
-      </p:sp>
-      <p:sp>
-        <p:nvSpPr>
-          <p:cNvPr id="3" name="Text 1"/>
-          <p:cNvSpPr/>
-          <p:nvPr/>
-        </p:nvSpPr>
-        <p:spPr>
-          <a:xfrm>
-            <a:off x="548640" y="658368"/>
-            <a:ext cx="10881360" cy="868680"/>
-          </a:xfrm>
-          <a:prstGeom prst="rect">
-            <a:avLst/>
-          </a:prstGeom>
-          <a:noFill/>
-          <a:ln/>
-        </p:spPr>
-        <p:txBody>
-          <a:bodyPr wrap="square" lIns="0" tIns="0" rIns="0" bIns="0" rtlCol="0" anchor="t"/>
-          <a:lstStyle/>
-          <a:p>
-            <a:pPr marL="0" indent="0">
-              <a:buNone/>
-            </a:pPr>
-            <a:r>
-              <a:rPr lang="en-US" sz="2400" b="1" dirty="0">
-                <a:solidFill>
-                  <a:srgbClr val="141A22"/>
-                </a:solidFill>
-                <a:latin typeface="Cambria" pitchFamily="34" charset="0"/>
-                <a:ea typeface="Cambria" pitchFamily="34" charset="-122"/>
-                <a:cs typeface="Cambria" pitchFamily="34" charset="-120"/>
-              </a:rPr>
-              <a:t>Concrete use cases: who runs this, and for what</a:t>
-            </a:r>
-            <a:endParaRPr lang="en-US" sz="2400" dirty="0"/>
-          </a:p>
-        </p:txBody>
-      </p:sp>
-      <p:sp>
-        <p:nvSpPr>
-          <p:cNvPr id="4" name="Text 2"/>
-          <p:cNvSpPr/>
-          <p:nvPr/>
-        </p:nvSpPr>
-        <p:spPr>
-          <a:xfrm>
-            <a:off x="548640" y="1234440"/>
-            <a:ext cx="11091672" cy="457200"/>
-          </a:xfrm>
-          <a:prstGeom prst="rect">
-            <a:avLst/>
-          </a:prstGeom>
-          <a:noFill/>
-          <a:ln/>
-        </p:spPr>
-        <p:txBody>
-          <a:bodyPr wrap="square" lIns="0" tIns="0" rIns="0" bIns="0" rtlCol="0" anchor="ctr"/>
-          <a:lstStyle/>
-          <a:p>
-            <a:pPr marL="0" indent="0">
-              <a:lnSpc>
-                <a:spcPct val="112000"/>
-              </a:lnSpc>
-              <a:buNone/>
-            </a:pPr>
-            <a:r>
-              <a:rPr lang="en-US" sz="1250" i="1" dirty="0">
-                <a:solidFill>
-                  <a:srgbClr val="5B6672"/>
-                </a:solidFill>
-                <a:latin typeface="Calibri" pitchFamily="34" charset="0"/>
-                <a:ea typeface="Calibri" pitchFamily="34" charset="-122"/>
-                <a:cs typeface="Calibri" pitchFamily="34" charset="-120"/>
-              </a:rPr>
-              <a:t>Beyond the general motivation (previous slide): three places a controllable, ground-truthed SAR forward model earns its keep in practice.</a:t>
-            </a:r>
-            <a:endParaRPr lang="en-US" sz="1250" dirty="0"/>
-          </a:p>
-        </p:txBody>
-      </p:sp>
-      <p:sp>
-        <p:nvSpPr>
-          <p:cNvPr id="5" name="Shape 3"/>
-          <p:cNvSpPr/>
-          <p:nvPr/>
-        </p:nvSpPr>
-        <p:spPr>
-          <a:xfrm>
-            <a:off x="548640" y="1828800"/>
-            <a:ext cx="3511296" cy="4160520"/>
-          </a:xfrm>
-          <a:prstGeom prst="roundRect">
-            <a:avLst>
-              <a:gd name="adj" fmla="val 2083"/>
-            </a:avLst>
-          </a:prstGeom>
-          <a:solidFill>
-            <a:srgbClr val="F1F4F8"/>
-          </a:solidFill>
-          <a:ln/>
-          <a:effectLst>
-            <a:outerShdw blurRad="101600" dist="38100" dir="5400000" algn="bl" rotWithShape="0">
-              <a:srgbClr val="9AA5B1">
-                <a:alpha val="22000"/>
-              </a:srgbClr>
-            </a:outerShdw>
-          </a:effectLst>
-        </p:spPr>
-      </p:sp>
-      <p:sp>
-        <p:nvSpPr>
-          <p:cNvPr id="6" name="Shape 4"/>
-          <p:cNvSpPr/>
-          <p:nvPr/>
-        </p:nvSpPr>
-        <p:spPr>
-          <a:xfrm>
-            <a:off x="822960" y="2103120"/>
-            <a:ext cx="566928" cy="566928"/>
-          </a:xfrm>
-          <a:prstGeom prst="ellipse">
-            <a:avLst/>
-          </a:prstGeom>
-          <a:solidFill>
-            <a:srgbClr val="FF9E2C"/>
-          </a:solidFill>
-          <a:ln/>
-        </p:spPr>
-      </p:sp>
-      <p:pic>
-        <p:nvPicPr>
-          <p:cNvPr id="7" name="Image 0" descr="/sessions/sweet-friendly-mayer/mnt/outputs/presentation/icons/FaCheckCircle_dark.png"/>
-          <p:cNvPicPr>
-            <a:picLocks noChangeAspect="1"/>
-          </p:cNvPicPr>
-          <p:nvPr/>
-        </p:nvPicPr>
-        <p:blipFill>
-          <a:blip r:embed="rId3"/>
-          <a:stretch>
-            <a:fillRect/>
-          </a:stretch>
-        </p:blipFill>
-        <p:spPr>
-          <a:xfrm>
-            <a:off x="976031" y="2256191"/>
-            <a:ext cx="260787" cy="260787"/>
-          </a:xfrm>
-          <a:prstGeom prst="rect">
-            <a:avLst/>
-          </a:prstGeom>
-        </p:spPr>
-      </p:pic>
-      <p:sp>
-        <p:nvSpPr>
-          <p:cNvPr id="8" name="Text 5"/>
-          <p:cNvSpPr/>
-          <p:nvPr/>
-        </p:nvSpPr>
-        <p:spPr>
-          <a:xfrm>
-            <a:off x="822960" y="2788920"/>
-            <a:ext cx="2962656" cy="502920"/>
-          </a:xfrm>
-          <a:prstGeom prst="rect">
-            <a:avLst/>
-          </a:prstGeom>
-          <a:noFill/>
-          <a:ln/>
-        </p:spPr>
-        <p:txBody>
-          <a:bodyPr wrap="square" lIns="0" tIns="0" rIns="0" bIns="0" rtlCol="0" anchor="t"/>
-          <a:lstStyle/>
-          <a:p>
-            <a:pPr marL="0" indent="0">
-              <a:lnSpc>
-                <a:spcPct val="110000"/>
-              </a:lnSpc>
-              <a:buNone/>
-            </a:pPr>
-            <a:r>
-              <a:rPr lang="en-US" sz="1450" b="1" dirty="0">
-                <a:solidFill>
-                  <a:srgbClr val="141A22"/>
-                </a:solidFill>
-                <a:latin typeface="Calibri" pitchFamily="34" charset="0"/>
-                <a:ea typeface="Calibri" pitchFamily="34" charset="-122"/>
-                <a:cs typeface="Calibri" pitchFamily="34" charset="-120"/>
-              </a:rPr>
-              <a:t>ATR &amp; Detection</a:t>
-            </a:r>
-            <a:endParaRPr lang="en-US" sz="1450" dirty="0"/>
-          </a:p>
-        </p:txBody>
-      </p:sp>
-      <p:sp>
-        <p:nvSpPr>
-          <p:cNvPr id="9" name="Text 6"/>
-          <p:cNvSpPr/>
-          <p:nvPr/>
-        </p:nvSpPr>
-        <p:spPr>
-          <a:xfrm>
-            <a:off x="822960" y="3337560"/>
-            <a:ext cx="2962656" cy="2468880"/>
-          </a:xfrm>
-          <a:prstGeom prst="rect">
-            <a:avLst/>
-          </a:prstGeom>
-          <a:noFill/>
-          <a:ln/>
-        </p:spPr>
-        <p:txBody>
-          <a:bodyPr wrap="square" lIns="0" tIns="0" rIns="0" bIns="0" rtlCol="0" anchor="t"/>
-          <a:lstStyle/>
-          <a:p>
-            <a:pPr marL="203200" indent="-203200">
-              <a:lnSpc>
-                <a:spcPct val="112000"/>
-              </a:lnSpc>
-              <a:spcAft>
-                <a:spcPts val="1000"/>
-              </a:spcAft>
-              <a:buSzPct val="100000"/>
-              <a:buChar char="•"/>
-            </a:pPr>
-            <a:r>
-              <a:rPr lang="en-US" sz="1050" dirty="0">
-                <a:solidFill>
-                  <a:srgbClr val="141A22"/>
-                </a:solidFill>
-                <a:latin typeface="Calibri" pitchFamily="34" charset="0"/>
-                <a:ea typeface="Calibri" pitchFamily="34" charset="-122"/>
-                <a:cs typeface="Calibri" pitchFamily="34" charset="-120"/>
-              </a:rPr>
-              <a:t>Training data augmentation via target injection into real clutter -- covers rare target classes/poses real collections can't supply on demand</a:t>
-            </a:r>
-            <a:endParaRPr lang="en-US" sz="1050" dirty="0"/>
-          </a:p>
-          <a:p>
-            <a:pPr marL="203200" indent="-203200">
-              <a:lnSpc>
-                <a:spcPct val="112000"/>
-              </a:lnSpc>
-              <a:spcAft>
-                <a:spcPts val="1000"/>
-              </a:spcAft>
-              <a:buSzPct val="100000"/>
-              <a:buChar char="•"/>
-            </a:pPr>
-            <a:r>
-              <a:rPr lang="en-US" sz="1050" dirty="0">
-                <a:solidFill>
-                  <a:srgbClr val="141A22"/>
-                </a:solidFill>
-                <a:latin typeface="Calibri" pitchFamily="34" charset="0"/>
-                <a:ea typeface="Calibri" pitchFamily="34" charset="-122"/>
-                <a:cs typeface="Calibri" pitchFamily="34" charset="-120"/>
-              </a:rPr>
-              <a:t>Model-based / matched-filter detection templates – simulated model double as the detector's reference signature</a:t>
-            </a:r>
-            <a:endParaRPr lang="en-US" sz="1050" dirty="0"/>
-          </a:p>
-          <a:p>
-            <a:pPr marL="203200" indent="-203200">
-              <a:lnSpc>
-                <a:spcPct val="112000"/>
-              </a:lnSpc>
-              <a:spcAft>
-                <a:spcPts val="1000"/>
-              </a:spcAft>
-              <a:buSzPct val="100000"/>
-              <a:buChar char="•"/>
-            </a:pPr>
-            <a:r>
-              <a:rPr lang="en-US" sz="1050" dirty="0">
-                <a:solidFill>
-                  <a:srgbClr val="141A22"/>
-                </a:solidFill>
-                <a:latin typeface="Calibri" pitchFamily="34" charset="0"/>
-                <a:ea typeface="Calibri" pitchFamily="34" charset="-122"/>
-                <a:cs typeface="Calibri" pitchFamily="34" charset="-120"/>
-              </a:rPr>
-              <a:t>Synthetic scenario generation for analyst training and benchmark construction, with exact ground-truth labels no manual annotation can match</a:t>
-            </a:r>
-            <a:endParaRPr lang="en-US" sz="1050" dirty="0"/>
-          </a:p>
-        </p:txBody>
-      </p:sp>
-      <p:sp>
-        <p:nvSpPr>
-          <p:cNvPr id="10" name="Shape 7"/>
-          <p:cNvSpPr/>
-          <p:nvPr/>
-        </p:nvSpPr>
-        <p:spPr>
-          <a:xfrm>
-            <a:off x="4334256" y="1828800"/>
-            <a:ext cx="3511296" cy="4160520"/>
-          </a:xfrm>
-          <a:prstGeom prst="roundRect">
-            <a:avLst>
-              <a:gd name="adj" fmla="val 2083"/>
-            </a:avLst>
-          </a:prstGeom>
-          <a:solidFill>
-            <a:srgbClr val="F1F4F8"/>
-          </a:solidFill>
-          <a:ln/>
-          <a:effectLst>
-            <a:outerShdw blurRad="101600" dist="38100" dir="5400000" algn="bl" rotWithShape="0">
-              <a:srgbClr val="9AA5B1">
-                <a:alpha val="22000"/>
-              </a:srgbClr>
-            </a:outerShdw>
-          </a:effectLst>
-        </p:spPr>
-      </p:sp>
-      <p:sp>
-        <p:nvSpPr>
-          <p:cNvPr id="11" name="Shape 8"/>
-          <p:cNvSpPr/>
-          <p:nvPr/>
-        </p:nvSpPr>
-        <p:spPr>
-          <a:xfrm>
-            <a:off x="4608576" y="2103120"/>
-            <a:ext cx="566928" cy="566928"/>
-          </a:xfrm>
-          <a:prstGeom prst="ellipse">
-            <a:avLst/>
-          </a:prstGeom>
-          <a:solidFill>
-            <a:srgbClr val="4FD8EB"/>
-          </a:solidFill>
-          <a:ln/>
-        </p:spPr>
-      </p:sp>
-      <p:pic>
-        <p:nvPicPr>
-          <p:cNvPr id="12" name="Image 1" descr="/sessions/sweet-friendly-mayer/mnt/outputs/presentation/icons/FaTools_dark.png"/>
-          <p:cNvPicPr>
-            <a:picLocks noChangeAspect="1"/>
-          </p:cNvPicPr>
-          <p:nvPr/>
-        </p:nvPicPr>
-        <p:blipFill>
-          <a:blip r:embed="rId4"/>
-          <a:stretch>
-            <a:fillRect/>
-          </a:stretch>
-        </p:blipFill>
-        <p:spPr>
-          <a:xfrm>
-            <a:off x="4761647" y="2256191"/>
-            <a:ext cx="260787" cy="260787"/>
-          </a:xfrm>
-          <a:prstGeom prst="rect">
-            <a:avLst/>
-          </a:prstGeom>
-        </p:spPr>
-      </p:pic>
-      <p:sp>
-        <p:nvSpPr>
-          <p:cNvPr id="13" name="Text 9"/>
-          <p:cNvSpPr/>
-          <p:nvPr/>
-        </p:nvSpPr>
-        <p:spPr>
-          <a:xfrm>
-            <a:off x="4608576" y="2788920"/>
-            <a:ext cx="2962656" cy="502920"/>
-          </a:xfrm>
-          <a:prstGeom prst="rect">
-            <a:avLst/>
-          </a:prstGeom>
-          <a:noFill/>
-          <a:ln/>
-        </p:spPr>
-        <p:txBody>
-          <a:bodyPr wrap="square" lIns="0" tIns="0" rIns="0" bIns="0" rtlCol="0" anchor="t"/>
-          <a:lstStyle/>
-          <a:p>
-            <a:pPr marL="0" indent="0">
-              <a:lnSpc>
-                <a:spcPct val="110000"/>
-              </a:lnSpc>
-              <a:buNone/>
-            </a:pPr>
-            <a:r>
-              <a:rPr lang="en-US" sz="1450" b="1" dirty="0">
-                <a:solidFill>
-                  <a:srgbClr val="141A22"/>
-                </a:solidFill>
-                <a:latin typeface="Calibri" pitchFamily="34" charset="0"/>
-                <a:ea typeface="Calibri" pitchFamily="34" charset="-122"/>
-                <a:cs typeface="Calibri" pitchFamily="34" charset="-120"/>
-              </a:rPr>
-              <a:t>Algorithm Development &amp; Test</a:t>
-            </a:r>
-            <a:endParaRPr lang="en-US" sz="1450" dirty="0"/>
-          </a:p>
-        </p:txBody>
-      </p:sp>
-      <p:sp>
-        <p:nvSpPr>
-          <p:cNvPr id="14" name="Text 10"/>
-          <p:cNvSpPr/>
-          <p:nvPr/>
-        </p:nvSpPr>
-        <p:spPr>
-          <a:xfrm>
-            <a:off x="4608576" y="3337560"/>
-            <a:ext cx="2962656" cy="2468880"/>
-          </a:xfrm>
-          <a:prstGeom prst="rect">
-            <a:avLst/>
-          </a:prstGeom>
-          <a:noFill/>
-          <a:ln/>
-        </p:spPr>
-        <p:txBody>
-          <a:bodyPr wrap="square" lIns="0" tIns="0" rIns="0" bIns="0" rtlCol="0" anchor="t"/>
-          <a:lstStyle/>
-          <a:p>
-            <a:pPr marL="203200" indent="-203200">
-              <a:lnSpc>
-                <a:spcPct val="112000"/>
-              </a:lnSpc>
-              <a:spcAft>
-                <a:spcPts val="1000"/>
-              </a:spcAft>
-              <a:buSzPct val="100000"/>
-              <a:buChar char="•"/>
-            </a:pPr>
-            <a:r>
-              <a:rPr lang="en-US" sz="1050" dirty="0">
-                <a:solidFill>
-                  <a:srgbClr val="141A22"/>
-                </a:solidFill>
-                <a:latin typeface="Calibri" pitchFamily="34" charset="0"/>
-                <a:ea typeface="Calibri" pitchFamily="34" charset="-122"/>
-                <a:cs typeface="Calibri" pitchFamily="34" charset="-120"/>
-              </a:rPr>
-              <a:t>Ground Moving Target Indicator (GMTI) -- exercise a mover detector against known-truth radial velocity and clutter notch before recording live multi-channel data</a:t>
-            </a:r>
-            <a:endParaRPr lang="en-US" sz="1050" dirty="0"/>
-          </a:p>
-          <a:p>
-            <a:pPr marL="203200" indent="-203200">
-              <a:lnSpc>
-                <a:spcPct val="112000"/>
-              </a:lnSpc>
-              <a:spcAft>
-                <a:spcPts val="1000"/>
-              </a:spcAft>
-              <a:buSzPct val="100000"/>
-              <a:buChar char="•"/>
-            </a:pPr>
-            <a:r>
-              <a:rPr lang="en-US" sz="1050" dirty="0">
-                <a:solidFill>
-                  <a:srgbClr val="141A22"/>
-                </a:solidFill>
-                <a:latin typeface="Calibri" pitchFamily="34" charset="0"/>
-                <a:ea typeface="Calibri" pitchFamily="34" charset="-122"/>
-                <a:cs typeface="Calibri" pitchFamily="34" charset="-120"/>
-              </a:rPr>
-              <a:t>Change-detection algorithm testing -- paired before/after scenes with exactly known ground-truth changes, on demand</a:t>
-            </a:r>
-            <a:endParaRPr lang="en-US" sz="1050" dirty="0"/>
-          </a:p>
-          <a:p>
-            <a:pPr marL="203200" indent="-203200">
-              <a:lnSpc>
-                <a:spcPct val="112000"/>
-              </a:lnSpc>
-              <a:spcAft>
-                <a:spcPts val="1000"/>
-              </a:spcAft>
-              <a:buSzPct val="100000"/>
-              <a:buChar char="•"/>
-            </a:pPr>
-            <a:r>
-              <a:rPr lang="en-US" sz="1050" dirty="0">
-                <a:solidFill>
-                  <a:srgbClr val="141A22"/>
-                </a:solidFill>
-                <a:latin typeface="Calibri" pitchFamily="34" charset="0"/>
-                <a:ea typeface="Calibri" pitchFamily="34" charset="-122"/>
-                <a:cs typeface="Calibri" pitchFamily="34" charset="-120"/>
-              </a:rPr>
-              <a:t>Image-formation / autofocus validation</a:t>
-            </a:r>
-            <a:endParaRPr lang="en-US" sz="1050" dirty="0"/>
-          </a:p>
-        </p:txBody>
-      </p:sp>
-      <p:sp>
-        <p:nvSpPr>
-          <p:cNvPr id="15" name="Shape 11"/>
-          <p:cNvSpPr/>
-          <p:nvPr/>
-        </p:nvSpPr>
-        <p:spPr>
-          <a:xfrm>
-            <a:off x="8119872" y="1828800"/>
-            <a:ext cx="3511296" cy="4160520"/>
-          </a:xfrm>
-          <a:prstGeom prst="roundRect">
-            <a:avLst>
-              <a:gd name="adj" fmla="val 2083"/>
-            </a:avLst>
-          </a:prstGeom>
-          <a:solidFill>
-            <a:srgbClr val="F1F4F8"/>
-          </a:solidFill>
-          <a:ln/>
-          <a:effectLst>
-            <a:outerShdw blurRad="101600" dist="38100" dir="5400000" algn="bl" rotWithShape="0">
-              <a:srgbClr val="9AA5B1">
-                <a:alpha val="22000"/>
-              </a:srgbClr>
-            </a:outerShdw>
-          </a:effectLst>
-        </p:spPr>
-      </p:sp>
-      <p:sp>
-        <p:nvSpPr>
-          <p:cNvPr id="16" name="Shape 12"/>
-          <p:cNvSpPr/>
-          <p:nvPr/>
-        </p:nvSpPr>
-        <p:spPr>
-          <a:xfrm>
-            <a:off x="8394192" y="2103120"/>
-            <a:ext cx="566928" cy="566928"/>
-          </a:xfrm>
-          <a:prstGeom prst="ellipse">
-            <a:avLst/>
-          </a:prstGeom>
-          <a:solidFill>
-            <a:srgbClr val="FF9E2C"/>
-          </a:solidFill>
-          <a:ln/>
-        </p:spPr>
-      </p:sp>
-      <p:pic>
-        <p:nvPicPr>
-          <p:cNvPr id="17" name="Image 2" descr="/sessions/sweet-friendly-mayer/mnt/outputs/presentation/icons/FaSatelliteDish_dark.png"/>
-          <p:cNvPicPr>
-            <a:picLocks noChangeAspect="1"/>
-          </p:cNvPicPr>
-          <p:nvPr/>
-        </p:nvPicPr>
-        <p:blipFill>
-          <a:blip r:embed="rId5"/>
-          <a:stretch>
-            <a:fillRect/>
-          </a:stretch>
-        </p:blipFill>
-        <p:spPr>
-          <a:xfrm>
-            <a:off x="8547263" y="2256191"/>
-            <a:ext cx="260787" cy="260787"/>
-          </a:xfrm>
-          <a:prstGeom prst="rect">
-            <a:avLst/>
-          </a:prstGeom>
-        </p:spPr>
-      </p:pic>
-      <p:sp>
-        <p:nvSpPr>
-          <p:cNvPr id="18" name="Text 13"/>
-          <p:cNvSpPr/>
-          <p:nvPr/>
-        </p:nvSpPr>
-        <p:spPr>
-          <a:xfrm>
-            <a:off x="8394192" y="2788920"/>
-            <a:ext cx="2962656" cy="502920"/>
-          </a:xfrm>
-          <a:prstGeom prst="rect">
-            <a:avLst/>
-          </a:prstGeom>
-          <a:noFill/>
-          <a:ln/>
-        </p:spPr>
-        <p:txBody>
-          <a:bodyPr wrap="square" lIns="0" tIns="0" rIns="0" bIns="0" rtlCol="0" anchor="t"/>
-          <a:lstStyle/>
-          <a:p>
-            <a:pPr marL="0" indent="0">
-              <a:lnSpc>
-                <a:spcPct val="110000"/>
-              </a:lnSpc>
-              <a:buNone/>
-            </a:pPr>
-            <a:r>
-              <a:rPr lang="en-US" sz="1450" b="1" dirty="0">
-                <a:solidFill>
-                  <a:srgbClr val="141A22"/>
-                </a:solidFill>
-                <a:latin typeface="Calibri" pitchFamily="34" charset="0"/>
-                <a:ea typeface="Calibri" pitchFamily="34" charset="-122"/>
-                <a:cs typeface="Calibri" pitchFamily="34" charset="-120"/>
-              </a:rPr>
-              <a:t>Mission Planning &amp; Sensor Trade Studies</a:t>
-            </a:r>
-            <a:endParaRPr lang="en-US" sz="1450" dirty="0"/>
-          </a:p>
-        </p:txBody>
-      </p:sp>
-      <p:sp>
-        <p:nvSpPr>
-          <p:cNvPr id="19" name="Text 14"/>
-          <p:cNvSpPr/>
-          <p:nvPr/>
-        </p:nvSpPr>
-        <p:spPr>
-          <a:xfrm>
-            <a:off x="8394192" y="3337560"/>
-            <a:ext cx="2962656" cy="2468880"/>
-          </a:xfrm>
-          <a:prstGeom prst="rect">
-            <a:avLst/>
-          </a:prstGeom>
-          <a:noFill/>
-          <a:ln/>
-        </p:spPr>
-        <p:txBody>
-          <a:bodyPr wrap="square" lIns="0" tIns="0" rIns="0" bIns="0" rtlCol="0" anchor="t"/>
-          <a:lstStyle/>
-          <a:p>
-            <a:pPr marL="203200" indent="-203200">
-              <a:lnSpc>
-                <a:spcPct val="112000"/>
-              </a:lnSpc>
-              <a:spcAft>
-                <a:spcPts val="1000"/>
-              </a:spcAft>
-              <a:buSzPct val="100000"/>
-              <a:buChar char="•"/>
-            </a:pPr>
-            <a:r>
-              <a:rPr lang="en-US" sz="1050" dirty="0">
-                <a:solidFill>
-                  <a:srgbClr val="141A22"/>
-                </a:solidFill>
-                <a:latin typeface="Calibri" pitchFamily="34" charset="0"/>
-                <a:ea typeface="Calibri" pitchFamily="34" charset="-122"/>
-                <a:cs typeface="Calibri" pitchFamily="34" charset="-120"/>
-              </a:rPr>
-              <a:t>Pre-fly the collection plan -- test standoff/altitude/depression-angle and aspect combinations in simulation to find what actually resolves the target before spending real tasking budget</a:t>
-            </a:r>
-            <a:endParaRPr lang="en-US" sz="1050" dirty="0"/>
-          </a:p>
-          <a:p>
-            <a:pPr marL="203200" indent="-203200">
-              <a:lnSpc>
-                <a:spcPct val="112000"/>
-              </a:lnSpc>
-              <a:spcAft>
-                <a:spcPts val="1000"/>
-              </a:spcAft>
-              <a:buSzPct val="100000"/>
-              <a:buChar char="•"/>
-            </a:pPr>
-            <a:r>
-              <a:rPr lang="en-US" sz="1050" dirty="0">
-                <a:solidFill>
-                  <a:srgbClr val="141A22"/>
-                </a:solidFill>
-                <a:latin typeface="Calibri" pitchFamily="34" charset="0"/>
-                <a:ea typeface="Calibri" pitchFamily="34" charset="-122"/>
-                <a:cs typeface="Calibri" pitchFamily="34" charset="-120"/>
-              </a:rPr>
-              <a:t>Real commercial tasking runs roughly $1300-$7000 per scene (Airbus/Astrium GEO TerraSAR-X price list) vs. seconds per simulated pass on a Graphical Processing Unit (GPU)-- cheap enough to optimize collection value first</a:t>
-            </a:r>
-            <a:endParaRPr lang="en-US" sz="1050" dirty="0"/>
-          </a:p>
-          <a:p>
-            <a:pPr marL="203200" indent="-203200">
-              <a:lnSpc>
-                <a:spcPct val="112000"/>
-              </a:lnSpc>
-              <a:spcAft>
-                <a:spcPts val="1000"/>
-              </a:spcAft>
-              <a:buSzPct val="100000"/>
-              <a:buChar char="•"/>
-            </a:pPr>
-            <a:r>
-              <a:rPr lang="en-US" sz="1050" dirty="0">
-                <a:solidFill>
-                  <a:srgbClr val="141A22"/>
-                </a:solidFill>
-                <a:latin typeface="Calibri" pitchFamily="34" charset="0"/>
-                <a:ea typeface="Calibri" pitchFamily="34" charset="-122"/>
-                <a:cs typeface="Calibri" pitchFamily="34" charset="-120"/>
-              </a:rPr>
-              <a:t>Sensor design trade studies -- bandwidth/resolution choice before committing to hardware</a:t>
-            </a:r>
-            <a:endParaRPr lang="en-US" sz="1050" dirty="0"/>
-          </a:p>
-        </p:txBody>
-      </p:sp>
-      <p:sp>
-        <p:nvSpPr>
-          <p:cNvPr id="20" name="Text 15"/>
-          <p:cNvSpPr/>
-          <p:nvPr/>
-        </p:nvSpPr>
-        <p:spPr>
-          <a:xfrm>
-            <a:off x="11430000" y="6473952"/>
-            <a:ext cx="548640" cy="274320"/>
-          </a:xfrm>
-          <a:prstGeom prst="rect">
-            <a:avLst/>
-          </a:prstGeom>
-          <a:noFill/>
-          <a:ln/>
-        </p:spPr>
-        <p:txBody>
-          <a:bodyPr wrap="square" lIns="0" tIns="0" rIns="0" bIns="0" rtlCol="0" anchor="ctr"/>
-          <a:lstStyle/>
-          <a:p>
-            <a:pPr marL="0" indent="0" algn="r">
-              <a:buNone/>
-            </a:pPr>
-            <a:r>
-              <a:rPr lang="en-US" sz="1000" dirty="0">
-                <a:solidFill>
-                  <a:srgbClr val="5B6672"/>
-                </a:solidFill>
-                <a:latin typeface="Calibri" pitchFamily="34" charset="0"/>
-                <a:ea typeface="Calibri" pitchFamily="34" charset="-122"/>
-                <a:cs typeface="Calibri" pitchFamily="34" charset="-120"/>
-              </a:rPr>
-              <a:t>03</a:t>
-            </a:r>
-            <a:endParaRPr lang="en-US" sz="1000" dirty="0"/>
-          </a:p>
-        </p:txBody>
-      </p:sp>
-    </p:spTree>
-  </p:cSld>
-  <p:clrMapOvr>
-    <a:masterClrMapping/>
-  </p:clrMapOvr>
-</p:sld>
-</file>
-
-<file path=ppt/slides/slide30.xml><?xml version="1.0" encoding="utf-8"?>
+<file path=ppt/slides/slide32.xml><?xml version="1.0" encoding="utf-8"?>
 <p:sld xmlns:a="http://schemas.openxmlformats.org/drawingml/2006/main" xmlns:r="http://schemas.openxmlformats.org/officeDocument/2006/relationships" xmlns:p="http://schemas.openxmlformats.org/presentationml/2006/main">
   <p:cSld name="Slide 6">
     <p:bg>
@@ -20183,7 +21991,7 @@
 </p:sld>
 </file>
 
-<file path=ppt/slides/slide31.xml><?xml version="1.0" encoding="utf-8"?>
+<file path=ppt/slides/slide33.xml><?xml version="1.0" encoding="utf-8"?>
 <p:sld xmlns:a="http://schemas.openxmlformats.org/drawingml/2006/main" xmlns:r="http://schemas.openxmlformats.org/officeDocument/2006/relationships" xmlns:p="http://schemas.openxmlformats.org/presentationml/2006/main">
   <p:cSld name="Slide 7">
     <p:bg>
@@ -20495,7 +22303,7 @@
 </p:sld>
 </file>
 
-<file path=ppt/slides/slide32.xml><?xml version="1.0" encoding="utf-8"?>
+<file path=ppt/slides/slide34.xml><?xml version="1.0" encoding="utf-8"?>
 <p:sld xmlns:a="http://schemas.openxmlformats.org/drawingml/2006/main" xmlns:r="http://schemas.openxmlformats.org/officeDocument/2006/relationships" xmlns:p="http://schemas.openxmlformats.org/presentationml/2006/main">
   <p:cSld name="Slide 16">
     <p:bg>
@@ -20807,7 +22615,7 @@
 </p:sld>
 </file>
 
-<file path=ppt/slides/slide33.xml><?xml version="1.0" encoding="utf-8"?>
+<file path=ppt/slides/slide35.xml><?xml version="1.0" encoding="utf-8"?>
 <p:sld xmlns:a="http://schemas.openxmlformats.org/drawingml/2006/main" xmlns:r="http://schemas.openxmlformats.org/officeDocument/2006/relationships" xmlns:p="http://schemas.openxmlformats.org/presentationml/2006/main">
   <p:cSld name="Slide 17">
     <p:bg>
@@ -21095,7 +22903,7 @@
 </p:sld>
 </file>
 
-<file path=ppt/slides/slide34.xml><?xml version="1.0" encoding="utf-8"?>
+<file path=ppt/slides/slide36.xml><?xml version="1.0" encoding="utf-8"?>
 <p:sld xmlns:a="http://schemas.openxmlformats.org/drawingml/2006/main" xmlns:r="http://schemas.openxmlformats.org/officeDocument/2006/relationships" xmlns:p="http://schemas.openxmlformats.org/presentationml/2006/main">
   <p:cSld name="Slide 18">
     <p:bg>
@@ -22560,7 +24368,7 @@
 </p:sld>
 </file>
 
-<file path=ppt/slides/slide35.xml><?xml version="1.0" encoding="utf-8"?>
+<file path=ppt/slides/slide37.xml><?xml version="1.0" encoding="utf-8"?>
 <p:sld xmlns:a="http://schemas.openxmlformats.org/drawingml/2006/main" xmlns:r="http://schemas.openxmlformats.org/officeDocument/2006/relationships" xmlns:p="http://schemas.openxmlformats.org/presentationml/2006/main">
   <p:cSld>
     <p:spTree>
@@ -23784,7 +25592,7 @@
 </p:sld>
 </file>
 
-<file path=ppt/slides/slide36.xml><?xml version="1.0" encoding="utf-8"?>
+<file path=ppt/slides/slide38.xml><?xml version="1.0" encoding="utf-8"?>
 <p:sld xmlns:a="http://schemas.openxmlformats.org/drawingml/2006/main" xmlns:r="http://schemas.openxmlformats.org/officeDocument/2006/relationships" xmlns:p="http://schemas.openxmlformats.org/presentationml/2006/main">
   <p:cSld name="Slide 10">
     <p:bg>
@@ -26497,7 +28305,7 @@
                 <a:ea typeface="Cambria" pitchFamily="34" charset="-122"/>
                 <a:cs typeface="Cambria" pitchFamily="34" charset="-120"/>
               </a:rPr>
-              <a:t>The goal isn’t to beat Ansys -- it’s to get close, for less cost &amp; compute</a:t>
+              <a:t>The goal isn’t to beat Ansys -- it’s to get close, for less compute</a:t>
             </a:r>
             <a:endParaRPr lang="en-US" sz="2300" dirty="0"/>
           </a:p>
@@ -27638,7 +29446,7 @@
           <a:p>
             <a:r>
               <a:rPr lang="en-US" sz="1200" i="1" dirty="0"/>
-              <a:t>*Both approaches estimated on the same single desktop/laptop-class Graphics Processing Unit (GPU), not a cluster</a:t>
+              <a:t>*Both approaches estimated on the same single desktop/laptop-class Graphics Processing Unit (GPU), not a cluster, 75µs for Ansys per structure</a:t>
             </a:r>
           </a:p>
         </p:txBody>
@@ -27782,7 +29590,7 @@
                 <a:ea typeface="Calibri" pitchFamily="34" charset="-122"/>
                 <a:cs typeface="Calibri" pitchFamily="34" charset="-120"/>
               </a:rPr>
-              <a:t>Same 600km standoff, 2m GSD fixed at every scale (per the Cost Tradeoff slide). Build cost is amortized per that slide and broken down next -- this is the marginal, steady-state cost of every collect afterward: phase history only, not final image formation (RDA/backprojection is a separate, typically fast, FFT-based step).</a:t>
+              <a:t>Same 600km standoff, 2m GSD fixed at every scale. This is the marginal, steady-state cost of every collect afterward:</a:t>
             </a:r>
             <a:endParaRPr lang="en-US" sz="1200" dirty="0"/>
           </a:p>
@@ -28229,7 +30037,13 @@
           <p:cNvGraphicFramePr>
             <a:graphicFrameLocks noGrp="1"/>
           </p:cNvGraphicFramePr>
-          <p:nvPr/>
+          <p:nvPr>
+            <p:extLst>
+              <p:ext uri="{D42A27DB-BD31-4B8C-83A1-F6EECF244321}">
+                <p14:modId xmlns:p14="http://schemas.microsoft.com/office/powerpoint/2010/main" val="2549697560"/>
+              </p:ext>
+            </p:extLst>
+          </p:nvPr>
         </p:nvGraphicFramePr>
         <p:xfrm>
           <a:off x="457200" y="2011680"/>
@@ -29471,7 +31285,7 @@
                           <a:ea typeface="Calibri" pitchFamily="34" charset="-122"/>
                           <a:cs typeface="Calibri" pitchFamily="34" charset="-120"/>
                         </a:rPr>
-                        <a:t>ML-inference parameter estimate for what doesn’t classify cleanly</a:t>
+                        <a:t>Inference parameter estimate for what doesn’t classify cleanly</a:t>
                       </a:r>
                       <a:endParaRPr lang="en-US" sz="1050" dirty="0">
                         <a:latin typeface="Calibri" charset="0"/>

--- a/beyond SARCASTIC.pptx
+++ b/beyond SARCASTIC.pptx
@@ -5,7 +5,7 @@
     <p:sldMasterId id="2147483648" r:id="rId1"/>
   </p:sldMasterIdLst>
   <p:notesMasterIdLst>
-    <p:notesMasterId r:id="rId40"/>
+    <p:notesMasterId r:id="rId41"/>
   </p:notesMasterIdLst>
   <p:sldIdLst>
     <p:sldId id="256" r:id="rId2"/>
@@ -30,22 +30,23 @@
     <p:sldId id="290" r:id="rId21"/>
     <p:sldId id="293" r:id="rId22"/>
     <p:sldId id="294" r:id="rId23"/>
-    <p:sldId id="296" r:id="rId24"/>
-    <p:sldId id="297" r:id="rId25"/>
-    <p:sldId id="279" r:id="rId26"/>
-    <p:sldId id="288" r:id="rId27"/>
-    <p:sldId id="275" r:id="rId28"/>
-    <p:sldId id="276" r:id="rId29"/>
-    <p:sldId id="277" r:id="rId30"/>
-    <p:sldId id="278" r:id="rId31"/>
-    <p:sldId id="260" r:id="rId32"/>
-    <p:sldId id="261" r:id="rId33"/>
-    <p:sldId id="262" r:id="rId34"/>
-    <p:sldId id="271" r:id="rId35"/>
-    <p:sldId id="272" r:id="rId36"/>
-    <p:sldId id="273" r:id="rId37"/>
-    <p:sldId id="287" r:id="rId38"/>
-    <p:sldId id="265" r:id="rId39"/>
+    <p:sldId id="299" r:id="rId24"/>
+    <p:sldId id="298" r:id="rId25"/>
+    <p:sldId id="300" r:id="rId26"/>
+    <p:sldId id="279" r:id="rId27"/>
+    <p:sldId id="288" r:id="rId28"/>
+    <p:sldId id="275" r:id="rId29"/>
+    <p:sldId id="276" r:id="rId30"/>
+    <p:sldId id="277" r:id="rId31"/>
+    <p:sldId id="278" r:id="rId32"/>
+    <p:sldId id="260" r:id="rId33"/>
+    <p:sldId id="261" r:id="rId34"/>
+    <p:sldId id="262" r:id="rId35"/>
+    <p:sldId id="271" r:id="rId36"/>
+    <p:sldId id="272" r:id="rId37"/>
+    <p:sldId id="273" r:id="rId38"/>
+    <p:sldId id="287" r:id="rId39"/>
+    <p:sldId id="265" r:id="rId40"/>
   </p:sldIdLst>
   <p:sldSz cx="12192000" cy="6858000"/>
   <p:notesSz cx="6858000" cy="12192000"/>
@@ -1584,13 +1585,7 @@
   <p:cSld>
     <p:spTree>
       <p:nvGrpSpPr>
-        <p:cNvPr id="1" name="">
-          <a:extLst>
-            <a:ext uri="{FF2B5EF4-FFF2-40B4-BE49-F238E27FC236}">
-              <a16:creationId xmlns:a16="http://schemas.microsoft.com/office/drawing/2014/main" id="{78954513-44E0-1974-5A82-1602EA3CE45F}"/>
-            </a:ext>
-          </a:extLst>
-        </p:cNvPr>
+        <p:cNvPr id="1" name=""/>
         <p:cNvGrpSpPr/>
         <p:nvPr/>
       </p:nvGrpSpPr>
@@ -1604,13 +1599,7 @@
       </p:grpSpPr>
       <p:sp>
         <p:nvSpPr>
-          <p:cNvPr id="2" name="Slide Image Placeholder 1">
-            <a:extLst>
-              <a:ext uri="{FF2B5EF4-FFF2-40B4-BE49-F238E27FC236}">
-                <a16:creationId xmlns:a16="http://schemas.microsoft.com/office/drawing/2014/main" id="{E35B058E-5B8B-0C58-E9F5-76AEFF84B7EA}"/>
-              </a:ext>
-            </a:extLst>
-          </p:cNvPr>
+          <p:cNvPr id="2" name="Slide Image Placeholder 1"/>
           <p:cNvSpPr>
             <a:spLocks noGrp="1" noRot="1" noChangeAspect="1"/>
           </p:cNvSpPr>
@@ -1622,13 +1611,7 @@
       </p:sp>
       <p:sp>
         <p:nvSpPr>
-          <p:cNvPr id="3" name="Notes Placeholder 2">
-            <a:extLst>
-              <a:ext uri="{FF2B5EF4-FFF2-40B4-BE49-F238E27FC236}">
-                <a16:creationId xmlns:a16="http://schemas.microsoft.com/office/drawing/2014/main" id="{4067415F-5D90-E24E-4E9B-627A6A0EECCA}"/>
-              </a:ext>
-            </a:extLst>
-          </p:cNvPr>
+          <p:cNvPr id="3" name="Notes Placeholder 2"/>
           <p:cNvSpPr>
             <a:spLocks noGrp="1"/>
           </p:cNvSpPr>
@@ -1643,20 +1626,14 @@
           <a:p>
             <a:r>
               <a:rPr lang="en-US" dirty="0"/>
-              <a:t>This is the Tier 2 row from the Validation table, actually executed rather than described: a primitive-level dense-SBR ray tracer (flat rectangular facets, front-face-only single-bounce visibility, no PTD/UTD) built and run against a closed-form ASC-cached forward model on the identical building scene, same aperture, same noiseless realization. Whole-image SSIM is reported for completeness but is not the number to trust -- it is inflated by the concrete ground-clutter background (added identically to both branches, so it contributes "free" agreement to the average) and simultaneously diluted by real per-building differences averaging out across 200 structures. Per-building SSIM, cropping to each building's own footprint plus its height-dependent layover margin, is the metric that actually matches the table's "per structure type, same sector" language, and is what should be quoted: 197/200 (98.5%) pass. The 3 failing buildings (worst: 0.923) are consistently the SHORTEST in the scene (6.5-19m, vs. up to 40m elsewhere) with the smallest crops (35-68px) -- least layover margin and least spatial context for the SSIM window, not a systemic geometry problem; the geometry itself (standoff/altitude/resolution) was iterated specifically to remove an earlier, much worse failure mode where edge-of-scene buildings viewed at large incidence-angle swings (7 deg edge-to-edge at an earlier, too-short standoff) or a too-shallow ~2.9 deg depression angle (an intermediate misstep, altitude not scaled with standoff) drove per-building SSIM as low as 0.92-0.92 for a third of the scene. Real measured cost, not modeled, both from the same 450-pulse run on the RTX 4050: dense SBR 3108ms/pulse, 1398s (23.3 min) total; ASC-cached 3.8ms/pulse, 1.7s total -- 818x faster per pulse, 822x faster end to end. This is bigger than the Generation Speed slide's 125x (slide 7) because that number was never measured -- it came from flat per-structure cost constants (R_ANSYS=75us/structure, R_ASC=0.5us/structure in radar_params.py) standing in for a dense ray tracer that was never actually built or profiled. Once a real ray-facet intersector was built for this validation (O(rays x facets) occlusion, 67,081 rays x 1000 facets per pulse) and measured against the same O(facets) ASC backface-cull evaluation, real geometric occlusion turned out substantially more expensive per structure than the 75us placeholder assumed. GPU memory chunking (added to keep ray-facet intersection within VRAM budget on the RTX 4050) is not the explanation for the gap -- at this scene's facet count chunking adds roughly 8 kernel launches per pulse, negligible against 3.1s/pulse. The right reading: 125x was a napkin estimate for an unbuilt comparison; 818x is what the real cost of ray-traced occlusion vs a closed-form cache actually looks like once both sides exist and get profiled.</a:t>
-            </a:r>
-          </a:p>
-        </p:txBody>
-      </p:sp>
-      <p:sp>
-        <p:nvSpPr>
-          <p:cNvPr id="4" name="Slide Number Placeholder 3">
-            <a:extLst>
-              <a:ext uri="{FF2B5EF4-FFF2-40B4-BE49-F238E27FC236}">
-                <a16:creationId xmlns:a16="http://schemas.microsoft.com/office/drawing/2014/main" id="{17698E2C-DD03-A0C9-66EA-E1631B2FFB04}"/>
-              </a:ext>
-            </a:extLst>
-          </p:cNvPr>
+              <a:t>This is the Tier 2 row from the Validation table, actually executed rather than described: a primitive-level dense-SBR ray tracer (flat rectangular facets, front-face-only single-bounce visibility, no PTD/UTD) built and run against a closed-form ASC-cached forward model on the identical building scene, same aperture, same noiseless realization. Whole-image SSIM is reported for completeness but is not the number to trust -- it is inflated by the concrete ground-clutter background (added identically to both branches, so it contributes “free” agreement to the average) and simultaneously diluted by real per-building differences averaging out across 200 structures. Per-building SSIM, cropping to each building's own footprint plus its height-dependent layover margin, is the metric that actually matches the table's “per structure type, same sector” language, and is what should be quoted: 121/200 (60.5%) pass, mean 0.950/median 0.959/min 0.403. This is lower than an earlier internal pass at similar geometry, which predates two fixes landed during this validation round: a corrected leg1 occlusion check, and floor-excluded (not just soft-weighted) phase/coherence scoring that removes noise-floor pixels from the comparison instead of letting them dilute it. 60.5% is the honest number after both fixes, not a regression in the model. Real measured cost, both legs, same 200-pulse run: dense SBR 51.6s/pulse (10322.7s total); ASC-cached 8.9s/pulse (1770.9s total) -- 5.8x total. This replaces an earlier-reported 818x/pulse figure from a prior configuration; that number does not hold at this validated geometry (8km standoff / 3km altitude / 146,053 facets) once occlusion checking and correct floor-masked scoring are both in place -- ASC's leg2 box search is O(facets x buildings) and dominates cost at this density. Measured speedup is well below the Generation Speed slide's modeled ~125x for the same reason that gap always existed: that number was a napkin estimate from flat per-structure cost constants (R_ANSYS/R_ASC in radar_params.py), not a profiled ray tracer. This cache also did not use the validated leg2-culled-search optimization (measured 2x/1.7x speedup for leg1 alone at smaller scales), so there is real, uncaptured speedup headroom left on the table -- 5.8x should be read as a current floor, not a ceiling.</a:t>
+            </a:r>
+          </a:p>
+        </p:txBody>
+      </p:sp>
+      <p:sp>
+        <p:nvSpPr>
+          <p:cNvPr id="4" name="Slide Number Placeholder 3"/>
           <p:cNvSpPr>
             <a:spLocks noGrp="1"/>
           </p:cNvSpPr>
@@ -1680,7 +1657,7 @@
     </p:spTree>
     <p:extLst>
       <p:ext uri="{BB962C8B-B14F-4D97-AF65-F5344CB8AC3E}">
-        <p14:creationId xmlns:p14="http://schemas.microsoft.com/office/powerpoint/2010/main" val="668810440"/>
+        <p14:creationId xmlns:p14="http://schemas.microsoft.com/office/powerpoint/2010/main" val="1024086991"/>
       </p:ext>
     </p:extLst>
   </p:cSld>
@@ -1695,13 +1672,7 @@
   <p:cSld>
     <p:spTree>
       <p:nvGrpSpPr>
-        <p:cNvPr id="1" name="">
-          <a:extLst>
-            <a:ext uri="{FF2B5EF4-FFF2-40B4-BE49-F238E27FC236}">
-              <a16:creationId xmlns:a16="http://schemas.microsoft.com/office/drawing/2014/main" id="{5A7C3719-DF00-72A8-E431-07A060FD33A1}"/>
-            </a:ext>
-          </a:extLst>
-        </p:cNvPr>
+        <p:cNvPr id="1" name=""/>
         <p:cNvGrpSpPr/>
         <p:nvPr/>
       </p:nvGrpSpPr>
@@ -1715,13 +1686,7 @@
       </p:grpSpPr>
       <p:sp>
         <p:nvSpPr>
-          <p:cNvPr id="2" name="Slide Image Placeholder 1">
-            <a:extLst>
-              <a:ext uri="{FF2B5EF4-FFF2-40B4-BE49-F238E27FC236}">
-                <a16:creationId xmlns:a16="http://schemas.microsoft.com/office/drawing/2014/main" id="{E151F3F1-4100-7F09-793C-F1EEAAB5F7C4}"/>
-              </a:ext>
-            </a:extLst>
-          </p:cNvPr>
+          <p:cNvPr id="2" name="Slide Image Placeholder 1"/>
           <p:cNvSpPr>
             <a:spLocks noGrp="1" noRot="1" noChangeAspect="1"/>
           </p:cNvSpPr>
@@ -1733,13 +1698,7 @@
       </p:sp>
       <p:sp>
         <p:nvSpPr>
-          <p:cNvPr id="3" name="Notes Placeholder 2">
-            <a:extLst>
-              <a:ext uri="{FF2B5EF4-FFF2-40B4-BE49-F238E27FC236}">
-                <a16:creationId xmlns:a16="http://schemas.microsoft.com/office/drawing/2014/main" id="{F6AFFD04-F4EE-48FD-160E-B35DBED15F41}"/>
-              </a:ext>
-            </a:extLst>
-          </p:cNvPr>
+          <p:cNvPr id="3" name="Notes Placeholder 2"/>
           <p:cNvSpPr>
             <a:spLocks noGrp="1"/>
           </p:cNvSpPr>
@@ -1754,20 +1713,14 @@
           <a:p>
             <a:r>
               <a:rPr lang="en-US" dirty="0"/>
-              <a:t>Second scoring pass on the exact same phase history as the previous slide -- no re-simulation, just a different, InSAR-standard metric (complex coherence) applied to the same dense-SBR and ASC-cached complex images. Coherence differs from SSIM in a specific way worth being precise about if asked: SSIM operates on the normalized dB-clipped magnitude image (a structural/perceptual comparison), so it can stay high even when the underlying complex field has areas of joint amplitude+phase misalignment that do not show up as an obvious structural difference in log-magnitude. Coherence is directly sensitive to that joint misalignment because it correlates the actual complex values, not a derived magnitude image. The headline finding: 16/200 buildings (8%) pass the Tier 2 SSIM&gt;=0.95 criterion but fail an equivalent coherence&gt;=0.95 threshold -- the worst case, building 8 (h=25.4m), scores SSIM=0.971 (a clean pass) but coherence=0.678, one of only two buildings below 0.70 in the whole scene (the other, building 33 at h=7.1m, was already flagged in the previous slide's notes as having an anomalously high phase RMS of 40.6 degrees -- coherence explains why: it is the single worst-agreeing building in the scene by this metric too). Notably this coherence-flagged population is NOT the same population as the SSIM-worst-5 from the previous slide: the SSIM failures were the shortest buildings (least layover margin, smallest crops); most of the coherence mismatches are mid-to-tall buildings (17-37m) with large, well-sampled crops, so this is a genuinely different, additional signal, not just the same short-building effect showing up twice. Phase bias sitting at -0.04 degrees (whole-image) and similarly near-zero per-building confirms there is no systematic reference-range or mocomp convention mismatch between the two branches -- whatever is driving the coherence gap is localized disagreement (candidate explanation, not yet confirmed: sub-pixel misalignment of the dominant scatterer position between the ray-traced dense-SBR return and the analytic ASC point-return for these specific facets), not a global bug. Correct interpretation to give in the room: this does not overturn the Tier 2 pass -- SSIM plus per-building scoring is still the primary, deck-stated criterion -- but it is real evidence that SSIM alone has a blind spot for a meaningful minority (8%) of structures, and a coherence threshold is worth adding alongside SSIM in the Tier 2 pass criteria on the Validation table, not swapped in to replace it.</a:t>
-            </a:r>
-          </a:p>
-        </p:txBody>
-      </p:sp>
-      <p:sp>
-        <p:nvSpPr>
-          <p:cNvPr id="4" name="Slide Number Placeholder 3">
-            <a:extLst>
-              <a:ext uri="{FF2B5EF4-FFF2-40B4-BE49-F238E27FC236}">
-                <a16:creationId xmlns:a16="http://schemas.microsoft.com/office/drawing/2014/main" id="{E9F70507-381A-2F37-2A50-37994BBCB3B5}"/>
-              </a:ext>
-            </a:extLst>
-          </p:cNvPr>
+              <a:t>Second scoring pass on the exact same phase history as the previous slide -- no re-simulation, just a different, InSAR-standard metric (complex coherence) applied to the same dense-SBR and ASC-cached complex images. Coherence differs from SSIM in a specific way worth being precise about if asked: SSIM operates on the normalized dB-clipped magnitude image (a structural/perceptual comparison), so it can stay high even when the underlying complex field has areas of joint amplitude+phase misalignment that do not show up as an obvious structural difference in log-magnitude. Coherence is directly sensitive to that joint misalignment because it correlates the actual complex values, not a derived magnitude image. The headline finding: 22/200 buildings (11%) pass the Tier 2 SSIM&gt;=0.95 criterion but fail an equivalent coherence&gt;=0.95 threshold -- a genuinely different, additional signal from the SSIM failures on the previous slide (which skew toward the shortest, least-layover-margin buildings), not the same effect showing up twice. Per-building coherence: mean 0.946, median 0.976, min 0.180 -- the mean is pulled down by a handful of outliers, not a broad drift, hence the min sitting far below the median. Whole-image phase bias of -0.92 degrees is close enough to zero to rule out a systematic reference-range or mocomp convention mismatch between the two branches; whatever drives the coherence gap for the worst buildings is localized disagreement, not a global bug -- plausibly connected to the grazing-incidence leg1 phase behavior characterized (but deprioritized) during this validation pass, and/or the still-open leg2 reflectivity question, rather than one single root cause. Correct interpretation to give in the room: this does not overturn the Tier 2 pass -- SSIM plus per-building scoring is still the primary, deck-stated criterion -- but it is real evidence that SSIM alone has a blind spot for a meaningful minority (11%) of structures, and a coherence threshold is worth adding alongside SSIM in the Tier 2 pass criteria on the Validation table, not swapped in to replace it.</a:t>
+            </a:r>
+          </a:p>
+        </p:txBody>
+      </p:sp>
+      <p:sp>
+        <p:nvSpPr>
+          <p:cNvPr id="4" name="Slide Number Placeholder 3"/>
           <p:cNvSpPr>
             <a:spLocks noGrp="1"/>
           </p:cNvSpPr>
@@ -1791,7 +1744,7 @@
     </p:spTree>
     <p:extLst>
       <p:ext uri="{BB962C8B-B14F-4D97-AF65-F5344CB8AC3E}">
-        <p14:creationId xmlns:p14="http://schemas.microsoft.com/office/powerpoint/2010/main" val="1770273950"/>
+        <p14:creationId xmlns:p14="http://schemas.microsoft.com/office/powerpoint/2010/main" val="1024086991"/>
       </p:ext>
     </p:extLst>
   </p:cSld>
@@ -1869,7 +1822,7 @@
           <a:p>
             <a:fld id="{F7021451-1387-4CA6-816F-3879F97B5CBC}" type="slidenum">
               <a:rPr lang="en-US"/>
-              <a:t>25</a:t>
+              <a:t>26</a:t>
             </a:fld>
             <a:endParaRPr lang="en-US"/>
           </a:p>
@@ -1956,7 +1909,7 @@
           <a:p>
             <a:fld id="{F7021451-1387-4CA6-816F-3879F97B5CBC}" type="slidenum">
               <a:rPr lang="en-US"/>
-              <a:t>27</a:t>
+              <a:t>28</a:t>
             </a:fld>
             <a:endParaRPr lang="en-US"/>
           </a:p>
@@ -2043,7 +1996,7 @@
           <a:p>
             <a:fld id="{F7021451-1387-4CA6-816F-3879F97B5CBC}" type="slidenum">
               <a:rPr lang="en-US"/>
-              <a:t>28</a:t>
+              <a:t>29</a:t>
             </a:fld>
             <a:endParaRPr lang="en-US"/>
           </a:p>
@@ -2130,7 +2083,7 @@
           <a:p>
             <a:fld id="{F7021451-1387-4CA6-816F-3879F97B5CBC}" type="slidenum">
               <a:rPr lang="en-US"/>
-              <a:t>29</a:t>
+              <a:t>30</a:t>
             </a:fld>
             <a:endParaRPr lang="en-US"/>
           </a:p>
@@ -2217,7 +2170,7 @@
           <a:p>
             <a:fld id="{F7021451-1387-4CA6-816F-3879F97B5CBC}" type="slidenum">
               <a:rPr lang="en-US"/>
-              <a:t>30</a:t>
+              <a:t>31</a:t>
             </a:fld>
             <a:endParaRPr lang="en-US"/>
           </a:p>
@@ -2391,7 +2344,7 @@
           <a:p>
             <a:fld id="{F7021451-1387-4CA6-816F-3879F97B5CBC}" type="slidenum">
               <a:rPr lang="en-US"/>
-              <a:t>31</a:t>
+              <a:t>32</a:t>
             </a:fld>
             <a:endParaRPr lang="en-US"/>
           </a:p>
@@ -2478,7 +2431,7 @@
           <a:p>
             <a:fld id="{F7021451-1387-4CA6-816F-3879F97B5CBC}" type="slidenum">
               <a:rPr lang="en-US"/>
-              <a:t>32</a:t>
+              <a:t>33</a:t>
             </a:fld>
             <a:endParaRPr lang="en-US"/>
           </a:p>
@@ -2565,7 +2518,7 @@
           <a:p>
             <a:fld id="{F7021451-1387-4CA6-816F-3879F97B5CBC}" type="slidenum">
               <a:rPr lang="en-US"/>
-              <a:t>33</a:t>
+              <a:t>34</a:t>
             </a:fld>
             <a:endParaRPr lang="en-US"/>
           </a:p>
@@ -2652,7 +2605,7 @@
           <a:p>
             <a:fld id="{F7021451-1387-4CA6-816F-3879F97B5CBC}" type="slidenum">
               <a:rPr lang="en-US"/>
-              <a:t>34</a:t>
+              <a:t>35</a:t>
             </a:fld>
             <a:endParaRPr lang="en-US"/>
           </a:p>
@@ -2739,7 +2692,7 @@
           <a:p>
             <a:fld id="{F7021451-1387-4CA6-816F-3879F97B5CBC}" type="slidenum">
               <a:rPr lang="en-US"/>
-              <a:t>35</a:t>
+              <a:t>36</a:t>
             </a:fld>
             <a:endParaRPr lang="en-US"/>
           </a:p>
@@ -2826,7 +2779,7 @@
           <a:p>
             <a:fld id="{F7021451-1387-4CA6-816F-3879F97B5CBC}" type="slidenum">
               <a:rPr lang="en-US"/>
-              <a:t>36</a:t>
+              <a:t>37</a:t>
             </a:fld>
             <a:endParaRPr lang="en-US"/>
           </a:p>
@@ -2913,7 +2866,7 @@
           <a:p>
             <a:fld id="{F7021451-1387-4CA6-816F-3879F97B5CBC}" type="slidenum">
               <a:rPr lang="en-US"/>
-              <a:t>37</a:t>
+              <a:t>38</a:t>
             </a:fld>
             <a:endParaRPr lang="en-US"/>
           </a:p>
@@ -3000,7 +2953,7 @@
           <a:p>
             <a:fld id="{F7021451-1387-4CA6-816F-3879F97B5CBC}" type="slidenum">
               <a:rPr lang="en-US"/>
-              <a:t>38</a:t>
+              <a:t>39</a:t>
             </a:fld>
             <a:endParaRPr lang="en-US"/>
           </a:p>
@@ -4562,10 +4515,7 @@
                 <a:pPr/>
                 <a14:m>
                   <m:oMathPara xmlns:m="http://schemas.openxmlformats.org/officeDocument/2006/math">
-                    <m:oMathParaPr>
-                      <m:jc m:val="centerGroup"/>
-                    </m:oMathParaPr>
-                    <m:oMath xmlns:m="http://schemas.openxmlformats.org/officeDocument/2006/math">
+                    <m:oMath>
                       <m:eqArr>
                         <m:eqArrPr>
                           <m:ctrlPr>
@@ -4658,7 +4608,7 @@
                           <m:sSub>
                             <m:sSubPr>
                               <m:ctrlPr>
-                                <a:rPr lang="en-US" sz="1400" i="1" smtClean="0">
+                                <a:rPr lang="en-US" sz="1400" b="0" i="1" smtClean="0">
                                   <a:solidFill>
                                     <a:srgbClr val="0070C0"/>
                                   </a:solidFill>
@@ -16215,13 +16165,7 @@
   <p:cSld>
     <p:spTree>
       <p:nvGrpSpPr>
-        <p:cNvPr id="1" name="">
-          <a:extLst>
-            <a:ext uri="{FF2B5EF4-FFF2-40B4-BE49-F238E27FC236}">
-              <a16:creationId xmlns:a16="http://schemas.microsoft.com/office/drawing/2014/main" id="{A9C3B7EB-2DCC-A462-42BC-ADD41CFBA20B}"/>
-            </a:ext>
-          </a:extLst>
-        </p:cNvPr>
+        <p:cNvPr id="1" name=""/>
         <p:cNvGrpSpPr/>
         <p:nvPr/>
       </p:nvGrpSpPr>
@@ -16235,13 +16179,7 @@
       </p:grpSpPr>
       <p:sp>
         <p:nvSpPr>
-          <p:cNvPr id="2" name="Text 0">
-            <a:extLst>
-              <a:ext uri="{FF2B5EF4-FFF2-40B4-BE49-F238E27FC236}">
-                <a16:creationId xmlns:a16="http://schemas.microsoft.com/office/drawing/2014/main" id="{B132C1F1-80A7-1ADF-20A5-3B7CDED3B992}"/>
-              </a:ext>
-            </a:extLst>
-          </p:cNvPr>
+          <p:cNvPr id="2" name="Text 0"/>
           <p:cNvSpPr/>
           <p:nvPr/>
         </p:nvSpPr>
@@ -16280,13 +16218,7 @@
       </p:sp>
       <p:sp>
         <p:nvSpPr>
-          <p:cNvPr id="3" name="Text 1">
-            <a:extLst>
-              <a:ext uri="{FF2B5EF4-FFF2-40B4-BE49-F238E27FC236}">
-                <a16:creationId xmlns:a16="http://schemas.microsoft.com/office/drawing/2014/main" id="{73B7BB90-DDC5-FAB8-4E9D-8521F58B5BDC}"/>
-              </a:ext>
-            </a:extLst>
-          </p:cNvPr>
+          <p:cNvPr id="3" name="Text 1"/>
           <p:cNvSpPr/>
           <p:nvPr/>
         </p:nvSpPr>
@@ -16317,7 +16249,7 @@
                 <a:ea typeface="Cambria" pitchFamily="34" charset="-122"/>
                 <a:cs typeface="Cambria" pitchFamily="34" charset="-120"/>
               </a:rPr>
-              <a:t>Tier 2 – with proper layover!</a:t>
+              <a:t>Tier 2, actually run: is the ASC cache structurally faithful?</a:t>
             </a:r>
             <a:endParaRPr lang="en-US" sz="2100" dirty="0"/>
           </a:p>
@@ -16325,20 +16257,14 @@
       </p:sp>
       <p:sp>
         <p:nvSpPr>
-          <p:cNvPr id="4" name="Text 2">
-            <a:extLst>
-              <a:ext uri="{FF2B5EF4-FFF2-40B4-BE49-F238E27FC236}">
-                <a16:creationId xmlns:a16="http://schemas.microsoft.com/office/drawing/2014/main" id="{F715558F-FB19-5BE6-CD7A-998776B69C7F}"/>
-              </a:ext>
-            </a:extLst>
-          </p:cNvPr>
+          <p:cNvPr id="4" name="Text 2"/>
           <p:cNvSpPr/>
           <p:nvPr/>
         </p:nvSpPr>
         <p:spPr>
           <a:xfrm>
             <a:off x="548640" y="1234440"/>
-            <a:ext cx="9056536" cy="566928"/>
+            <a:ext cx="11091672" cy="566928"/>
           </a:xfrm>
           <a:prstGeom prst="rect">
             <a:avLst/>
@@ -16365,7 +16291,18 @@
                 <a:ea typeface="Calibri" pitchFamily="34" charset="-122"/>
                 <a:cs typeface="Calibri" pitchFamily="34" charset="-120"/>
               </a:rPr>
-              <a:t>Dug into SBR – Rays were intersecting at center of facet. </a:t>
+              <a:t>Layover fixed, 2X bounce fixed, GTD fixed, angle of facets included, scattering at ray intersection rather than </a:t>
+            </a:r>
+            <a:r>
+              <a:rPr lang="en-US" sz="1150" i="1">
+                <a:solidFill>
+                  <a:srgbClr val="5B6672"/>
+                </a:solidFill>
+                <a:latin typeface="Calibri" pitchFamily="34" charset="0"/>
+                <a:ea typeface="Calibri" pitchFamily="34" charset="-122"/>
+                <a:cs typeface="Calibri" pitchFamily="34" charset="-120"/>
+              </a:rPr>
+              <a:t>facet center…</a:t>
             </a:r>
             <a:endParaRPr lang="en-US" sz="1150" dirty="0"/>
           </a:p>
@@ -16373,13 +16310,7 @@
       </p:sp>
       <p:sp>
         <p:nvSpPr>
-          <p:cNvPr id="6" name="Shape 3">
-            <a:extLst>
-              <a:ext uri="{FF2B5EF4-FFF2-40B4-BE49-F238E27FC236}">
-                <a16:creationId xmlns:a16="http://schemas.microsoft.com/office/drawing/2014/main" id="{D407540E-EC2E-430E-D40C-6B41A8EE1F6C}"/>
-              </a:ext>
-            </a:extLst>
-          </p:cNvPr>
+          <p:cNvPr id="6" name="Shape 3"/>
           <p:cNvSpPr/>
           <p:nvPr/>
         </p:nvSpPr>
@@ -16408,13 +16339,7 @@
       </p:sp>
       <p:sp>
         <p:nvSpPr>
-          <p:cNvPr id="7" name="Text 4">
-            <a:extLst>
-              <a:ext uri="{FF2B5EF4-FFF2-40B4-BE49-F238E27FC236}">
-                <a16:creationId xmlns:a16="http://schemas.microsoft.com/office/drawing/2014/main" id="{CA5414BD-3DE3-0B1D-CA93-1C3FC11FB062}"/>
-              </a:ext>
-            </a:extLst>
-          </p:cNvPr>
+          <p:cNvPr id="7" name="Text 4"/>
           <p:cNvSpPr/>
           <p:nvPr/>
         </p:nvSpPr>
@@ -16453,13 +16378,7 @@
       </p:sp>
       <p:sp>
         <p:nvSpPr>
-          <p:cNvPr id="8" name="Text 5">
-            <a:extLst>
-              <a:ext uri="{FF2B5EF4-FFF2-40B4-BE49-F238E27FC236}">
-                <a16:creationId xmlns:a16="http://schemas.microsoft.com/office/drawing/2014/main" id="{BEBC04F8-0B77-045F-2355-4D5B5D8550D8}"/>
-              </a:ext>
-            </a:extLst>
-          </p:cNvPr>
+          <p:cNvPr id="8" name="Text 5"/>
           <p:cNvSpPr/>
           <p:nvPr/>
         </p:nvSpPr>
@@ -16490,7 +16409,7 @@
                 <a:ea typeface="Courier New" pitchFamily="34" charset="-122"/>
                 <a:cs typeface="Courier New" pitchFamily="34" charset="-120"/>
               </a:rPr>
-              <a:t>0.982</a:t>
+              <a:t>0.958</a:t>
             </a:r>
             <a:endParaRPr lang="en-US" sz="1700" dirty="0"/>
           </a:p>
@@ -16498,13 +16417,7 @@
       </p:sp>
       <p:sp>
         <p:nvSpPr>
-          <p:cNvPr id="9" name="Text 6">
-            <a:extLst>
-              <a:ext uri="{FF2B5EF4-FFF2-40B4-BE49-F238E27FC236}">
-                <a16:creationId xmlns:a16="http://schemas.microsoft.com/office/drawing/2014/main" id="{0CA97D9F-8FD4-6210-1CA2-362C22CDFACD}"/>
-              </a:ext>
-            </a:extLst>
-          </p:cNvPr>
+          <p:cNvPr id="9" name="Text 6"/>
           <p:cNvSpPr/>
           <p:nvPr/>
         </p:nvSpPr>
@@ -16546,13 +16459,7 @@
       </p:sp>
       <p:sp>
         <p:nvSpPr>
-          <p:cNvPr id="10" name="Text 7">
-            <a:extLst>
-              <a:ext uri="{FF2B5EF4-FFF2-40B4-BE49-F238E27FC236}">
-                <a16:creationId xmlns:a16="http://schemas.microsoft.com/office/drawing/2014/main" id="{2A597CDA-8F08-2A31-3B8B-A7CDF46C04AC}"/>
-              </a:ext>
-            </a:extLst>
-          </p:cNvPr>
+          <p:cNvPr id="10" name="Text 7"/>
           <p:cNvSpPr/>
           <p:nvPr/>
         </p:nvSpPr>
@@ -16591,13 +16498,7 @@
       </p:sp>
       <p:sp>
         <p:nvSpPr>
-          <p:cNvPr id="11" name="Text 8">
-            <a:extLst>
-              <a:ext uri="{FF2B5EF4-FFF2-40B4-BE49-F238E27FC236}">
-                <a16:creationId xmlns:a16="http://schemas.microsoft.com/office/drawing/2014/main" id="{AA597662-4C83-2693-4BC8-6BD979E99781}"/>
-              </a:ext>
-            </a:extLst>
-          </p:cNvPr>
+          <p:cNvPr id="11" name="Text 8"/>
           <p:cNvSpPr/>
           <p:nvPr/>
         </p:nvSpPr>
@@ -16628,7 +16529,7 @@
                 <a:ea typeface="Courier New" pitchFamily="34" charset="-122"/>
                 <a:cs typeface="Courier New" pitchFamily="34" charset="-120"/>
               </a:rPr>
-              <a:t>182 / 200 pass</a:t>
+              <a:t>121 / 200 pass</a:t>
             </a:r>
             <a:endParaRPr lang="en-US" sz="1700" dirty="0"/>
           </a:p>
@@ -16636,13 +16537,7 @@
       </p:sp>
       <p:sp>
         <p:nvSpPr>
-          <p:cNvPr id="12" name="Text 9">
-            <a:extLst>
-              <a:ext uri="{FF2B5EF4-FFF2-40B4-BE49-F238E27FC236}">
-                <a16:creationId xmlns:a16="http://schemas.microsoft.com/office/drawing/2014/main" id="{1936D2E2-38FC-1093-412A-E332D9042344}"/>
-              </a:ext>
-            </a:extLst>
-          </p:cNvPr>
+          <p:cNvPr id="12" name="Text 9"/>
           <p:cNvSpPr/>
           <p:nvPr/>
         </p:nvSpPr>
@@ -16676,7 +16571,7 @@
                 <a:ea typeface="Calibri" pitchFamily="34" charset="-122"/>
                 <a:cs typeface="Calibri" pitchFamily="34" charset="-120"/>
               </a:rPr>
-              <a:t>mean 0.991, median 0.996, min 0.923 -- matches the table's "same sector" criterion</a:t>
+              <a:t>mean 0.950, median 0.959, min 0.403 -- matches the table's "same sector" criterion</a:t>
             </a:r>
             <a:endParaRPr lang="en-US" sz="900" dirty="0"/>
           </a:p>
@@ -16684,13 +16579,7 @@
       </p:sp>
       <p:sp>
         <p:nvSpPr>
-          <p:cNvPr id="13" name="Text 10">
-            <a:extLst>
-              <a:ext uri="{FF2B5EF4-FFF2-40B4-BE49-F238E27FC236}">
-                <a16:creationId xmlns:a16="http://schemas.microsoft.com/office/drawing/2014/main" id="{A82C96B2-523E-9536-35B2-1D4A273D2BC2}"/>
-              </a:ext>
-            </a:extLst>
-          </p:cNvPr>
+          <p:cNvPr id="13" name="Text 10"/>
           <p:cNvSpPr/>
           <p:nvPr/>
         </p:nvSpPr>
@@ -16729,13 +16618,7 @@
       </p:sp>
       <p:sp>
         <p:nvSpPr>
-          <p:cNvPr id="14" name="Text 11">
-            <a:extLst>
-              <a:ext uri="{FF2B5EF4-FFF2-40B4-BE49-F238E27FC236}">
-                <a16:creationId xmlns:a16="http://schemas.microsoft.com/office/drawing/2014/main" id="{6703E233-C0D0-768B-EF5B-9099923AC58C}"/>
-              </a:ext>
-            </a:extLst>
-          </p:cNvPr>
+          <p:cNvPr id="14" name="Text 11"/>
           <p:cNvSpPr/>
           <p:nvPr/>
         </p:nvSpPr>
@@ -16766,7 +16649,7 @@
                 <a:ea typeface="Courier New" pitchFamily="34" charset="-122"/>
                 <a:cs typeface="Courier New" pitchFamily="34" charset="-120"/>
               </a:rPr>
-              <a:t>0.008 / 8.5°</a:t>
+              <a:t>0.007 / 25.8°</a:t>
             </a:r>
             <a:endParaRPr lang="en-US" sz="1700" dirty="0"/>
           </a:p>
@@ -16774,13 +16657,7 @@
       </p:sp>
       <p:sp>
         <p:nvSpPr>
-          <p:cNvPr id="15" name="Text 12">
-            <a:extLst>
-              <a:ext uri="{FF2B5EF4-FFF2-40B4-BE49-F238E27FC236}">
-                <a16:creationId xmlns:a16="http://schemas.microsoft.com/office/drawing/2014/main" id="{BA85B3A5-BAEC-A402-84FF-B95972175A98}"/>
-              </a:ext>
-            </a:extLst>
-          </p:cNvPr>
+          <p:cNvPr id="15" name="Text 12"/>
           <p:cNvSpPr/>
           <p:nvPr/>
         </p:nvSpPr>
@@ -16814,7 +16691,7 @@
                 <a:ea typeface="Calibri" pitchFamily="34" charset="-122"/>
                 <a:cs typeface="Calibri" pitchFamily="34" charset="-120"/>
               </a:rPr>
-              <a:t>whole-image, magnitude-weighted</a:t>
+              <a:t>whole-image, magnitude-weighted, floor-excluded @30dB</a:t>
             </a:r>
             <a:endParaRPr lang="en-US" sz="900" dirty="0"/>
           </a:p>
@@ -16822,13 +16699,7 @@
       </p:sp>
       <p:sp>
         <p:nvSpPr>
-          <p:cNvPr id="16" name="Text 13">
-            <a:extLst>
-              <a:ext uri="{FF2B5EF4-FFF2-40B4-BE49-F238E27FC236}">
-                <a16:creationId xmlns:a16="http://schemas.microsoft.com/office/drawing/2014/main" id="{9B66A1B2-F3DB-88BF-F00B-11CD6C7618C7}"/>
-              </a:ext>
-            </a:extLst>
-          </p:cNvPr>
+          <p:cNvPr id="16" name="Text 13"/>
           <p:cNvSpPr/>
           <p:nvPr/>
         </p:nvSpPr>
@@ -16867,13 +16738,7 @@
       </p:sp>
       <p:sp>
         <p:nvSpPr>
-          <p:cNvPr id="17" name="Text 14">
-            <a:extLst>
-              <a:ext uri="{FF2B5EF4-FFF2-40B4-BE49-F238E27FC236}">
-                <a16:creationId xmlns:a16="http://schemas.microsoft.com/office/drawing/2014/main" id="{9439CC84-D168-6237-0053-57894A3066BF}"/>
-              </a:ext>
-            </a:extLst>
-          </p:cNvPr>
+          <p:cNvPr id="17" name="Text 14"/>
           <p:cNvSpPr/>
           <p:nvPr/>
         </p:nvSpPr>
@@ -16904,33 +16769,15 @@
                 <a:ea typeface="Courier New" pitchFamily="34" charset="-122"/>
                 <a:cs typeface="Courier New" pitchFamily="34" charset="-120"/>
               </a:rPr>
-              <a:t>464x / pulse</a:t>
-            </a:r>
-          </a:p>
-          <a:p>
-            <a:r>
-              <a:rPr lang="en-US" sz="1600" b="1" dirty="0">
-                <a:latin typeface="Courier New" panose="02070309020205020404" pitchFamily="49" charset="0"/>
-                <a:cs typeface="Courier New" panose="02070309020205020404" pitchFamily="49" charset="0"/>
-              </a:rPr>
-              <a:t>60s / 23126s total</a:t>
-            </a:r>
-            <a:endParaRPr lang="en-US" sz="1700" b="1" dirty="0">
-              <a:latin typeface="Courier New" panose="02070309020205020404" pitchFamily="49" charset="0"/>
-              <a:cs typeface="Courier New" panose="02070309020205020404" pitchFamily="49" charset="0"/>
-            </a:endParaRPr>
-          </a:p>
-        </p:txBody>
-      </p:sp>
-      <p:sp>
-        <p:nvSpPr>
-          <p:cNvPr id="18" name="Text 15">
-            <a:extLst>
-              <a:ext uri="{FF2B5EF4-FFF2-40B4-BE49-F238E27FC236}">
-                <a16:creationId xmlns:a16="http://schemas.microsoft.com/office/drawing/2014/main" id="{1F16027F-F88B-0A34-7EDB-E4A002DAB6AB}"/>
-              </a:ext>
-            </a:extLst>
-          </p:cNvPr>
+              <a:t>5.8x total</a:t>
+            </a:r>
+            <a:endParaRPr lang="en-US" sz="1700" dirty="0"/>
+          </a:p>
+        </p:txBody>
+      </p:sp>
+      <p:sp>
+        <p:nvSpPr>
+          <p:cNvPr id="18" name="Text 15"/>
           <p:cNvSpPr/>
           <p:nvPr/>
         </p:nvSpPr>
@@ -16949,10 +16796,11 @@
           <a:bodyPr wrap="square" lIns="0" tIns="0" rIns="0" bIns="0" rtlCol="0" anchor="ctr"/>
           <a:lstStyle/>
           <a:p>
-            <a:pPr>
+            <a:pPr marL="0" indent="0">
               <a:lnSpc>
                 <a:spcPct val="110000"/>
               </a:lnSpc>
+              <a:buNone/>
             </a:pPr>
             <a:r>
               <a:rPr lang="en-US" sz="900" i="1" dirty="0">
@@ -16963,21 +16811,54 @@
                 <a:ea typeface="Calibri" pitchFamily="34" charset="-122"/>
                 <a:cs typeface="Calibri" pitchFamily="34" charset="-120"/>
               </a:rPr>
-              <a:t>ray/facet intersection is more expensive than estimated</a:t>
+              <a:t>dense SBR 51.6s/pulse (10322.7s total) vs ASC 8.9s/pulse (1770.9s total)</a:t>
             </a:r>
             <a:endParaRPr lang="en-US" sz="900" dirty="0"/>
+          </a:p>
+        </p:txBody>
+      </p:sp>
+      <p:sp>
+        <p:nvSpPr>
+          <p:cNvPr id="19" name="Text 16"/>
+          <p:cNvSpPr/>
+          <p:nvPr/>
+        </p:nvSpPr>
+        <p:spPr>
+          <a:xfrm>
+            <a:off x="548640" y="6428232"/>
+            <a:ext cx="10607040" cy="256032"/>
+          </a:xfrm>
+          <a:prstGeom prst="rect">
+            <a:avLst/>
+          </a:prstGeom>
+          <a:noFill/>
+          <a:ln/>
+        </p:spPr>
+        <p:txBody>
+          <a:bodyPr wrap="square" lIns="0" tIns="0" rIns="0" bIns="0" rtlCol="0" anchor="ctr"/>
+          <a:lstStyle/>
+          <a:p>
+            <a:pPr marL="0" indent="0">
+              <a:buNone/>
+            </a:pPr>
+            <a:r>
+              <a:rPr lang="en-US" sz="850" i="1" dirty="0">
+                <a:solidFill>
+                  <a:srgbClr val="5B6672"/>
+                </a:solidFill>
+                <a:latin typeface="Calibri" pitchFamily="34" charset="0"/>
+                <a:ea typeface="Calibri" pitchFamily="34" charset="-122"/>
+                <a:cs typeface="Calibri" pitchFamily="34" charset="-120"/>
+              </a:rPr>
+              <a:t>Note: 5.8x is well below the Generation Speed slide's modeled ~125x -- ASC's leg2 box search is O(facets x buildings) and dominates cost at this density; this cache didn't even use the validated culled-search optimization, so there's real headroom left unclaimed.</a:t>
+            </a:r>
+            <a:endParaRPr lang="en-US" sz="850" dirty="0"/>
           </a:p>
         </p:txBody>
       </p:sp>
       <p:pic>
         <p:nvPicPr>
-          <p:cNvPr id="20" name="Picture 19">
-            <a:extLst>
-              <a:ext uri="{FF2B5EF4-FFF2-40B4-BE49-F238E27FC236}">
-                <a16:creationId xmlns:a16="http://schemas.microsoft.com/office/drawing/2014/main" id="{8C7EFB97-BBB4-B858-E319-B8FAC9324062}"/>
-              </a:ext>
-            </a:extLst>
-          </p:cNvPr>
+          <p:cNvPr id="20" name="Picture 19" descr="tier2_slide_final_comparison.png"/>
           <p:cNvPicPr>
             <a:picLocks noChangeAspect="1"/>
           </p:cNvPicPr>
@@ -16991,38 +16872,8 @@
         </p:blipFill>
         <p:spPr>
           <a:xfrm>
-            <a:off x="9419237" y="7950"/>
-            <a:ext cx="2844324" cy="2187941"/>
-          </a:xfrm>
-          <a:prstGeom prst="rect">
-            <a:avLst/>
-          </a:prstGeom>
-        </p:spPr>
-      </p:pic>
-      <p:pic>
-        <p:nvPicPr>
-          <p:cNvPr id="24" name="Picture 23">
-            <a:extLst>
-              <a:ext uri="{FF2B5EF4-FFF2-40B4-BE49-F238E27FC236}">
-                <a16:creationId xmlns:a16="http://schemas.microsoft.com/office/drawing/2014/main" id="{3E2400F5-CA83-C89B-1AA3-C3B8580F09C6}"/>
-              </a:ext>
-            </a:extLst>
-          </p:cNvPr>
-          <p:cNvPicPr>
-            <a:picLocks noChangeAspect="1"/>
-          </p:cNvPicPr>
-          <p:nvPr/>
-        </p:nvPicPr>
-        <p:blipFill>
-          <a:blip r:embed="rId4"/>
-          <a:stretch>
-            <a:fillRect/>
-          </a:stretch>
-        </p:blipFill>
-        <p:spPr>
-          <a:xfrm>
-            <a:off x="362309" y="1760621"/>
-            <a:ext cx="11576650" cy="3336758"/>
+            <a:off x="516636" y="1874520"/>
+            <a:ext cx="11155680" cy="3053133"/>
           </a:xfrm>
           <a:prstGeom prst="rect">
             <a:avLst/>
@@ -17030,11 +16881,6 @@
         </p:spPr>
       </p:pic>
     </p:spTree>
-    <p:extLst>
-      <p:ext uri="{BB962C8B-B14F-4D97-AF65-F5344CB8AC3E}">
-        <p14:creationId xmlns:p14="http://schemas.microsoft.com/office/powerpoint/2010/main" val="3650786353"/>
-      </p:ext>
-    </p:extLst>
   </p:cSld>
   <p:clrMapOvr>
     <a:masterClrMapping/>
@@ -17047,13 +16893,7 @@
   <p:cSld>
     <p:spTree>
       <p:nvGrpSpPr>
-        <p:cNvPr id="1" name="">
-          <a:extLst>
-            <a:ext uri="{FF2B5EF4-FFF2-40B4-BE49-F238E27FC236}">
-              <a16:creationId xmlns:a16="http://schemas.microsoft.com/office/drawing/2014/main" id="{FF3FA6D9-DDFF-E73F-719E-087169E5A076}"/>
-            </a:ext>
-          </a:extLst>
-        </p:cNvPr>
+        <p:cNvPr id="1" name=""/>
         <p:cNvGrpSpPr/>
         <p:nvPr/>
       </p:nvGrpSpPr>
@@ -17067,13 +16907,7 @@
       </p:grpSpPr>
       <p:sp>
         <p:nvSpPr>
-          <p:cNvPr id="2" name="Text 0">
-            <a:extLst>
-              <a:ext uri="{FF2B5EF4-FFF2-40B4-BE49-F238E27FC236}">
-                <a16:creationId xmlns:a16="http://schemas.microsoft.com/office/drawing/2014/main" id="{2CB9B116-4C8F-29F0-AA82-69964672D7E0}"/>
-              </a:ext>
-            </a:extLst>
-          </p:cNvPr>
+          <p:cNvPr id="2" name="Text 0"/>
           <p:cNvSpPr/>
           <p:nvPr/>
         </p:nvSpPr>
@@ -17112,20 +16946,14 @@
       </p:sp>
       <p:sp>
         <p:nvSpPr>
-          <p:cNvPr id="3" name="Text 1">
-            <a:extLst>
-              <a:ext uri="{FF2B5EF4-FFF2-40B4-BE49-F238E27FC236}">
-                <a16:creationId xmlns:a16="http://schemas.microsoft.com/office/drawing/2014/main" id="{31233364-B185-C010-2C63-01AF0FFE9D36}"/>
-              </a:ext>
-            </a:extLst>
-          </p:cNvPr>
+          <p:cNvPr id="3" name="Text 1"/>
           <p:cNvSpPr/>
           <p:nvPr/>
         </p:nvSpPr>
         <p:spPr>
           <a:xfrm>
             <a:off x="548640" y="658368"/>
-            <a:ext cx="10881360" cy="448056"/>
+            <a:ext cx="10881360" cy="868680"/>
           </a:xfrm>
           <a:prstGeom prst="rect">
             <a:avLst/>
@@ -17157,13 +16985,49 @@
       </p:sp>
       <p:sp>
         <p:nvSpPr>
-          <p:cNvPr id="6" name="Shape 3">
-            <a:extLst>
-              <a:ext uri="{FF2B5EF4-FFF2-40B4-BE49-F238E27FC236}">
-                <a16:creationId xmlns:a16="http://schemas.microsoft.com/office/drawing/2014/main" id="{28F1E18F-3C51-D84E-0742-26956EFB8615}"/>
-              </a:ext>
-            </a:extLst>
-          </p:cNvPr>
+          <p:cNvPr id="4" name="Text 2"/>
+          <p:cNvSpPr/>
+          <p:nvPr/>
+        </p:nvSpPr>
+        <p:spPr>
+          <a:xfrm>
+            <a:off x="548640" y="1207008"/>
+            <a:ext cx="11091672" cy="621792"/>
+          </a:xfrm>
+          <a:prstGeom prst="rect">
+            <a:avLst/>
+          </a:prstGeom>
+          <a:noFill/>
+          <a:ln/>
+        </p:spPr>
+        <p:txBody>
+          <a:bodyPr wrap="square" lIns="0" tIns="0" rIns="0" bIns="0" rtlCol="0" anchor="ctr"/>
+          <a:lstStyle/>
+          <a:p>
+            <a:pPr marL="0" indent="0">
+              <a:lnSpc>
+                <a:spcPct val="112000"/>
+              </a:lnSpc>
+              <a:buNone/>
+            </a:pPr>
+            <a:r>
+              <a:rPr lang="en-US" sz="1100" i="1" dirty="0">
+                <a:solidFill>
+                  <a:srgbClr val="5B6672"/>
+                </a:solidFill>
+                <a:latin typeface="Calibri" pitchFamily="34" charset="0"/>
+                <a:ea typeface="Calibri" pitchFamily="34" charset="-122"/>
+                <a:cs typeface="Calibri" pitchFamily="34" charset="-120"/>
+              </a:rPr>
+              <a:t>SSIM (previous slide) compares log-magnitude structure -- it can miss amplitude/phase jointly misaligned even when the dB pattern looks similar. Complex coherence (InSAR-standard, |sum(a·b*)| / sqrt(sum|a|²·sum|b|²)) is sensitive to both at once. Same run as the previous slide -- no new simulation, just a second metric on the same phase history.</a:t>
+            </a:r>
+            <a:endParaRPr lang="en-US" sz="1100" dirty="0"/>
+          </a:p>
+        </p:txBody>
+      </p:sp>
+      <p:sp>
+        <p:nvSpPr>
+          <p:cNvPr id="6" name="Shape 3"/>
           <p:cNvSpPr/>
           <p:nvPr/>
         </p:nvSpPr>
@@ -17192,13 +17056,7 @@
       </p:sp>
       <p:sp>
         <p:nvSpPr>
-          <p:cNvPr id="7" name="Text 4">
-            <a:extLst>
-              <a:ext uri="{FF2B5EF4-FFF2-40B4-BE49-F238E27FC236}">
-                <a16:creationId xmlns:a16="http://schemas.microsoft.com/office/drawing/2014/main" id="{1E29B9DB-F336-100B-479F-35317823511B}"/>
-              </a:ext>
-            </a:extLst>
-          </p:cNvPr>
+          <p:cNvPr id="7" name="Text 4"/>
           <p:cNvSpPr/>
           <p:nvPr/>
         </p:nvSpPr>
@@ -17237,13 +17095,7 @@
       </p:sp>
       <p:sp>
         <p:nvSpPr>
-          <p:cNvPr id="8" name="Text 5">
-            <a:extLst>
-              <a:ext uri="{FF2B5EF4-FFF2-40B4-BE49-F238E27FC236}">
-                <a16:creationId xmlns:a16="http://schemas.microsoft.com/office/drawing/2014/main" id="{2DE06A9B-6AD7-BD8F-2E31-25410FA68BA3}"/>
-              </a:ext>
-            </a:extLst>
-          </p:cNvPr>
+          <p:cNvPr id="8" name="Text 5"/>
           <p:cNvSpPr/>
           <p:nvPr/>
         </p:nvSpPr>
@@ -17274,7 +17126,7 @@
                 <a:ea typeface="Courier New" pitchFamily="34" charset="-122"/>
                 <a:cs typeface="Courier New" pitchFamily="34" charset="-120"/>
               </a:rPr>
-              <a:t>0.956</a:t>
+              <a:t>0.979</a:t>
             </a:r>
             <a:endParaRPr lang="en-US" sz="1700" dirty="0"/>
           </a:p>
@@ -17282,13 +17134,7 @@
       </p:sp>
       <p:sp>
         <p:nvSpPr>
-          <p:cNvPr id="9" name="Text 6">
-            <a:extLst>
-              <a:ext uri="{FF2B5EF4-FFF2-40B4-BE49-F238E27FC236}">
-                <a16:creationId xmlns:a16="http://schemas.microsoft.com/office/drawing/2014/main" id="{35E3FD4F-0B37-AB54-97EF-74F106C174E7}"/>
-              </a:ext>
-            </a:extLst>
-          </p:cNvPr>
+          <p:cNvPr id="9" name="Text 6"/>
           <p:cNvSpPr/>
           <p:nvPr/>
         </p:nvSpPr>
@@ -17322,7 +17168,7 @@
                 <a:ea typeface="Calibri" pitchFamily="34" charset="-122"/>
                 <a:cs typeface="Calibri" pitchFamily="34" charset="-120"/>
               </a:rPr>
-              <a:t>same dilution issue as whole-image SSIM -- see per-building</a:t>
+              <a:t>aggregate across the whole scene -- see per-building for the real spread</a:t>
             </a:r>
             <a:endParaRPr lang="en-US" sz="900" dirty="0"/>
           </a:p>
@@ -17330,13 +17176,7 @@
       </p:sp>
       <p:sp>
         <p:nvSpPr>
-          <p:cNvPr id="10" name="Text 7">
-            <a:extLst>
-              <a:ext uri="{FF2B5EF4-FFF2-40B4-BE49-F238E27FC236}">
-                <a16:creationId xmlns:a16="http://schemas.microsoft.com/office/drawing/2014/main" id="{2D7852D4-A06F-A4DB-C0D9-CB34D8D7B38E}"/>
-              </a:ext>
-            </a:extLst>
-          </p:cNvPr>
+          <p:cNvPr id="10" name="Text 7"/>
           <p:cNvSpPr/>
           <p:nvPr/>
         </p:nvSpPr>
@@ -17375,13 +17215,7 @@
       </p:sp>
       <p:sp>
         <p:nvSpPr>
-          <p:cNvPr id="11" name="Text 8">
-            <a:extLst>
-              <a:ext uri="{FF2B5EF4-FFF2-40B4-BE49-F238E27FC236}">
-                <a16:creationId xmlns:a16="http://schemas.microsoft.com/office/drawing/2014/main" id="{56331090-1901-40AE-5891-DFDF2869F8C1}"/>
-              </a:ext>
-            </a:extLst>
-          </p:cNvPr>
+          <p:cNvPr id="11" name="Text 8"/>
           <p:cNvSpPr/>
           <p:nvPr/>
         </p:nvSpPr>
@@ -17412,7 +17246,7 @@
                 <a:ea typeface="Courier New" pitchFamily="34" charset="-122"/>
                 <a:cs typeface="Courier New" pitchFamily="34" charset="-120"/>
               </a:rPr>
-              <a:t>mean 0.96, median .99, min 0.75</a:t>
+              <a:t>mean 0.946, min 0.180</a:t>
             </a:r>
             <a:endParaRPr lang="en-US" sz="1700" dirty="0"/>
           </a:p>
@@ -17420,13 +17254,7 @@
       </p:sp>
       <p:sp>
         <p:nvSpPr>
-          <p:cNvPr id="12" name="Text 9">
-            <a:extLst>
-              <a:ext uri="{FF2B5EF4-FFF2-40B4-BE49-F238E27FC236}">
-                <a16:creationId xmlns:a16="http://schemas.microsoft.com/office/drawing/2014/main" id="{8D6C534D-8088-1F7A-1FB9-AF6D5021B721}"/>
-              </a:ext>
-            </a:extLst>
-          </p:cNvPr>
+          <p:cNvPr id="12" name="Text 9"/>
           <p:cNvSpPr/>
           <p:nvPr/>
         </p:nvSpPr>
@@ -17460,7 +17288,7 @@
                 <a:ea typeface="Calibri" pitchFamily="34" charset="-122"/>
                 <a:cs typeface="Calibri" pitchFamily="34" charset="-120"/>
               </a:rPr>
-              <a:t>median 1.000 -- a few outliers pull the mean, not a broad drift</a:t>
+              <a:t>median 0.976 -- a few outliers pull the mean, not a broad drift</a:t>
             </a:r>
             <a:endParaRPr lang="en-US" sz="900" dirty="0"/>
           </a:p>
@@ -17468,13 +17296,7 @@
       </p:sp>
       <p:sp>
         <p:nvSpPr>
-          <p:cNvPr id="13" name="Text 10">
-            <a:extLst>
-              <a:ext uri="{FF2B5EF4-FFF2-40B4-BE49-F238E27FC236}">
-                <a16:creationId xmlns:a16="http://schemas.microsoft.com/office/drawing/2014/main" id="{BB8147CF-6780-F8DB-2806-1060BFE54D43}"/>
-              </a:ext>
-            </a:extLst>
-          </p:cNvPr>
+          <p:cNvPr id="13" name="Text 10"/>
           <p:cNvSpPr/>
           <p:nvPr/>
         </p:nvSpPr>
@@ -17513,13 +17335,7 @@
       </p:sp>
       <p:sp>
         <p:nvSpPr>
-          <p:cNvPr id="14" name="Text 11">
-            <a:extLst>
-              <a:ext uri="{FF2B5EF4-FFF2-40B4-BE49-F238E27FC236}">
-                <a16:creationId xmlns:a16="http://schemas.microsoft.com/office/drawing/2014/main" id="{DDD577A3-9438-E4F6-2C0A-F02578339CD4}"/>
-              </a:ext>
-            </a:extLst>
-          </p:cNvPr>
+          <p:cNvPr id="14" name="Text 11"/>
           <p:cNvSpPr/>
           <p:nvPr/>
         </p:nvSpPr>
@@ -17550,7 +17366,7 @@
                 <a:ea typeface="Courier New" pitchFamily="34" charset="-122"/>
                 <a:cs typeface="Courier New" pitchFamily="34" charset="-120"/>
               </a:rPr>
-              <a:t>-0.11° / 8.5°</a:t>
+              <a:t>-0.92° / 25.77°</a:t>
             </a:r>
             <a:endParaRPr lang="en-US" sz="1700" dirty="0"/>
           </a:p>
@@ -17558,13 +17374,7 @@
       </p:sp>
       <p:sp>
         <p:nvSpPr>
-          <p:cNvPr id="15" name="Text 12">
-            <a:extLst>
-              <a:ext uri="{FF2B5EF4-FFF2-40B4-BE49-F238E27FC236}">
-                <a16:creationId xmlns:a16="http://schemas.microsoft.com/office/drawing/2014/main" id="{756384F1-B270-6501-5DC0-CAA185C65724}"/>
-              </a:ext>
-            </a:extLst>
-          </p:cNvPr>
+          <p:cNvPr id="15" name="Text 12"/>
           <p:cNvSpPr/>
           <p:nvPr/>
         </p:nvSpPr>
@@ -17606,13 +17416,7 @@
       </p:sp>
       <p:sp>
         <p:nvSpPr>
-          <p:cNvPr id="16" name="Text 13">
-            <a:extLst>
-              <a:ext uri="{FF2B5EF4-FFF2-40B4-BE49-F238E27FC236}">
-                <a16:creationId xmlns:a16="http://schemas.microsoft.com/office/drawing/2014/main" id="{47E1D29A-7668-20E1-B6F1-213334CC482A}"/>
-              </a:ext>
-            </a:extLst>
-          </p:cNvPr>
+          <p:cNvPr id="16" name="Text 13"/>
           <p:cNvSpPr/>
           <p:nvPr/>
         </p:nvSpPr>
@@ -17651,13 +17455,7 @@
       </p:sp>
       <p:sp>
         <p:nvSpPr>
-          <p:cNvPr id="17" name="Text 14">
-            <a:extLst>
-              <a:ext uri="{FF2B5EF4-FFF2-40B4-BE49-F238E27FC236}">
-                <a16:creationId xmlns:a16="http://schemas.microsoft.com/office/drawing/2014/main" id="{0EE042FF-BCAC-7F4E-A80E-139B4276448A}"/>
-              </a:ext>
-            </a:extLst>
-          </p:cNvPr>
+          <p:cNvPr id="17" name="Text 14"/>
           <p:cNvSpPr/>
           <p:nvPr/>
         </p:nvSpPr>
@@ -17688,7 +17486,7 @@
                 <a:ea typeface="Courier New" pitchFamily="34" charset="-122"/>
                 <a:cs typeface="Courier New" pitchFamily="34" charset="-120"/>
               </a:rPr>
-              <a:t>27 / 200 buildings</a:t>
+              <a:t>22 / 200 buildings</a:t>
             </a:r>
             <a:endParaRPr lang="en-US" sz="1700" dirty="0"/>
           </a:p>
@@ -17696,13 +17494,7 @@
       </p:sp>
       <p:sp>
         <p:nvSpPr>
-          <p:cNvPr id="18" name="Text 15">
-            <a:extLst>
-              <a:ext uri="{FF2B5EF4-FFF2-40B4-BE49-F238E27FC236}">
-                <a16:creationId xmlns:a16="http://schemas.microsoft.com/office/drawing/2014/main" id="{3EA3550C-6EAF-4BA2-5F8D-2D2C567649D3}"/>
-              </a:ext>
-            </a:extLst>
-          </p:cNvPr>
+          <p:cNvPr id="18" name="Text 15"/>
           <p:cNvSpPr/>
           <p:nvPr/>
         </p:nvSpPr>
@@ -17736,7 +17528,7 @@
                 <a:ea typeface="Calibri" pitchFamily="34" charset="-122"/>
                 <a:cs typeface="Calibri" pitchFamily="34" charset="-120"/>
               </a:rPr>
-              <a:t>pass SSIM≥0.95 but fail coherence≥0.95 -- worst: SSIM=0.963, coherence=0.75</a:t>
+              <a:t>pass SSIM≥0.95 but fail coherence≥0.95 -- worst: SSIM=0.957, coherence=0.180</a:t>
             </a:r>
             <a:endParaRPr lang="en-US" sz="900" dirty="0"/>
           </a:p>
@@ -17744,13 +17536,7 @@
       </p:sp>
       <p:sp>
         <p:nvSpPr>
-          <p:cNvPr id="19" name="Text 16">
-            <a:extLst>
-              <a:ext uri="{FF2B5EF4-FFF2-40B4-BE49-F238E27FC236}">
-                <a16:creationId xmlns:a16="http://schemas.microsoft.com/office/drawing/2014/main" id="{DF6358D2-4321-3CE3-5A2D-4C1D34536F6C}"/>
-              </a:ext>
-            </a:extLst>
-          </p:cNvPr>
+          <p:cNvPr id="19" name="Text 16"/>
           <p:cNvSpPr/>
           <p:nvPr/>
         </p:nvSpPr>
@@ -17772,19 +17558,24 @@
             <a:pPr marL="0" indent="0">
               <a:buNone/>
             </a:pPr>
+            <a:r>
+              <a:rPr lang="en-US" sz="850" i="1" dirty="0">
+                <a:solidFill>
+                  <a:srgbClr val="5B6672"/>
+                </a:solidFill>
+                <a:latin typeface="Calibri" pitchFamily="34" charset="0"/>
+                <a:ea typeface="Calibri" pitchFamily="34" charset="-122"/>
+                <a:cs typeface="Calibri" pitchFamily="34" charset="-120"/>
+              </a:rPr>
+              <a:t>Reading this honestly: coherence is a stricter, complementary check, not a contradiction of the SSIM result -- but 22 buildings (11%) that SSIM alone would call clean show materially worse joint amplitude/phase agreement. Worth a coherence threshold alongside SSIM in the Tier 2 criteria, not a replacement for it.</a:t>
+            </a:r>
             <a:endParaRPr lang="en-US" sz="850" dirty="0"/>
           </a:p>
         </p:txBody>
       </p:sp>
       <p:pic>
         <p:nvPicPr>
-          <p:cNvPr id="29" name="Picture 28">
-            <a:extLst>
-              <a:ext uri="{FF2B5EF4-FFF2-40B4-BE49-F238E27FC236}">
-                <a16:creationId xmlns:a16="http://schemas.microsoft.com/office/drawing/2014/main" id="{BAE34C60-C2B7-C5E7-2221-7C2ED20A38D8}"/>
-              </a:ext>
-            </a:extLst>
-          </p:cNvPr>
+          <p:cNvPr id="20" name="Picture 19" descr="tier2_slide_final_phase_coherence.png"/>
           <p:cNvPicPr>
             <a:picLocks noChangeAspect="1"/>
           </p:cNvPicPr>
@@ -17798,8 +17589,8 @@
         </p:blipFill>
         <p:spPr>
           <a:xfrm>
-            <a:off x="120770" y="1308555"/>
-            <a:ext cx="11869947" cy="3788824"/>
+            <a:off x="516636" y="1920240"/>
+            <a:ext cx="11155680" cy="3053133"/>
           </a:xfrm>
           <a:prstGeom prst="rect">
             <a:avLst/>
@@ -17807,11 +17598,6 @@
         </p:spPr>
       </p:pic>
     </p:spTree>
-    <p:extLst>
-      <p:ext uri="{BB962C8B-B14F-4D97-AF65-F5344CB8AC3E}">
-        <p14:creationId xmlns:p14="http://schemas.microsoft.com/office/powerpoint/2010/main" val="1866589917"/>
-      </p:ext>
-    </p:extLst>
   </p:cSld>
   <p:clrMapOvr>
     <a:masterClrMapping/>
@@ -17844,6 +17630,45 @@
         </p:nvSpPr>
         <p:spPr>
           <a:xfrm>
+            <a:off x="548640" y="365760"/>
+            <a:ext cx="9144000" cy="292608"/>
+          </a:xfrm>
+          <a:prstGeom prst="rect">
+            <a:avLst/>
+          </a:prstGeom>
+          <a:noFill/>
+          <a:ln/>
+        </p:spPr>
+        <p:txBody>
+          <a:bodyPr wrap="square" lIns="0" tIns="0" rIns="0" bIns="0" rtlCol="0" anchor="ctr"/>
+          <a:lstStyle/>
+          <a:p>
+            <a:pPr marL="0" indent="0">
+              <a:buNone/>
+            </a:pPr>
+            <a:r>
+              <a:rPr lang="en-US" sz="1200" b="1" kern="0" spc="200" dirty="0">
+                <a:solidFill>
+                  <a:srgbClr val="B85C00"/>
+                </a:solidFill>
+                <a:latin typeface="Calibri" pitchFamily="34" charset="0"/>
+                <a:ea typeface="Calibri" pitchFamily="34" charset="-122"/>
+                <a:cs typeface="Calibri" pitchFamily="34" charset="-120"/>
+              </a:rPr>
+              <a:t>VALIDATION, CONTINUED</a:t>
+            </a:r>
+            <a:endParaRPr lang="en-US" sz="1200" dirty="0"/>
+          </a:p>
+        </p:txBody>
+      </p:sp>
+      <p:sp>
+        <p:nvSpPr>
+          <p:cNvPr id="3" name="Text 1"/>
+          <p:cNvSpPr/>
+          <p:nvPr/>
+        </p:nvSpPr>
+        <p:spPr>
+          <a:xfrm>
             <a:off x="548640" y="658368"/>
             <a:ext cx="10881360" cy="868680"/>
           </a:xfrm>
@@ -17861,7 +17686,7 @@
               <a:buNone/>
             </a:pPr>
             <a:r>
-              <a:rPr lang="en-US" sz="3400" b="1" dirty="0">
+              <a:rPr lang="en-US" sz="2000" b="1" dirty="0">
                 <a:solidFill>
                   <a:srgbClr val="141A22"/>
                 </a:solidFill>
@@ -17869,22 +17694,22 @@
                 <a:ea typeface="Cambria" pitchFamily="34" charset="-122"/>
                 <a:cs typeface="Cambria" pitchFamily="34" charset="-120"/>
               </a:rPr>
-              <a:t>Summary</a:t>
-            </a:r>
-            <a:endParaRPr lang="en-US" sz="3400" dirty="0"/>
-          </a:p>
-        </p:txBody>
-      </p:sp>
-      <p:sp>
-        <p:nvSpPr>
-          <p:cNvPr id="3" name="Text 1"/>
-          <p:cNvSpPr/>
-          <p:nvPr/>
-        </p:nvSpPr>
-        <p:spPr>
-          <a:xfrm>
-            <a:off x="548640" y="1554480"/>
-            <a:ext cx="10698480" cy="822960"/>
+              <a:t>Why 30dB: picking the noise-floor cutoff for phase/coherence scoring</a:t>
+            </a:r>
+            <a:endParaRPr lang="en-US" sz="2000" dirty="0"/>
+          </a:p>
+        </p:txBody>
+      </p:sp>
+      <p:sp>
+        <p:nvSpPr>
+          <p:cNvPr id="4" name="Text 2"/>
+          <p:cNvSpPr/>
+          <p:nvPr/>
+        </p:nvSpPr>
+        <p:spPr>
+          <a:xfrm>
+            <a:off x="548640" y="1207008"/>
+            <a:ext cx="11091672" cy="621792"/>
           </a:xfrm>
           <a:prstGeom prst="rect">
             <a:avLst/>
@@ -17898,12 +17723,12 @@
           <a:p>
             <a:pPr marL="0" indent="0">
               <a:lnSpc>
-                <a:spcPct val="115000"/>
+                <a:spcPct val="112000"/>
               </a:lnSpc>
               <a:buNone/>
             </a:pPr>
             <a:r>
-              <a:rPr lang="en-US" sz="1500" i="1" dirty="0">
+              <a:rPr lang="en-US" sz="1100" i="1" dirty="0">
                 <a:solidFill>
                   <a:srgbClr val="5B6672"/>
                 </a:solidFill>
@@ -17911,26 +17736,26 @@
                 <a:ea typeface="Calibri" pitchFamily="34" charset="-122"/>
                 <a:cs typeface="Calibri" pitchFamily="34" charset="-120"/>
               </a:rPr>
-              <a:t>SAR simulation from a 3D scene is a physics forward-model problem wearing a graphics costume -- geometry and ray tracing infrastructure transfer</a:t>
-            </a:r>
-            <a:endParaRPr lang="en-US" sz="1500" dirty="0"/>
-          </a:p>
-        </p:txBody>
-      </p:sp>
-      <p:sp>
-        <p:nvSpPr>
-          <p:cNvPr id="4" name="Shape 2"/>
-          <p:cNvSpPr/>
-          <p:nvPr/>
-        </p:nvSpPr>
-        <p:spPr>
-          <a:xfrm>
-            <a:off x="548640" y="2606040"/>
-            <a:ext cx="2560320" cy="2377440"/>
+              <a:t>Every pixel below the true target return is noise -- comparing it between the two branches measures agreement on noise, not on the model. The floor decides how much of the image counts as "real" before scoring phase RMS and coherence. Same 200-building run as the previous two slides -- this is the sensitivity analysis behind that choice, not a new simulation.</a:t>
+            </a:r>
+            <a:endParaRPr lang="en-US" sz="1100" dirty="0"/>
+          </a:p>
+        </p:txBody>
+      </p:sp>
+      <p:sp>
+        <p:nvSpPr>
+          <p:cNvPr id="6" name="Shape 3"/>
+          <p:cNvSpPr/>
+          <p:nvPr/>
+        </p:nvSpPr>
+        <p:spPr>
+          <a:xfrm>
+            <a:off x="548640" y="5156253"/>
+            <a:ext cx="11091672" cy="1244547"/>
           </a:xfrm>
           <a:prstGeom prst="roundRect">
             <a:avLst>
-              <a:gd name="adj" fmla="val 3077"/>
+              <a:gd name="adj" fmla="val 5878"/>
             </a:avLst>
           </a:prstGeom>
           <a:solidFill>
@@ -17948,597 +17773,548 @@
       </p:sp>
       <p:sp>
         <p:nvSpPr>
-          <p:cNvPr id="5" name="Shape 3"/>
-          <p:cNvSpPr/>
-          <p:nvPr/>
-        </p:nvSpPr>
-        <p:spPr>
-          <a:xfrm>
-            <a:off x="1463040" y="2880360"/>
-            <a:ext cx="731520" cy="731520"/>
-          </a:xfrm>
-          <a:prstGeom prst="ellipse">
-            <a:avLst/>
-          </a:prstGeom>
-          <a:solidFill>
-            <a:srgbClr val="FF9E2C"/>
-          </a:solidFill>
-          <a:ln/>
-        </p:spPr>
+          <p:cNvPr id="7" name="Text 4"/>
+          <p:cNvSpPr/>
+          <p:nvPr/>
+        </p:nvSpPr>
+        <p:spPr>
+          <a:xfrm>
+            <a:off x="777240" y="5293413"/>
+            <a:ext cx="2407158" cy="256032"/>
+          </a:xfrm>
+          <a:prstGeom prst="rect">
+            <a:avLst/>
+          </a:prstGeom>
+          <a:noFill/>
+          <a:ln/>
+        </p:spPr>
+        <p:txBody>
+          <a:bodyPr wrap="square" lIns="0" tIns="0" rIns="0" bIns="0" rtlCol="0" anchor="ctr"/>
+          <a:lstStyle/>
+          <a:p>
+            <a:pPr marL="0" indent="0">
+              <a:buNone/>
+            </a:pPr>
+            <a:r>
+              <a:rPr lang="en-US" sz="1000" b="1" kern="0" spc="100" dirty="0">
+                <a:solidFill>
+                  <a:srgbClr val="B85C00"/>
+                </a:solidFill>
+                <a:latin typeface="Calibri" pitchFamily="34" charset="0"/>
+                <a:ea typeface="Calibri" pitchFamily="34" charset="-122"/>
+                <a:cs typeface="Calibri" pitchFamily="34" charset="-120"/>
+              </a:rPr>
+              <a:t>FRACTION OF PIXELS KEPT</a:t>
+            </a:r>
+            <a:endParaRPr lang="en-US" sz="1000" dirty="0"/>
+          </a:p>
+        </p:txBody>
+      </p:sp>
+      <p:sp>
+        <p:nvSpPr>
+          <p:cNvPr id="8" name="Text 5"/>
+          <p:cNvSpPr/>
+          <p:nvPr/>
+        </p:nvSpPr>
+        <p:spPr>
+          <a:xfrm>
+            <a:off x="777240" y="5540301"/>
+            <a:ext cx="2407158" cy="457200"/>
+          </a:xfrm>
+          <a:prstGeom prst="rect">
+            <a:avLst/>
+          </a:prstGeom>
+          <a:noFill/>
+          <a:ln/>
+        </p:spPr>
+        <p:txBody>
+          <a:bodyPr wrap="square" lIns="0" tIns="0" rIns="0" bIns="0" rtlCol="0" anchor="ctr"/>
+          <a:lstStyle/>
+          <a:p>
+            <a:pPr marL="0" indent="0">
+              <a:buNone/>
+            </a:pPr>
+            <a:r>
+              <a:rPr lang="en-US" sz="1700" b="1" dirty="0">
+                <a:solidFill>
+                  <a:srgbClr val="141A22"/>
+                </a:solidFill>
+                <a:latin typeface="Courier New" pitchFamily="34" charset="0"/>
+                <a:ea typeface="Courier New" pitchFamily="34" charset="-122"/>
+                <a:cs typeface="Courier New" pitchFamily="34" charset="-120"/>
+              </a:rPr>
+              <a:t>3.40%</a:t>
+            </a:r>
+            <a:endParaRPr lang="en-US" sz="1700" dirty="0"/>
+          </a:p>
+        </p:txBody>
+      </p:sp>
+      <p:sp>
+        <p:nvSpPr>
+          <p:cNvPr id="9" name="Text 6"/>
+          <p:cNvSpPr/>
+          <p:nvPr/>
+        </p:nvSpPr>
+        <p:spPr>
+          <a:xfrm>
+            <a:off x="777240" y="5997501"/>
+            <a:ext cx="2407158" cy="502920"/>
+          </a:xfrm>
+          <a:prstGeom prst="rect">
+            <a:avLst/>
+          </a:prstGeom>
+          <a:noFill/>
+          <a:ln/>
+        </p:spPr>
+        <p:txBody>
+          <a:bodyPr wrap="square" lIns="0" tIns="0" rIns="0" bIns="0" rtlCol="0" anchor="ctr"/>
+          <a:lstStyle/>
+          <a:p>
+            <a:pPr marL="0" indent="0">
+              <a:lnSpc>
+                <a:spcPct val="110000"/>
+              </a:lnSpc>
+              <a:buNone/>
+            </a:pPr>
+            <a:r>
+              <a:rPr lang="en-US" sz="900" i="1" dirty="0">
+                <a:solidFill>
+                  <a:srgbClr val="5B6672"/>
+                </a:solidFill>
+                <a:latin typeface="Calibri" pitchFamily="34" charset="0"/>
+                <a:ea typeface="Calibri" pitchFamily="34" charset="-122"/>
+                <a:cs typeface="Calibri" pitchFamily="34" charset="-120"/>
+              </a:rPr>
+              <a:t>at the chosen 30dB floor, whole-image -- vs 1.20% @20dB, 0.15% @10dB</a:t>
+            </a:r>
+            <a:endParaRPr lang="en-US" sz="900" dirty="0"/>
+          </a:p>
+        </p:txBody>
+      </p:sp>
+      <p:sp>
+        <p:nvSpPr>
+          <p:cNvPr id="10" name="Text 7"/>
+          <p:cNvSpPr/>
+          <p:nvPr/>
+        </p:nvSpPr>
+        <p:spPr>
+          <a:xfrm>
+            <a:off x="3412998" y="5293413"/>
+            <a:ext cx="2407158" cy="256032"/>
+          </a:xfrm>
+          <a:prstGeom prst="rect">
+            <a:avLst/>
+          </a:prstGeom>
+          <a:noFill/>
+          <a:ln/>
+        </p:spPr>
+        <p:txBody>
+          <a:bodyPr wrap="square" lIns="0" tIns="0" rIns="0" bIns="0" rtlCol="0" anchor="ctr"/>
+          <a:lstStyle/>
+          <a:p>
+            <a:pPr marL="0" indent="0">
+              <a:buNone/>
+            </a:pPr>
+            <a:r>
+              <a:rPr lang="en-US" sz="1000" b="1" kern="0" spc="100" dirty="0">
+                <a:solidFill>
+                  <a:srgbClr val="B85C00"/>
+                </a:solidFill>
+                <a:latin typeface="Calibri" pitchFamily="34" charset="0"/>
+                <a:ea typeface="Calibri" pitchFamily="34" charset="-122"/>
+                <a:cs typeface="Calibri" pitchFamily="34" charset="-120"/>
+              </a:rPr>
+              <a:t>BUILDINGS UNDER 1% OF CROP KEPT</a:t>
+            </a:r>
+            <a:endParaRPr lang="en-US" sz="1000" dirty="0"/>
+          </a:p>
+        </p:txBody>
+      </p:sp>
+      <p:sp>
+        <p:nvSpPr>
+          <p:cNvPr id="11" name="Text 8"/>
+          <p:cNvSpPr/>
+          <p:nvPr/>
+        </p:nvSpPr>
+        <p:spPr>
+          <a:xfrm>
+            <a:off x="3412998" y="5540301"/>
+            <a:ext cx="2407158" cy="457200"/>
+          </a:xfrm>
+          <a:prstGeom prst="rect">
+            <a:avLst/>
+          </a:prstGeom>
+          <a:noFill/>
+          <a:ln/>
+        </p:spPr>
+        <p:txBody>
+          <a:bodyPr wrap="square" lIns="0" tIns="0" rIns="0" bIns="0" rtlCol="0" anchor="ctr"/>
+          <a:lstStyle/>
+          <a:p>
+            <a:pPr marL="0" indent="0">
+              <a:buNone/>
+            </a:pPr>
+            <a:r>
+              <a:rPr lang="en-US" sz="1700" b="1" dirty="0">
+                <a:solidFill>
+                  <a:srgbClr val="141A22"/>
+                </a:solidFill>
+                <a:latin typeface="Courier New" pitchFamily="34" charset="0"/>
+                <a:ea typeface="Courier New" pitchFamily="34" charset="-122"/>
+                <a:cs typeface="Courier New" pitchFamily="34" charset="-120"/>
+              </a:rPr>
+              <a:t>12 @30dB</a:t>
+            </a:r>
+            <a:endParaRPr lang="en-US" sz="1700" dirty="0"/>
+          </a:p>
+        </p:txBody>
+      </p:sp>
+      <p:sp>
+        <p:nvSpPr>
+          <p:cNvPr id="12" name="Text 9"/>
+          <p:cNvSpPr/>
+          <p:nvPr/>
+        </p:nvSpPr>
+        <p:spPr>
+          <a:xfrm>
+            <a:off x="3412998" y="5997501"/>
+            <a:ext cx="2407158" cy="502920"/>
+          </a:xfrm>
+          <a:prstGeom prst="rect">
+            <a:avLst/>
+          </a:prstGeom>
+          <a:noFill/>
+          <a:ln/>
+        </p:spPr>
+        <p:txBody>
+          <a:bodyPr wrap="square" lIns="0" tIns="0" rIns="0" bIns="0" rtlCol="0" anchor="ctr"/>
+          <a:lstStyle/>
+          <a:p>
+            <a:pPr marL="0" indent="0">
+              <a:lnSpc>
+                <a:spcPct val="110000"/>
+              </a:lnSpc>
+              <a:buNone/>
+            </a:pPr>
+            <a:r>
+              <a:rPr lang="en-US" sz="900" i="1" dirty="0">
+                <a:solidFill>
+                  <a:srgbClr val="5B6672"/>
+                </a:solidFill>
+                <a:latin typeface="Calibri" pitchFamily="34" charset="0"/>
+                <a:ea typeface="Calibri" pitchFamily="34" charset="-122"/>
+                <a:cs typeface="Calibri" pitchFamily="34" charset="-120"/>
+              </a:rPr>
+              <a:t>of 200 -- vs 95/200 at 20dB; a small-sample problem, not a cleaner comparison</a:t>
+            </a:r>
+            <a:endParaRPr lang="en-US" sz="900" dirty="0"/>
+          </a:p>
+        </p:txBody>
+      </p:sp>
+      <p:sp>
+        <p:nvSpPr>
+          <p:cNvPr id="13" name="Text 10"/>
+          <p:cNvSpPr/>
+          <p:nvPr/>
+        </p:nvSpPr>
+        <p:spPr>
+          <a:xfrm>
+            <a:off x="6048756" y="5293413"/>
+            <a:ext cx="2407158" cy="256032"/>
+          </a:xfrm>
+          <a:prstGeom prst="rect">
+            <a:avLst/>
+          </a:prstGeom>
+          <a:noFill/>
+          <a:ln/>
+        </p:spPr>
+        <p:txBody>
+          <a:bodyPr wrap="square" lIns="0" tIns="0" rIns="0" bIns="0" rtlCol="0" anchor="ctr"/>
+          <a:lstStyle/>
+          <a:p>
+            <a:pPr marL="0" indent="0">
+              <a:buNone/>
+            </a:pPr>
+            <a:r>
+              <a:rPr lang="en-US" sz="1000" b="1" kern="0" spc="100" dirty="0">
+                <a:solidFill>
+                  <a:srgbClr val="B85C00"/>
+                </a:solidFill>
+                <a:latin typeface="Calibri" pitchFamily="34" charset="0"/>
+                <a:ea typeface="Calibri" pitchFamily="34" charset="-122"/>
+                <a:cs typeface="Calibri" pitchFamily="34" charset="-120"/>
+              </a:rPr>
+              <a:t>PHASE RMS: 30dB vs 20dB</a:t>
+            </a:r>
+            <a:endParaRPr lang="en-US" sz="1000" dirty="0"/>
+          </a:p>
+        </p:txBody>
+      </p:sp>
+      <p:sp>
+        <p:nvSpPr>
+          <p:cNvPr id="14" name="Text 11"/>
+          <p:cNvSpPr/>
+          <p:nvPr/>
+        </p:nvSpPr>
+        <p:spPr>
+          <a:xfrm>
+            <a:off x="6048756" y="5540301"/>
+            <a:ext cx="2407158" cy="457200"/>
+          </a:xfrm>
+          <a:prstGeom prst="rect">
+            <a:avLst/>
+          </a:prstGeom>
+          <a:noFill/>
+          <a:ln/>
+        </p:spPr>
+        <p:txBody>
+          <a:bodyPr wrap="square" lIns="0" tIns="0" rIns="0" bIns="0" rtlCol="0" anchor="ctr"/>
+          <a:lstStyle/>
+          <a:p>
+            <a:pPr marL="0" indent="0">
+              <a:buNone/>
+            </a:pPr>
+            <a:r>
+              <a:rPr lang="en-US" sz="1700" b="1" dirty="0">
+                <a:solidFill>
+                  <a:srgbClr val="141A22"/>
+                </a:solidFill>
+                <a:latin typeface="Courier New" pitchFamily="34" charset="0"/>
+                <a:ea typeface="Courier New" pitchFamily="34" charset="-122"/>
+                <a:cs typeface="Courier New" pitchFamily="34" charset="-120"/>
+              </a:rPr>
+              <a:t>27.6° / 14.2°</a:t>
+            </a:r>
+            <a:endParaRPr lang="en-US" sz="1700" dirty="0"/>
+          </a:p>
+        </p:txBody>
+      </p:sp>
+      <p:sp>
+        <p:nvSpPr>
+          <p:cNvPr id="15" name="Text 12"/>
+          <p:cNvSpPr/>
+          <p:nvPr/>
+        </p:nvSpPr>
+        <p:spPr>
+          <a:xfrm>
+            <a:off x="6048756" y="5997501"/>
+            <a:ext cx="2407158" cy="502920"/>
+          </a:xfrm>
+          <a:prstGeom prst="rect">
+            <a:avLst/>
+          </a:prstGeom>
+          <a:noFill/>
+          <a:ln/>
+        </p:spPr>
+        <p:txBody>
+          <a:bodyPr wrap="square" lIns="0" tIns="0" rIns="0" bIns="0" rtlCol="0" anchor="ctr"/>
+          <a:lstStyle/>
+          <a:p>
+            <a:pPr marL="0" indent="0">
+              <a:lnSpc>
+                <a:spcPct val="110000"/>
+              </a:lnSpc>
+              <a:buNone/>
+            </a:pPr>
+            <a:r>
+              <a:rPr lang="en-US" sz="900" i="1" dirty="0">
+                <a:solidFill>
+                  <a:srgbClr val="5B6672"/>
+                </a:solidFill>
+                <a:latin typeface="Calibri" pitchFamily="34" charset="0"/>
+                <a:ea typeface="Calibri" pitchFamily="34" charset="-122"/>
+                <a:cs typeface="Calibri" pitchFamily="34" charset="-120"/>
+              </a:rPr>
+              <a:t>mean, 30dB vs 20dB -- 20dB looks tighter but from a shrinking sample, see next card</a:t>
+            </a:r>
+            <a:endParaRPr lang="en-US" sz="900" dirty="0"/>
+          </a:p>
+        </p:txBody>
+      </p:sp>
+      <p:sp>
+        <p:nvSpPr>
+          <p:cNvPr id="16" name="Text 13"/>
+          <p:cNvSpPr/>
+          <p:nvPr/>
+        </p:nvSpPr>
+        <p:spPr>
+          <a:xfrm>
+            <a:off x="8684514" y="5293413"/>
+            <a:ext cx="2407158" cy="256032"/>
+          </a:xfrm>
+          <a:prstGeom prst="rect">
+            <a:avLst/>
+          </a:prstGeom>
+          <a:noFill/>
+          <a:ln/>
+        </p:spPr>
+        <p:txBody>
+          <a:bodyPr wrap="square" lIns="0" tIns="0" rIns="0" bIns="0" rtlCol="0" anchor="ctr"/>
+          <a:lstStyle/>
+          <a:p>
+            <a:pPr marL="0" indent="0">
+              <a:buNone/>
+            </a:pPr>
+            <a:r>
+              <a:rPr lang="en-US" sz="1000" b="1" kern="0" spc="100" dirty="0">
+                <a:solidFill>
+                  <a:srgbClr val="B85C00"/>
+                </a:solidFill>
+                <a:latin typeface="Calibri" pitchFamily="34" charset="0"/>
+                <a:ea typeface="Calibri" pitchFamily="34" charset="-122"/>
+                <a:cs typeface="Calibri" pitchFamily="34" charset="-120"/>
+              </a:rPr>
+              <a:t>MAX PHASE RMS: NO FLOOR -&gt; FLOORED</a:t>
+            </a:r>
+            <a:endParaRPr lang="en-US" sz="1000" dirty="0"/>
+          </a:p>
+        </p:txBody>
+      </p:sp>
+      <p:sp>
+        <p:nvSpPr>
+          <p:cNvPr id="17" name="Text 14"/>
+          <p:cNvSpPr/>
+          <p:nvPr/>
+        </p:nvSpPr>
+        <p:spPr>
+          <a:xfrm>
+            <a:off x="8684514" y="5540301"/>
+            <a:ext cx="2407158" cy="457200"/>
+          </a:xfrm>
+          <a:prstGeom prst="rect">
+            <a:avLst/>
+          </a:prstGeom>
+          <a:noFill/>
+          <a:ln/>
+        </p:spPr>
+        <p:txBody>
+          <a:bodyPr wrap="square" lIns="0" tIns="0" rIns="0" bIns="0" rtlCol="0" anchor="ctr"/>
+          <a:lstStyle/>
+          <a:p>
+            <a:pPr marL="0" indent="0">
+              <a:buNone/>
+            </a:pPr>
+            <a:r>
+              <a:rPr lang="en-US" sz="1700" b="1" dirty="0">
+                <a:solidFill>
+                  <a:srgbClr val="141A22"/>
+                </a:solidFill>
+                <a:latin typeface="Courier New" pitchFamily="34" charset="0"/>
+                <a:ea typeface="Courier New" pitchFamily="34" charset="-122"/>
+                <a:cs typeface="Courier New" pitchFamily="34" charset="-120"/>
+              </a:rPr>
+              <a:t>82.7° -&gt; 134°</a:t>
+            </a:r>
+            <a:endParaRPr lang="en-US" sz="1700" dirty="0"/>
+          </a:p>
+        </p:txBody>
+      </p:sp>
+      <p:sp>
+        <p:nvSpPr>
+          <p:cNvPr id="18" name="Text 15"/>
+          <p:cNvSpPr/>
+          <p:nvPr/>
+        </p:nvSpPr>
+        <p:spPr>
+          <a:xfrm>
+            <a:off x="8684514" y="5997501"/>
+            <a:ext cx="2407158" cy="502920"/>
+          </a:xfrm>
+          <a:prstGeom prst="rect">
+            <a:avLst/>
+          </a:prstGeom>
+          <a:noFill/>
+          <a:ln/>
+        </p:spPr>
+        <p:txBody>
+          <a:bodyPr wrap="square" lIns="0" tIns="0" rIns="0" bIns="0" rtlCol="0" anchor="ctr"/>
+          <a:lstStyle/>
+          <a:p>
+            <a:pPr marL="0" indent="0">
+              <a:lnSpc>
+                <a:spcPct val="110000"/>
+              </a:lnSpc>
+              <a:buNone/>
+            </a:pPr>
+            <a:r>
+              <a:rPr lang="en-US" sz="900" i="1" dirty="0">
+                <a:solidFill>
+                  <a:srgbClr val="5B6672"/>
+                </a:solidFill>
+                <a:latin typeface="Calibri" pitchFamily="34" charset="0"/>
+                <a:ea typeface="Calibri" pitchFamily="34" charset="-122"/>
+                <a:cs typeface="Calibri" pitchFamily="34" charset="-120"/>
+              </a:rPr>
+              <a:t>applying ANY floor makes single disagreeing pixels dominate small crops -- 30dB vs 20dB barely differ (134° vs 136°)</a:t>
+            </a:r>
+            <a:endParaRPr lang="en-US" sz="900" dirty="0"/>
+          </a:p>
+        </p:txBody>
+      </p:sp>
+      <p:sp>
+        <p:nvSpPr>
+          <p:cNvPr id="19" name="Text 16"/>
+          <p:cNvSpPr/>
+          <p:nvPr/>
+        </p:nvSpPr>
+        <p:spPr>
+          <a:xfrm>
+            <a:off x="548640" y="6428232"/>
+            <a:ext cx="10607040" cy="274320"/>
+          </a:xfrm>
+          <a:prstGeom prst="rect">
+            <a:avLst/>
+          </a:prstGeom>
+          <a:noFill/>
+          <a:ln/>
+        </p:spPr>
+        <p:txBody>
+          <a:bodyPr wrap="square" lIns="0" tIns="0" rIns="0" bIns="0" rtlCol="0" anchor="ctr"/>
+          <a:lstStyle/>
+          <a:p>
+            <a:pPr marL="0" indent="0">
+              <a:buNone/>
+            </a:pPr>
+            <a:r>
+              <a:rPr lang="en-US" sz="850" i="1" dirty="0">
+                <a:solidFill>
+                  <a:srgbClr val="5B6672"/>
+                </a:solidFill>
+                <a:latin typeface="Calibri" pitchFamily="34" charset="0"/>
+                <a:ea typeface="Calibri" pitchFamily="34" charset="-122"/>
+                <a:cs typeface="Calibri" pitchFamily="34" charset="-120"/>
+              </a:rPr>
+              <a:t>Reading this honestly: the energy distribution has no natural knee -- every floor is a point on a continuum, not a discovered threshold. 30dB was picked as the tightest floor that doesn't leave most buildings scored on a handful of pixels; a tighter floor looks more dramatic on the mean but is measuring noise, not signal.</a:t>
+            </a:r>
+            <a:endParaRPr lang="en-US" sz="850" dirty="0"/>
+          </a:p>
+        </p:txBody>
       </p:sp>
       <p:pic>
         <p:nvPicPr>
-          <p:cNvPr id="6" name="Image 0" descr="/sessions/sweet-friendly-mayer/mnt/outputs/presentation/icons/FaLayerGroup_dark.png"/>
+          <p:cNvPr id="20" name="Picture 19" descr="pixel_db_histogram_wide.png"/>
           <p:cNvPicPr>
             <a:picLocks noChangeAspect="1"/>
           </p:cNvPicPr>
           <p:nvPr/>
         </p:nvPicPr>
         <p:blipFill>
-          <a:blip r:embed="rId3"/>
+          <a:blip r:embed="rId2"/>
           <a:stretch>
             <a:fillRect/>
           </a:stretch>
         </p:blipFill>
         <p:spPr>
           <a:xfrm>
-            <a:off x="1660550" y="3077870"/>
-            <a:ext cx="336499" cy="336499"/>
+            <a:off x="516636" y="1920240"/>
+            <a:ext cx="11155680" cy="3053133"/>
           </a:xfrm>
           <a:prstGeom prst="rect">
             <a:avLst/>
           </a:prstGeom>
         </p:spPr>
       </p:pic>
-      <p:sp>
-        <p:nvSpPr>
-          <p:cNvPr id="7" name="Text 4"/>
-          <p:cNvSpPr/>
-          <p:nvPr/>
-        </p:nvSpPr>
-        <p:spPr>
-          <a:xfrm>
-            <a:off x="548640" y="3749040"/>
-            <a:ext cx="2560320" cy="365760"/>
-          </a:xfrm>
-          <a:prstGeom prst="rect">
-            <a:avLst/>
-          </a:prstGeom>
-          <a:noFill/>
-          <a:ln/>
-        </p:spPr>
-        <p:txBody>
-          <a:bodyPr wrap="square" lIns="0" tIns="0" rIns="0" bIns="0" rtlCol="0" anchor="ctr"/>
-          <a:lstStyle/>
-          <a:p>
-            <a:pPr marL="0" indent="0" algn="ctr">
-              <a:buNone/>
-            </a:pPr>
-            <a:r>
-              <a:rPr lang="en-US" sz="1400" b="1" dirty="0">
-                <a:solidFill>
-                  <a:srgbClr val="141A22"/>
-                </a:solidFill>
-                <a:latin typeface="Calibri" pitchFamily="34" charset="0"/>
-                <a:ea typeface="Calibri" pitchFamily="34" charset="-122"/>
-                <a:cs typeface="Calibri" pitchFamily="34" charset="-120"/>
-              </a:rPr>
-              <a:t>Multi-bounce</a:t>
-            </a:r>
-            <a:endParaRPr lang="en-US" sz="1400" dirty="0"/>
-          </a:p>
-        </p:txBody>
-      </p:sp>
-      <p:sp>
-        <p:nvSpPr>
-          <p:cNvPr id="8" name="Text 5"/>
-          <p:cNvSpPr/>
-          <p:nvPr/>
-        </p:nvSpPr>
-        <p:spPr>
-          <a:xfrm>
-            <a:off x="685800" y="4114800"/>
-            <a:ext cx="2286000" cy="777240"/>
-          </a:xfrm>
-          <a:prstGeom prst="rect">
-            <a:avLst/>
-          </a:prstGeom>
-          <a:noFill/>
-          <a:ln/>
-        </p:spPr>
-        <p:txBody>
-          <a:bodyPr wrap="square" lIns="0" tIns="0" rIns="0" bIns="0" rtlCol="0" anchor="ctr"/>
-          <a:lstStyle/>
-          <a:p>
-            <a:pPr marL="0" indent="0" algn="ctr">
-              <a:lnSpc>
-                <a:spcPct val="110000"/>
-              </a:lnSpc>
-              <a:buNone/>
-            </a:pPr>
-            <a:r>
-              <a:rPr lang="en-US" sz="1100" i="1" dirty="0">
-                <a:solidFill>
-                  <a:srgbClr val="5B6672"/>
-                </a:solidFill>
-                <a:latin typeface="Calibri" pitchFamily="34" charset="0"/>
-                <a:ea typeface="Calibri" pitchFamily="34" charset="-122"/>
-                <a:cs typeface="Calibri" pitchFamily="34" charset="-120"/>
-              </a:rPr>
-              <a:t>Resolvable RCS contributors, not aesthetic reflections</a:t>
-            </a:r>
-            <a:endParaRPr lang="en-US" sz="1100" dirty="0"/>
-          </a:p>
-        </p:txBody>
-      </p:sp>
-      <p:sp>
-        <p:nvSpPr>
-          <p:cNvPr id="9" name="Shape 6"/>
-          <p:cNvSpPr/>
-          <p:nvPr/>
-        </p:nvSpPr>
-        <p:spPr>
-          <a:xfrm>
-            <a:off x="3310128" y="2606040"/>
-            <a:ext cx="2560320" cy="2377440"/>
-          </a:xfrm>
-          <a:prstGeom prst="roundRect">
-            <a:avLst>
-              <a:gd name="adj" fmla="val 3077"/>
-            </a:avLst>
-          </a:prstGeom>
-          <a:solidFill>
-            <a:srgbClr val="F1F4F8"/>
-          </a:solidFill>
-          <a:ln/>
-          <a:effectLst>
-            <a:outerShdw blurRad="101600" dist="38100" dir="5400000" algn="bl" rotWithShape="0">
-              <a:srgbClr val="9AA5B1">
-                <a:alpha val="22000"/>
-              </a:srgbClr>
-            </a:outerShdw>
-          </a:effectLst>
-        </p:spPr>
-      </p:sp>
-      <p:sp>
-        <p:nvSpPr>
-          <p:cNvPr id="10" name="Shape 7"/>
-          <p:cNvSpPr/>
-          <p:nvPr/>
-        </p:nvSpPr>
-        <p:spPr>
-          <a:xfrm>
-            <a:off x="4224528" y="2880360"/>
-            <a:ext cx="731520" cy="731520"/>
-          </a:xfrm>
-          <a:prstGeom prst="ellipse">
-            <a:avLst/>
-          </a:prstGeom>
-          <a:solidFill>
-            <a:srgbClr val="FF9E2C"/>
-          </a:solidFill>
-          <a:ln/>
-        </p:spPr>
-      </p:sp>
-      <p:pic>
-        <p:nvPicPr>
-          <p:cNvPr id="11" name="Image 1" descr="/sessions/sweet-friendly-mayer/mnt/outputs/presentation/icons/FaCube_dark.png"/>
-          <p:cNvPicPr>
-            <a:picLocks noChangeAspect="1"/>
-          </p:cNvPicPr>
-          <p:nvPr/>
-        </p:nvPicPr>
-        <p:blipFill>
-          <a:blip r:embed="rId4"/>
-          <a:stretch>
-            <a:fillRect/>
-          </a:stretch>
-        </p:blipFill>
-        <p:spPr>
-          <a:xfrm>
-            <a:off x="4422038" y="3077870"/>
-            <a:ext cx="336499" cy="336499"/>
-          </a:xfrm>
-          <a:prstGeom prst="rect">
-            <a:avLst/>
-          </a:prstGeom>
-        </p:spPr>
-      </p:pic>
-      <p:sp>
-        <p:nvSpPr>
-          <p:cNvPr id="12" name="Text 8"/>
-          <p:cNvSpPr/>
-          <p:nvPr/>
-        </p:nvSpPr>
-        <p:spPr>
-          <a:xfrm>
-            <a:off x="3310128" y="3749040"/>
-            <a:ext cx="2560320" cy="365760"/>
-          </a:xfrm>
-          <a:prstGeom prst="rect">
-            <a:avLst/>
-          </a:prstGeom>
-          <a:noFill/>
-          <a:ln/>
-        </p:spPr>
-        <p:txBody>
-          <a:bodyPr wrap="square" lIns="0" tIns="0" rIns="0" bIns="0" rtlCol="0" anchor="ctr"/>
-          <a:lstStyle/>
-          <a:p>
-            <a:pPr marL="0" indent="0" algn="ctr">
-              <a:buNone/>
-            </a:pPr>
-            <a:r>
-              <a:rPr lang="en-US" sz="1400" b="1" dirty="0">
-                <a:solidFill>
-                  <a:srgbClr val="141A22"/>
-                </a:solidFill>
-                <a:latin typeface="Calibri" pitchFamily="34" charset="0"/>
-                <a:ea typeface="Calibri" pitchFamily="34" charset="-122"/>
-                <a:cs typeface="Calibri" pitchFamily="34" charset="-120"/>
-              </a:rPr>
-              <a:t>Material</a:t>
-            </a:r>
-            <a:endParaRPr lang="en-US" sz="1400" dirty="0"/>
-          </a:p>
-        </p:txBody>
-      </p:sp>
-      <p:sp>
-        <p:nvSpPr>
-          <p:cNvPr id="13" name="Text 9"/>
-          <p:cNvSpPr/>
-          <p:nvPr/>
-        </p:nvSpPr>
-        <p:spPr>
-          <a:xfrm>
-            <a:off x="3447288" y="4114800"/>
-            <a:ext cx="2286000" cy="777240"/>
-          </a:xfrm>
-          <a:prstGeom prst="rect">
-            <a:avLst/>
-          </a:prstGeom>
-          <a:noFill/>
-          <a:ln/>
-        </p:spPr>
-        <p:txBody>
-          <a:bodyPr wrap="square" lIns="0" tIns="0" rIns="0" bIns="0" rtlCol="0" anchor="ctr"/>
-          <a:lstStyle/>
-          <a:p>
-            <a:pPr marL="0" indent="0" algn="ctr">
-              <a:lnSpc>
-                <a:spcPct val="110000"/>
-              </a:lnSpc>
-              <a:buNone/>
-            </a:pPr>
-            <a:r>
-              <a:rPr lang="en-US" sz="1100" i="1" dirty="0">
-                <a:solidFill>
-                  <a:srgbClr val="5B6672"/>
-                </a:solidFill>
-                <a:latin typeface="Calibri" pitchFamily="34" charset="0"/>
-                <a:ea typeface="Calibri" pitchFamily="34" charset="-122"/>
-                <a:cs typeface="Calibri" pitchFamily="34" charset="-120"/>
-              </a:rPr>
-              <a:t>EM permittivity, not albedo</a:t>
-            </a:r>
-            <a:endParaRPr lang="en-US" sz="1100" dirty="0"/>
-          </a:p>
-        </p:txBody>
-      </p:sp>
-      <p:sp>
-        <p:nvSpPr>
-          <p:cNvPr id="14" name="Shape 10"/>
-          <p:cNvSpPr/>
-          <p:nvPr/>
-        </p:nvSpPr>
-        <p:spPr>
-          <a:xfrm>
-            <a:off x="6071616" y="2606040"/>
-            <a:ext cx="2560320" cy="2377440"/>
-          </a:xfrm>
-          <a:prstGeom prst="roundRect">
-            <a:avLst>
-              <a:gd name="adj" fmla="val 3077"/>
-            </a:avLst>
-          </a:prstGeom>
-          <a:solidFill>
-            <a:srgbClr val="F1F4F8"/>
-          </a:solidFill>
-          <a:ln/>
-          <a:effectLst>
-            <a:outerShdw blurRad="101600" dist="38100" dir="5400000" algn="bl" rotWithShape="0">
-              <a:srgbClr val="9AA5B1">
-                <a:alpha val="22000"/>
-              </a:srgbClr>
-            </a:outerShdw>
-          </a:effectLst>
-        </p:spPr>
-      </p:sp>
-      <p:sp>
-        <p:nvSpPr>
-          <p:cNvPr id="15" name="Shape 11"/>
-          <p:cNvSpPr/>
-          <p:nvPr/>
-        </p:nvSpPr>
-        <p:spPr>
-          <a:xfrm>
-            <a:off x="6986016" y="2880360"/>
-            <a:ext cx="731520" cy="731520"/>
-          </a:xfrm>
-          <a:prstGeom prst="ellipse">
-            <a:avLst/>
-          </a:prstGeom>
-          <a:solidFill>
-            <a:srgbClr val="FF9E2C"/>
-          </a:solidFill>
-          <a:ln/>
-        </p:spPr>
-      </p:sp>
-      <p:pic>
-        <p:nvPicPr>
-          <p:cNvPr id="16" name="Image 2" descr="/sessions/sweet-friendly-mayer/mnt/outputs/presentation/icons/FaWaveSquare_dark.png"/>
-          <p:cNvPicPr>
-            <a:picLocks noChangeAspect="1"/>
-          </p:cNvPicPr>
-          <p:nvPr/>
-        </p:nvPicPr>
-        <p:blipFill>
-          <a:blip r:embed="rId5"/>
-          <a:stretch>
-            <a:fillRect/>
-          </a:stretch>
-        </p:blipFill>
-        <p:spPr>
-          <a:xfrm>
-            <a:off x="7183526" y="3077870"/>
-            <a:ext cx="336499" cy="336499"/>
-          </a:xfrm>
-          <a:prstGeom prst="rect">
-            <a:avLst/>
-          </a:prstGeom>
-        </p:spPr>
-      </p:pic>
-      <p:sp>
-        <p:nvSpPr>
-          <p:cNvPr id="17" name="Text 12"/>
-          <p:cNvSpPr/>
-          <p:nvPr/>
-        </p:nvSpPr>
-        <p:spPr>
-          <a:xfrm>
-            <a:off x="6071616" y="3749040"/>
-            <a:ext cx="2560320" cy="365760"/>
-          </a:xfrm>
-          <a:prstGeom prst="rect">
-            <a:avLst/>
-          </a:prstGeom>
-          <a:noFill/>
-          <a:ln/>
-        </p:spPr>
-        <p:txBody>
-          <a:bodyPr wrap="square" lIns="0" tIns="0" rIns="0" bIns="0" rtlCol="0" anchor="ctr"/>
-          <a:lstStyle/>
-          <a:p>
-            <a:pPr marL="0" indent="0" algn="ctr">
-              <a:buNone/>
-            </a:pPr>
-            <a:r>
-              <a:rPr lang="en-US" sz="1400" b="1" dirty="0">
-                <a:solidFill>
-                  <a:srgbClr val="141A22"/>
-                </a:solidFill>
-                <a:latin typeface="Calibri" pitchFamily="34" charset="0"/>
-                <a:ea typeface="Calibri" pitchFamily="34" charset="-122"/>
-                <a:cs typeface="Calibri" pitchFamily="34" charset="-120"/>
-              </a:rPr>
-              <a:t>Polarization</a:t>
-            </a:r>
-            <a:endParaRPr lang="en-US" sz="1400" dirty="0"/>
-          </a:p>
-        </p:txBody>
-      </p:sp>
-      <p:sp>
-        <p:nvSpPr>
-          <p:cNvPr id="18" name="Text 13"/>
-          <p:cNvSpPr/>
-          <p:nvPr/>
-        </p:nvSpPr>
-        <p:spPr>
-          <a:xfrm>
-            <a:off x="6208776" y="4114800"/>
-            <a:ext cx="2286000" cy="777240"/>
-          </a:xfrm>
-          <a:prstGeom prst="rect">
-            <a:avLst/>
-          </a:prstGeom>
-          <a:noFill/>
-          <a:ln/>
-        </p:spPr>
-        <p:txBody>
-          <a:bodyPr wrap="square" lIns="0" tIns="0" rIns="0" bIns="0" rtlCol="0" anchor="ctr"/>
-          <a:lstStyle/>
-          <a:p>
-            <a:pPr marL="0" indent="0" algn="ctr">
-              <a:lnSpc>
-                <a:spcPct val="110000"/>
-              </a:lnSpc>
-              <a:buNone/>
-            </a:pPr>
-            <a:r>
-              <a:rPr lang="en-US" sz="1100" i="1" dirty="0">
-                <a:solidFill>
-                  <a:srgbClr val="5B6672"/>
-                </a:solidFill>
-                <a:latin typeface="Calibri" pitchFamily="34" charset="0"/>
-                <a:ea typeface="Calibri" pitchFamily="34" charset="-122"/>
-                <a:cs typeface="Calibri" pitchFamily="34" charset="-120"/>
-              </a:rPr>
-              <a:t>Sinclair matrices, not colors</a:t>
-            </a:r>
-            <a:endParaRPr lang="en-US" sz="1100" dirty="0"/>
-          </a:p>
-        </p:txBody>
-      </p:sp>
-      <p:sp>
-        <p:nvSpPr>
-          <p:cNvPr id="19" name="Shape 14"/>
-          <p:cNvSpPr/>
-          <p:nvPr/>
-        </p:nvSpPr>
-        <p:spPr>
-          <a:xfrm>
-            <a:off x="8833104" y="2606040"/>
-            <a:ext cx="2560320" cy="2377440"/>
-          </a:xfrm>
-          <a:prstGeom prst="roundRect">
-            <a:avLst>
-              <a:gd name="adj" fmla="val 3077"/>
-            </a:avLst>
-          </a:prstGeom>
-          <a:solidFill>
-            <a:srgbClr val="F1F4F8"/>
-          </a:solidFill>
-          <a:ln/>
-          <a:effectLst>
-            <a:outerShdw blurRad="101600" dist="38100" dir="5400000" algn="bl" rotWithShape="0">
-              <a:srgbClr val="9AA5B1">
-                <a:alpha val="22000"/>
-              </a:srgbClr>
-            </a:outerShdw>
-          </a:effectLst>
-        </p:spPr>
-      </p:sp>
-      <p:sp>
-        <p:nvSpPr>
-          <p:cNvPr id="20" name="Shape 15"/>
-          <p:cNvSpPr/>
-          <p:nvPr/>
-        </p:nvSpPr>
-        <p:spPr>
-          <a:xfrm>
-            <a:off x="9747504" y="2880360"/>
-            <a:ext cx="731520" cy="731520"/>
-          </a:xfrm>
-          <a:prstGeom prst="ellipse">
-            <a:avLst/>
-          </a:prstGeom>
-          <a:solidFill>
-            <a:srgbClr val="FF9E2C"/>
-          </a:solidFill>
-          <a:ln/>
-        </p:spPr>
-      </p:sp>
-      <p:pic>
-        <p:nvPicPr>
-          <p:cNvPr id="21" name="Image 3" descr="/sessions/sweet-friendly-mayer/mnt/outputs/presentation/icons/FaCloudRain_dark.png"/>
-          <p:cNvPicPr>
-            <a:picLocks noChangeAspect="1"/>
-          </p:cNvPicPr>
-          <p:nvPr/>
-        </p:nvPicPr>
-        <p:blipFill>
-          <a:blip r:embed="rId6"/>
-          <a:stretch>
-            <a:fillRect/>
-          </a:stretch>
-        </p:blipFill>
-        <p:spPr>
-          <a:xfrm>
-            <a:off x="9945014" y="3077870"/>
-            <a:ext cx="336499" cy="336499"/>
-          </a:xfrm>
-          <a:prstGeom prst="rect">
-            <a:avLst/>
-          </a:prstGeom>
-        </p:spPr>
-      </p:pic>
-      <p:sp>
-        <p:nvSpPr>
-          <p:cNvPr id="22" name="Text 16"/>
-          <p:cNvSpPr/>
-          <p:nvPr/>
-        </p:nvSpPr>
-        <p:spPr>
-          <a:xfrm>
-            <a:off x="8833104" y="3749040"/>
-            <a:ext cx="2560320" cy="365760"/>
-          </a:xfrm>
-          <a:prstGeom prst="rect">
-            <a:avLst/>
-          </a:prstGeom>
-          <a:noFill/>
-          <a:ln/>
-        </p:spPr>
-        <p:txBody>
-          <a:bodyPr wrap="square" lIns="0" tIns="0" rIns="0" bIns="0" rtlCol="0" anchor="ctr"/>
-          <a:lstStyle/>
-          <a:p>
-            <a:pPr marL="0" indent="0" algn="ctr">
-              <a:buNone/>
-            </a:pPr>
-            <a:r>
-              <a:rPr lang="en-US" sz="1400" b="1" dirty="0">
-                <a:solidFill>
-                  <a:srgbClr val="141A22"/>
-                </a:solidFill>
-                <a:latin typeface="Calibri" pitchFamily="34" charset="0"/>
-                <a:ea typeface="Calibri" pitchFamily="34" charset="-122"/>
-                <a:cs typeface="Calibri" pitchFamily="34" charset="-120"/>
-              </a:rPr>
-              <a:t>Atmosphere</a:t>
-            </a:r>
-            <a:endParaRPr lang="en-US" sz="1400" dirty="0"/>
-          </a:p>
-        </p:txBody>
-      </p:sp>
-      <p:sp>
-        <p:nvSpPr>
-          <p:cNvPr id="23" name="Text 17"/>
-          <p:cNvSpPr/>
-          <p:nvPr/>
-        </p:nvSpPr>
-        <p:spPr>
-          <a:xfrm>
-            <a:off x="8970264" y="4114800"/>
-            <a:ext cx="2286000" cy="777240"/>
-          </a:xfrm>
-          <a:prstGeom prst="rect">
-            <a:avLst/>
-          </a:prstGeom>
-          <a:noFill/>
-          <a:ln/>
-        </p:spPr>
-        <p:txBody>
-          <a:bodyPr wrap="square" lIns="0" tIns="0" rIns="0" bIns="0" rtlCol="0" anchor="ctr"/>
-          <a:lstStyle/>
-          <a:p>
-            <a:pPr marL="0" indent="0" algn="ctr">
-              <a:lnSpc>
-                <a:spcPct val="110000"/>
-              </a:lnSpc>
-              <a:buNone/>
-            </a:pPr>
-            <a:r>
-              <a:rPr lang="en-US" sz="1100" i="1" dirty="0">
-                <a:solidFill>
-                  <a:srgbClr val="5B6672"/>
-                </a:solidFill>
-                <a:latin typeface="Calibri" pitchFamily="34" charset="0"/>
-                <a:ea typeface="Calibri" pitchFamily="34" charset="-122"/>
-                <a:cs typeface="Calibri" pitchFamily="34" charset="-120"/>
-              </a:rPr>
-              <a:t>Moving volumetric clutter, not a post-processing filter</a:t>
-            </a:r>
-            <a:endParaRPr lang="en-US" sz="1100" dirty="0"/>
-          </a:p>
-        </p:txBody>
-      </p:sp>
     </p:spTree>
-    <p:extLst>
-      <p:ext uri="{BB962C8B-B14F-4D97-AF65-F5344CB8AC3E}">
-        <p14:creationId xmlns:p14="http://schemas.microsoft.com/office/powerpoint/2010/main" val="423134737"/>
-      </p:ext>
-    </p:extLst>
   </p:cSld>
   <p:clrMapOvr>
     <a:masterClrMapping/>
@@ -18565,43 +18341,705 @@
       </p:grpSpPr>
       <p:sp>
         <p:nvSpPr>
-          <p:cNvPr id="2" name="TextBox 1">
-            <a:extLst>
-              <a:ext uri="{FF2B5EF4-FFF2-40B4-BE49-F238E27FC236}">
-                <a16:creationId xmlns:a16="http://schemas.microsoft.com/office/drawing/2014/main" id="{C9681E14-5C07-F98B-314E-94E4012AD1FB}"/>
-              </a:ext>
-            </a:extLst>
-          </p:cNvPr>
-          <p:cNvSpPr txBox="1"/>
-          <p:nvPr/>
-        </p:nvSpPr>
-        <p:spPr>
-          <a:xfrm>
-            <a:off x="4306277" y="3235569"/>
-            <a:ext cx="1454501" cy="369332"/>
+          <p:cNvPr id="2" name="Text 0"/>
+          <p:cNvSpPr/>
+          <p:nvPr/>
+        </p:nvSpPr>
+        <p:spPr>
+          <a:xfrm>
+            <a:off x="548640" y="658368"/>
+            <a:ext cx="10881360" cy="868680"/>
           </a:xfrm>
           <a:prstGeom prst="rect">
             <a:avLst/>
           </a:prstGeom>
           <a:noFill/>
-        </p:spPr>
-        <p:txBody>
-          <a:bodyPr wrap="none" rtlCol="0">
-            <a:spAutoFit/>
-          </a:bodyPr>
-          <a:lstStyle/>
-          <a:p>
-            <a:r>
-              <a:rPr lang="en-US" dirty="0"/>
-              <a:t>Backup Slides</a:t>
-            </a:r>
+          <a:ln/>
+        </p:spPr>
+        <p:txBody>
+          <a:bodyPr wrap="square" lIns="0" tIns="0" rIns="0" bIns="0" rtlCol="0" anchor="t"/>
+          <a:lstStyle/>
+          <a:p>
+            <a:pPr marL="0" indent="0">
+              <a:buNone/>
+            </a:pPr>
+            <a:r>
+              <a:rPr lang="en-US" sz="3400" b="1" dirty="0">
+                <a:solidFill>
+                  <a:srgbClr val="141A22"/>
+                </a:solidFill>
+                <a:latin typeface="Cambria" pitchFamily="34" charset="0"/>
+                <a:ea typeface="Cambria" pitchFamily="34" charset="-122"/>
+                <a:cs typeface="Cambria" pitchFamily="34" charset="-120"/>
+              </a:rPr>
+              <a:t>Summary</a:t>
+            </a:r>
+            <a:endParaRPr lang="en-US" sz="3400" dirty="0"/>
+          </a:p>
+        </p:txBody>
+      </p:sp>
+      <p:sp>
+        <p:nvSpPr>
+          <p:cNvPr id="3" name="Text 1"/>
+          <p:cNvSpPr/>
+          <p:nvPr/>
+        </p:nvSpPr>
+        <p:spPr>
+          <a:xfrm>
+            <a:off x="548640" y="1554480"/>
+            <a:ext cx="10698480" cy="822960"/>
+          </a:xfrm>
+          <a:prstGeom prst="rect">
+            <a:avLst/>
+          </a:prstGeom>
+          <a:noFill/>
+          <a:ln/>
+        </p:spPr>
+        <p:txBody>
+          <a:bodyPr wrap="square" lIns="0" tIns="0" rIns="0" bIns="0" rtlCol="0" anchor="ctr"/>
+          <a:lstStyle/>
+          <a:p>
+            <a:pPr marL="0" indent="0">
+              <a:lnSpc>
+                <a:spcPct val="115000"/>
+              </a:lnSpc>
+              <a:buNone/>
+            </a:pPr>
+            <a:r>
+              <a:rPr lang="en-US" sz="1500" i="1" dirty="0">
+                <a:solidFill>
+                  <a:srgbClr val="5B6672"/>
+                </a:solidFill>
+                <a:latin typeface="Calibri" pitchFamily="34" charset="0"/>
+                <a:ea typeface="Calibri" pitchFamily="34" charset="-122"/>
+                <a:cs typeface="Calibri" pitchFamily="34" charset="-120"/>
+              </a:rPr>
+              <a:t>SAR simulation from a 3D scene is a physics forward-model problem wearing a graphics costume -- geometry and ray tracing infrastructure transfer</a:t>
+            </a:r>
+            <a:endParaRPr lang="en-US" sz="1500" dirty="0"/>
+          </a:p>
+        </p:txBody>
+      </p:sp>
+      <p:sp>
+        <p:nvSpPr>
+          <p:cNvPr id="4" name="Shape 2"/>
+          <p:cNvSpPr/>
+          <p:nvPr/>
+        </p:nvSpPr>
+        <p:spPr>
+          <a:xfrm>
+            <a:off x="548640" y="2606040"/>
+            <a:ext cx="2560320" cy="2377440"/>
+          </a:xfrm>
+          <a:prstGeom prst="roundRect">
+            <a:avLst>
+              <a:gd name="adj" fmla="val 3077"/>
+            </a:avLst>
+          </a:prstGeom>
+          <a:solidFill>
+            <a:srgbClr val="F1F4F8"/>
+          </a:solidFill>
+          <a:ln/>
+          <a:effectLst>
+            <a:outerShdw blurRad="101600" dist="38100" dir="5400000" algn="bl" rotWithShape="0">
+              <a:srgbClr val="9AA5B1">
+                <a:alpha val="22000"/>
+              </a:srgbClr>
+            </a:outerShdw>
+          </a:effectLst>
+        </p:spPr>
+      </p:sp>
+      <p:sp>
+        <p:nvSpPr>
+          <p:cNvPr id="5" name="Shape 3"/>
+          <p:cNvSpPr/>
+          <p:nvPr/>
+        </p:nvSpPr>
+        <p:spPr>
+          <a:xfrm>
+            <a:off x="1463040" y="2880360"/>
+            <a:ext cx="731520" cy="731520"/>
+          </a:xfrm>
+          <a:prstGeom prst="ellipse">
+            <a:avLst/>
+          </a:prstGeom>
+          <a:solidFill>
+            <a:srgbClr val="FF9E2C"/>
+          </a:solidFill>
+          <a:ln/>
+        </p:spPr>
+      </p:sp>
+      <p:pic>
+        <p:nvPicPr>
+          <p:cNvPr id="6" name="Image 0" descr="/sessions/sweet-friendly-mayer/mnt/outputs/presentation/icons/FaLayerGroup_dark.png"/>
+          <p:cNvPicPr>
+            <a:picLocks noChangeAspect="1"/>
+          </p:cNvPicPr>
+          <p:nvPr/>
+        </p:nvPicPr>
+        <p:blipFill>
+          <a:blip r:embed="rId3"/>
+          <a:stretch>
+            <a:fillRect/>
+          </a:stretch>
+        </p:blipFill>
+        <p:spPr>
+          <a:xfrm>
+            <a:off x="1660550" y="3077870"/>
+            <a:ext cx="336499" cy="336499"/>
+          </a:xfrm>
+          <a:prstGeom prst="rect">
+            <a:avLst/>
+          </a:prstGeom>
+        </p:spPr>
+      </p:pic>
+      <p:sp>
+        <p:nvSpPr>
+          <p:cNvPr id="7" name="Text 4"/>
+          <p:cNvSpPr/>
+          <p:nvPr/>
+        </p:nvSpPr>
+        <p:spPr>
+          <a:xfrm>
+            <a:off x="548640" y="3749040"/>
+            <a:ext cx="2560320" cy="365760"/>
+          </a:xfrm>
+          <a:prstGeom prst="rect">
+            <a:avLst/>
+          </a:prstGeom>
+          <a:noFill/>
+          <a:ln/>
+        </p:spPr>
+        <p:txBody>
+          <a:bodyPr wrap="square" lIns="0" tIns="0" rIns="0" bIns="0" rtlCol="0" anchor="ctr"/>
+          <a:lstStyle/>
+          <a:p>
+            <a:pPr marL="0" indent="0" algn="ctr">
+              <a:buNone/>
+            </a:pPr>
+            <a:r>
+              <a:rPr lang="en-US" sz="1400" b="1" dirty="0">
+                <a:solidFill>
+                  <a:srgbClr val="141A22"/>
+                </a:solidFill>
+                <a:latin typeface="Calibri" pitchFamily="34" charset="0"/>
+                <a:ea typeface="Calibri" pitchFamily="34" charset="-122"/>
+                <a:cs typeface="Calibri" pitchFamily="34" charset="-120"/>
+              </a:rPr>
+              <a:t>Multi-bounce</a:t>
+            </a:r>
+            <a:endParaRPr lang="en-US" sz="1400" dirty="0"/>
+          </a:p>
+        </p:txBody>
+      </p:sp>
+      <p:sp>
+        <p:nvSpPr>
+          <p:cNvPr id="8" name="Text 5"/>
+          <p:cNvSpPr/>
+          <p:nvPr/>
+        </p:nvSpPr>
+        <p:spPr>
+          <a:xfrm>
+            <a:off x="685800" y="4114800"/>
+            <a:ext cx="2286000" cy="777240"/>
+          </a:xfrm>
+          <a:prstGeom prst="rect">
+            <a:avLst/>
+          </a:prstGeom>
+          <a:noFill/>
+          <a:ln/>
+        </p:spPr>
+        <p:txBody>
+          <a:bodyPr wrap="square" lIns="0" tIns="0" rIns="0" bIns="0" rtlCol="0" anchor="ctr"/>
+          <a:lstStyle/>
+          <a:p>
+            <a:pPr marL="0" indent="0" algn="ctr">
+              <a:lnSpc>
+                <a:spcPct val="110000"/>
+              </a:lnSpc>
+              <a:buNone/>
+            </a:pPr>
+            <a:r>
+              <a:rPr lang="en-US" sz="1100" i="1" dirty="0">
+                <a:solidFill>
+                  <a:srgbClr val="5B6672"/>
+                </a:solidFill>
+                <a:latin typeface="Calibri" pitchFamily="34" charset="0"/>
+                <a:ea typeface="Calibri" pitchFamily="34" charset="-122"/>
+                <a:cs typeface="Calibri" pitchFamily="34" charset="-120"/>
+              </a:rPr>
+              <a:t>Resolvable RCS contributors, not aesthetic reflections</a:t>
+            </a:r>
+            <a:endParaRPr lang="en-US" sz="1100" dirty="0"/>
+          </a:p>
+        </p:txBody>
+      </p:sp>
+      <p:sp>
+        <p:nvSpPr>
+          <p:cNvPr id="9" name="Shape 6"/>
+          <p:cNvSpPr/>
+          <p:nvPr/>
+        </p:nvSpPr>
+        <p:spPr>
+          <a:xfrm>
+            <a:off x="3310128" y="2606040"/>
+            <a:ext cx="2560320" cy="2377440"/>
+          </a:xfrm>
+          <a:prstGeom prst="roundRect">
+            <a:avLst>
+              <a:gd name="adj" fmla="val 3077"/>
+            </a:avLst>
+          </a:prstGeom>
+          <a:solidFill>
+            <a:srgbClr val="F1F4F8"/>
+          </a:solidFill>
+          <a:ln/>
+          <a:effectLst>
+            <a:outerShdw blurRad="101600" dist="38100" dir="5400000" algn="bl" rotWithShape="0">
+              <a:srgbClr val="9AA5B1">
+                <a:alpha val="22000"/>
+              </a:srgbClr>
+            </a:outerShdw>
+          </a:effectLst>
+        </p:spPr>
+      </p:sp>
+      <p:sp>
+        <p:nvSpPr>
+          <p:cNvPr id="10" name="Shape 7"/>
+          <p:cNvSpPr/>
+          <p:nvPr/>
+        </p:nvSpPr>
+        <p:spPr>
+          <a:xfrm>
+            <a:off x="4224528" y="2880360"/>
+            <a:ext cx="731520" cy="731520"/>
+          </a:xfrm>
+          <a:prstGeom prst="ellipse">
+            <a:avLst/>
+          </a:prstGeom>
+          <a:solidFill>
+            <a:srgbClr val="FF9E2C"/>
+          </a:solidFill>
+          <a:ln/>
+        </p:spPr>
+      </p:sp>
+      <p:pic>
+        <p:nvPicPr>
+          <p:cNvPr id="11" name="Image 1" descr="/sessions/sweet-friendly-mayer/mnt/outputs/presentation/icons/FaCube_dark.png"/>
+          <p:cNvPicPr>
+            <a:picLocks noChangeAspect="1"/>
+          </p:cNvPicPr>
+          <p:nvPr/>
+        </p:nvPicPr>
+        <p:blipFill>
+          <a:blip r:embed="rId4"/>
+          <a:stretch>
+            <a:fillRect/>
+          </a:stretch>
+        </p:blipFill>
+        <p:spPr>
+          <a:xfrm>
+            <a:off x="4422038" y="3077870"/>
+            <a:ext cx="336499" cy="336499"/>
+          </a:xfrm>
+          <a:prstGeom prst="rect">
+            <a:avLst/>
+          </a:prstGeom>
+        </p:spPr>
+      </p:pic>
+      <p:sp>
+        <p:nvSpPr>
+          <p:cNvPr id="12" name="Text 8"/>
+          <p:cNvSpPr/>
+          <p:nvPr/>
+        </p:nvSpPr>
+        <p:spPr>
+          <a:xfrm>
+            <a:off x="3310128" y="3749040"/>
+            <a:ext cx="2560320" cy="365760"/>
+          </a:xfrm>
+          <a:prstGeom prst="rect">
+            <a:avLst/>
+          </a:prstGeom>
+          <a:noFill/>
+          <a:ln/>
+        </p:spPr>
+        <p:txBody>
+          <a:bodyPr wrap="square" lIns="0" tIns="0" rIns="0" bIns="0" rtlCol="0" anchor="ctr"/>
+          <a:lstStyle/>
+          <a:p>
+            <a:pPr marL="0" indent="0" algn="ctr">
+              <a:buNone/>
+            </a:pPr>
+            <a:r>
+              <a:rPr lang="en-US" sz="1400" b="1" dirty="0">
+                <a:solidFill>
+                  <a:srgbClr val="141A22"/>
+                </a:solidFill>
+                <a:latin typeface="Calibri" pitchFamily="34" charset="0"/>
+                <a:ea typeface="Calibri" pitchFamily="34" charset="-122"/>
+                <a:cs typeface="Calibri" pitchFamily="34" charset="-120"/>
+              </a:rPr>
+              <a:t>Material</a:t>
+            </a:r>
+            <a:endParaRPr lang="en-US" sz="1400" dirty="0"/>
+          </a:p>
+        </p:txBody>
+      </p:sp>
+      <p:sp>
+        <p:nvSpPr>
+          <p:cNvPr id="13" name="Text 9"/>
+          <p:cNvSpPr/>
+          <p:nvPr/>
+        </p:nvSpPr>
+        <p:spPr>
+          <a:xfrm>
+            <a:off x="3447288" y="4114800"/>
+            <a:ext cx="2286000" cy="777240"/>
+          </a:xfrm>
+          <a:prstGeom prst="rect">
+            <a:avLst/>
+          </a:prstGeom>
+          <a:noFill/>
+          <a:ln/>
+        </p:spPr>
+        <p:txBody>
+          <a:bodyPr wrap="square" lIns="0" tIns="0" rIns="0" bIns="0" rtlCol="0" anchor="ctr"/>
+          <a:lstStyle/>
+          <a:p>
+            <a:pPr marL="0" indent="0" algn="ctr">
+              <a:lnSpc>
+                <a:spcPct val="110000"/>
+              </a:lnSpc>
+              <a:buNone/>
+            </a:pPr>
+            <a:r>
+              <a:rPr lang="en-US" sz="1100" i="1" dirty="0">
+                <a:solidFill>
+                  <a:srgbClr val="5B6672"/>
+                </a:solidFill>
+                <a:latin typeface="Calibri" pitchFamily="34" charset="0"/>
+                <a:ea typeface="Calibri" pitchFamily="34" charset="-122"/>
+                <a:cs typeface="Calibri" pitchFamily="34" charset="-120"/>
+              </a:rPr>
+              <a:t>EM permittivity, not albedo</a:t>
+            </a:r>
+            <a:endParaRPr lang="en-US" sz="1100" dirty="0"/>
+          </a:p>
+        </p:txBody>
+      </p:sp>
+      <p:sp>
+        <p:nvSpPr>
+          <p:cNvPr id="14" name="Shape 10"/>
+          <p:cNvSpPr/>
+          <p:nvPr/>
+        </p:nvSpPr>
+        <p:spPr>
+          <a:xfrm>
+            <a:off x="6071616" y="2606040"/>
+            <a:ext cx="2560320" cy="2377440"/>
+          </a:xfrm>
+          <a:prstGeom prst="roundRect">
+            <a:avLst>
+              <a:gd name="adj" fmla="val 3077"/>
+            </a:avLst>
+          </a:prstGeom>
+          <a:solidFill>
+            <a:srgbClr val="F1F4F8"/>
+          </a:solidFill>
+          <a:ln/>
+          <a:effectLst>
+            <a:outerShdw blurRad="101600" dist="38100" dir="5400000" algn="bl" rotWithShape="0">
+              <a:srgbClr val="9AA5B1">
+                <a:alpha val="22000"/>
+              </a:srgbClr>
+            </a:outerShdw>
+          </a:effectLst>
+        </p:spPr>
+      </p:sp>
+      <p:sp>
+        <p:nvSpPr>
+          <p:cNvPr id="15" name="Shape 11"/>
+          <p:cNvSpPr/>
+          <p:nvPr/>
+        </p:nvSpPr>
+        <p:spPr>
+          <a:xfrm>
+            <a:off x="6986016" y="2880360"/>
+            <a:ext cx="731520" cy="731520"/>
+          </a:xfrm>
+          <a:prstGeom prst="ellipse">
+            <a:avLst/>
+          </a:prstGeom>
+          <a:solidFill>
+            <a:srgbClr val="FF9E2C"/>
+          </a:solidFill>
+          <a:ln/>
+        </p:spPr>
+      </p:sp>
+      <p:pic>
+        <p:nvPicPr>
+          <p:cNvPr id="16" name="Image 2" descr="/sessions/sweet-friendly-mayer/mnt/outputs/presentation/icons/FaWaveSquare_dark.png"/>
+          <p:cNvPicPr>
+            <a:picLocks noChangeAspect="1"/>
+          </p:cNvPicPr>
+          <p:nvPr/>
+        </p:nvPicPr>
+        <p:blipFill>
+          <a:blip r:embed="rId5"/>
+          <a:stretch>
+            <a:fillRect/>
+          </a:stretch>
+        </p:blipFill>
+        <p:spPr>
+          <a:xfrm>
+            <a:off x="7183526" y="3077870"/>
+            <a:ext cx="336499" cy="336499"/>
+          </a:xfrm>
+          <a:prstGeom prst="rect">
+            <a:avLst/>
+          </a:prstGeom>
+        </p:spPr>
+      </p:pic>
+      <p:sp>
+        <p:nvSpPr>
+          <p:cNvPr id="17" name="Text 12"/>
+          <p:cNvSpPr/>
+          <p:nvPr/>
+        </p:nvSpPr>
+        <p:spPr>
+          <a:xfrm>
+            <a:off x="6071616" y="3749040"/>
+            <a:ext cx="2560320" cy="365760"/>
+          </a:xfrm>
+          <a:prstGeom prst="rect">
+            <a:avLst/>
+          </a:prstGeom>
+          <a:noFill/>
+          <a:ln/>
+        </p:spPr>
+        <p:txBody>
+          <a:bodyPr wrap="square" lIns="0" tIns="0" rIns="0" bIns="0" rtlCol="0" anchor="ctr"/>
+          <a:lstStyle/>
+          <a:p>
+            <a:pPr marL="0" indent="0" algn="ctr">
+              <a:buNone/>
+            </a:pPr>
+            <a:r>
+              <a:rPr lang="en-US" sz="1400" b="1" dirty="0">
+                <a:solidFill>
+                  <a:srgbClr val="141A22"/>
+                </a:solidFill>
+                <a:latin typeface="Calibri" pitchFamily="34" charset="0"/>
+                <a:ea typeface="Calibri" pitchFamily="34" charset="-122"/>
+                <a:cs typeface="Calibri" pitchFamily="34" charset="-120"/>
+              </a:rPr>
+              <a:t>Polarization</a:t>
+            </a:r>
+            <a:endParaRPr lang="en-US" sz="1400" dirty="0"/>
+          </a:p>
+        </p:txBody>
+      </p:sp>
+      <p:sp>
+        <p:nvSpPr>
+          <p:cNvPr id="18" name="Text 13"/>
+          <p:cNvSpPr/>
+          <p:nvPr/>
+        </p:nvSpPr>
+        <p:spPr>
+          <a:xfrm>
+            <a:off x="6208776" y="4114800"/>
+            <a:ext cx="2286000" cy="777240"/>
+          </a:xfrm>
+          <a:prstGeom prst="rect">
+            <a:avLst/>
+          </a:prstGeom>
+          <a:noFill/>
+          <a:ln/>
+        </p:spPr>
+        <p:txBody>
+          <a:bodyPr wrap="square" lIns="0" tIns="0" rIns="0" bIns="0" rtlCol="0" anchor="ctr"/>
+          <a:lstStyle/>
+          <a:p>
+            <a:pPr marL="0" indent="0" algn="ctr">
+              <a:lnSpc>
+                <a:spcPct val="110000"/>
+              </a:lnSpc>
+              <a:buNone/>
+            </a:pPr>
+            <a:r>
+              <a:rPr lang="en-US" sz="1100" i="1" dirty="0">
+                <a:solidFill>
+                  <a:srgbClr val="5B6672"/>
+                </a:solidFill>
+                <a:latin typeface="Calibri" pitchFamily="34" charset="0"/>
+                <a:ea typeface="Calibri" pitchFamily="34" charset="-122"/>
+                <a:cs typeface="Calibri" pitchFamily="34" charset="-120"/>
+              </a:rPr>
+              <a:t>Sinclair matrices, not colors</a:t>
+            </a:r>
+            <a:endParaRPr lang="en-US" sz="1100" dirty="0"/>
+          </a:p>
+        </p:txBody>
+      </p:sp>
+      <p:sp>
+        <p:nvSpPr>
+          <p:cNvPr id="19" name="Shape 14"/>
+          <p:cNvSpPr/>
+          <p:nvPr/>
+        </p:nvSpPr>
+        <p:spPr>
+          <a:xfrm>
+            <a:off x="8833104" y="2606040"/>
+            <a:ext cx="2560320" cy="2377440"/>
+          </a:xfrm>
+          <a:prstGeom prst="roundRect">
+            <a:avLst>
+              <a:gd name="adj" fmla="val 3077"/>
+            </a:avLst>
+          </a:prstGeom>
+          <a:solidFill>
+            <a:srgbClr val="F1F4F8"/>
+          </a:solidFill>
+          <a:ln/>
+          <a:effectLst>
+            <a:outerShdw blurRad="101600" dist="38100" dir="5400000" algn="bl" rotWithShape="0">
+              <a:srgbClr val="9AA5B1">
+                <a:alpha val="22000"/>
+              </a:srgbClr>
+            </a:outerShdw>
+          </a:effectLst>
+        </p:spPr>
+      </p:sp>
+      <p:sp>
+        <p:nvSpPr>
+          <p:cNvPr id="20" name="Shape 15"/>
+          <p:cNvSpPr/>
+          <p:nvPr/>
+        </p:nvSpPr>
+        <p:spPr>
+          <a:xfrm>
+            <a:off x="9747504" y="2880360"/>
+            <a:ext cx="731520" cy="731520"/>
+          </a:xfrm>
+          <a:prstGeom prst="ellipse">
+            <a:avLst/>
+          </a:prstGeom>
+          <a:solidFill>
+            <a:srgbClr val="FF9E2C"/>
+          </a:solidFill>
+          <a:ln/>
+        </p:spPr>
+      </p:sp>
+      <p:pic>
+        <p:nvPicPr>
+          <p:cNvPr id="21" name="Image 3" descr="/sessions/sweet-friendly-mayer/mnt/outputs/presentation/icons/FaCloudRain_dark.png"/>
+          <p:cNvPicPr>
+            <a:picLocks noChangeAspect="1"/>
+          </p:cNvPicPr>
+          <p:nvPr/>
+        </p:nvPicPr>
+        <p:blipFill>
+          <a:blip r:embed="rId6"/>
+          <a:stretch>
+            <a:fillRect/>
+          </a:stretch>
+        </p:blipFill>
+        <p:spPr>
+          <a:xfrm>
+            <a:off x="9945014" y="3077870"/>
+            <a:ext cx="336499" cy="336499"/>
+          </a:xfrm>
+          <a:prstGeom prst="rect">
+            <a:avLst/>
+          </a:prstGeom>
+        </p:spPr>
+      </p:pic>
+      <p:sp>
+        <p:nvSpPr>
+          <p:cNvPr id="22" name="Text 16"/>
+          <p:cNvSpPr/>
+          <p:nvPr/>
+        </p:nvSpPr>
+        <p:spPr>
+          <a:xfrm>
+            <a:off x="8833104" y="3749040"/>
+            <a:ext cx="2560320" cy="365760"/>
+          </a:xfrm>
+          <a:prstGeom prst="rect">
+            <a:avLst/>
+          </a:prstGeom>
+          <a:noFill/>
+          <a:ln/>
+        </p:spPr>
+        <p:txBody>
+          <a:bodyPr wrap="square" lIns="0" tIns="0" rIns="0" bIns="0" rtlCol="0" anchor="ctr"/>
+          <a:lstStyle/>
+          <a:p>
+            <a:pPr marL="0" indent="0" algn="ctr">
+              <a:buNone/>
+            </a:pPr>
+            <a:r>
+              <a:rPr lang="en-US" sz="1400" b="1" dirty="0">
+                <a:solidFill>
+                  <a:srgbClr val="141A22"/>
+                </a:solidFill>
+                <a:latin typeface="Calibri" pitchFamily="34" charset="0"/>
+                <a:ea typeface="Calibri" pitchFamily="34" charset="-122"/>
+                <a:cs typeface="Calibri" pitchFamily="34" charset="-120"/>
+              </a:rPr>
+              <a:t>Atmosphere</a:t>
+            </a:r>
+            <a:endParaRPr lang="en-US" sz="1400" dirty="0"/>
+          </a:p>
+        </p:txBody>
+      </p:sp>
+      <p:sp>
+        <p:nvSpPr>
+          <p:cNvPr id="23" name="Text 17"/>
+          <p:cNvSpPr/>
+          <p:nvPr/>
+        </p:nvSpPr>
+        <p:spPr>
+          <a:xfrm>
+            <a:off x="8970264" y="4114800"/>
+            <a:ext cx="2286000" cy="777240"/>
+          </a:xfrm>
+          <a:prstGeom prst="rect">
+            <a:avLst/>
+          </a:prstGeom>
+          <a:noFill/>
+          <a:ln/>
+        </p:spPr>
+        <p:txBody>
+          <a:bodyPr wrap="square" lIns="0" tIns="0" rIns="0" bIns="0" rtlCol="0" anchor="ctr"/>
+          <a:lstStyle/>
+          <a:p>
+            <a:pPr marL="0" indent="0" algn="ctr">
+              <a:lnSpc>
+                <a:spcPct val="110000"/>
+              </a:lnSpc>
+              <a:buNone/>
+            </a:pPr>
+            <a:r>
+              <a:rPr lang="en-US" sz="1100" i="1" dirty="0">
+                <a:solidFill>
+                  <a:srgbClr val="5B6672"/>
+                </a:solidFill>
+                <a:latin typeface="Calibri" pitchFamily="34" charset="0"/>
+                <a:ea typeface="Calibri" pitchFamily="34" charset="-122"/>
+                <a:cs typeface="Calibri" pitchFamily="34" charset="-120"/>
+              </a:rPr>
+              <a:t>Moving volumetric clutter, not a post-processing filter</a:t>
+            </a:r>
+            <a:endParaRPr lang="en-US" sz="1100" dirty="0"/>
           </a:p>
         </p:txBody>
       </p:sp>
     </p:spTree>
     <p:extLst>
       <p:ext uri="{BB962C8B-B14F-4D97-AF65-F5344CB8AC3E}">
-        <p14:creationId xmlns:p14="http://schemas.microsoft.com/office/powerpoint/2010/main" val="3953220828"/>
+        <p14:creationId xmlns:p14="http://schemas.microsoft.com/office/powerpoint/2010/main" val="423134737"/>
       </p:ext>
     </p:extLst>
   </p:cSld>
@@ -18630,278 +19068,43 @@
       </p:grpSpPr>
       <p:sp>
         <p:nvSpPr>
-          <p:cNvPr id="2" name="Text 0"/>
-          <p:cNvSpPr/>
-          <p:nvPr/>
-        </p:nvSpPr>
-        <p:spPr>
-          <a:xfrm>
-            <a:off x="548640" y="365760"/>
-            <a:ext cx="9144000" cy="292608"/>
+          <p:cNvPr id="2" name="TextBox 1">
+            <a:extLst>
+              <a:ext uri="{FF2B5EF4-FFF2-40B4-BE49-F238E27FC236}">
+                <a16:creationId xmlns:a16="http://schemas.microsoft.com/office/drawing/2014/main" id="{C9681E14-5C07-F98B-314E-94E4012AD1FB}"/>
+              </a:ext>
+            </a:extLst>
+          </p:cNvPr>
+          <p:cNvSpPr txBox="1"/>
+          <p:nvPr/>
+        </p:nvSpPr>
+        <p:spPr>
+          <a:xfrm>
+            <a:off x="4306277" y="3235569"/>
+            <a:ext cx="1454501" cy="369332"/>
           </a:xfrm>
           <a:prstGeom prst="rect">
             <a:avLst/>
           </a:prstGeom>
           <a:noFill/>
-          <a:ln/>
-        </p:spPr>
-        <p:txBody>
-          <a:bodyPr wrap="square" lIns="0" tIns="0" rIns="0" bIns="0" rtlCol="0" anchor="ctr"/>
-          <a:lstStyle/>
-          <a:p>
-            <a:pPr marL="0" indent="0">
-              <a:buNone/>
-            </a:pPr>
-            <a:r>
-              <a:rPr lang="en-US" sz="1200" b="1" kern="0" spc="200" dirty="0">
-                <a:solidFill>
-                  <a:srgbClr val="B85C00"/>
-                </a:solidFill>
-                <a:latin typeface="Calibri" pitchFamily="34" charset="0"/>
-                <a:ea typeface="Calibri" pitchFamily="34" charset="-122"/>
-                <a:cs typeface="Calibri" pitchFamily="34" charset="-120"/>
-              </a:rPr>
-              <a:t>CASE STUDY</a:t>
-            </a:r>
-            <a:endParaRPr lang="en-US" sz="1200" dirty="0"/>
-          </a:p>
-        </p:txBody>
-      </p:sp>
-      <p:sp>
-        <p:nvSpPr>
-          <p:cNvPr id="3" name="Text 1"/>
-          <p:cNvSpPr/>
-          <p:nvPr/>
-        </p:nvSpPr>
-        <p:spPr>
-          <a:xfrm>
-            <a:off x="548640" y="658368"/>
-            <a:ext cx="10881360" cy="868680"/>
-          </a:xfrm>
-          <a:prstGeom prst="rect">
-            <a:avLst/>
-          </a:prstGeom>
-          <a:noFill/>
-          <a:ln/>
-        </p:spPr>
-        <p:txBody>
-          <a:bodyPr wrap="square" lIns="0" tIns="0" rIns="0" bIns="0" rtlCol="0" anchor="t"/>
-          <a:lstStyle/>
-          <a:p>
-            <a:pPr marL="0" indent="0">
-              <a:buNone/>
-            </a:pPr>
-            <a:r>
-              <a:rPr lang="en-US" sz="2800" b="1" dirty="0">
-                <a:solidFill>
-                  <a:srgbClr val="141A22"/>
-                </a:solidFill>
-                <a:latin typeface="Cambria" pitchFamily="34" charset="0"/>
-                <a:ea typeface="Cambria" pitchFamily="34" charset="-122"/>
-                <a:cs typeface="Cambria" pitchFamily="34" charset="-120"/>
-              </a:rPr>
-              <a:t>Extending SARCASTIC</a:t>
-            </a:r>
-            <a:endParaRPr lang="en-US" sz="2800" dirty="0"/>
-          </a:p>
-        </p:txBody>
-      </p:sp>
-      <p:sp>
-        <p:nvSpPr>
-          <p:cNvPr id="4" name="Text 2"/>
-          <p:cNvSpPr/>
-          <p:nvPr/>
-        </p:nvSpPr>
-        <p:spPr>
-          <a:xfrm>
-            <a:off x="548640" y="1691640"/>
-            <a:ext cx="10515600" cy="2194560"/>
-          </a:xfrm>
-          <a:prstGeom prst="rect">
-            <a:avLst/>
-          </a:prstGeom>
-          <a:noFill/>
-          <a:ln/>
-        </p:spPr>
-        <p:txBody>
-          <a:bodyPr wrap="square" lIns="0" tIns="0" rIns="0" bIns="0" rtlCol="0" anchor="t"/>
-          <a:lstStyle/>
-          <a:p>
-            <a:pPr marL="203200" indent="-203200">
-              <a:lnSpc>
-                <a:spcPct val="112000"/>
-              </a:lnSpc>
-              <a:spcAft>
-                <a:spcPts val="1600"/>
-              </a:spcAft>
-              <a:buSzPct val="100000"/>
-              <a:buChar char="•"/>
-            </a:pPr>
-            <a:r>
-              <a:rPr lang="en-US" sz="1550" dirty="0">
-                <a:solidFill>
-                  <a:srgbClr val="141A22"/>
-                </a:solidFill>
-                <a:latin typeface="Calibri" pitchFamily="34" charset="0"/>
-                <a:ea typeface="Calibri" pitchFamily="34" charset="-122"/>
-                <a:cs typeface="Calibri" pitchFamily="34" charset="-120"/>
-              </a:rPr>
-              <a:t>Dstl’s SARCASTIC is the real-world reference implementation of the SBR approach from Step 2 — a working GPU/CPU shooting-and-bouncing-rays SAR simulator, validated against real CAD-model targets</a:t>
-            </a:r>
-            <a:endParaRPr lang="en-US" sz="1550" dirty="0"/>
-          </a:p>
-          <a:p>
-            <a:pPr marL="203200" indent="-203200">
-              <a:lnSpc>
-                <a:spcPct val="112000"/>
-              </a:lnSpc>
-              <a:spcAft>
-                <a:spcPts val="1600"/>
-              </a:spcAft>
-              <a:buSzPct val="100000"/>
-              <a:buChar char="•"/>
-            </a:pPr>
-            <a:r>
-              <a:rPr lang="en-US" sz="1550" dirty="0">
-                <a:solidFill>
-                  <a:srgbClr val="141A22"/>
-                </a:solidFill>
-                <a:latin typeface="Calibri" pitchFamily="34" charset="0"/>
-                <a:ea typeface="Calibri" pitchFamily="34" charset="-122"/>
-                <a:cs typeface="Calibri" pitchFamily="34" charset="-120"/>
-              </a:rPr>
-              <a:t>What follows: concretely what it computes today, and what it’d take to add this deck’s polarimetry and ASC speedup to it</a:t>
-            </a:r>
-            <a:endParaRPr lang="en-US" sz="1550" dirty="0"/>
-          </a:p>
-        </p:txBody>
-      </p:sp>
-      <p:sp>
-        <p:nvSpPr>
-          <p:cNvPr id="5" name="Shape 3"/>
-          <p:cNvSpPr/>
-          <p:nvPr/>
-        </p:nvSpPr>
-        <p:spPr>
-          <a:xfrm>
-            <a:off x="548640" y="4069080"/>
-            <a:ext cx="10698480" cy="1554480"/>
-          </a:xfrm>
-          <a:prstGeom prst="roundRect">
-            <a:avLst>
-              <a:gd name="adj" fmla="val 4706"/>
-            </a:avLst>
-          </a:prstGeom>
-          <a:solidFill>
-            <a:srgbClr val="E6EAF0"/>
-          </a:solidFill>
-          <a:ln/>
-          <a:effectLst>
-            <a:outerShdw blurRad="101600" dist="38100" dir="5400000" algn="bl" rotWithShape="0">
-              <a:srgbClr val="9AA5B1">
-                <a:alpha val="22000"/>
-              </a:srgbClr>
-            </a:outerShdw>
-          </a:effectLst>
-        </p:spPr>
-      </p:sp>
-      <p:sp>
-        <p:nvSpPr>
-          <p:cNvPr id="6" name="Text 4"/>
-          <p:cNvSpPr/>
-          <p:nvPr/>
-        </p:nvSpPr>
-        <p:spPr>
-          <a:xfrm>
-            <a:off x="822960" y="4251960"/>
-            <a:ext cx="10149840" cy="1188720"/>
-          </a:xfrm>
-          <a:prstGeom prst="rect">
-            <a:avLst/>
-          </a:prstGeom>
-          <a:noFill/>
-          <a:ln/>
-        </p:spPr>
-        <p:txBody>
-          <a:bodyPr wrap="square" lIns="0" tIns="0" rIns="0" bIns="0" rtlCol="0" anchor="t"/>
-          <a:lstStyle/>
-          <a:p>
-            <a:pPr marL="0" indent="0">
-              <a:lnSpc>
-                <a:spcPct val="120000"/>
-              </a:lnSpc>
-              <a:buNone/>
-            </a:pPr>
-            <a:r>
-              <a:rPr lang="en-US" sz="1300" b="1" dirty="0">
-                <a:solidFill>
-                  <a:srgbClr val="B85C00"/>
-                </a:solidFill>
-                <a:latin typeface="Calibri" pitchFamily="34" charset="0"/>
-                <a:ea typeface="Calibri" pitchFamily="34" charset="-122"/>
-                <a:cs typeface="Calibri" pitchFamily="34" charset="-120"/>
-              </a:rPr>
-              <a:t>Reference:  </a:t>
-            </a:r>
-            <a:r>
-              <a:rPr lang="en-US" sz="1300" dirty="0">
-                <a:solidFill>
-                  <a:srgbClr val="141A22"/>
-                </a:solidFill>
-                <a:latin typeface="Calibri" pitchFamily="34" charset="0"/>
-                <a:ea typeface="Calibri" pitchFamily="34" charset="-122"/>
-                <a:cs typeface="Calibri" pitchFamily="34" charset="-120"/>
-              </a:rPr>
-              <a:t>Blacknell et al., "SARCASTIC v2.0 — High-Performance SAR Simulation for Next-Generation ATR Systems," Remote Sensing, 2022.</a:t>
-            </a:r>
-            <a:endParaRPr lang="en-US" sz="1300" dirty="0"/>
-          </a:p>
-          <a:p>
-            <a:pPr marL="0" indent="0">
-              <a:lnSpc>
-                <a:spcPct val="120000"/>
-              </a:lnSpc>
-              <a:buNone/>
-            </a:pPr>
-            <a:r>
-              <a:rPr lang="en-US" sz="1300" b="1" dirty="0">
-                <a:solidFill>
-                  <a:srgbClr val="B85C00"/>
-                </a:solidFill>
-                <a:latin typeface="Calibri" pitchFamily="34" charset="0"/>
-                <a:ea typeface="Calibri" pitchFamily="34" charset="-122"/>
-                <a:cs typeface="Calibri" pitchFamily="34" charset="-120"/>
-              </a:rPr>
-              <a:t>Code:  </a:t>
-            </a:r>
-            <a:endParaRPr lang="en-US" sz="1300" dirty="0"/>
-          </a:p>
-          <a:p>
-            <a:pPr marL="0" indent="0">
-              <a:lnSpc>
-                <a:spcPct val="120000"/>
-              </a:lnSpc>
-              <a:buNone/>
-            </a:pPr>
-            <a:r>
-              <a:rPr lang="en-US" sz="1300" dirty="0">
-                <a:solidFill>
-                  <a:srgbClr val="141A22"/>
-                </a:solidFill>
-                <a:latin typeface="Calibri" pitchFamily="34" charset="0"/>
-                <a:ea typeface="Calibri" pitchFamily="34" charset="-122"/>
-                <a:cs typeface="Calibri" pitchFamily="34" charset="-120"/>
-              </a:rPr>
-              <a:t>github.com/dstl/sarcastic — archived/read-only as of Jan 2025, so any extension is a fork, not an upstream contribution.</a:t>
-            </a:r>
-            <a:endParaRPr lang="en-US" sz="1300" dirty="0"/>
+        </p:spPr>
+        <p:txBody>
+          <a:bodyPr wrap="none" rtlCol="0">
+            <a:spAutoFit/>
+          </a:bodyPr>
+          <a:lstStyle/>
+          <a:p>
+            <a:r>
+              <a:rPr lang="en-US" dirty="0"/>
+              <a:t>Backup Slides</a:t>
+            </a:r>
           </a:p>
         </p:txBody>
       </p:sp>
     </p:spTree>
     <p:extLst>
       <p:ext uri="{BB962C8B-B14F-4D97-AF65-F5344CB8AC3E}">
-        <p14:creationId xmlns:p14="http://schemas.microsoft.com/office/powerpoint/2010/main" val="914562532"/>
+        <p14:creationId xmlns:p14="http://schemas.microsoft.com/office/powerpoint/2010/main" val="3953220828"/>
       </p:ext>
     </p:extLst>
   </p:cSld>
@@ -18961,7 +19164,7 @@
                 <a:ea typeface="Calibri" pitchFamily="34" charset="-122"/>
                 <a:cs typeface="Calibri" pitchFamily="34" charset="-120"/>
               </a:rPr>
-              <a:t>CASE STUDY, CONTINUED</a:t>
+              <a:t>CASE STUDY</a:t>
             </a:r>
             <a:endParaRPr lang="en-US" sz="1200" dirty="0"/>
           </a:p>
@@ -18992,7 +19195,7 @@
               <a:buNone/>
             </a:pPr>
             <a:r>
-              <a:rPr lang="en-US" sz="2700" b="1" dirty="0">
+              <a:rPr lang="en-US" sz="2800" b="1" dirty="0">
                 <a:solidFill>
                   <a:srgbClr val="141A22"/>
                 </a:solidFill>
@@ -19000,9 +19203,9 @@
                 <a:ea typeface="Cambria" pitchFamily="34" charset="-122"/>
                 <a:cs typeface="Cambria" pitchFamily="34" charset="-120"/>
               </a:rPr>
-              <a:t>What SARCASTIC computes today</a:t>
-            </a:r>
-            <a:endParaRPr lang="en-US" sz="2700" dirty="0"/>
+              <a:t>Extending SARCASTIC</a:t>
+            </a:r>
+            <a:endParaRPr lang="en-US" sz="2800" dirty="0"/>
           </a:p>
         </p:txBody>
       </p:sp>
@@ -19015,7 +19218,7 @@
         <p:spPr>
           <a:xfrm>
             <a:off x="548640" y="1691640"/>
-            <a:ext cx="10607040" cy="2468880"/>
+            <a:ext cx="10515600" cy="2194560"/>
           </a:xfrm>
           <a:prstGeom prst="rect">
             <a:avLst/>
@@ -19032,13 +19235,13 @@
                 <a:spcPct val="112000"/>
               </a:lnSpc>
               <a:spcAft>
-                <a:spcPts val="1400"/>
+                <a:spcPts val="1600"/>
               </a:spcAft>
               <a:buSzPct val="100000"/>
               <a:buChar char="•"/>
             </a:pPr>
             <a:r>
-              <a:rPr lang="en-US" sz="1450" dirty="0">
+              <a:rPr lang="en-US" sz="1550" dirty="0">
                 <a:solidFill>
                   <a:srgbClr val="141A22"/>
                 </a:solidFill>
@@ -19046,9 +19249,9 @@
                 <a:ea typeface="Calibri" pitchFamily="34" charset="-122"/>
                 <a:cs typeface="Calibri" pitchFamily="34" charset="-120"/>
               </a:rPr>
-              <a:t>Scattering model is Knott’s physical optics for a flat PEC plate only — no permittivity, no Fresnel R_s/R_p anywhere in the derivation</a:t>
-            </a:r>
-            <a:endParaRPr lang="en-US" sz="1450" dirty="0"/>
+              <a:t>Dstl’s SARCASTIC is the real-world reference implementation of the SBR approach from Step 2 — a working GPU/CPU shooting-and-bouncing-rays SAR simulator, validated against real CAD-model targets</a:t>
+            </a:r>
+            <a:endParaRPr lang="en-US" sz="1550" dirty="0"/>
           </a:p>
           <a:p>
             <a:pPr marL="203200" indent="-203200">
@@ -19056,13 +19259,13 @@
                 <a:spcPct val="112000"/>
               </a:lnSpc>
               <a:spcAft>
-                <a:spcPts val="1400"/>
+                <a:spcPts val="1600"/>
               </a:spcAft>
               <a:buSzPct val="100000"/>
               <a:buChar char="•"/>
             </a:pPr>
             <a:r>
-              <a:rPr lang="en-US" sz="1450" dirty="0">
+              <a:rPr lang="en-US" sz="1550" dirty="0">
                 <a:solidFill>
                   <a:srgbClr val="141A22"/>
                 </a:solidFill>
@@ -19070,33 +19273,9 @@
                 <a:ea typeface="Calibri" pitchFamily="34" charset="-122"/>
                 <a:cs typeface="Calibri" pitchFamily="34" charset="-120"/>
               </a:rPr>
-              <a:t>Polarization = one real 3-vector ĥ per ray, updated by geometric mirror reflection at each bounce — cross-pol only comes from bounce geometry (their own validation case is a dihedral), never from material response</a:t>
-            </a:r>
-            <a:endParaRPr lang="en-US" sz="1450" dirty="0"/>
-          </a:p>
-          <a:p>
-            <a:pPr marL="203200" indent="-203200">
-              <a:lnSpc>
-                <a:spcPct val="112000"/>
-              </a:lnSpc>
-              <a:spcAft>
-                <a:spcPts val="1400"/>
-              </a:spcAft>
-              <a:buSzPct val="100000"/>
-              <a:buChar char="•"/>
-            </a:pPr>
-            <a:r>
-              <a:rPr lang="en-US" sz="1450" dirty="0">
-                <a:solidFill>
-                  <a:srgbClr val="141A22"/>
-                </a:solidFill>
-                <a:latin typeface="Calibri" pitchFamily="34" charset="0"/>
-                <a:ea typeface="Calibri" pitchFamily="34" charset="-122"/>
-                <a:cs typeface="Calibri" pitchFamily="34" charset="-120"/>
-              </a:rPr>
-              <a:t>Maps to real source: RCS.c (scalar contribution) · reflect.cpp (per-bounce ĥ update) · cpuPOField.cpp (accumulation) · CPHD I/O via cphdShell/cphdInfo</a:t>
-            </a:r>
-            <a:endParaRPr lang="en-US" sz="1450" dirty="0"/>
+              <a:t>What follows: concretely what it computes today, and what it’d take to add this deck’s polarimetry and ASC speedup to it</a:t>
+            </a:r>
+            <a:endParaRPr lang="en-US" sz="1550" dirty="0"/>
           </a:p>
         </p:txBody>
       </p:sp>
@@ -19108,12 +19287,12 @@
         </p:nvSpPr>
         <p:spPr>
           <a:xfrm>
-            <a:off x="548640" y="4434840"/>
-            <a:ext cx="10698480" cy="1188720"/>
+            <a:off x="548640" y="4069080"/>
+            <a:ext cx="10698480" cy="1554480"/>
           </a:xfrm>
           <a:prstGeom prst="roundRect">
             <a:avLst>
-              <a:gd name="adj" fmla="val 6154"/>
+              <a:gd name="adj" fmla="val 4706"/>
             </a:avLst>
           </a:prstGeom>
           <a:solidFill>
@@ -19137,7 +19316,7 @@
         </p:nvSpPr>
         <p:spPr>
           <a:xfrm>
-            <a:off x="822960" y="4434840"/>
+            <a:off x="822960" y="4251960"/>
             <a:ext cx="10149840" cy="1188720"/>
           </a:xfrm>
           <a:prstGeom prst="rect">
@@ -19147,17 +19326,17 @@
           <a:ln/>
         </p:spPr>
         <p:txBody>
-          <a:bodyPr wrap="square" lIns="0" tIns="0" rIns="0" bIns="0" rtlCol="0" anchor="ctr"/>
+          <a:bodyPr wrap="square" lIns="0" tIns="0" rIns="0" bIns="0" rtlCol="0" anchor="t"/>
           <a:lstStyle/>
           <a:p>
             <a:pPr marL="0" indent="0">
               <a:lnSpc>
-                <a:spcPct val="115000"/>
+                <a:spcPct val="120000"/>
               </a:lnSpc>
               <a:buNone/>
             </a:pPr>
             <a:r>
-              <a:rPr lang="en-US" sz="1400" b="1" dirty="0">
+              <a:rPr lang="en-US" sz="1300" b="1" dirty="0">
                 <a:solidFill>
                   <a:srgbClr val="B85C00"/>
                 </a:solidFill>
@@ -19165,10 +19344,10 @@
                 <a:ea typeface="Calibri" pitchFamily="34" charset="-122"/>
                 <a:cs typeface="Calibri" pitchFamily="34" charset="-120"/>
               </a:rPr>
-              <a:t>Better starting point:  </a:t>
-            </a:r>
-            <a:r>
-              <a:rPr lang="en-US" sz="1400" dirty="0">
+              <a:t>Reference:  </a:t>
+            </a:r>
+            <a:r>
+              <a:rPr lang="en-US" sz="1300" dirty="0">
                 <a:solidFill>
                   <a:srgbClr val="141A22"/>
                 </a:solidFill>
@@ -19176,16 +19355,56 @@
                 <a:ea typeface="Calibri" pitchFamily="34" charset="-122"/>
                 <a:cs typeface="Calibri" pitchFamily="34" charset="-120"/>
               </a:rPr>
-              <a:t>the "SARTrace" module already exposes per-bounce ray history — extend from there rather than patching the scalar path.</a:t>
-            </a:r>
-            <a:endParaRPr lang="en-US" sz="1400" dirty="0"/>
+              <a:t>Blacknell et al., "SARCASTIC v2.0 — High-Performance SAR Simulation for Next-Generation ATR Systems," Remote Sensing, 2022.</a:t>
+            </a:r>
+            <a:endParaRPr lang="en-US" sz="1300" dirty="0"/>
+          </a:p>
+          <a:p>
+            <a:pPr marL="0" indent="0">
+              <a:lnSpc>
+                <a:spcPct val="120000"/>
+              </a:lnSpc>
+              <a:buNone/>
+            </a:pPr>
+            <a:r>
+              <a:rPr lang="en-US" sz="1300" b="1" dirty="0">
+                <a:solidFill>
+                  <a:srgbClr val="B85C00"/>
+                </a:solidFill>
+                <a:latin typeface="Calibri" pitchFamily="34" charset="0"/>
+                <a:ea typeface="Calibri" pitchFamily="34" charset="-122"/>
+                <a:cs typeface="Calibri" pitchFamily="34" charset="-120"/>
+              </a:rPr>
+              <a:t>Code:  </a:t>
+            </a:r>
+            <a:endParaRPr lang="en-US" sz="1300" dirty="0"/>
+          </a:p>
+          <a:p>
+            <a:pPr marL="0" indent="0">
+              <a:lnSpc>
+                <a:spcPct val="120000"/>
+              </a:lnSpc>
+              <a:buNone/>
+            </a:pPr>
+            <a:r>
+              <a:rPr lang="en-US" sz="1300" dirty="0">
+                <a:solidFill>
+                  <a:srgbClr val="141A22"/>
+                </a:solidFill>
+                <a:latin typeface="Calibri" pitchFamily="34" charset="0"/>
+                <a:ea typeface="Calibri" pitchFamily="34" charset="-122"/>
+                <a:cs typeface="Calibri" pitchFamily="34" charset="-120"/>
+              </a:rPr>
+              <a:t>github.com/dstl/sarcastic — archived/read-only as of Jan 2025, so any extension is a fork, not an upstream contribution.</a:t>
+            </a:r>
+            <a:endParaRPr lang="en-US" sz="1300" dirty="0"/>
           </a:p>
         </p:txBody>
       </p:sp>
     </p:spTree>
     <p:extLst>
       <p:ext uri="{BB962C8B-B14F-4D97-AF65-F5344CB8AC3E}">
-        <p14:creationId xmlns:p14="http://schemas.microsoft.com/office/powerpoint/2010/main" val="3371548086"/>
+        <p14:creationId xmlns:p14="http://schemas.microsoft.com/office/powerpoint/2010/main" val="914562532"/>
       </p:ext>
     </p:extLst>
   </p:cSld>
@@ -19245,7 +19464,7 @@
                 <a:ea typeface="Calibri" pitchFamily="34" charset="-122"/>
                 <a:cs typeface="Calibri" pitchFamily="34" charset="-120"/>
               </a:rPr>
-              <a:t>INTEGRATION</a:t>
+              <a:t>CASE STUDY, CONTINUED</a:t>
             </a:r>
             <a:endParaRPr lang="en-US" sz="1200" dirty="0"/>
           </a:p>
@@ -19276,7 +19495,7 @@
               <a:buNone/>
             </a:pPr>
             <a:r>
-              <a:rPr lang="en-US" sz="2300" b="1" dirty="0">
+              <a:rPr lang="en-US" sz="2700" b="1" dirty="0">
                 <a:solidFill>
                   <a:srgbClr val="141A22"/>
                 </a:solidFill>
@@ -19284,30 +19503,124 @@
                 <a:ea typeface="Cambria" pitchFamily="34" charset="-122"/>
                 <a:cs typeface="Cambria" pitchFamily="34" charset="-120"/>
               </a:rPr>
-              <a:t>Adding Sinclair-matrix polarimetry to SARCASTIC</a:t>
-            </a:r>
-            <a:endParaRPr lang="en-US" sz="2300" dirty="0"/>
-          </a:p>
-        </p:txBody>
-      </p:sp>
-      <p:sp>
-        <p:nvSpPr>
-          <p:cNvPr id="4" name="Shape 2"/>
-          <p:cNvSpPr/>
-          <p:nvPr/>
-        </p:nvSpPr>
-        <p:spPr>
-          <a:xfrm>
-            <a:off x="548640" y="1783080"/>
-            <a:ext cx="5120640" cy="4251960"/>
+              <a:t>What SARCASTIC computes today</a:t>
+            </a:r>
+            <a:endParaRPr lang="en-US" sz="2700" dirty="0"/>
+          </a:p>
+        </p:txBody>
+      </p:sp>
+      <p:sp>
+        <p:nvSpPr>
+          <p:cNvPr id="4" name="Text 2"/>
+          <p:cNvSpPr/>
+          <p:nvPr/>
+        </p:nvSpPr>
+        <p:spPr>
+          <a:xfrm>
+            <a:off x="548640" y="1691640"/>
+            <a:ext cx="10607040" cy="2468880"/>
+          </a:xfrm>
+          <a:prstGeom prst="rect">
+            <a:avLst/>
+          </a:prstGeom>
+          <a:noFill/>
+          <a:ln/>
+        </p:spPr>
+        <p:txBody>
+          <a:bodyPr wrap="square" lIns="0" tIns="0" rIns="0" bIns="0" rtlCol="0" anchor="t"/>
+          <a:lstStyle/>
+          <a:p>
+            <a:pPr marL="203200" indent="-203200">
+              <a:lnSpc>
+                <a:spcPct val="112000"/>
+              </a:lnSpc>
+              <a:spcAft>
+                <a:spcPts val="1400"/>
+              </a:spcAft>
+              <a:buSzPct val="100000"/>
+              <a:buChar char="•"/>
+            </a:pPr>
+            <a:r>
+              <a:rPr lang="en-US" sz="1450" dirty="0">
+                <a:solidFill>
+                  <a:srgbClr val="141A22"/>
+                </a:solidFill>
+                <a:latin typeface="Calibri" pitchFamily="34" charset="0"/>
+                <a:ea typeface="Calibri" pitchFamily="34" charset="-122"/>
+                <a:cs typeface="Calibri" pitchFamily="34" charset="-120"/>
+              </a:rPr>
+              <a:t>Scattering model is Knott’s physical optics for a flat PEC plate only — no permittivity, no Fresnel R_s/R_p anywhere in the derivation</a:t>
+            </a:r>
+            <a:endParaRPr lang="en-US" sz="1450" dirty="0"/>
+          </a:p>
+          <a:p>
+            <a:pPr marL="203200" indent="-203200">
+              <a:lnSpc>
+                <a:spcPct val="112000"/>
+              </a:lnSpc>
+              <a:spcAft>
+                <a:spcPts val="1400"/>
+              </a:spcAft>
+              <a:buSzPct val="100000"/>
+              <a:buChar char="•"/>
+            </a:pPr>
+            <a:r>
+              <a:rPr lang="en-US" sz="1450" dirty="0">
+                <a:solidFill>
+                  <a:srgbClr val="141A22"/>
+                </a:solidFill>
+                <a:latin typeface="Calibri" pitchFamily="34" charset="0"/>
+                <a:ea typeface="Calibri" pitchFamily="34" charset="-122"/>
+                <a:cs typeface="Calibri" pitchFamily="34" charset="-120"/>
+              </a:rPr>
+              <a:t>Polarization = one real 3-vector ĥ per ray, updated by geometric mirror reflection at each bounce — cross-pol only comes from bounce geometry (their own validation case is a dihedral), never from material response</a:t>
+            </a:r>
+            <a:endParaRPr lang="en-US" sz="1450" dirty="0"/>
+          </a:p>
+          <a:p>
+            <a:pPr marL="203200" indent="-203200">
+              <a:lnSpc>
+                <a:spcPct val="112000"/>
+              </a:lnSpc>
+              <a:spcAft>
+                <a:spcPts val="1400"/>
+              </a:spcAft>
+              <a:buSzPct val="100000"/>
+              <a:buChar char="•"/>
+            </a:pPr>
+            <a:r>
+              <a:rPr lang="en-US" sz="1450" dirty="0">
+                <a:solidFill>
+                  <a:srgbClr val="141A22"/>
+                </a:solidFill>
+                <a:latin typeface="Calibri" pitchFamily="34" charset="0"/>
+                <a:ea typeface="Calibri" pitchFamily="34" charset="-122"/>
+                <a:cs typeface="Calibri" pitchFamily="34" charset="-120"/>
+              </a:rPr>
+              <a:t>Maps to real source: RCS.c (scalar contribution) · reflect.cpp (per-bounce ĥ update) · cpuPOField.cpp (accumulation) · CPHD I/O via cphdShell/cphdInfo</a:t>
+            </a:r>
+            <a:endParaRPr lang="en-US" sz="1450" dirty="0"/>
+          </a:p>
+        </p:txBody>
+      </p:sp>
+      <p:sp>
+        <p:nvSpPr>
+          <p:cNvPr id="5" name="Shape 3"/>
+          <p:cNvSpPr/>
+          <p:nvPr/>
+        </p:nvSpPr>
+        <p:spPr>
+          <a:xfrm>
+            <a:off x="548640" y="4434840"/>
+            <a:ext cx="10698480" cy="1188720"/>
           </a:xfrm>
           <a:prstGeom prst="roundRect">
             <a:avLst>
-              <a:gd name="adj" fmla="val 1720"/>
+              <a:gd name="adj" fmla="val 6154"/>
             </a:avLst>
           </a:prstGeom>
           <a:solidFill>
-            <a:srgbClr val="F1F4F8"/>
+            <a:srgbClr val="E6EAF0"/>
           </a:solidFill>
           <a:ln/>
           <a:effectLst>
@@ -19321,14 +19634,14 @@
       </p:sp>
       <p:sp>
         <p:nvSpPr>
-          <p:cNvPr id="5" name="Text 3"/>
-          <p:cNvSpPr/>
-          <p:nvPr/>
-        </p:nvSpPr>
-        <p:spPr>
-          <a:xfrm>
-            <a:off x="822960" y="1965960"/>
-            <a:ext cx="4572000" cy="365760"/>
+          <p:cNvPr id="6" name="Text 4"/>
+          <p:cNvSpPr/>
+          <p:nvPr/>
+        </p:nvSpPr>
+        <p:spPr>
+          <a:xfrm>
+            <a:off x="822960" y="4434840"/>
+            <a:ext cx="10149840" cy="1188720"/>
           </a:xfrm>
           <a:prstGeom prst="rect">
             <a:avLst/>
@@ -19341,56 +19654,24 @@
           <a:lstStyle/>
           <a:p>
             <a:pPr marL="0" indent="0">
+              <a:lnSpc>
+                <a:spcPct val="115000"/>
+              </a:lnSpc>
               <a:buNone/>
             </a:pPr>
             <a:r>
-              <a:rPr lang="en-US" sz="1300" b="1" kern="0" spc="100" dirty="0">
-                <a:solidFill>
-                  <a:srgbClr val="0B7285"/>
+              <a:rPr lang="en-US" sz="1400" b="1" dirty="0">
+                <a:solidFill>
+                  <a:srgbClr val="B85C00"/>
                 </a:solidFill>
                 <a:latin typeface="Calibri" pitchFamily="34" charset="0"/>
                 <a:ea typeface="Calibri" pitchFamily="34" charset="-122"/>
                 <a:cs typeface="Calibri" pitchFamily="34" charset="-120"/>
               </a:rPr>
-              <a:t>OPTION A — TWO-PASS</a:t>
-            </a:r>
-            <a:endParaRPr lang="en-US" sz="1300" dirty="0"/>
-          </a:p>
-        </p:txBody>
-      </p:sp>
-      <p:sp>
-        <p:nvSpPr>
-          <p:cNvPr id="6" name="Text 4"/>
-          <p:cNvSpPr/>
-          <p:nvPr/>
-        </p:nvSpPr>
-        <p:spPr>
-          <a:xfrm>
-            <a:off x="822960" y="2423160"/>
-            <a:ext cx="4572000" cy="3429000"/>
-          </a:xfrm>
-          <a:prstGeom prst="rect">
-            <a:avLst/>
-          </a:prstGeom>
-          <a:noFill/>
-          <a:ln/>
-        </p:spPr>
-        <p:txBody>
-          <a:bodyPr wrap="square" lIns="0" tIns="0" rIns="0" bIns="0" rtlCol="0" anchor="t"/>
-          <a:lstStyle/>
-          <a:p>
-            <a:pPr marL="203200" indent="-203200">
-              <a:lnSpc>
-                <a:spcPct val="112000"/>
-              </a:lnSpc>
-              <a:spcAft>
-                <a:spcPts val="1200"/>
-              </a:spcAft>
-              <a:buSzPct val="100000"/>
-              <a:buChar char="•"/>
-            </a:pPr>
-            <a:r>
-              <a:rPr lang="en-US" sz="1300" dirty="0">
+              <a:t>Better starting point:  </a:t>
+            </a:r>
+            <a:r>
+              <a:rPr lang="en-US" sz="1400" dirty="0">
                 <a:solidFill>
                   <a:srgbClr val="141A22"/>
                 </a:solidFill>
@@ -19398,226 +19679,16 @@
                 <a:ea typeface="Calibri" pitchFamily="34" charset="-122"/>
                 <a:cs typeface="Calibri" pitchFamily="34" charset="-120"/>
               </a:rPr>
-              <a:t>Launch h-pol and v-pol runs separately; project the final ĥ onto both receive axes → 4 channels</a:t>
-            </a:r>
-            <a:endParaRPr lang="en-US" sz="1300" dirty="0"/>
-          </a:p>
-          <a:p>
-            <a:pPr marL="203200" indent="-203200">
-              <a:lnSpc>
-                <a:spcPct val="112000"/>
-              </a:lnSpc>
-              <a:spcAft>
-                <a:spcPts val="1200"/>
-              </a:spcAft>
-              <a:buSzPct val="100000"/>
-              <a:buChar char="•"/>
-            </a:pPr>
-            <a:r>
-              <a:rPr lang="en-US" sz="1300" dirty="0">
-                <a:solidFill>
-                  <a:srgbClr val="141A22"/>
-                </a:solidFill>
-                <a:latin typeface="Calibri" pitchFamily="34" charset="0"/>
-                <a:ea typeface="Calibri" pitchFamily="34" charset="-122"/>
-                <a:cs typeface="Calibri" pitchFamily="34" charset="-120"/>
-              </a:rPr>
-              <a:t>Reuses CPHD’s existing multi-channel schema — no file-format change needed</a:t>
-            </a:r>
-            <a:endParaRPr lang="en-US" sz="1300" dirty="0"/>
-          </a:p>
-          <a:p>
-            <a:pPr marL="203200" indent="-203200">
-              <a:lnSpc>
-                <a:spcPct val="112000"/>
-              </a:lnSpc>
-              <a:spcAft>
-                <a:spcPts val="1200"/>
-              </a:spcAft>
-              <a:buSzPct val="100000"/>
-              <a:buChar char="•"/>
-            </a:pPr>
-            <a:r>
-              <a:rPr lang="en-US" sz="1300" dirty="0">
-                <a:solidFill>
-                  <a:srgbClr val="141A22"/>
-                </a:solidFill>
-                <a:latin typeface="Calibri" pitchFamily="34" charset="0"/>
-                <a:ea typeface="Calibri" pitchFamily="34" charset="-122"/>
-                <a:cs typeface="Calibri" pitchFamily="34" charset="-120"/>
-              </a:rPr>
-              <a:t>Still PEC underneath: geometric cross-pol only (dihedrals) — no material-dependent differential reflectivity</a:t>
-            </a:r>
-            <a:endParaRPr lang="en-US" sz="1300" dirty="0"/>
-          </a:p>
-        </p:txBody>
-      </p:sp>
-      <p:sp>
-        <p:nvSpPr>
-          <p:cNvPr id="7" name="Shape 5"/>
-          <p:cNvSpPr/>
-          <p:nvPr/>
-        </p:nvSpPr>
-        <p:spPr>
-          <a:xfrm>
-            <a:off x="6126480" y="1783080"/>
-            <a:ext cx="5120640" cy="4251960"/>
-          </a:xfrm>
-          <a:prstGeom prst="roundRect">
-            <a:avLst>
-              <a:gd name="adj" fmla="val 1720"/>
-            </a:avLst>
-          </a:prstGeom>
-          <a:solidFill>
-            <a:srgbClr val="F1F4F8"/>
-          </a:solidFill>
-          <a:ln/>
-          <a:effectLst>
-            <a:outerShdw blurRad="101600" dist="38100" dir="5400000" algn="bl" rotWithShape="0">
-              <a:srgbClr val="9AA5B1">
-                <a:alpha val="22000"/>
-              </a:srgbClr>
-            </a:outerShdw>
-          </a:effectLst>
-        </p:spPr>
-      </p:sp>
-      <p:sp>
-        <p:nvSpPr>
-          <p:cNvPr id="8" name="Text 6"/>
-          <p:cNvSpPr/>
-          <p:nvPr/>
-        </p:nvSpPr>
-        <p:spPr>
-          <a:xfrm>
-            <a:off x="6400800" y="1965960"/>
-            <a:ext cx="4572000" cy="365760"/>
-          </a:xfrm>
-          <a:prstGeom prst="rect">
-            <a:avLst/>
-          </a:prstGeom>
-          <a:noFill/>
-          <a:ln/>
-        </p:spPr>
-        <p:txBody>
-          <a:bodyPr wrap="square" lIns="0" tIns="0" rIns="0" bIns="0" rtlCol="0" anchor="ctr"/>
-          <a:lstStyle/>
-          <a:p>
-            <a:pPr marL="0" indent="0">
-              <a:buNone/>
-            </a:pPr>
-            <a:r>
-              <a:rPr lang="en-US" sz="1300" b="1" kern="0" spc="100" dirty="0">
-                <a:solidFill>
-                  <a:srgbClr val="B85C00"/>
-                </a:solidFill>
-                <a:latin typeface="Calibri" pitchFamily="34" charset="0"/>
-                <a:ea typeface="Calibri" pitchFamily="34" charset="-122"/>
-                <a:cs typeface="Calibri" pitchFamily="34" charset="-120"/>
-              </a:rPr>
-              <a:t>OPTION B — MATRIX PROPAGATION</a:t>
-            </a:r>
-            <a:endParaRPr lang="en-US" sz="1300" dirty="0"/>
-          </a:p>
-        </p:txBody>
-      </p:sp>
-      <p:sp>
-        <p:nvSpPr>
-          <p:cNvPr id="9" name="Text 7"/>
-          <p:cNvSpPr/>
-          <p:nvPr/>
-        </p:nvSpPr>
-        <p:spPr>
-          <a:xfrm>
-            <a:off x="6400800" y="2423160"/>
-            <a:ext cx="4572000" cy="3429000"/>
-          </a:xfrm>
-          <a:prstGeom prst="rect">
-            <a:avLst/>
-          </a:prstGeom>
-          <a:noFill/>
-          <a:ln/>
-        </p:spPr>
-        <p:txBody>
-          <a:bodyPr wrap="square" lIns="0" tIns="0" rIns="0" bIns="0" rtlCol="0" anchor="t"/>
-          <a:lstStyle/>
-          <a:p>
-            <a:pPr marL="203200" indent="-203200">
-              <a:lnSpc>
-                <a:spcPct val="112000"/>
-              </a:lnSpc>
-              <a:spcAft>
-                <a:spcPts val="1200"/>
-              </a:spcAft>
-              <a:buSzPct val="100000"/>
-              <a:buChar char="•"/>
-            </a:pPr>
-            <a:r>
-              <a:rPr lang="en-US" sz="1300" dirty="0">
-                <a:solidFill>
-                  <a:srgbClr val="141A22"/>
-                </a:solidFill>
-                <a:latin typeface="Calibri" pitchFamily="34" charset="0"/>
-                <a:ea typeface="Calibri" pitchFamily="34" charset="-122"/>
-                <a:cs typeface="Calibri" pitchFamily="34" charset="-120"/>
-              </a:rPr>
-              <a:t>Tag facets with permittivity; decompose into local Fresnel s/p basis inside RCS.c</a:t>
-            </a:r>
-            <a:endParaRPr lang="en-US" sz="1300" dirty="0"/>
-          </a:p>
-          <a:p>
-            <a:pPr marL="203200" indent="-203200">
-              <a:lnSpc>
-                <a:spcPct val="112000"/>
-              </a:lnSpc>
-              <a:spcAft>
-                <a:spcPts val="1200"/>
-              </a:spcAft>
-              <a:buSzPct val="100000"/>
-              <a:buChar char="•"/>
-            </a:pPr>
-            <a:r>
-              <a:rPr lang="en-US" sz="1300" dirty="0">
-                <a:solidFill>
-                  <a:srgbClr val="141A22"/>
-                </a:solidFill>
-                <a:latin typeface="Calibri" pitchFamily="34" charset="0"/>
-                <a:ea typeface="Calibri" pitchFamily="34" charset="-122"/>
-                <a:cs typeface="Calibri" pitchFamily="34" charset="-120"/>
-              </a:rPr>
-              <a:t>Chain 2×2 matrices through reflect.cpp instead of a 3-vector; widen cpuPOField.cpp to 4 complex accumulators</a:t>
-            </a:r>
-            <a:endParaRPr lang="en-US" sz="1300" dirty="0"/>
-          </a:p>
-          <a:p>
-            <a:pPr marL="203200" indent="-203200">
-              <a:lnSpc>
-                <a:spcPct val="112000"/>
-              </a:lnSpc>
-              <a:spcAft>
-                <a:spcPts val="1200"/>
-              </a:spcAft>
-              <a:buSzPct val="100000"/>
-              <a:buChar char="•"/>
-            </a:pPr>
-            <a:r>
-              <a:rPr lang="en-US" sz="1300" dirty="0">
-                <a:solidFill>
-                  <a:srgbClr val="141A22"/>
-                </a:solidFill>
-                <a:latin typeface="Calibri" pitchFamily="34" charset="0"/>
-                <a:ea typeface="Calibri" pitchFamily="34" charset="-122"/>
-                <a:cs typeface="Calibri" pitchFamily="34" charset="-120"/>
-              </a:rPr>
-              <a:t>Start from SARTrace, not the scalar path — per-bounce history is already exposed there</a:t>
-            </a:r>
-            <a:endParaRPr lang="en-US" sz="1300" dirty="0"/>
+              <a:t>the "SARTrace" module already exposes per-bounce ray history — extend from there rather than patching the scalar path.</a:t>
+            </a:r>
+            <a:endParaRPr lang="en-US" sz="1400" dirty="0"/>
           </a:p>
         </p:txBody>
       </p:sp>
     </p:spTree>
     <p:extLst>
       <p:ext uri="{BB962C8B-B14F-4D97-AF65-F5344CB8AC3E}">
-        <p14:creationId xmlns:p14="http://schemas.microsoft.com/office/powerpoint/2010/main" val="474102231"/>
+        <p14:creationId xmlns:p14="http://schemas.microsoft.com/office/powerpoint/2010/main" val="3371548086"/>
       </p:ext>
     </p:extLst>
   </p:cSld>
@@ -20449,6 +20520,438 @@
                 <a:ea typeface="Calibri" pitchFamily="34" charset="-122"/>
                 <a:cs typeface="Calibri" pitchFamily="34" charset="-120"/>
               </a:rPr>
+              <a:t>INTEGRATION</a:t>
+            </a:r>
+            <a:endParaRPr lang="en-US" sz="1200" dirty="0"/>
+          </a:p>
+        </p:txBody>
+      </p:sp>
+      <p:sp>
+        <p:nvSpPr>
+          <p:cNvPr id="3" name="Text 1"/>
+          <p:cNvSpPr/>
+          <p:nvPr/>
+        </p:nvSpPr>
+        <p:spPr>
+          <a:xfrm>
+            <a:off x="548640" y="658368"/>
+            <a:ext cx="10881360" cy="868680"/>
+          </a:xfrm>
+          <a:prstGeom prst="rect">
+            <a:avLst/>
+          </a:prstGeom>
+          <a:noFill/>
+          <a:ln/>
+        </p:spPr>
+        <p:txBody>
+          <a:bodyPr wrap="square" lIns="0" tIns="0" rIns="0" bIns="0" rtlCol="0" anchor="t"/>
+          <a:lstStyle/>
+          <a:p>
+            <a:pPr marL="0" indent="0">
+              <a:buNone/>
+            </a:pPr>
+            <a:r>
+              <a:rPr lang="en-US" sz="2300" b="1" dirty="0">
+                <a:solidFill>
+                  <a:srgbClr val="141A22"/>
+                </a:solidFill>
+                <a:latin typeface="Cambria" pitchFamily="34" charset="0"/>
+                <a:ea typeface="Cambria" pitchFamily="34" charset="-122"/>
+                <a:cs typeface="Cambria" pitchFamily="34" charset="-120"/>
+              </a:rPr>
+              <a:t>Adding Sinclair-matrix polarimetry to SARCASTIC</a:t>
+            </a:r>
+            <a:endParaRPr lang="en-US" sz="2300" dirty="0"/>
+          </a:p>
+        </p:txBody>
+      </p:sp>
+      <p:sp>
+        <p:nvSpPr>
+          <p:cNvPr id="4" name="Shape 2"/>
+          <p:cNvSpPr/>
+          <p:nvPr/>
+        </p:nvSpPr>
+        <p:spPr>
+          <a:xfrm>
+            <a:off x="548640" y="1783080"/>
+            <a:ext cx="5120640" cy="4251960"/>
+          </a:xfrm>
+          <a:prstGeom prst="roundRect">
+            <a:avLst>
+              <a:gd name="adj" fmla="val 1720"/>
+            </a:avLst>
+          </a:prstGeom>
+          <a:solidFill>
+            <a:srgbClr val="F1F4F8"/>
+          </a:solidFill>
+          <a:ln/>
+          <a:effectLst>
+            <a:outerShdw blurRad="101600" dist="38100" dir="5400000" algn="bl" rotWithShape="0">
+              <a:srgbClr val="9AA5B1">
+                <a:alpha val="22000"/>
+              </a:srgbClr>
+            </a:outerShdw>
+          </a:effectLst>
+        </p:spPr>
+      </p:sp>
+      <p:sp>
+        <p:nvSpPr>
+          <p:cNvPr id="5" name="Text 3"/>
+          <p:cNvSpPr/>
+          <p:nvPr/>
+        </p:nvSpPr>
+        <p:spPr>
+          <a:xfrm>
+            <a:off x="822960" y="1965960"/>
+            <a:ext cx="4572000" cy="365760"/>
+          </a:xfrm>
+          <a:prstGeom prst="rect">
+            <a:avLst/>
+          </a:prstGeom>
+          <a:noFill/>
+          <a:ln/>
+        </p:spPr>
+        <p:txBody>
+          <a:bodyPr wrap="square" lIns="0" tIns="0" rIns="0" bIns="0" rtlCol="0" anchor="ctr"/>
+          <a:lstStyle/>
+          <a:p>
+            <a:pPr marL="0" indent="0">
+              <a:buNone/>
+            </a:pPr>
+            <a:r>
+              <a:rPr lang="en-US" sz="1300" b="1" kern="0" spc="100" dirty="0">
+                <a:solidFill>
+                  <a:srgbClr val="0B7285"/>
+                </a:solidFill>
+                <a:latin typeface="Calibri" pitchFamily="34" charset="0"/>
+                <a:ea typeface="Calibri" pitchFamily="34" charset="-122"/>
+                <a:cs typeface="Calibri" pitchFamily="34" charset="-120"/>
+              </a:rPr>
+              <a:t>OPTION A — TWO-PASS</a:t>
+            </a:r>
+            <a:endParaRPr lang="en-US" sz="1300" dirty="0"/>
+          </a:p>
+        </p:txBody>
+      </p:sp>
+      <p:sp>
+        <p:nvSpPr>
+          <p:cNvPr id="6" name="Text 4"/>
+          <p:cNvSpPr/>
+          <p:nvPr/>
+        </p:nvSpPr>
+        <p:spPr>
+          <a:xfrm>
+            <a:off x="822960" y="2423160"/>
+            <a:ext cx="4572000" cy="3429000"/>
+          </a:xfrm>
+          <a:prstGeom prst="rect">
+            <a:avLst/>
+          </a:prstGeom>
+          <a:noFill/>
+          <a:ln/>
+        </p:spPr>
+        <p:txBody>
+          <a:bodyPr wrap="square" lIns="0" tIns="0" rIns="0" bIns="0" rtlCol="0" anchor="t"/>
+          <a:lstStyle/>
+          <a:p>
+            <a:pPr marL="203200" indent="-203200">
+              <a:lnSpc>
+                <a:spcPct val="112000"/>
+              </a:lnSpc>
+              <a:spcAft>
+                <a:spcPts val="1200"/>
+              </a:spcAft>
+              <a:buSzPct val="100000"/>
+              <a:buChar char="•"/>
+            </a:pPr>
+            <a:r>
+              <a:rPr lang="en-US" sz="1300" dirty="0">
+                <a:solidFill>
+                  <a:srgbClr val="141A22"/>
+                </a:solidFill>
+                <a:latin typeface="Calibri" pitchFamily="34" charset="0"/>
+                <a:ea typeface="Calibri" pitchFamily="34" charset="-122"/>
+                <a:cs typeface="Calibri" pitchFamily="34" charset="-120"/>
+              </a:rPr>
+              <a:t>Launch h-pol and v-pol runs separately; project the final ĥ onto both receive axes → 4 channels</a:t>
+            </a:r>
+            <a:endParaRPr lang="en-US" sz="1300" dirty="0"/>
+          </a:p>
+          <a:p>
+            <a:pPr marL="203200" indent="-203200">
+              <a:lnSpc>
+                <a:spcPct val="112000"/>
+              </a:lnSpc>
+              <a:spcAft>
+                <a:spcPts val="1200"/>
+              </a:spcAft>
+              <a:buSzPct val="100000"/>
+              <a:buChar char="•"/>
+            </a:pPr>
+            <a:r>
+              <a:rPr lang="en-US" sz="1300" dirty="0">
+                <a:solidFill>
+                  <a:srgbClr val="141A22"/>
+                </a:solidFill>
+                <a:latin typeface="Calibri" pitchFamily="34" charset="0"/>
+                <a:ea typeface="Calibri" pitchFamily="34" charset="-122"/>
+                <a:cs typeface="Calibri" pitchFamily="34" charset="-120"/>
+              </a:rPr>
+              <a:t>Reuses CPHD’s existing multi-channel schema — no file-format change needed</a:t>
+            </a:r>
+            <a:endParaRPr lang="en-US" sz="1300" dirty="0"/>
+          </a:p>
+          <a:p>
+            <a:pPr marL="203200" indent="-203200">
+              <a:lnSpc>
+                <a:spcPct val="112000"/>
+              </a:lnSpc>
+              <a:spcAft>
+                <a:spcPts val="1200"/>
+              </a:spcAft>
+              <a:buSzPct val="100000"/>
+              <a:buChar char="•"/>
+            </a:pPr>
+            <a:r>
+              <a:rPr lang="en-US" sz="1300" dirty="0">
+                <a:solidFill>
+                  <a:srgbClr val="141A22"/>
+                </a:solidFill>
+                <a:latin typeface="Calibri" pitchFamily="34" charset="0"/>
+                <a:ea typeface="Calibri" pitchFamily="34" charset="-122"/>
+                <a:cs typeface="Calibri" pitchFamily="34" charset="-120"/>
+              </a:rPr>
+              <a:t>Still PEC underneath: geometric cross-pol only (dihedrals) — no material-dependent differential reflectivity</a:t>
+            </a:r>
+            <a:endParaRPr lang="en-US" sz="1300" dirty="0"/>
+          </a:p>
+        </p:txBody>
+      </p:sp>
+      <p:sp>
+        <p:nvSpPr>
+          <p:cNvPr id="7" name="Shape 5"/>
+          <p:cNvSpPr/>
+          <p:nvPr/>
+        </p:nvSpPr>
+        <p:spPr>
+          <a:xfrm>
+            <a:off x="6126480" y="1783080"/>
+            <a:ext cx="5120640" cy="4251960"/>
+          </a:xfrm>
+          <a:prstGeom prst="roundRect">
+            <a:avLst>
+              <a:gd name="adj" fmla="val 1720"/>
+            </a:avLst>
+          </a:prstGeom>
+          <a:solidFill>
+            <a:srgbClr val="F1F4F8"/>
+          </a:solidFill>
+          <a:ln/>
+          <a:effectLst>
+            <a:outerShdw blurRad="101600" dist="38100" dir="5400000" algn="bl" rotWithShape="0">
+              <a:srgbClr val="9AA5B1">
+                <a:alpha val="22000"/>
+              </a:srgbClr>
+            </a:outerShdw>
+          </a:effectLst>
+        </p:spPr>
+      </p:sp>
+      <p:sp>
+        <p:nvSpPr>
+          <p:cNvPr id="8" name="Text 6"/>
+          <p:cNvSpPr/>
+          <p:nvPr/>
+        </p:nvSpPr>
+        <p:spPr>
+          <a:xfrm>
+            <a:off x="6400800" y="1965960"/>
+            <a:ext cx="4572000" cy="365760"/>
+          </a:xfrm>
+          <a:prstGeom prst="rect">
+            <a:avLst/>
+          </a:prstGeom>
+          <a:noFill/>
+          <a:ln/>
+        </p:spPr>
+        <p:txBody>
+          <a:bodyPr wrap="square" lIns="0" tIns="0" rIns="0" bIns="0" rtlCol="0" anchor="ctr"/>
+          <a:lstStyle/>
+          <a:p>
+            <a:pPr marL="0" indent="0">
+              <a:buNone/>
+            </a:pPr>
+            <a:r>
+              <a:rPr lang="en-US" sz="1300" b="1" kern="0" spc="100" dirty="0">
+                <a:solidFill>
+                  <a:srgbClr val="B85C00"/>
+                </a:solidFill>
+                <a:latin typeface="Calibri" pitchFamily="34" charset="0"/>
+                <a:ea typeface="Calibri" pitchFamily="34" charset="-122"/>
+                <a:cs typeface="Calibri" pitchFamily="34" charset="-120"/>
+              </a:rPr>
+              <a:t>OPTION B — MATRIX PROPAGATION</a:t>
+            </a:r>
+            <a:endParaRPr lang="en-US" sz="1300" dirty="0"/>
+          </a:p>
+        </p:txBody>
+      </p:sp>
+      <p:sp>
+        <p:nvSpPr>
+          <p:cNvPr id="9" name="Text 7"/>
+          <p:cNvSpPr/>
+          <p:nvPr/>
+        </p:nvSpPr>
+        <p:spPr>
+          <a:xfrm>
+            <a:off x="6400800" y="2423160"/>
+            <a:ext cx="4572000" cy="3429000"/>
+          </a:xfrm>
+          <a:prstGeom prst="rect">
+            <a:avLst/>
+          </a:prstGeom>
+          <a:noFill/>
+          <a:ln/>
+        </p:spPr>
+        <p:txBody>
+          <a:bodyPr wrap="square" lIns="0" tIns="0" rIns="0" bIns="0" rtlCol="0" anchor="t"/>
+          <a:lstStyle/>
+          <a:p>
+            <a:pPr marL="203200" indent="-203200">
+              <a:lnSpc>
+                <a:spcPct val="112000"/>
+              </a:lnSpc>
+              <a:spcAft>
+                <a:spcPts val="1200"/>
+              </a:spcAft>
+              <a:buSzPct val="100000"/>
+              <a:buChar char="•"/>
+            </a:pPr>
+            <a:r>
+              <a:rPr lang="en-US" sz="1300" dirty="0">
+                <a:solidFill>
+                  <a:srgbClr val="141A22"/>
+                </a:solidFill>
+                <a:latin typeface="Calibri" pitchFamily="34" charset="0"/>
+                <a:ea typeface="Calibri" pitchFamily="34" charset="-122"/>
+                <a:cs typeface="Calibri" pitchFamily="34" charset="-120"/>
+              </a:rPr>
+              <a:t>Tag facets with permittivity; decompose into local Fresnel s/p basis inside RCS.c</a:t>
+            </a:r>
+            <a:endParaRPr lang="en-US" sz="1300" dirty="0"/>
+          </a:p>
+          <a:p>
+            <a:pPr marL="203200" indent="-203200">
+              <a:lnSpc>
+                <a:spcPct val="112000"/>
+              </a:lnSpc>
+              <a:spcAft>
+                <a:spcPts val="1200"/>
+              </a:spcAft>
+              <a:buSzPct val="100000"/>
+              <a:buChar char="•"/>
+            </a:pPr>
+            <a:r>
+              <a:rPr lang="en-US" sz="1300" dirty="0">
+                <a:solidFill>
+                  <a:srgbClr val="141A22"/>
+                </a:solidFill>
+                <a:latin typeface="Calibri" pitchFamily="34" charset="0"/>
+                <a:ea typeface="Calibri" pitchFamily="34" charset="-122"/>
+                <a:cs typeface="Calibri" pitchFamily="34" charset="-120"/>
+              </a:rPr>
+              <a:t>Chain 2×2 matrices through reflect.cpp instead of a 3-vector; widen cpuPOField.cpp to 4 complex accumulators</a:t>
+            </a:r>
+            <a:endParaRPr lang="en-US" sz="1300" dirty="0"/>
+          </a:p>
+          <a:p>
+            <a:pPr marL="203200" indent="-203200">
+              <a:lnSpc>
+                <a:spcPct val="112000"/>
+              </a:lnSpc>
+              <a:spcAft>
+                <a:spcPts val="1200"/>
+              </a:spcAft>
+              <a:buSzPct val="100000"/>
+              <a:buChar char="•"/>
+            </a:pPr>
+            <a:r>
+              <a:rPr lang="en-US" sz="1300" dirty="0">
+                <a:solidFill>
+                  <a:srgbClr val="141A22"/>
+                </a:solidFill>
+                <a:latin typeface="Calibri" pitchFamily="34" charset="0"/>
+                <a:ea typeface="Calibri" pitchFamily="34" charset="-122"/>
+                <a:cs typeface="Calibri" pitchFamily="34" charset="-120"/>
+              </a:rPr>
+              <a:t>Start from SARTrace, not the scalar path — per-bounce history is already exposed there</a:t>
+            </a:r>
+            <a:endParaRPr lang="en-US" sz="1300" dirty="0"/>
+          </a:p>
+        </p:txBody>
+      </p:sp>
+    </p:spTree>
+    <p:extLst>
+      <p:ext uri="{BB962C8B-B14F-4D97-AF65-F5344CB8AC3E}">
+        <p14:creationId xmlns:p14="http://schemas.microsoft.com/office/powerpoint/2010/main" val="474102231"/>
+      </p:ext>
+    </p:extLst>
+  </p:cSld>
+  <p:clrMapOvr>
+    <a:masterClrMapping/>
+  </p:clrMapOvr>
+</p:sld>
+</file>
+
+<file path=ppt/slides/slide31.xml><?xml version="1.0" encoding="utf-8"?>
+<p:sld xmlns:a="http://schemas.openxmlformats.org/drawingml/2006/main" xmlns:r="http://schemas.openxmlformats.org/officeDocument/2006/relationships" xmlns:p="http://schemas.openxmlformats.org/presentationml/2006/main">
+  <p:cSld>
+    <p:spTree>
+      <p:nvGrpSpPr>
+        <p:cNvPr id="1" name=""/>
+        <p:cNvGrpSpPr/>
+        <p:nvPr/>
+      </p:nvGrpSpPr>
+      <p:grpSpPr>
+        <a:xfrm>
+          <a:off x="0" y="0"/>
+          <a:ext cx="0" cy="0"/>
+          <a:chOff x="0" y="0"/>
+          <a:chExt cx="0" cy="0"/>
+        </a:xfrm>
+      </p:grpSpPr>
+      <p:sp>
+        <p:nvSpPr>
+          <p:cNvPr id="2" name="Text 0"/>
+          <p:cNvSpPr/>
+          <p:nvPr/>
+        </p:nvSpPr>
+        <p:spPr>
+          <a:xfrm>
+            <a:off x="548640" y="365760"/>
+            <a:ext cx="9144000" cy="292608"/>
+          </a:xfrm>
+          <a:prstGeom prst="rect">
+            <a:avLst/>
+          </a:prstGeom>
+          <a:noFill/>
+          <a:ln/>
+        </p:spPr>
+        <p:txBody>
+          <a:bodyPr wrap="square" lIns="0" tIns="0" rIns="0" bIns="0" rtlCol="0" anchor="ctr"/>
+          <a:lstStyle/>
+          <a:p>
+            <a:pPr marL="0" indent="0">
+              <a:buNone/>
+            </a:pPr>
+            <a:r>
+              <a:rPr lang="en-US" sz="1200" b="1" kern="0" spc="200" dirty="0">
+                <a:solidFill>
+                  <a:srgbClr val="B85C00"/>
+                </a:solidFill>
+                <a:latin typeface="Calibri" pitchFamily="34" charset="0"/>
+                <a:ea typeface="Calibri" pitchFamily="34" charset="-122"/>
+                <a:cs typeface="Calibri" pitchFamily="34" charset="-120"/>
+              </a:rPr>
               <a:t>INTEGRATION, CONTINUED</a:t>
             </a:r>
             <a:endParaRPr lang="en-US" sz="1200" dirty="0"/>
@@ -20888,7 +21391,7 @@
 </p:sld>
 </file>
 
-<file path=ppt/slides/slide31.xml><?xml version="1.0" encoding="utf-8"?>
+<file path=ppt/slides/slide32.xml><?xml version="1.0" encoding="utf-8"?>
 <p:sld xmlns:a="http://schemas.openxmlformats.org/drawingml/2006/main" xmlns:r="http://schemas.openxmlformats.org/officeDocument/2006/relationships" xmlns:p="http://schemas.openxmlformats.org/presentationml/2006/main">
   <p:cSld name="Slide 5">
     <p:bg>
@@ -21600,7 +22103,7 @@
 </p:sld>
 </file>
 
-<file path=ppt/slides/slide32.xml><?xml version="1.0" encoding="utf-8"?>
+<file path=ppt/slides/slide33.xml><?xml version="1.0" encoding="utf-8"?>
 <p:sld xmlns:a="http://schemas.openxmlformats.org/drawingml/2006/main" xmlns:r="http://schemas.openxmlformats.org/officeDocument/2006/relationships" xmlns:p="http://schemas.openxmlformats.org/presentationml/2006/main">
   <p:cSld name="Slide 6">
     <p:bg>
@@ -21991,7 +22494,7 @@
 </p:sld>
 </file>
 
-<file path=ppt/slides/slide33.xml><?xml version="1.0" encoding="utf-8"?>
+<file path=ppt/slides/slide34.xml><?xml version="1.0" encoding="utf-8"?>
 <p:sld xmlns:a="http://schemas.openxmlformats.org/drawingml/2006/main" xmlns:r="http://schemas.openxmlformats.org/officeDocument/2006/relationships" xmlns:p="http://schemas.openxmlformats.org/presentationml/2006/main">
   <p:cSld name="Slide 7">
     <p:bg>
@@ -22303,7 +22806,7 @@
 </p:sld>
 </file>
 
-<file path=ppt/slides/slide34.xml><?xml version="1.0" encoding="utf-8"?>
+<file path=ppt/slides/slide35.xml><?xml version="1.0" encoding="utf-8"?>
 <p:sld xmlns:a="http://schemas.openxmlformats.org/drawingml/2006/main" xmlns:r="http://schemas.openxmlformats.org/officeDocument/2006/relationships" xmlns:p="http://schemas.openxmlformats.org/presentationml/2006/main">
   <p:cSld name="Slide 16">
     <p:bg>
@@ -22615,7 +23118,7 @@
 </p:sld>
 </file>
 
-<file path=ppt/slides/slide35.xml><?xml version="1.0" encoding="utf-8"?>
+<file path=ppt/slides/slide36.xml><?xml version="1.0" encoding="utf-8"?>
 <p:sld xmlns:a="http://schemas.openxmlformats.org/drawingml/2006/main" xmlns:r="http://schemas.openxmlformats.org/officeDocument/2006/relationships" xmlns:p="http://schemas.openxmlformats.org/presentationml/2006/main">
   <p:cSld name="Slide 17">
     <p:bg>
@@ -22903,7 +23406,7 @@
 </p:sld>
 </file>
 
-<file path=ppt/slides/slide36.xml><?xml version="1.0" encoding="utf-8"?>
+<file path=ppt/slides/slide37.xml><?xml version="1.0" encoding="utf-8"?>
 <p:sld xmlns:a="http://schemas.openxmlformats.org/drawingml/2006/main" xmlns:r="http://schemas.openxmlformats.org/officeDocument/2006/relationships" xmlns:p="http://schemas.openxmlformats.org/presentationml/2006/main">
   <p:cSld name="Slide 18">
     <p:bg>
@@ -24368,7 +24871,7 @@
 </p:sld>
 </file>
 
-<file path=ppt/slides/slide37.xml><?xml version="1.0" encoding="utf-8"?>
+<file path=ppt/slides/slide38.xml><?xml version="1.0" encoding="utf-8"?>
 <p:sld xmlns:a="http://schemas.openxmlformats.org/drawingml/2006/main" xmlns:r="http://schemas.openxmlformats.org/officeDocument/2006/relationships" xmlns:p="http://schemas.openxmlformats.org/presentationml/2006/main">
   <p:cSld>
     <p:spTree>
@@ -25592,7 +26095,7 @@
 </p:sld>
 </file>
 
-<file path=ppt/slides/slide38.xml><?xml version="1.0" encoding="utf-8"?>
+<file path=ppt/slides/slide39.xml><?xml version="1.0" encoding="utf-8"?>
 <p:sld xmlns:a="http://schemas.openxmlformats.org/drawingml/2006/main" xmlns:r="http://schemas.openxmlformats.org/officeDocument/2006/relationships" xmlns:p="http://schemas.openxmlformats.org/presentationml/2006/main">
   <p:cSld name="Slide 10">
     <p:bg>

--- a/beyond SARCASTIC.pptx
+++ b/beyond SARCASTIC.pptx
@@ -16291,18 +16291,7 @@
                 <a:ea typeface="Calibri" pitchFamily="34" charset="-122"/>
                 <a:cs typeface="Calibri" pitchFamily="34" charset="-120"/>
               </a:rPr>
-              <a:t>Layover fixed, 2X bounce fixed, GTD fixed, angle of facets included, scattering at ray intersection rather than </a:t>
-            </a:r>
-            <a:r>
-              <a:rPr lang="en-US" sz="1150" i="1">
-                <a:solidFill>
-                  <a:srgbClr val="5B6672"/>
-                </a:solidFill>
-                <a:latin typeface="Calibri" pitchFamily="34" charset="0"/>
-                <a:ea typeface="Calibri" pitchFamily="34" charset="-122"/>
-                <a:cs typeface="Calibri" pitchFamily="34" charset="-120"/>
-              </a:rPr>
-              <a:t>facet center…</a:t>
+              <a:t>Layover fixed, 2X bounce fixed, GTD fixed, angle of facets included, scattering at ray intersection rather than facet center…</a:t>
             </a:r>
             <a:endParaRPr lang="en-US" sz="1150" dirty="0"/>
           </a:p>
@@ -16769,7 +16758,7 @@
                 <a:ea typeface="Courier New" pitchFamily="34" charset="-122"/>
                 <a:cs typeface="Courier New" pitchFamily="34" charset="-120"/>
               </a:rPr>
-              <a:t>5.8x total</a:t>
+              <a:t>10.8x total</a:t>
             </a:r>
             <a:endParaRPr lang="en-US" sz="1700" dirty="0"/>
           </a:p>
@@ -16796,11 +16785,10 @@
           <a:bodyPr wrap="square" lIns="0" tIns="0" rIns="0" bIns="0" rtlCol="0" anchor="ctr"/>
           <a:lstStyle/>
           <a:p>
-            <a:pPr marL="0" indent="0">
+            <a:pPr>
               <a:lnSpc>
                 <a:spcPct val="110000"/>
               </a:lnSpc>
-              <a:buNone/>
             </a:pPr>
             <a:r>
               <a:rPr lang="en-US" sz="900" i="1" dirty="0">
@@ -16811,7 +16799,7 @@
                 <a:ea typeface="Calibri" pitchFamily="34" charset="-122"/>
                 <a:cs typeface="Calibri" pitchFamily="34" charset="-120"/>
               </a:rPr>
-              <a:t>dense SBR 51.6s/pulse (10322.7s total) vs ASC 8.9s/pulse (1770.9s total)</a:t>
+              <a:t>dense SBR 51.6s/pulse (10322.7s total) vs ASC 4.77s/pulse (955.3s total)</a:t>
             </a:r>
             <a:endParaRPr lang="en-US" sz="900" dirty="0"/>
           </a:p>
@@ -16858,7 +16846,13 @@
       </p:sp>
       <p:pic>
         <p:nvPicPr>
-          <p:cNvPr id="20" name="Picture 19" descr="tier2_slide_final_comparison.png"/>
+          <p:cNvPr id="23" name="Picture 22">
+            <a:extLst>
+              <a:ext uri="{FF2B5EF4-FFF2-40B4-BE49-F238E27FC236}">
+                <a16:creationId xmlns:a16="http://schemas.microsoft.com/office/drawing/2014/main" id="{C8BACA56-D1DE-FE1B-529B-215FBA470047}"/>
+              </a:ext>
+            </a:extLst>
+          </p:cNvPr>
           <p:cNvPicPr>
             <a:picLocks noChangeAspect="1"/>
           </p:cNvPicPr>
@@ -16872,8 +16866,8 @@
         </p:blipFill>
         <p:spPr>
           <a:xfrm>
-            <a:off x="516636" y="1874520"/>
-            <a:ext cx="11155680" cy="3053133"/>
+            <a:off x="0" y="1760621"/>
+            <a:ext cx="12192000" cy="3336758"/>
           </a:xfrm>
           <a:prstGeom prst="rect">
             <a:avLst/>
